--- a/FIND-CKD.pptx
+++ b/FIND-CKD.pptx
@@ -10488,14 +10488,15 @@
             <a:endParaRPr lang="en-US" sz="1250" dirty="0"/>
           </a:p>
           <a:p>
-            <a:pPr indent="0" marL="0">
+            <a:pPr marL="203200" indent="-203200">
               <a:lnSpc>
                 <a:spcPct val="105000"/>
               </a:lnSpc>
               <a:spcAft>
                 <a:spcPts val="900"/>
               </a:spcAft>
-              <a:buNone/>
+              <a:buSzPct val="100000"/>
+              <a:buChar char="✓"/>
             </a:pPr>
             <a:r>
               <a:rPr lang="en-US" sz="1250" dirty="0">
@@ -10511,14 +10512,15 @@
             <a:endParaRPr lang="en-US" sz="1250" dirty="0"/>
           </a:p>
           <a:p>
-            <a:pPr indent="0" marL="0">
+            <a:pPr marL="203200" indent="-203200">
               <a:lnSpc>
                 <a:spcPct val="105000"/>
               </a:lnSpc>
               <a:spcAft>
                 <a:spcPts val="900"/>
               </a:spcAft>
-              <a:buNone/>
+              <a:buSzPct val="100000"/>
+              <a:buChar char="✓"/>
             </a:pPr>
             <a:r>
               <a:rPr lang="en-US" sz="1250" dirty="0">
@@ -10534,14 +10536,15 @@
             <a:endParaRPr lang="en-US" sz="1250" dirty="0"/>
           </a:p>
           <a:p>
-            <a:pPr indent="0" marL="0">
+            <a:pPr marL="203200" indent="-203200">
               <a:lnSpc>
                 <a:spcPct val="105000"/>
               </a:lnSpc>
               <a:spcAft>
                 <a:spcPts val="900"/>
               </a:spcAft>
-              <a:buNone/>
+              <a:buSzPct val="100000"/>
+              <a:buChar char="✓"/>
             </a:pPr>
             <a:r>
               <a:rPr lang="en-US" sz="1250" dirty="0">
@@ -10557,14 +10560,15 @@
             <a:endParaRPr lang="en-US" sz="1250" dirty="0"/>
           </a:p>
           <a:p>
-            <a:pPr indent="0" marL="0">
+            <a:pPr marL="203200" indent="-203200">
               <a:lnSpc>
                 <a:spcPct val="105000"/>
               </a:lnSpc>
               <a:spcAft>
                 <a:spcPts val="900"/>
               </a:spcAft>
-              <a:buNone/>
+              <a:buSzPct val="100000"/>
+              <a:buChar char="✓"/>
             </a:pPr>
             <a:r>
               <a:rPr lang="en-US" sz="1250" dirty="0">
@@ -10699,14 +10703,15 @@
             <a:endParaRPr lang="en-US" sz="1250" dirty="0"/>
           </a:p>
           <a:p>
-            <a:pPr indent="0" marL="0">
+            <a:pPr marL="203200" indent="-203200">
               <a:lnSpc>
                 <a:spcPct val="105000"/>
               </a:lnSpc>
               <a:spcAft>
                 <a:spcPts val="900"/>
               </a:spcAft>
-              <a:buNone/>
+              <a:buSzPct val="100000"/>
+              <a:buChar char="✕"/>
             </a:pPr>
             <a:r>
               <a:rPr lang="en-US" sz="1250" dirty="0">
@@ -10722,14 +10727,15 @@
             <a:endParaRPr lang="en-US" sz="1250" dirty="0"/>
           </a:p>
           <a:p>
-            <a:pPr indent="0" marL="0">
+            <a:pPr marL="203200" indent="-203200">
               <a:lnSpc>
                 <a:spcPct val="105000"/>
               </a:lnSpc>
               <a:spcAft>
                 <a:spcPts val="900"/>
               </a:spcAft>
-              <a:buNone/>
+              <a:buSzPct val="100000"/>
+              <a:buChar char="✕"/>
             </a:pPr>
             <a:r>
               <a:rPr lang="en-US" sz="1250" dirty="0">
@@ -10745,14 +10751,15 @@
             <a:endParaRPr lang="en-US" sz="1250" dirty="0"/>
           </a:p>
           <a:p>
-            <a:pPr indent="0" marL="0">
+            <a:pPr marL="203200" indent="-203200">
               <a:lnSpc>
                 <a:spcPct val="105000"/>
               </a:lnSpc>
               <a:spcAft>
                 <a:spcPts val="900"/>
               </a:spcAft>
-              <a:buNone/>
+              <a:buSzPct val="100000"/>
+              <a:buChar char="✕"/>
             </a:pPr>
             <a:r>
               <a:rPr lang="en-US" sz="1250" dirty="0">
@@ -10768,14 +10775,15 @@
             <a:endParaRPr lang="en-US" sz="1250" dirty="0"/>
           </a:p>
           <a:p>
-            <a:pPr indent="0" marL="0">
+            <a:pPr marL="203200" indent="-203200">
               <a:lnSpc>
                 <a:spcPct val="105000"/>
               </a:lnSpc>
               <a:spcAft>
                 <a:spcPts val="900"/>
               </a:spcAft>
-              <a:buNone/>
+              <a:buSzPct val="100000"/>
+              <a:buChar char="✕"/>
             </a:pPr>
             <a:r>
               <a:rPr lang="en-US" sz="1250" dirty="0">
@@ -16389,11 +16397,12 @@
             <a:endParaRPr lang="en-US" sz="1200" dirty="0"/>
           </a:p>
           <a:p>
-            <a:pPr indent="0" marL="0">
+            <a:pPr marL="152400" indent="-152400">
               <a:lnSpc>
                 <a:spcPct val="110000"/>
               </a:lnSpc>
-              <a:buNone/>
+              <a:buSzPct val="100000"/>
+              <a:buChar char="•"/>
             </a:pPr>
             <a:r>
               <a:rPr lang="en-US" sz="1200" dirty="0">
@@ -16562,11 +16571,12 @@
             <a:endParaRPr lang="en-US" sz="1150" dirty="0"/>
           </a:p>
           <a:p>
-            <a:pPr indent="0" marL="0">
+            <a:pPr marL="152400" indent="-152400">
               <a:lnSpc>
                 <a:spcPct val="108000"/>
               </a:lnSpc>
-              <a:buNone/>
+              <a:buSzPct val="100000"/>
+              <a:buChar char="•"/>
             </a:pPr>
             <a:r>
               <a:rPr lang="en-US" sz="1150" dirty="0">
@@ -16582,11 +16592,12 @@
             <a:endParaRPr lang="en-US" sz="1150" dirty="0"/>
           </a:p>
           <a:p>
-            <a:pPr indent="0" marL="0">
+            <a:pPr marL="152400" indent="-152400">
               <a:lnSpc>
                 <a:spcPct val="108000"/>
               </a:lnSpc>
-              <a:buNone/>
+              <a:buSzPct val="100000"/>
+              <a:buChar char="•"/>
             </a:pPr>
             <a:r>
               <a:rPr lang="en-US" sz="1150" dirty="0">
@@ -16904,14 +16915,15 @@
             <a:endParaRPr lang="en-US" sz="1300" dirty="0"/>
           </a:p>
           <a:p>
-            <a:pPr indent="0" marL="0">
+            <a:pPr marL="203200" indent="-203200">
               <a:lnSpc>
                 <a:spcPct val="135000"/>
               </a:lnSpc>
               <a:spcAft>
                 <a:spcPts val="800"/>
               </a:spcAft>
-              <a:buNone/>
+              <a:buSzPct val="100000"/>
+              <a:buChar char="✓"/>
             </a:pPr>
             <a:r>
               <a:rPr lang="en-US" sz="1300" dirty="0">
@@ -16927,14 +16939,15 @@
             <a:endParaRPr lang="en-US" sz="1300" dirty="0"/>
           </a:p>
           <a:p>
-            <a:pPr indent="0" marL="0">
+            <a:pPr marL="203200" indent="-203200">
               <a:lnSpc>
                 <a:spcPct val="135000"/>
               </a:lnSpc>
               <a:spcAft>
                 <a:spcPts val="800"/>
               </a:spcAft>
-              <a:buNone/>
+              <a:buSzPct val="100000"/>
+              <a:buChar char="✓"/>
             </a:pPr>
             <a:r>
               <a:rPr lang="en-US" sz="1300" dirty="0">
@@ -16950,14 +16963,15 @@
             <a:endParaRPr lang="en-US" sz="1300" dirty="0"/>
           </a:p>
           <a:p>
-            <a:pPr indent="0" marL="0">
+            <a:pPr marL="203200" indent="-203200">
               <a:lnSpc>
                 <a:spcPct val="135000"/>
               </a:lnSpc>
               <a:spcAft>
                 <a:spcPts val="800"/>
               </a:spcAft>
-              <a:buNone/>
+              <a:buSzPct val="100000"/>
+              <a:buChar char="✓"/>
             </a:pPr>
             <a:r>
               <a:rPr lang="en-US" sz="1300" dirty="0">
@@ -16973,14 +16987,15 @@
             <a:endParaRPr lang="en-US" sz="1300" dirty="0"/>
           </a:p>
           <a:p>
-            <a:pPr indent="0" marL="0">
+            <a:pPr marL="203200" indent="-203200">
               <a:lnSpc>
                 <a:spcPct val="135000"/>
               </a:lnSpc>
               <a:spcAft>
                 <a:spcPts val="800"/>
               </a:spcAft>
-              <a:buNone/>
+              <a:buSzPct val="100000"/>
+              <a:buChar char="✓"/>
             </a:pPr>
             <a:r>
               <a:rPr lang="en-US" sz="1300" dirty="0">
@@ -17115,14 +17130,15 @@
             <a:endParaRPr lang="en-US" sz="1300" dirty="0"/>
           </a:p>
           <a:p>
-            <a:pPr indent="0" marL="0">
+            <a:pPr marL="203200" indent="-203200">
               <a:lnSpc>
                 <a:spcPct val="135000"/>
               </a:lnSpc>
               <a:spcAft>
                 <a:spcPts val="800"/>
               </a:spcAft>
-              <a:buNone/>
+              <a:buSzPct val="100000"/>
+              <a:buChar char="✕"/>
             </a:pPr>
             <a:r>
               <a:rPr lang="en-US" sz="1300" dirty="0">
@@ -17138,14 +17154,15 @@
             <a:endParaRPr lang="en-US" sz="1300" dirty="0"/>
           </a:p>
           <a:p>
-            <a:pPr indent="0" marL="0">
+            <a:pPr marL="203200" indent="-203200">
               <a:lnSpc>
                 <a:spcPct val="135000"/>
               </a:lnSpc>
               <a:spcAft>
                 <a:spcPts val="800"/>
               </a:spcAft>
-              <a:buNone/>
+              <a:buSzPct val="100000"/>
+              <a:buChar char="✕"/>
             </a:pPr>
             <a:r>
               <a:rPr lang="en-US" sz="1300" dirty="0">
@@ -17161,14 +17178,15 @@
             <a:endParaRPr lang="en-US" sz="1300" dirty="0"/>
           </a:p>
           <a:p>
-            <a:pPr indent="0" marL="0">
+            <a:pPr marL="203200" indent="-203200">
               <a:lnSpc>
                 <a:spcPct val="135000"/>
               </a:lnSpc>
               <a:spcAft>
                 <a:spcPts val="800"/>
               </a:spcAft>
-              <a:buNone/>
+              <a:buSzPct val="100000"/>
+              <a:buChar char="✕"/>
             </a:pPr>
             <a:r>
               <a:rPr lang="en-US" sz="1300" dirty="0">
@@ -17184,14 +17202,15 @@
             <a:endParaRPr lang="en-US" sz="1300" dirty="0"/>
           </a:p>
           <a:p>
-            <a:pPr indent="0" marL="0">
+            <a:pPr marL="203200" indent="-203200">
               <a:lnSpc>
                 <a:spcPct val="135000"/>
               </a:lnSpc>
               <a:spcAft>
                 <a:spcPts val="800"/>
               </a:spcAft>
-              <a:buNone/>
+              <a:buSzPct val="100000"/>
+              <a:buChar char="✕"/>
             </a:pPr>
             <a:r>
               <a:rPr lang="en-US" sz="1300" dirty="0">
@@ -19265,12 +19284,12 @@
         </p:nvSpPr>
         <p:spPr>
           <a:xfrm>
-            <a:off x="822960" y="1901952"/>
-            <a:ext cx="5303520" cy="658368"/>
+            <a:off x="822960" y="1874520"/>
+            <a:ext cx="5303520" cy="530352"/>
           </a:xfrm>
           <a:prstGeom prst="roundRect">
             <a:avLst>
-              <a:gd name="adj" fmla="val 12500"/>
+              <a:gd name="adj" fmla="val 15517"/>
             </a:avLst>
           </a:prstGeom>
           <a:solidFill>
@@ -19292,8 +19311,8 @@
         </p:nvSpPr>
         <p:spPr>
           <a:xfrm>
-            <a:off x="1024128" y="1901952"/>
-            <a:ext cx="2377440" cy="658368"/>
+            <a:off x="1024128" y="1874520"/>
+            <a:ext cx="2377440" cy="530352"/>
           </a:xfrm>
           <a:prstGeom prst="rect">
             <a:avLst/>
@@ -19331,7 +19350,7 @@
         </p:nvSpPr>
         <p:spPr>
           <a:xfrm>
-            <a:off x="3218688" y="2139696"/>
+            <a:off x="3218688" y="2048256"/>
             <a:ext cx="365760" cy="201168"/>
           </a:xfrm>
           <a:prstGeom prst="rightArrow">
@@ -19351,8 +19370,8 @@
         </p:nvSpPr>
         <p:spPr>
           <a:xfrm>
-            <a:off x="3675888" y="1901952"/>
-            <a:ext cx="2377440" cy="658368"/>
+            <a:off x="3675888" y="1874520"/>
+            <a:ext cx="2377440" cy="530352"/>
           </a:xfrm>
           <a:prstGeom prst="rect">
             <a:avLst/>
@@ -19390,12 +19409,12 @@
         </p:nvSpPr>
         <p:spPr>
           <a:xfrm>
-            <a:off x="822960" y="2651760"/>
-            <a:ext cx="5303520" cy="658368"/>
+            <a:off x="822960" y="2496312"/>
+            <a:ext cx="5303520" cy="530352"/>
           </a:xfrm>
           <a:prstGeom prst="roundRect">
             <a:avLst>
-              <a:gd name="adj" fmla="val 12500"/>
+              <a:gd name="adj" fmla="val 15517"/>
             </a:avLst>
           </a:prstGeom>
           <a:solidFill>
@@ -19417,8 +19436,8 @@
         </p:nvSpPr>
         <p:spPr>
           <a:xfrm>
-            <a:off x="1024128" y="2651760"/>
-            <a:ext cx="2377440" cy="658368"/>
+            <a:off x="1024128" y="2496312"/>
+            <a:ext cx="2377440" cy="530352"/>
           </a:xfrm>
           <a:prstGeom prst="rect">
             <a:avLst/>
@@ -19456,7 +19475,7 @@
         </p:nvSpPr>
         <p:spPr>
           <a:xfrm>
-            <a:off x="3218688" y="2889504"/>
+            <a:off x="3218688" y="2670048"/>
             <a:ext cx="365760" cy="201168"/>
           </a:xfrm>
           <a:prstGeom prst="rightArrow">
@@ -19476,8 +19495,8 @@
         </p:nvSpPr>
         <p:spPr>
           <a:xfrm>
-            <a:off x="3675888" y="2651760"/>
-            <a:ext cx="2377440" cy="658368"/>
+            <a:off x="3675888" y="2496312"/>
+            <a:ext cx="2377440" cy="530352"/>
           </a:xfrm>
           <a:prstGeom prst="rect">
             <a:avLst/>
@@ -19515,8 +19534,8 @@
         </p:nvSpPr>
         <p:spPr>
           <a:xfrm>
-            <a:off x="822960" y="3127248"/>
-            <a:ext cx="5486400" cy="292608"/>
+            <a:off x="822960" y="3163824"/>
+            <a:ext cx="5486400" cy="274320"/>
           </a:xfrm>
           <a:prstGeom prst="rect">
             <a:avLst/>

--- a/FIND-CKD.pptx
+++ b/FIND-CKD.pptx
@@ -526,7 +526,7 @@
                 <a:pPr>
                   <a:defRPr sz="1100" b="0" i="0" u="none" strike="noStrike">
                     <a:solidFill>
-                      <a:srgbClr val="6C7C84"/>
+                      <a:srgbClr val="4E5E66"/>
                     </a:solidFill>
                     <a:latin typeface="Arial"/>
                   </a:defRPr>
@@ -534,7 +534,7 @@
                 <a:r>
                   <a:rPr sz="1100" b="0" i="0" u="none" strike="noStrike">
                     <a:solidFill>
-                      <a:srgbClr val="6C7C84"/>
+                      <a:srgbClr val="4E5E66"/>
                     </a:solidFill>
                     <a:latin typeface="Arial"/>
                   </a:rPr>
@@ -566,7 +566,7 @@
             <a:pPr>
               <a:defRPr sz="1000" b="0" i="0" u="none" strike="noStrike">
                 <a:solidFill>
-                  <a:srgbClr val="6C7C84"/>
+                  <a:srgbClr val="4E5E66"/>
                 </a:solidFill>
                 <a:latin typeface="Calibri"/>
               </a:defRPr>
@@ -609,7 +609,7 @@
                 <a:pPr>
                   <a:defRPr sz="1100" b="0" i="0" u="none" strike="noStrike">
                     <a:solidFill>
-                      <a:srgbClr val="6C7C84"/>
+                      <a:srgbClr val="4E5E66"/>
                     </a:solidFill>
                     <a:latin typeface="Arial"/>
                   </a:defRPr>
@@ -617,7 +617,7 @@
                 <a:r>
                   <a:rPr sz="1100" b="0" i="0" u="none" strike="noStrike">
                     <a:solidFill>
-                      <a:srgbClr val="6C7C84"/>
+                      <a:srgbClr val="4E5E66"/>
                     </a:solidFill>
                     <a:latin typeface="Arial"/>
                   </a:rPr>
@@ -649,7 +649,7 @@
             <a:pPr>
               <a:defRPr sz="1000" b="0" i="0" u="none" strike="noStrike">
                 <a:solidFill>
-                  <a:srgbClr val="6C7C84"/>
+                  <a:srgbClr val="4E5E66"/>
                 </a:solidFill>
                 <a:latin typeface="Calibri"/>
               </a:defRPr>
@@ -680,7 +680,7 @@
           <a:pPr>
             <a:defRPr sz="1200">
               <a:solidFill>
-                <a:srgbClr val="22343C"/>
+                <a:srgbClr val="13212A"/>
               </a:solidFill>
               <a:latin typeface="Calibri"/>
               <a:cs typeface="Calibri"/>
@@ -748,7 +748,7 @@
                 <a:pPr>
                   <a:defRPr b="1" i="0" strike="noStrike" sz="1200" u="none">
                     <a:solidFill>
-                      <a:srgbClr val="22343C"/>
+                      <a:srgbClr val="13212A"/>
                     </a:solidFill>
                     <a:latin typeface="Calibri"/>
                   </a:defRPr>
@@ -834,7 +834,7 @@
                 <a:pPr>
                   <a:defRPr b="1" i="0" strike="noStrike" sz="1200" u="none">
                     <a:solidFill>
-                      <a:srgbClr val="22343C"/>
+                      <a:srgbClr val="13212A"/>
                     </a:solidFill>
                     <a:latin typeface="Calibri"/>
                   </a:defRPr>
@@ -899,7 +899,7 @@
               <a:pPr>
                 <a:defRPr b="1" i="0" strike="noStrike" sz="1200" u="none">
                   <a:solidFill>
-                    <a:srgbClr val="22343C"/>
+                    <a:srgbClr val="13212A"/>
                   </a:solidFill>
                   <a:latin typeface="Calibri"/>
                 </a:defRPr>
@@ -947,7 +947,7 @@
             <a:pPr>
               <a:defRPr sz="1100" b="0" i="0" u="none" strike="noStrike">
                 <a:solidFill>
-                  <a:srgbClr val="22343C"/>
+                  <a:srgbClr val="13212A"/>
                 </a:solidFill>
                 <a:latin typeface="Calibri"/>
               </a:defRPr>
@@ -990,7 +990,7 @@
                 <a:pPr>
                   <a:defRPr sz="1100" b="0" i="0" u="none" strike="noStrike">
                     <a:solidFill>
-                      <a:srgbClr val="6C7C84"/>
+                      <a:srgbClr val="4E5E66"/>
                     </a:solidFill>
                     <a:latin typeface="Arial"/>
                   </a:defRPr>
@@ -998,7 +998,7 @@
                 <a:r>
                   <a:rPr sz="1100" b="0" i="0" u="none" strike="noStrike">
                     <a:solidFill>
-                      <a:srgbClr val="6C7C84"/>
+                      <a:srgbClr val="4E5E66"/>
                     </a:solidFill>
                     <a:latin typeface="Arial"/>
                   </a:rPr>
@@ -1030,7 +1030,7 @@
             <a:pPr>
               <a:defRPr sz="1000" b="0" i="0" u="none" strike="noStrike">
                 <a:solidFill>
-                  <a:srgbClr val="6C7C84"/>
+                  <a:srgbClr val="4E5E66"/>
                 </a:solidFill>
                 <a:latin typeface="Calibri"/>
               </a:defRPr>
@@ -1061,7 +1061,7 @@
           <a:pPr>
             <a:defRPr sz="1200">
               <a:solidFill>
-                <a:srgbClr val="22343C"/>
+                <a:srgbClr val="13212A"/>
               </a:solidFill>
               <a:latin typeface="Calibri"/>
               <a:cs typeface="Calibri"/>
@@ -1435,7 +1435,7 @@
                 <a:pPr>
                   <a:defRPr sz="1050" b="0" i="0" u="none" strike="noStrike">
                     <a:solidFill>
-                      <a:srgbClr val="6C7C84"/>
+                      <a:srgbClr val="4E5E66"/>
                     </a:solidFill>
                     <a:latin typeface="Arial"/>
                   </a:defRPr>
@@ -1443,7 +1443,7 @@
                 <a:r>
                   <a:rPr sz="1050" b="0" i="0" u="none" strike="noStrike">
                     <a:solidFill>
-                      <a:srgbClr val="6C7C84"/>
+                      <a:srgbClr val="4E5E66"/>
                     </a:solidFill>
                     <a:latin typeface="Arial"/>
                   </a:rPr>
@@ -1475,7 +1475,7 @@
             <a:pPr>
               <a:defRPr sz="1000" b="0" i="0" u="none" strike="noStrike">
                 <a:solidFill>
-                  <a:srgbClr val="6C7C84"/>
+                  <a:srgbClr val="4E5E66"/>
                 </a:solidFill>
                 <a:latin typeface="Calibri"/>
               </a:defRPr>
@@ -1518,7 +1518,7 @@
                 <a:pPr>
                   <a:defRPr sz="1050" b="0" i="0" u="none" strike="noStrike">
                     <a:solidFill>
-                      <a:srgbClr val="6C7C84"/>
+                      <a:srgbClr val="4E5E66"/>
                     </a:solidFill>
                     <a:latin typeface="Arial"/>
                   </a:defRPr>
@@ -1526,7 +1526,7 @@
                 <a:r>
                   <a:rPr sz="1050" b="0" i="0" u="none" strike="noStrike">
                     <a:solidFill>
-                      <a:srgbClr val="6C7C84"/>
+                      <a:srgbClr val="4E5E66"/>
                     </a:solidFill>
                     <a:latin typeface="Arial"/>
                   </a:rPr>
@@ -1558,7 +1558,7 @@
             <a:pPr>
               <a:defRPr sz="1000" b="0" i="0" u="none" strike="noStrike">
                 <a:solidFill>
-                  <a:srgbClr val="6C7C84"/>
+                  <a:srgbClr val="4E5E66"/>
                 </a:solidFill>
                 <a:latin typeface="Calibri"/>
               </a:defRPr>
@@ -1589,7 +1589,7 @@
           <a:pPr>
             <a:defRPr sz="1150">
               <a:solidFill>
-                <a:srgbClr val="22343C"/>
+                <a:srgbClr val="13212A"/>
               </a:solidFill>
               <a:latin typeface="Calibri"/>
               <a:cs typeface="Calibri"/>
@@ -1657,7 +1657,7 @@
                 <a:pPr>
                   <a:defRPr b="1" i="0" strike="noStrike" sz="1000" u="none">
                     <a:solidFill>
-                      <a:srgbClr val="22343C"/>
+                      <a:srgbClr val="13212A"/>
                     </a:solidFill>
                     <a:latin typeface="Calibri"/>
                   </a:defRPr>
@@ -1761,7 +1761,7 @@
                 <a:pPr>
                   <a:defRPr b="1" i="0" strike="noStrike" sz="1000" u="none">
                     <a:solidFill>
-                      <a:srgbClr val="22343C"/>
+                      <a:srgbClr val="13212A"/>
                     </a:solidFill>
                     <a:latin typeface="Calibri"/>
                   </a:defRPr>
@@ -1844,7 +1844,7 @@
               <a:pPr>
                 <a:defRPr b="1" i="0" strike="noStrike" sz="1000" u="none">
                   <a:solidFill>
-                    <a:srgbClr val="22343C"/>
+                    <a:srgbClr val="13212A"/>
                   </a:solidFill>
                   <a:latin typeface="Calibri"/>
                 </a:defRPr>
@@ -1892,7 +1892,7 @@
             <a:pPr>
               <a:defRPr sz="950" b="0" i="0" u="none" strike="noStrike">
                 <a:solidFill>
-                  <a:srgbClr val="22343C"/>
+                  <a:srgbClr val="13212A"/>
                 </a:solidFill>
                 <a:latin typeface="Calibri"/>
               </a:defRPr>
@@ -1935,7 +1935,7 @@
                 <a:pPr>
                   <a:defRPr sz="1050" b="0" i="0" u="none" strike="noStrike">
                     <a:solidFill>
-                      <a:srgbClr val="6C7C84"/>
+                      <a:srgbClr val="4E5E66"/>
                     </a:solidFill>
                     <a:latin typeface="Arial"/>
                   </a:defRPr>
@@ -1943,7 +1943,7 @@
                 <a:r>
                   <a:rPr sz="1050" b="0" i="0" u="none" strike="noStrike">
                     <a:solidFill>
-                      <a:srgbClr val="6C7C84"/>
+                      <a:srgbClr val="4E5E66"/>
                     </a:solidFill>
                     <a:latin typeface="Arial"/>
                   </a:rPr>
@@ -1975,7 +1975,7 @@
             <a:pPr>
               <a:defRPr sz="950" b="0" i="0" u="none" strike="noStrike">
                 <a:solidFill>
-                  <a:srgbClr val="6C7C84"/>
+                  <a:srgbClr val="4E5E66"/>
                 </a:solidFill>
                 <a:latin typeface="Calibri"/>
               </a:defRPr>
@@ -2006,7 +2006,7 @@
           <a:pPr>
             <a:defRPr sz="1150">
               <a:solidFill>
-                <a:srgbClr val="22343C"/>
+                <a:srgbClr val="13212A"/>
               </a:solidFill>
               <a:latin typeface="Calibri"/>
               <a:cs typeface="Calibri"/>
@@ -5355,7 +5355,7 @@
               <a:buNone/>
             </a:pPr>
             <a:r>
-              <a:rPr lang="en-US" sz="1300" dirty="0">
+              <a:rPr lang="en-US" sz="1450" dirty="0">
                 <a:solidFill>
                   <a:srgbClr val="9FBBC6"/>
                 </a:solidFill>
@@ -5365,7 +5365,7 @@
               </a:rPr>
               <a:t>Journal club  ·  Nephrology</a:t>
             </a:r>
-            <a:endParaRPr lang="en-US" sz="1300" dirty="0"/>
+            <a:endParaRPr lang="en-US" sz="1450" dirty="0"/>
           </a:p>
         </p:txBody>
       </p:sp>
@@ -5475,7 +5475,7 @@
               <a:buNone/>
             </a:pPr>
             <a:r>
-              <a:rPr lang="en-US" sz="1350" dirty="0">
+              <a:rPr lang="en-US" sz="1500" dirty="0">
                 <a:solidFill>
                   <a:srgbClr val="C2D8DE"/>
                 </a:solidFill>
@@ -5485,7 +5485,7 @@
               </a:rPr>
               <a:t>Heerspink HJL, Neuen BL, Agarwal R, et al., for the FIND-CKD Investigators</a:t>
             </a:r>
-            <a:endParaRPr lang="en-US" sz="1350" dirty="0"/>
+            <a:endParaRPr lang="en-US" sz="1500" dirty="0"/>
           </a:p>
           <a:p>
             <a:pPr indent="0" marL="0">
@@ -5495,7 +5495,7 @@
               <a:buNone/>
             </a:pPr>
             <a:r>
-              <a:rPr lang="en-US" sz="1200" dirty="0">
+              <a:rPr lang="en-US" sz="1350" dirty="0">
                 <a:solidFill>
                   <a:srgbClr val="8CAAB4"/>
                 </a:solidFill>
@@ -5505,7 +5505,7 @@
               </a:rPr>
               <a:t>N Engl J Med 2026.  DOI 10.1056/NEJMoa2604625  ·  NCT05047263  ·  Funded by Bayer</a:t>
             </a:r>
-            <a:endParaRPr lang="en-US" sz="1350" dirty="0"/>
+            <a:endParaRPr lang="en-US" sz="1500" dirty="0"/>
           </a:p>
         </p:txBody>
       </p:sp>
@@ -5534,7 +5534,7 @@
               <a:buNone/>
             </a:pPr>
             <a:r>
-              <a:rPr lang="en-US" sz="1250" dirty="0">
+              <a:rPr lang="en-US" sz="1400" dirty="0">
                 <a:solidFill>
                   <a:srgbClr val="7FA0AC"/>
                 </a:solidFill>
@@ -5544,7 +5544,7 @@
               </a:rPr>
               <a:t>Presented by [name], [date]</a:t>
             </a:r>
-            <a:endParaRPr lang="en-US" sz="1250" dirty="0"/>
+            <a:endParaRPr lang="en-US" sz="1400" dirty="0"/>
           </a:p>
         </p:txBody>
       </p:sp>
@@ -5634,8 +5634,8 @@
         </p:nvSpPr>
         <p:spPr>
           <a:xfrm>
-            <a:off x="1389888" y="329184"/>
-            <a:ext cx="10158984" cy="566928"/>
+            <a:off x="1389888" y="310896"/>
+            <a:ext cx="10158984" cy="603504"/>
           </a:xfrm>
           <a:prstGeom prst="rect">
             <a:avLst/>
@@ -5651,7 +5651,7 @@
               <a:buNone/>
             </a:pPr>
             <a:r>
-              <a:rPr lang="en-US" sz="2300" b="1" dirty="0">
+              <a:rPr lang="en-US" sz="2600" b="1" dirty="0">
                 <a:solidFill>
                   <a:srgbClr val="0F3446"/>
                 </a:solidFill>
@@ -5661,7 +5661,7 @@
               </a:rPr>
               <a:t>Baseline characteristics</a:t>
             </a:r>
-            <a:endParaRPr lang="en-US" sz="2300" dirty="0"/>
+            <a:endParaRPr lang="en-US" sz="2600" dirty="0"/>
           </a:p>
         </p:txBody>
       </p:sp>
@@ -5690,9 +5690,9 @@
               <a:buNone/>
             </a:pPr>
             <a:r>
-              <a:rPr lang="en-US" sz="1300" i="1" dirty="0">
-                <a:solidFill>
-                  <a:srgbClr val="6C7C84"/>
+              <a:rPr lang="en-US" sz="1450" i="1" dirty="0">
+                <a:solidFill>
+                  <a:srgbClr val="4E5E66"/>
                 </a:solidFill>
                 <a:latin typeface="Calibri" pitchFamily="34" charset="0"/>
                 <a:ea typeface="Calibri" pitchFamily="34" charset="-122"/>
@@ -5700,7 +5700,7 @@
               </a:rPr>
               <a:t>Well balanced between the two groups (n = 1584).</a:t>
             </a:r>
-            <a:endParaRPr lang="en-US" sz="1300" dirty="0"/>
+            <a:endParaRPr lang="en-US" sz="1450" dirty="0"/>
           </a:p>
         </p:txBody>
       </p:sp>
@@ -5752,7 +5752,7 @@
               <a:buNone/>
             </a:pPr>
             <a:r>
-              <a:rPr lang="en-US" sz="1200" b="1" dirty="0">
+              <a:rPr lang="en-US" sz="1300" b="1" dirty="0">
                 <a:solidFill>
                   <a:srgbClr val="FFFFFF"/>
                 </a:solidFill>
@@ -5762,7 +5762,7 @@
               </a:rPr>
               <a:t>Characteristic</a:t>
             </a:r>
-            <a:endParaRPr lang="en-US" sz="1200" dirty="0"/>
+            <a:endParaRPr lang="en-US" sz="1300" dirty="0"/>
           </a:p>
         </p:txBody>
       </p:sp>
@@ -5794,7 +5794,7 @@
               <a:buNone/>
             </a:pPr>
             <a:r>
-              <a:rPr lang="en-US" sz="1200" b="1" dirty="0">
+              <a:rPr lang="en-US" sz="1300" b="1" dirty="0">
                 <a:solidFill>
                   <a:srgbClr val="FFFFFF"/>
                 </a:solidFill>
@@ -5804,7 +5804,7 @@
               </a:rPr>
               <a:t>Finerenone (n=793)</a:t>
             </a:r>
-            <a:endParaRPr lang="en-US" sz="1200" dirty="0"/>
+            <a:endParaRPr lang="en-US" sz="1300" dirty="0"/>
           </a:p>
         </p:txBody>
       </p:sp>
@@ -5836,7 +5836,7 @@
               <a:buNone/>
             </a:pPr>
             <a:r>
-              <a:rPr lang="en-US" sz="1200" b="1" dirty="0">
+              <a:rPr lang="en-US" sz="1300" b="1" dirty="0">
                 <a:solidFill>
                   <a:srgbClr val="FFFFFF"/>
                 </a:solidFill>
@@ -5846,7 +5846,7 @@
               </a:rPr>
               <a:t>Placebo (n=791)</a:t>
             </a:r>
-            <a:endParaRPr lang="en-US" sz="1200" dirty="0"/>
+            <a:endParaRPr lang="en-US" sz="1300" dirty="0"/>
           </a:p>
         </p:txBody>
       </p:sp>
@@ -5901,7 +5901,7 @@
               <a:buNone/>
             </a:pPr>
             <a:r>
-              <a:rPr lang="en-US" sz="1150" b="1" dirty="0">
+              <a:rPr lang="en-US" sz="1300" b="1" dirty="0">
                 <a:solidFill>
                   <a:srgbClr val="0F3446"/>
                 </a:solidFill>
@@ -5911,7 +5911,7 @@
               </a:rPr>
               <a:t>Age, yr</a:t>
             </a:r>
-            <a:endParaRPr lang="en-US" sz="1150" dirty="0"/>
+            <a:endParaRPr lang="en-US" sz="1300" dirty="0"/>
           </a:p>
         </p:txBody>
       </p:sp>
@@ -5943,9 +5943,9 @@
               <a:buNone/>
             </a:pPr>
             <a:r>
-              <a:rPr lang="en-US" sz="1150" dirty="0">
-                <a:solidFill>
-                  <a:srgbClr val="22343C"/>
+              <a:rPr lang="en-US" sz="1300" dirty="0">
+                <a:solidFill>
+                  <a:srgbClr val="13212A"/>
                 </a:solidFill>
                 <a:latin typeface="Calibri" pitchFamily="34" charset="0"/>
                 <a:ea typeface="Calibri" pitchFamily="34" charset="-122"/>
@@ -5953,7 +5953,7 @@
               </a:rPr>
               <a:t>54.5</a:t>
             </a:r>
-            <a:endParaRPr lang="en-US" sz="1150" dirty="0"/>
+            <a:endParaRPr lang="en-US" sz="1300" dirty="0"/>
           </a:p>
         </p:txBody>
       </p:sp>
@@ -5985,9 +5985,9 @@
               <a:buNone/>
             </a:pPr>
             <a:r>
-              <a:rPr lang="en-US" sz="1150" dirty="0">
-                <a:solidFill>
-                  <a:srgbClr val="22343C"/>
+              <a:rPr lang="en-US" sz="1300" dirty="0">
+                <a:solidFill>
+                  <a:srgbClr val="13212A"/>
                 </a:solidFill>
                 <a:latin typeface="Calibri" pitchFamily="34" charset="0"/>
                 <a:ea typeface="Calibri" pitchFamily="34" charset="-122"/>
@@ -5995,7 +5995,7 @@
               </a:rPr>
               <a:t>54.8</a:t>
             </a:r>
-            <a:endParaRPr lang="en-US" sz="1150" dirty="0"/>
+            <a:endParaRPr lang="en-US" sz="1300" dirty="0"/>
           </a:p>
         </p:txBody>
       </p:sp>
@@ -6050,7 +6050,7 @@
               <a:buNone/>
             </a:pPr>
             <a:r>
-              <a:rPr lang="en-US" sz="1150" b="1" dirty="0">
+              <a:rPr lang="en-US" sz="1300" b="1" dirty="0">
                 <a:solidFill>
                   <a:srgbClr val="0F3446"/>
                 </a:solidFill>
@@ -6060,7 +6060,7 @@
               </a:rPr>
               <a:t>Female, n (%)</a:t>
             </a:r>
-            <a:endParaRPr lang="en-US" sz="1150" dirty="0"/>
+            <a:endParaRPr lang="en-US" sz="1300" dirty="0"/>
           </a:p>
         </p:txBody>
       </p:sp>
@@ -6092,9 +6092,9 @@
               <a:buNone/>
             </a:pPr>
             <a:r>
-              <a:rPr lang="en-US" sz="1150" dirty="0">
-                <a:solidFill>
-                  <a:srgbClr val="22343C"/>
+              <a:rPr lang="en-US" sz="1300" dirty="0">
+                <a:solidFill>
+                  <a:srgbClr val="13212A"/>
                 </a:solidFill>
                 <a:latin typeface="Calibri" pitchFamily="34" charset="0"/>
                 <a:ea typeface="Calibri" pitchFamily="34" charset="-122"/>
@@ -6102,7 +6102,7 @@
               </a:rPr>
               <a:t>275 (34.7)</a:t>
             </a:r>
-            <a:endParaRPr lang="en-US" sz="1150" dirty="0"/>
+            <a:endParaRPr lang="en-US" sz="1300" dirty="0"/>
           </a:p>
         </p:txBody>
       </p:sp>
@@ -6134,9 +6134,9 @@
               <a:buNone/>
             </a:pPr>
             <a:r>
-              <a:rPr lang="en-US" sz="1150" dirty="0">
-                <a:solidFill>
-                  <a:srgbClr val="22343C"/>
+              <a:rPr lang="en-US" sz="1300" dirty="0">
+                <a:solidFill>
+                  <a:srgbClr val="13212A"/>
                 </a:solidFill>
                 <a:latin typeface="Calibri" pitchFamily="34" charset="0"/>
                 <a:ea typeface="Calibri" pitchFamily="34" charset="-122"/>
@@ -6144,7 +6144,7 @@
               </a:rPr>
               <a:t>260 (32.9)</a:t>
             </a:r>
-            <a:endParaRPr lang="en-US" sz="1150" dirty="0"/>
+            <a:endParaRPr lang="en-US" sz="1300" dirty="0"/>
           </a:p>
         </p:txBody>
       </p:sp>
@@ -6199,7 +6199,7 @@
               <a:buNone/>
             </a:pPr>
             <a:r>
-              <a:rPr lang="en-US" sz="1150" b="1" dirty="0">
+              <a:rPr lang="en-US" sz="1300" b="1" dirty="0">
                 <a:solidFill>
                   <a:srgbClr val="0F3446"/>
                 </a:solidFill>
@@ -6209,7 +6209,7 @@
               </a:rPr>
               <a:t>eGFR, ml/min/1.73 m²</a:t>
             </a:r>
-            <a:endParaRPr lang="en-US" sz="1150" dirty="0"/>
+            <a:endParaRPr lang="en-US" sz="1300" dirty="0"/>
           </a:p>
         </p:txBody>
       </p:sp>
@@ -6241,9 +6241,9 @@
               <a:buNone/>
             </a:pPr>
             <a:r>
-              <a:rPr lang="en-US" sz="1150" dirty="0">
-                <a:solidFill>
-                  <a:srgbClr val="22343C"/>
+              <a:rPr lang="en-US" sz="1300" dirty="0">
+                <a:solidFill>
+                  <a:srgbClr val="13212A"/>
                 </a:solidFill>
                 <a:latin typeface="Calibri" pitchFamily="34" charset="0"/>
                 <a:ea typeface="Calibri" pitchFamily="34" charset="-122"/>
@@ -6251,7 +6251,7 @@
               </a:rPr>
               <a:t>46.8</a:t>
             </a:r>
-            <a:endParaRPr lang="en-US" sz="1150" dirty="0"/>
+            <a:endParaRPr lang="en-US" sz="1300" dirty="0"/>
           </a:p>
         </p:txBody>
       </p:sp>
@@ -6283,9 +6283,9 @@
               <a:buNone/>
             </a:pPr>
             <a:r>
-              <a:rPr lang="en-US" sz="1150" dirty="0">
-                <a:solidFill>
-                  <a:srgbClr val="22343C"/>
+              <a:rPr lang="en-US" sz="1300" dirty="0">
+                <a:solidFill>
+                  <a:srgbClr val="13212A"/>
                 </a:solidFill>
                 <a:latin typeface="Calibri" pitchFamily="34" charset="0"/>
                 <a:ea typeface="Calibri" pitchFamily="34" charset="-122"/>
@@ -6293,7 +6293,7 @@
               </a:rPr>
               <a:t>46.6</a:t>
             </a:r>
-            <a:endParaRPr lang="en-US" sz="1150" dirty="0"/>
+            <a:endParaRPr lang="en-US" sz="1300" dirty="0"/>
           </a:p>
         </p:txBody>
       </p:sp>
@@ -6348,7 +6348,7 @@
               <a:buNone/>
             </a:pPr>
             <a:r>
-              <a:rPr lang="en-US" sz="1150" b="1" dirty="0">
+              <a:rPr lang="en-US" sz="1300" b="1" dirty="0">
                 <a:solidFill>
                   <a:srgbClr val="0F3446"/>
                 </a:solidFill>
@@ -6358,7 +6358,7 @@
               </a:rPr>
               <a:t>eGFR &lt;60 ml/min/1.73 m², %</a:t>
             </a:r>
-            <a:endParaRPr lang="en-US" sz="1150" dirty="0"/>
+            <a:endParaRPr lang="en-US" sz="1300" dirty="0"/>
           </a:p>
         </p:txBody>
       </p:sp>
@@ -6390,9 +6390,9 @@
               <a:buNone/>
             </a:pPr>
             <a:r>
-              <a:rPr lang="en-US" sz="1150" dirty="0">
-                <a:solidFill>
-                  <a:srgbClr val="22343C"/>
+              <a:rPr lang="en-US" sz="1300" dirty="0">
+                <a:solidFill>
+                  <a:srgbClr val="13212A"/>
                 </a:solidFill>
                 <a:latin typeface="Calibri" pitchFamily="34" charset="0"/>
                 <a:ea typeface="Calibri" pitchFamily="34" charset="-122"/>
@@ -6400,7 +6400,7 @@
               </a:rPr>
               <a:t>79.6</a:t>
             </a:r>
-            <a:endParaRPr lang="en-US" sz="1150" dirty="0"/>
+            <a:endParaRPr lang="en-US" sz="1300" dirty="0"/>
           </a:p>
         </p:txBody>
       </p:sp>
@@ -6432,9 +6432,9 @@
               <a:buNone/>
             </a:pPr>
             <a:r>
-              <a:rPr lang="en-US" sz="1150" dirty="0">
-                <a:solidFill>
-                  <a:srgbClr val="22343C"/>
+              <a:rPr lang="en-US" sz="1300" dirty="0">
+                <a:solidFill>
+                  <a:srgbClr val="13212A"/>
                 </a:solidFill>
                 <a:latin typeface="Calibri" pitchFamily="34" charset="0"/>
                 <a:ea typeface="Calibri" pitchFamily="34" charset="-122"/>
@@ -6442,7 +6442,7 @@
               </a:rPr>
               <a:t>80.4</a:t>
             </a:r>
-            <a:endParaRPr lang="en-US" sz="1150" dirty="0"/>
+            <a:endParaRPr lang="en-US" sz="1300" dirty="0"/>
           </a:p>
         </p:txBody>
       </p:sp>
@@ -6497,7 +6497,7 @@
               <a:buNone/>
             </a:pPr>
             <a:r>
-              <a:rPr lang="en-US" sz="1150" b="1" dirty="0">
+              <a:rPr lang="en-US" sz="1300" b="1" dirty="0">
                 <a:solidFill>
                   <a:srgbClr val="0F3446"/>
                 </a:solidFill>
@@ -6507,7 +6507,7 @@
               </a:rPr>
               <a:t>UACR, median (mg/g)</a:t>
             </a:r>
-            <a:endParaRPr lang="en-US" sz="1150" dirty="0"/>
+            <a:endParaRPr lang="en-US" sz="1300" dirty="0"/>
           </a:p>
         </p:txBody>
       </p:sp>
@@ -6539,9 +6539,9 @@
               <a:buNone/>
             </a:pPr>
             <a:r>
-              <a:rPr lang="en-US" sz="1150" dirty="0">
-                <a:solidFill>
-                  <a:srgbClr val="22343C"/>
+              <a:rPr lang="en-US" sz="1300" dirty="0">
+                <a:solidFill>
+                  <a:srgbClr val="13212A"/>
                 </a:solidFill>
                 <a:latin typeface="Calibri" pitchFamily="34" charset="0"/>
                 <a:ea typeface="Calibri" pitchFamily="34" charset="-122"/>
@@ -6549,7 +6549,7 @@
               </a:rPr>
               <a:t>827.5</a:t>
             </a:r>
-            <a:endParaRPr lang="en-US" sz="1150" dirty="0"/>
+            <a:endParaRPr lang="en-US" sz="1300" dirty="0"/>
           </a:p>
         </p:txBody>
       </p:sp>
@@ -6581,9 +6581,9 @@
               <a:buNone/>
             </a:pPr>
             <a:r>
-              <a:rPr lang="en-US" sz="1150" dirty="0">
-                <a:solidFill>
-                  <a:srgbClr val="22343C"/>
+              <a:rPr lang="en-US" sz="1300" dirty="0">
+                <a:solidFill>
+                  <a:srgbClr val="13212A"/>
                 </a:solidFill>
                 <a:latin typeface="Calibri" pitchFamily="34" charset="0"/>
                 <a:ea typeface="Calibri" pitchFamily="34" charset="-122"/>
@@ -6591,7 +6591,7 @@
               </a:rPr>
               <a:t>810.7</a:t>
             </a:r>
-            <a:endParaRPr lang="en-US" sz="1150" dirty="0"/>
+            <a:endParaRPr lang="en-US" sz="1300" dirty="0"/>
           </a:p>
         </p:txBody>
       </p:sp>
@@ -6646,7 +6646,7 @@
               <a:buNone/>
             </a:pPr>
             <a:r>
-              <a:rPr lang="en-US" sz="1150" b="1" dirty="0">
+              <a:rPr lang="en-US" sz="1300" b="1" dirty="0">
                 <a:solidFill>
                   <a:srgbClr val="0F3446"/>
                 </a:solidFill>
@@ -6656,7 +6656,7 @@
               </a:rPr>
               <a:t>UACR &gt;1000 mg/g, %</a:t>
             </a:r>
-            <a:endParaRPr lang="en-US" sz="1150" dirty="0"/>
+            <a:endParaRPr lang="en-US" sz="1300" dirty="0"/>
           </a:p>
         </p:txBody>
       </p:sp>
@@ -6688,9 +6688,9 @@
               <a:buNone/>
             </a:pPr>
             <a:r>
-              <a:rPr lang="en-US" sz="1150" dirty="0">
-                <a:solidFill>
-                  <a:srgbClr val="22343C"/>
+              <a:rPr lang="en-US" sz="1300" dirty="0">
+                <a:solidFill>
+                  <a:srgbClr val="13212A"/>
                 </a:solidFill>
                 <a:latin typeface="Calibri" pitchFamily="34" charset="0"/>
                 <a:ea typeface="Calibri" pitchFamily="34" charset="-122"/>
@@ -6698,7 +6698,7 @@
               </a:rPr>
               <a:t>39.1</a:t>
             </a:r>
-            <a:endParaRPr lang="en-US" sz="1150" dirty="0"/>
+            <a:endParaRPr lang="en-US" sz="1300" dirty="0"/>
           </a:p>
         </p:txBody>
       </p:sp>
@@ -6730,9 +6730,9 @@
               <a:buNone/>
             </a:pPr>
             <a:r>
-              <a:rPr lang="en-US" sz="1150" dirty="0">
-                <a:solidFill>
-                  <a:srgbClr val="22343C"/>
+              <a:rPr lang="en-US" sz="1300" dirty="0">
+                <a:solidFill>
+                  <a:srgbClr val="13212A"/>
                 </a:solidFill>
                 <a:latin typeface="Calibri" pitchFamily="34" charset="0"/>
                 <a:ea typeface="Calibri" pitchFamily="34" charset="-122"/>
@@ -6740,7 +6740,7 @@
               </a:rPr>
               <a:t>35.7</a:t>
             </a:r>
-            <a:endParaRPr lang="en-US" sz="1150" dirty="0"/>
+            <a:endParaRPr lang="en-US" sz="1300" dirty="0"/>
           </a:p>
         </p:txBody>
       </p:sp>
@@ -6795,7 +6795,7 @@
               <a:buNone/>
             </a:pPr>
             <a:r>
-              <a:rPr lang="en-US" sz="1150" b="1" dirty="0">
+              <a:rPr lang="en-US" sz="1300" b="1" dirty="0">
                 <a:solidFill>
                   <a:srgbClr val="0F3446"/>
                 </a:solidFill>
@@ -6805,7 +6805,7 @@
               </a:rPr>
               <a:t>Chronic glomerulonephritis, %</a:t>
             </a:r>
-            <a:endParaRPr lang="en-US" sz="1150" dirty="0"/>
+            <a:endParaRPr lang="en-US" sz="1300" dirty="0"/>
           </a:p>
         </p:txBody>
       </p:sp>
@@ -6837,9 +6837,9 @@
               <a:buNone/>
             </a:pPr>
             <a:r>
-              <a:rPr lang="en-US" sz="1150" dirty="0">
-                <a:solidFill>
-                  <a:srgbClr val="22343C"/>
+              <a:rPr lang="en-US" sz="1300" dirty="0">
+                <a:solidFill>
+                  <a:srgbClr val="13212A"/>
                 </a:solidFill>
                 <a:latin typeface="Calibri" pitchFamily="34" charset="0"/>
                 <a:ea typeface="Calibri" pitchFamily="34" charset="-122"/>
@@ -6847,7 +6847,7 @@
               </a:rPr>
               <a:t>56.2</a:t>
             </a:r>
-            <a:endParaRPr lang="en-US" sz="1150" dirty="0"/>
+            <a:endParaRPr lang="en-US" sz="1300" dirty="0"/>
           </a:p>
         </p:txBody>
       </p:sp>
@@ -6879,9 +6879,9 @@
               <a:buNone/>
             </a:pPr>
             <a:r>
-              <a:rPr lang="en-US" sz="1150" dirty="0">
-                <a:solidFill>
-                  <a:srgbClr val="22343C"/>
+              <a:rPr lang="en-US" sz="1300" dirty="0">
+                <a:solidFill>
+                  <a:srgbClr val="13212A"/>
                 </a:solidFill>
                 <a:latin typeface="Calibri" pitchFamily="34" charset="0"/>
                 <a:ea typeface="Calibri" pitchFamily="34" charset="-122"/>
@@ -6889,7 +6889,7 @@
               </a:rPr>
               <a:t>57.8</a:t>
             </a:r>
-            <a:endParaRPr lang="en-US" sz="1150" dirty="0"/>
+            <a:endParaRPr lang="en-US" sz="1300" dirty="0"/>
           </a:p>
         </p:txBody>
       </p:sp>
@@ -6944,7 +6944,7 @@
               <a:buNone/>
             </a:pPr>
             <a:r>
-              <a:rPr lang="en-US" sz="1150" b="1" dirty="0">
+              <a:rPr lang="en-US" sz="1300" b="1" dirty="0">
                 <a:solidFill>
                   <a:srgbClr val="0F3446"/>
                 </a:solidFill>
@@ -6954,7 +6954,7 @@
               </a:rPr>
               <a:t>RAS inhibitor, %</a:t>
             </a:r>
-            <a:endParaRPr lang="en-US" sz="1150" dirty="0"/>
+            <a:endParaRPr lang="en-US" sz="1300" dirty="0"/>
           </a:p>
         </p:txBody>
       </p:sp>
@@ -6986,9 +6986,9 @@
               <a:buNone/>
             </a:pPr>
             <a:r>
-              <a:rPr lang="en-US" sz="1150" dirty="0">
-                <a:solidFill>
-                  <a:srgbClr val="22343C"/>
+              <a:rPr lang="en-US" sz="1300" dirty="0">
+                <a:solidFill>
+                  <a:srgbClr val="13212A"/>
                 </a:solidFill>
                 <a:latin typeface="Calibri" pitchFamily="34" charset="0"/>
                 <a:ea typeface="Calibri" pitchFamily="34" charset="-122"/>
@@ -6996,7 +6996,7 @@
               </a:rPr>
               <a:t>99.6</a:t>
             </a:r>
-            <a:endParaRPr lang="en-US" sz="1150" dirty="0"/>
+            <a:endParaRPr lang="en-US" sz="1300" dirty="0"/>
           </a:p>
         </p:txBody>
       </p:sp>
@@ -7028,9 +7028,9 @@
               <a:buNone/>
             </a:pPr>
             <a:r>
-              <a:rPr lang="en-US" sz="1150" dirty="0">
-                <a:solidFill>
-                  <a:srgbClr val="22343C"/>
+              <a:rPr lang="en-US" sz="1300" dirty="0">
+                <a:solidFill>
+                  <a:srgbClr val="13212A"/>
                 </a:solidFill>
                 <a:latin typeface="Calibri" pitchFamily="34" charset="0"/>
                 <a:ea typeface="Calibri" pitchFamily="34" charset="-122"/>
@@ -7038,7 +7038,7 @@
               </a:rPr>
               <a:t>99.7</a:t>
             </a:r>
-            <a:endParaRPr lang="en-US" sz="1150" dirty="0"/>
+            <a:endParaRPr lang="en-US" sz="1300" dirty="0"/>
           </a:p>
         </p:txBody>
       </p:sp>
@@ -7093,7 +7093,7 @@
               <a:buNone/>
             </a:pPr>
             <a:r>
-              <a:rPr lang="en-US" sz="1150" b="1" dirty="0">
+              <a:rPr lang="en-US" sz="1300" b="1" dirty="0">
                 <a:solidFill>
                   <a:srgbClr val="0F3446"/>
                 </a:solidFill>
@@ -7103,7 +7103,7 @@
               </a:rPr>
               <a:t>SGLT2 inhibitor, %</a:t>
             </a:r>
-            <a:endParaRPr lang="en-US" sz="1150" dirty="0"/>
+            <a:endParaRPr lang="en-US" sz="1300" dirty="0"/>
           </a:p>
         </p:txBody>
       </p:sp>
@@ -7135,9 +7135,9 @@
               <a:buNone/>
             </a:pPr>
             <a:r>
-              <a:rPr lang="en-US" sz="1150" dirty="0">
-                <a:solidFill>
-                  <a:srgbClr val="22343C"/>
+              <a:rPr lang="en-US" sz="1300" dirty="0">
+                <a:solidFill>
+                  <a:srgbClr val="13212A"/>
                 </a:solidFill>
                 <a:latin typeface="Calibri" pitchFamily="34" charset="0"/>
                 <a:ea typeface="Calibri" pitchFamily="34" charset="-122"/>
@@ -7145,7 +7145,7 @@
               </a:rPr>
               <a:t>17.0</a:t>
             </a:r>
-            <a:endParaRPr lang="en-US" sz="1150" dirty="0"/>
+            <a:endParaRPr lang="en-US" sz="1300" dirty="0"/>
           </a:p>
         </p:txBody>
       </p:sp>
@@ -7177,9 +7177,9 @@
               <a:buNone/>
             </a:pPr>
             <a:r>
-              <a:rPr lang="en-US" sz="1150" dirty="0">
-                <a:solidFill>
-                  <a:srgbClr val="22343C"/>
+              <a:rPr lang="en-US" sz="1300" dirty="0">
+                <a:solidFill>
+                  <a:srgbClr val="13212A"/>
                 </a:solidFill>
                 <a:latin typeface="Calibri" pitchFamily="34" charset="0"/>
                 <a:ea typeface="Calibri" pitchFamily="34" charset="-122"/>
@@ -7187,7 +7187,7 @@
               </a:rPr>
               <a:t>17.1</a:t>
             </a:r>
-            <a:endParaRPr lang="en-US" sz="1150" dirty="0"/>
+            <a:endParaRPr lang="en-US" sz="1300" dirty="0"/>
           </a:p>
         </p:txBody>
       </p:sp>
@@ -7219,9 +7219,9 @@
               <a:buNone/>
             </a:pPr>
             <a:r>
-              <a:rPr lang="en-US" sz="1250" i="1" dirty="0">
-                <a:solidFill>
-                  <a:srgbClr val="6C7C84"/>
+              <a:rPr lang="en-US" sz="1400" i="1" dirty="0">
+                <a:solidFill>
+                  <a:srgbClr val="4E5E66"/>
                 </a:solidFill>
                 <a:latin typeface="Calibri" pitchFamily="34" charset="0"/>
                 <a:ea typeface="Calibri" pitchFamily="34" charset="-122"/>
@@ -7229,7 +7229,7 @@
               </a:rPr>
               <a:t>Nearly everyone was on a RAS inhibitor, but only about 1 in 6 on an SGLT2 inhibitor: largely a RAS-inhibitor background. Median UACR ~819 mg/g confirms heavy albuminuria.</a:t>
             </a:r>
-            <a:endParaRPr lang="en-US" sz="1250" dirty="0"/>
+            <a:endParaRPr lang="en-US" sz="1400" dirty="0"/>
           </a:p>
         </p:txBody>
       </p:sp>
@@ -7274,7 +7274,7 @@
             <a:r>
               <a:rPr lang="en-US" sz="900" dirty="0">
                 <a:solidFill>
-                  <a:srgbClr val="6C7C84"/>
+                  <a:srgbClr val="4E5E66"/>
                 </a:solidFill>
                 <a:latin typeface="Calibri" pitchFamily="34" charset="0"/>
                 <a:ea typeface="Calibri" pitchFamily="34" charset="-122"/>
@@ -7313,7 +7313,7 @@
             <a:r>
               <a:rPr lang="en-US" sz="900" dirty="0">
                 <a:solidFill>
-                  <a:srgbClr val="6C7C84"/>
+                  <a:srgbClr val="4E5E66"/>
                 </a:solidFill>
                 <a:latin typeface="Calibri" pitchFamily="34" charset="0"/>
                 <a:ea typeface="Calibri" pitchFamily="34" charset="-122"/>
@@ -7411,8 +7411,8 @@
         </p:nvSpPr>
         <p:spPr>
           <a:xfrm>
-            <a:off x="1389888" y="329184"/>
-            <a:ext cx="10158984" cy="566928"/>
+            <a:off x="1389888" y="310896"/>
+            <a:ext cx="10158984" cy="603504"/>
           </a:xfrm>
           <a:prstGeom prst="rect">
             <a:avLst/>
@@ -7428,7 +7428,7 @@
               <a:buNone/>
             </a:pPr>
             <a:r>
-              <a:rPr lang="en-US" sz="2300" b="1" dirty="0">
+              <a:rPr lang="en-US" sz="2600" b="1" dirty="0">
                 <a:solidFill>
                   <a:srgbClr val="0F3446"/>
                 </a:solidFill>
@@ -7438,7 +7438,7 @@
               </a:rPr>
               <a:t>Intervention, dosing and potassium management</a:t>
             </a:r>
-            <a:endParaRPr lang="en-US" sz="2300" dirty="0"/>
+            <a:endParaRPr lang="en-US" sz="2600" dirty="0"/>
           </a:p>
         </p:txBody>
       </p:sp>
@@ -7467,7 +7467,7 @@
               <a:buNone/>
             </a:pPr>
             <a:r>
-              <a:rPr lang="en-US" sz="1400" b="1" dirty="0">
+              <a:rPr lang="en-US" sz="1550" b="1" dirty="0">
                 <a:solidFill>
                   <a:srgbClr val="0E8385"/>
                 </a:solidFill>
@@ -7477,7 +7477,7 @@
               </a:rPr>
               <a:t>Starting dose by screening eGFR</a:t>
             </a:r>
-            <a:endParaRPr lang="en-US" sz="1400" dirty="0"/>
+            <a:endParaRPr lang="en-US" sz="1550" dirty="0"/>
           </a:p>
         </p:txBody>
       </p:sp>
@@ -7529,7 +7529,7 @@
               <a:buNone/>
             </a:pPr>
             <a:r>
-              <a:rPr lang="en-US" sz="1200" b="1" dirty="0">
+              <a:rPr lang="en-US" sz="1300" b="1" dirty="0">
                 <a:solidFill>
                   <a:srgbClr val="FFFFFF"/>
                 </a:solidFill>
@@ -7539,7 +7539,7 @@
               </a:rPr>
               <a:t>Screening eGFR</a:t>
             </a:r>
-            <a:endParaRPr lang="en-US" sz="1200" dirty="0"/>
+            <a:endParaRPr lang="en-US" sz="1300" dirty="0"/>
           </a:p>
         </p:txBody>
       </p:sp>
@@ -7571,7 +7571,7 @@
               <a:buNone/>
             </a:pPr>
             <a:r>
-              <a:rPr lang="en-US" sz="1200" b="1" dirty="0">
+              <a:rPr lang="en-US" sz="1300" b="1" dirty="0">
                 <a:solidFill>
                   <a:srgbClr val="FFFFFF"/>
                 </a:solidFill>
@@ -7581,7 +7581,7 @@
               </a:rPr>
               <a:t>Starting dose</a:t>
             </a:r>
-            <a:endParaRPr lang="en-US" sz="1200" dirty="0"/>
+            <a:endParaRPr lang="en-US" sz="1300" dirty="0"/>
           </a:p>
         </p:txBody>
       </p:sp>
@@ -7636,7 +7636,7 @@
               <a:buNone/>
             </a:pPr>
             <a:r>
-              <a:rPr lang="en-US" sz="1250" b="1" dirty="0">
+              <a:rPr lang="en-US" sz="1400" b="1" dirty="0">
                 <a:solidFill>
                   <a:srgbClr val="0F3446"/>
                 </a:solidFill>
@@ -7646,7 +7646,7 @@
               </a:rPr>
               <a:t>≥ 60 ml/min/1.73 m²</a:t>
             </a:r>
-            <a:endParaRPr lang="en-US" sz="1250" dirty="0"/>
+            <a:endParaRPr lang="en-US" sz="1400" dirty="0"/>
           </a:p>
         </p:txBody>
       </p:sp>
@@ -7678,9 +7678,9 @@
               <a:buNone/>
             </a:pPr>
             <a:r>
-              <a:rPr lang="en-US" sz="1250" dirty="0">
-                <a:solidFill>
-                  <a:srgbClr val="22343C"/>
+              <a:rPr lang="en-US" sz="1400" dirty="0">
+                <a:solidFill>
+                  <a:srgbClr val="13212A"/>
                 </a:solidFill>
                 <a:latin typeface="Calibri" pitchFamily="34" charset="0"/>
                 <a:ea typeface="Calibri" pitchFamily="34" charset="-122"/>
@@ -7688,7 +7688,7 @@
               </a:rPr>
               <a:t>20 mg once daily</a:t>
             </a:r>
-            <a:endParaRPr lang="en-US" sz="1250" dirty="0"/>
+            <a:endParaRPr lang="en-US" sz="1400" dirty="0"/>
           </a:p>
         </p:txBody>
       </p:sp>
@@ -7743,7 +7743,7 @@
               <a:buNone/>
             </a:pPr>
             <a:r>
-              <a:rPr lang="en-US" sz="1250" b="1" dirty="0">
+              <a:rPr lang="en-US" sz="1400" b="1" dirty="0">
                 <a:solidFill>
                   <a:srgbClr val="0F3446"/>
                 </a:solidFill>
@@ -7753,7 +7753,7 @@
               </a:rPr>
               <a:t>25 to &lt;60 ml/min/1.73 m²</a:t>
             </a:r>
-            <a:endParaRPr lang="en-US" sz="1250" dirty="0"/>
+            <a:endParaRPr lang="en-US" sz="1400" dirty="0"/>
           </a:p>
         </p:txBody>
       </p:sp>
@@ -7785,9 +7785,9 @@
               <a:buNone/>
             </a:pPr>
             <a:r>
-              <a:rPr lang="en-US" sz="1250" dirty="0">
-                <a:solidFill>
-                  <a:srgbClr val="22343C"/>
+              <a:rPr lang="en-US" sz="1400" dirty="0">
+                <a:solidFill>
+                  <a:srgbClr val="13212A"/>
                 </a:solidFill>
                 <a:latin typeface="Calibri" pitchFamily="34" charset="0"/>
                 <a:ea typeface="Calibri" pitchFamily="34" charset="-122"/>
@@ -7795,7 +7795,7 @@
               </a:rPr>
               <a:t>10 mg once daily</a:t>
             </a:r>
-            <a:endParaRPr lang="en-US" sz="1250" dirty="0"/>
+            <a:endParaRPr lang="en-US" sz="1400" dirty="0"/>
           </a:p>
         </p:txBody>
       </p:sp>
@@ -7831,9 +7831,9 @@
               <a:buChar char="•"/>
             </a:pPr>
             <a:r>
-              <a:rPr lang="en-US" sz="1200" dirty="0">
-                <a:solidFill>
-                  <a:srgbClr val="22343C"/>
+              <a:rPr lang="en-US" sz="1350" dirty="0">
+                <a:solidFill>
+                  <a:srgbClr val="13212A"/>
                 </a:solidFill>
                 <a:latin typeface="Calibri" pitchFamily="34" charset="0"/>
                 <a:ea typeface="Calibri" pitchFamily="34" charset="-122"/>
@@ -7841,7 +7841,7 @@
               </a:rPr>
               <a:t>Up-titrate 10 → 20 mg from month 1 if K⁺ ≤4.8 and eGFR is stable.</a:t>
             </a:r>
-            <a:endParaRPr lang="en-US" sz="1200" dirty="0"/>
+            <a:endParaRPr lang="en-US" sz="1350" dirty="0"/>
           </a:p>
           <a:p>
             <a:pPr marL="203200" indent="-203200">
@@ -7855,9 +7855,9 @@
               <a:buChar char="•"/>
             </a:pPr>
             <a:r>
-              <a:rPr lang="en-US" sz="1200" dirty="0">
-                <a:solidFill>
-                  <a:srgbClr val="22343C"/>
+              <a:rPr lang="en-US" sz="1350" dirty="0">
+                <a:solidFill>
+                  <a:srgbClr val="13212A"/>
                 </a:solidFill>
                 <a:latin typeface="Calibri" pitchFamily="34" charset="0"/>
                 <a:ea typeface="Calibri" pitchFamily="34" charset="-122"/>
@@ -7865,7 +7865,7 @@
               </a:rPr>
               <a:t>K⁺ &gt;5.5 mmol/L: withhold for 72 h; restart at 10 mg once K⁺ ≤5.0.</a:t>
             </a:r>
-            <a:endParaRPr lang="en-US" sz="1200" dirty="0"/>
+            <a:endParaRPr lang="en-US" sz="1350" dirty="0"/>
           </a:p>
           <a:p>
             <a:pPr marL="203200" indent="-203200">
@@ -7879,9 +7879,9 @@
               <a:buChar char="•"/>
             </a:pPr>
             <a:r>
-              <a:rPr lang="en-US" sz="1200" dirty="0">
-                <a:solidFill>
-                  <a:srgbClr val="22343C"/>
+              <a:rPr lang="en-US" sz="1350" dirty="0">
+                <a:solidFill>
+                  <a:srgbClr val="13212A"/>
                 </a:solidFill>
                 <a:latin typeface="Calibri" pitchFamily="34" charset="0"/>
                 <a:ea typeface="Calibri" pitchFamily="34" charset="-122"/>
@@ -7889,7 +7889,7 @@
               </a:rPr>
               <a:t>Central-lab potassium at every visit; dose reducible any time for safety.</a:t>
             </a:r>
-            <a:endParaRPr lang="en-US" sz="1200" dirty="0"/>
+            <a:endParaRPr lang="en-US" sz="1350" dirty="0"/>
           </a:p>
         </p:txBody>
       </p:sp>
@@ -7918,7 +7918,7 @@
               <a:buNone/>
             </a:pPr>
             <a:r>
-              <a:rPr lang="en-US" sz="1400" b="1" dirty="0">
+              <a:rPr lang="en-US" sz="1550" b="1" dirty="0">
                 <a:solidFill>
                   <a:srgbClr val="0E8385"/>
                 </a:solidFill>
@@ -7928,7 +7928,7 @@
               </a:rPr>
               <a:t>Visit schedule</a:t>
             </a:r>
-            <a:endParaRPr lang="en-US" sz="1400" dirty="0"/>
+            <a:endParaRPr lang="en-US" sz="1550" dirty="0"/>
           </a:p>
         </p:txBody>
       </p:sp>
@@ -7960,9 +7960,9 @@
               <a:buNone/>
             </a:pPr>
             <a:r>
-              <a:rPr lang="en-US" sz="1250" dirty="0">
-                <a:solidFill>
-                  <a:srgbClr val="22343C"/>
+              <a:rPr lang="en-US" sz="1400" dirty="0">
+                <a:solidFill>
+                  <a:srgbClr val="13212A"/>
                 </a:solidFill>
                 <a:latin typeface="Calibri" pitchFamily="34" charset="0"/>
                 <a:ea typeface="Calibri" pitchFamily="34" charset="-122"/>
@@ -7970,7 +7970,7 @@
               </a:rPr>
               <a:t>Screening, baseline, then months 1, 3, 6, 9, 12, and every 4 months thereafter. Treatment for at least 32 months, with an off-treatment visit 4 weeks after the last dose.</a:t>
             </a:r>
-            <a:endParaRPr lang="en-US" sz="1250" dirty="0"/>
+            <a:endParaRPr lang="en-US" sz="1400" dirty="0"/>
           </a:p>
         </p:txBody>
       </p:sp>
@@ -8044,7 +8044,7 @@
             <a:r>
               <a:rPr lang="en-US" sz="900" dirty="0">
                 <a:solidFill>
-                  <a:srgbClr val="22343C"/>
+                  <a:srgbClr val="13212A"/>
                 </a:solidFill>
                 <a:latin typeface="Calibri" pitchFamily="34" charset="0"/>
                 <a:ea typeface="Calibri" pitchFamily="34" charset="-122"/>
@@ -8103,7 +8103,7 @@
             <a:r>
               <a:rPr lang="en-US" sz="900" dirty="0">
                 <a:solidFill>
-                  <a:srgbClr val="22343C"/>
+                  <a:srgbClr val="13212A"/>
                 </a:solidFill>
                 <a:latin typeface="Calibri" pitchFamily="34" charset="0"/>
                 <a:ea typeface="Calibri" pitchFamily="34" charset="-122"/>
@@ -8162,7 +8162,7 @@
             <a:r>
               <a:rPr lang="en-US" sz="900" dirty="0">
                 <a:solidFill>
-                  <a:srgbClr val="22343C"/>
+                  <a:srgbClr val="13212A"/>
                 </a:solidFill>
                 <a:latin typeface="Calibri" pitchFamily="34" charset="0"/>
                 <a:ea typeface="Calibri" pitchFamily="34" charset="-122"/>
@@ -8221,7 +8221,7 @@
             <a:r>
               <a:rPr lang="en-US" sz="900" dirty="0">
                 <a:solidFill>
-                  <a:srgbClr val="22343C"/>
+                  <a:srgbClr val="13212A"/>
                 </a:solidFill>
                 <a:latin typeface="Calibri" pitchFamily="34" charset="0"/>
                 <a:ea typeface="Calibri" pitchFamily="34" charset="-122"/>
@@ -8280,7 +8280,7 @@
             <a:r>
               <a:rPr lang="en-US" sz="900" dirty="0">
                 <a:solidFill>
-                  <a:srgbClr val="22343C"/>
+                  <a:srgbClr val="13212A"/>
                 </a:solidFill>
                 <a:latin typeface="Calibri" pitchFamily="34" charset="0"/>
                 <a:ea typeface="Calibri" pitchFamily="34" charset="-122"/>
@@ -8339,7 +8339,7 @@
             <a:r>
               <a:rPr lang="en-US" sz="900" dirty="0">
                 <a:solidFill>
-                  <a:srgbClr val="22343C"/>
+                  <a:srgbClr val="13212A"/>
                 </a:solidFill>
                 <a:latin typeface="Calibri" pitchFamily="34" charset="0"/>
                 <a:ea typeface="Calibri" pitchFamily="34" charset="-122"/>
@@ -8398,7 +8398,7 @@
             <a:r>
               <a:rPr lang="en-US" sz="900" b="1" dirty="0">
                 <a:solidFill>
-                  <a:srgbClr val="22343C"/>
+                  <a:srgbClr val="13212A"/>
                 </a:solidFill>
                 <a:latin typeface="Calibri" pitchFamily="34" charset="0"/>
                 <a:ea typeface="Calibri" pitchFamily="34" charset="-122"/>
@@ -8457,7 +8457,7 @@
             <a:r>
               <a:rPr lang="en-US" sz="900" b="1" dirty="0">
                 <a:solidFill>
-                  <a:srgbClr val="22343C"/>
+                  <a:srgbClr val="13212A"/>
                 </a:solidFill>
                 <a:latin typeface="Calibri" pitchFamily="34" charset="0"/>
                 <a:ea typeface="Calibri" pitchFamily="34" charset="-122"/>
@@ -8497,9 +8497,9 @@
               <a:buNone/>
             </a:pPr>
             <a:r>
-              <a:rPr lang="en-US" sz="1100" i="1" dirty="0">
-                <a:solidFill>
-                  <a:srgbClr val="6C7C84"/>
+              <a:rPr lang="en-US" sz="1250" i="1" dirty="0">
+                <a:solidFill>
+                  <a:srgbClr val="4E5E66"/>
                 </a:solidFill>
                 <a:latin typeface="Calibri" pitchFamily="34" charset="0"/>
                 <a:ea typeface="Calibri" pitchFamily="34" charset="-122"/>
@@ -8507,7 +8507,7 @@
               </a:rPr>
               <a:t>The off-treatment visit isolates the reversible (hemodynamic) part of the eGFR effect.</a:t>
             </a:r>
-            <a:endParaRPr lang="en-US" sz="1100" dirty="0"/>
+            <a:endParaRPr lang="en-US" sz="1250" dirty="0"/>
           </a:p>
         </p:txBody>
       </p:sp>
@@ -8552,7 +8552,7 @@
             <a:r>
               <a:rPr lang="en-US" sz="900" dirty="0">
                 <a:solidFill>
-                  <a:srgbClr val="6C7C84"/>
+                  <a:srgbClr val="4E5E66"/>
                 </a:solidFill>
                 <a:latin typeface="Calibri" pitchFamily="34" charset="0"/>
                 <a:ea typeface="Calibri" pitchFamily="34" charset="-122"/>
@@ -8591,7 +8591,7 @@
             <a:r>
               <a:rPr lang="en-US" sz="900" dirty="0">
                 <a:solidFill>
-                  <a:srgbClr val="6C7C84"/>
+                  <a:srgbClr val="4E5E66"/>
                 </a:solidFill>
                 <a:latin typeface="Calibri" pitchFamily="34" charset="0"/>
                 <a:ea typeface="Calibri" pitchFamily="34" charset="-122"/>
@@ -8689,8 +8689,8 @@
         </p:nvSpPr>
         <p:spPr>
           <a:xfrm>
-            <a:off x="1389888" y="329184"/>
-            <a:ext cx="10158984" cy="566928"/>
+            <a:off x="1389888" y="310896"/>
+            <a:ext cx="10158984" cy="603504"/>
           </a:xfrm>
           <a:prstGeom prst="rect">
             <a:avLst/>
@@ -8706,7 +8706,7 @@
               <a:buNone/>
             </a:pPr>
             <a:r>
-              <a:rPr lang="en-US" sz="2300" b="1" dirty="0">
+              <a:rPr lang="en-US" sz="2600" b="1" dirty="0">
                 <a:solidFill>
                   <a:srgbClr val="0F3446"/>
                 </a:solidFill>
@@ -8716,7 +8716,7 @@
               </a:rPr>
               <a:t>Endpoints</a:t>
             </a:r>
-            <a:endParaRPr lang="en-US" sz="2300" dirty="0"/>
+            <a:endParaRPr lang="en-US" sz="2600" dirty="0"/>
           </a:p>
         </p:txBody>
       </p:sp>
@@ -8748,7 +8748,7 @@
               <a:buNone/>
             </a:pPr>
             <a:r>
-              <a:rPr lang="en-US" sz="1500" b="1" dirty="0">
+              <a:rPr lang="en-US" sz="1650" b="1" dirty="0">
                 <a:solidFill>
                   <a:srgbClr val="0E8385"/>
                 </a:solidFill>
@@ -8765,9 +8765,9 @@
               <a:buNone/>
             </a:pPr>
             <a:r>
-              <a:rPr lang="en-US" sz="1400" dirty="0">
-                <a:solidFill>
-                  <a:srgbClr val="22343C"/>
+              <a:rPr lang="en-US" sz="1550" dirty="0">
+                <a:solidFill>
+                  <a:srgbClr val="13212A"/>
                 </a:solidFill>
                 <a:latin typeface="Calibri" pitchFamily="34" charset="0"/>
                 <a:ea typeface="Calibri" pitchFamily="34" charset="-122"/>
@@ -8775,7 +8775,7 @@
               </a:rPr>
               <a:t>Total eGFR slope: mean annual rate of change in eGFR from baseline to month 32, estimated with a two-slope linear spline mixed model.</a:t>
             </a:r>
-            <a:endParaRPr lang="en-US" sz="1500" dirty="0"/>
+            <a:endParaRPr lang="en-US" sz="1650" dirty="0"/>
           </a:p>
         </p:txBody>
       </p:sp>
@@ -8804,7 +8804,7 @@
               <a:buNone/>
             </a:pPr>
             <a:r>
-              <a:rPr lang="en-US" sz="1400" b="1" dirty="0">
+              <a:rPr lang="en-US" sz="1550" b="1" dirty="0">
                 <a:solidFill>
                   <a:srgbClr val="0E8385"/>
                 </a:solidFill>
@@ -8814,7 +8814,7 @@
               </a:rPr>
               <a:t>Secondary outcomes (pre-specified hierarchical testing)</a:t>
             </a:r>
-            <a:endParaRPr lang="en-US" sz="1400" dirty="0"/>
+            <a:endParaRPr lang="en-US" sz="1550" dirty="0"/>
           </a:p>
         </p:txBody>
       </p:sp>
@@ -8849,9 +8849,9 @@
               <a:buNone/>
             </a:pPr>
             <a:r>
-              <a:rPr lang="en-US" sz="1350" dirty="0">
-                <a:solidFill>
-                  <a:srgbClr val="22343C"/>
+              <a:rPr lang="en-US" sz="1500" dirty="0">
+                <a:solidFill>
+                  <a:srgbClr val="13212A"/>
                 </a:solidFill>
                 <a:latin typeface="Calibri" pitchFamily="34" charset="0"/>
                 <a:ea typeface="Calibri" pitchFamily="34" charset="-122"/>
@@ -8859,7 +8859,7 @@
               </a:rPr>
               <a:t>1.  Composite kidney–CV: sustained ≥57% eGFR decline, kidney failure, HF hospitalization, or CV death</a:t>
             </a:r>
-            <a:endParaRPr lang="en-US" sz="1350" dirty="0"/>
+            <a:endParaRPr lang="en-US" sz="1500" dirty="0"/>
           </a:p>
           <a:p>
             <a:pPr indent="0" marL="0">
@@ -8872,9 +8872,9 @@
               <a:buNone/>
             </a:pPr>
             <a:r>
-              <a:rPr lang="en-US" sz="1350" dirty="0">
-                <a:solidFill>
-                  <a:srgbClr val="22343C"/>
+              <a:rPr lang="en-US" sz="1500" dirty="0">
+                <a:solidFill>
+                  <a:srgbClr val="13212A"/>
                 </a:solidFill>
                 <a:latin typeface="Calibri" pitchFamily="34" charset="0"/>
                 <a:ea typeface="Calibri" pitchFamily="34" charset="-122"/>
@@ -8882,7 +8882,7 @@
               </a:rPr>
               <a:t>2.  Composite kidney: sustained ≥57% eGFR decline or kidney failure</a:t>
             </a:r>
-            <a:endParaRPr lang="en-US" sz="1350" dirty="0"/>
+            <a:endParaRPr lang="en-US" sz="1500" dirty="0"/>
           </a:p>
           <a:p>
             <a:pPr indent="0" marL="0">
@@ -8895,9 +8895,9 @@
               <a:buNone/>
             </a:pPr>
             <a:r>
-              <a:rPr lang="en-US" sz="1350" dirty="0">
-                <a:solidFill>
-                  <a:srgbClr val="22343C"/>
+              <a:rPr lang="en-US" sz="1500" dirty="0">
+                <a:solidFill>
+                  <a:srgbClr val="13212A"/>
                 </a:solidFill>
                 <a:latin typeface="Calibri" pitchFamily="34" charset="0"/>
                 <a:ea typeface="Calibri" pitchFamily="34" charset="-122"/>
@@ -8905,7 +8905,7 @@
               </a:rPr>
               <a:t>3.  Composite CV: HF hospitalization or CV death</a:t>
             </a:r>
-            <a:endParaRPr lang="en-US" sz="1350" dirty="0"/>
+            <a:endParaRPr lang="en-US" sz="1500" dirty="0"/>
           </a:p>
         </p:txBody>
       </p:sp>
@@ -8937,7 +8937,7 @@
               <a:buNone/>
             </a:pPr>
             <a:r>
-              <a:rPr lang="en-US" sz="1250" b="1" dirty="0">
+              <a:rPr lang="en-US" sz="1400" b="1" dirty="0">
                 <a:solidFill>
                   <a:srgbClr val="0F3446"/>
                 </a:solidFill>
@@ -8954,9 +8954,9 @@
               <a:buNone/>
             </a:pPr>
             <a:r>
-              <a:rPr lang="en-US" sz="1250" dirty="0">
-                <a:solidFill>
-                  <a:srgbClr val="22343C"/>
+              <a:rPr lang="en-US" sz="1400" dirty="0">
+                <a:solidFill>
+                  <a:srgbClr val="13212A"/>
                 </a:solidFill>
                 <a:latin typeface="Calibri" pitchFamily="34" charset="0"/>
                 <a:ea typeface="Calibri" pitchFamily="34" charset="-122"/>
@@ -8964,7 +8964,7 @@
               </a:rPr>
               <a:t>Kidney failure = confirmed eGFR &lt;15, chronic dialysis ≥30 days, or transplant. Sustained = a drop from baseline held for ≥4 weeks.</a:t>
             </a:r>
-            <a:endParaRPr lang="en-US" sz="1250" dirty="0"/>
+            <a:endParaRPr lang="en-US" sz="1400" dirty="0"/>
           </a:p>
         </p:txBody>
       </p:sp>
@@ -8996,7 +8996,7 @@
               <a:buNone/>
             </a:pPr>
             <a:r>
-              <a:rPr lang="en-US" sz="1250" b="1" dirty="0">
+              <a:rPr lang="en-US" sz="1400" b="1" dirty="0">
                 <a:solidFill>
                   <a:srgbClr val="0F3446"/>
                 </a:solidFill>
@@ -9013,9 +9013,9 @@
               <a:buNone/>
             </a:pPr>
             <a:r>
-              <a:rPr lang="en-US" sz="1250" dirty="0">
-                <a:solidFill>
-                  <a:srgbClr val="22343C"/>
+              <a:rPr lang="en-US" sz="1400" dirty="0">
+                <a:solidFill>
+                  <a:srgbClr val="13212A"/>
                 </a:solidFill>
                 <a:latin typeface="Calibri" pitchFamily="34" charset="0"/>
                 <a:ea typeface="Calibri" pitchFamily="34" charset="-122"/>
@@ -9023,7 +9023,7 @@
               </a:rPr>
               <a:t>Chronic slope (month 3 to end of treatment), acute change (baseline to month 3), off-treatment eGFR change, UACR at month 6, and a ≥40% eGFR-decline composite.</a:t>
             </a:r>
-            <a:endParaRPr lang="en-US" sz="1250" dirty="0"/>
+            <a:endParaRPr lang="en-US" sz="1400" dirty="0"/>
           </a:p>
         </p:txBody>
       </p:sp>
@@ -9068,7 +9068,7 @@
             <a:r>
               <a:rPr lang="en-US" sz="900" dirty="0">
                 <a:solidFill>
-                  <a:srgbClr val="6C7C84"/>
+                  <a:srgbClr val="4E5E66"/>
                 </a:solidFill>
                 <a:latin typeface="Calibri" pitchFamily="34" charset="0"/>
                 <a:ea typeface="Calibri" pitchFamily="34" charset="-122"/>
@@ -9107,7 +9107,7 @@
             <a:r>
               <a:rPr lang="en-US" sz="900" dirty="0">
                 <a:solidFill>
-                  <a:srgbClr val="6C7C84"/>
+                  <a:srgbClr val="4E5E66"/>
                 </a:solidFill>
                 <a:latin typeface="Calibri" pitchFamily="34" charset="0"/>
                 <a:ea typeface="Calibri" pitchFamily="34" charset="-122"/>
@@ -9205,8 +9205,8 @@
         </p:nvSpPr>
         <p:spPr>
           <a:xfrm>
-            <a:off x="1389888" y="329184"/>
-            <a:ext cx="10158984" cy="566928"/>
+            <a:off x="1389888" y="310896"/>
+            <a:ext cx="10158984" cy="603504"/>
           </a:xfrm>
           <a:prstGeom prst="rect">
             <a:avLst/>
@@ -9222,7 +9222,7 @@
               <a:buNone/>
             </a:pPr>
             <a:r>
-              <a:rPr lang="en-US" sz="2300" b="1" dirty="0">
+              <a:rPr lang="en-US" sz="2600" b="1" dirty="0">
                 <a:solidFill>
                   <a:srgbClr val="0F3446"/>
                 </a:solidFill>
@@ -9232,7 +9232,7 @@
               </a:rPr>
               <a:t>Statistical approach, and why eGFR slope</a:t>
             </a:r>
-            <a:endParaRPr lang="en-US" sz="2300" dirty="0"/>
+            <a:endParaRPr lang="en-US" sz="2600" dirty="0"/>
           </a:p>
         </p:txBody>
       </p:sp>
@@ -9261,7 +9261,7 @@
               <a:buNone/>
             </a:pPr>
             <a:r>
-              <a:rPr lang="en-US" sz="1400" b="1" dirty="0">
+              <a:rPr lang="en-US" sz="1550" b="1" dirty="0">
                 <a:solidFill>
                   <a:srgbClr val="0E8385"/>
                 </a:solidFill>
@@ -9271,7 +9271,7 @@
               </a:rPr>
               <a:t>The primary model</a:t>
             </a:r>
-            <a:endParaRPr lang="en-US" sz="1400" dirty="0"/>
+            <a:endParaRPr lang="en-US" sz="1550" dirty="0"/>
           </a:p>
         </p:txBody>
       </p:sp>
@@ -9307,9 +9307,9 @@
               <a:buChar char="•"/>
             </a:pPr>
             <a:r>
-              <a:rPr lang="en-US" sz="1300" dirty="0">
-                <a:solidFill>
-                  <a:srgbClr val="22343C"/>
+              <a:rPr lang="en-US" sz="1450" dirty="0">
+                <a:solidFill>
+                  <a:srgbClr val="13212A"/>
                 </a:solidFill>
                 <a:latin typeface="Calibri" pitchFamily="34" charset="0"/>
                 <a:ea typeface="Calibri" pitchFamily="34" charset="-122"/>
@@ -9317,7 +9317,7 @@
               </a:rPr>
               <a:t>Two-slope linear spline mixed-effects model, with a fixed change point at month 3 separating the early hemodynamic effect from the chronic slope.</a:t>
             </a:r>
-            <a:endParaRPr lang="en-US" sz="1300" dirty="0"/>
+            <a:endParaRPr lang="en-US" sz="1450" dirty="0"/>
           </a:p>
           <a:p>
             <a:pPr marL="203200" indent="-203200">
@@ -9331,9 +9331,9 @@
               <a:buChar char="•"/>
             </a:pPr>
             <a:r>
-              <a:rPr lang="en-US" sz="1300" dirty="0">
-                <a:solidFill>
-                  <a:srgbClr val="22343C"/>
+              <a:rPr lang="en-US" sz="1450" dirty="0">
+                <a:solidFill>
+                  <a:srgbClr val="13212A"/>
                 </a:solidFill>
                 <a:latin typeface="Calibri" pitchFamily="34" charset="0"/>
                 <a:ea typeface="Calibri" pitchFamily="34" charset="-122"/>
@@ -9341,7 +9341,7 @@
               </a:rPr>
               <a:t>Treatment-policy estimand; intercurrent events (dialysis, transplant, death) handled by multiple imputation from an unfavorable-value pool.</a:t>
             </a:r>
-            <a:endParaRPr lang="en-US" sz="1300" dirty="0"/>
+            <a:endParaRPr lang="en-US" sz="1450" dirty="0"/>
           </a:p>
           <a:p>
             <a:pPr marL="203200" indent="-203200">
@@ -9355,9 +9355,9 @@
               <a:buChar char="•"/>
             </a:pPr>
             <a:r>
-              <a:rPr lang="en-US" sz="1300" dirty="0">
-                <a:solidFill>
-                  <a:srgbClr val="22343C"/>
+              <a:rPr lang="en-US" sz="1450" dirty="0">
+                <a:solidFill>
+                  <a:srgbClr val="13212A"/>
                 </a:solidFill>
                 <a:latin typeface="Calibri" pitchFamily="34" charset="0"/>
                 <a:ea typeface="Calibri" pitchFamily="34" charset="-122"/>
@@ -9365,7 +9365,7 @@
               </a:rPr>
               <a:t>Confirmed with cystatin C–based eGFR, a shared-parameter model, and tipping-point sensitivity analyses.</a:t>
             </a:r>
-            <a:endParaRPr lang="en-US" sz="1300" dirty="0"/>
+            <a:endParaRPr lang="en-US" sz="1450" dirty="0"/>
           </a:p>
         </p:txBody>
       </p:sp>
@@ -9394,7 +9394,7 @@
               <a:buNone/>
             </a:pPr>
             <a:r>
-              <a:rPr lang="en-US" sz="1400" b="1" dirty="0">
+              <a:rPr lang="en-US" sz="1550" b="1" dirty="0">
                 <a:solidFill>
                   <a:srgbClr val="0E8385"/>
                 </a:solidFill>
@@ -9404,7 +9404,7 @@
               </a:rPr>
               <a:t>Why slope, and is it fair</a:t>
             </a:r>
-            <a:endParaRPr lang="en-US" sz="1400" dirty="0"/>
+            <a:endParaRPr lang="en-US" sz="1550" dirty="0"/>
           </a:p>
         </p:txBody>
       </p:sp>
@@ -9436,7 +9436,7 @@
               <a:buNone/>
             </a:pPr>
             <a:r>
-              <a:rPr lang="en-US" sz="1500" b="1" dirty="0">
+              <a:rPr lang="en-US" sz="1650" b="1" dirty="0">
                 <a:solidFill>
                   <a:srgbClr val="0E8385"/>
                 </a:solidFill>
@@ -9453,9 +9453,9 @@
               <a:buNone/>
             </a:pPr>
             <a:r>
-              <a:rPr lang="en-US" sz="1300" dirty="0">
-                <a:solidFill>
-                  <a:srgbClr val="22343C"/>
+              <a:rPr lang="en-US" sz="1450" dirty="0">
+                <a:solidFill>
+                  <a:srgbClr val="13212A"/>
                 </a:solidFill>
                 <a:latin typeface="Calibri" pitchFamily="34" charset="0"/>
                 <a:ea typeface="Calibri" pitchFamily="34" charset="-122"/>
@@ -9463,7 +9463,7 @@
               </a:rPr>
               <a:t>gave &gt;90% power to detect a 0.7 ml/min/1.73 m²/yr difference in slope (two-sided α = 0.05). A hard-outcome composite was not feasible at this sample size.</a:t>
             </a:r>
-            <a:endParaRPr lang="en-US" sz="1500" dirty="0"/>
+            <a:endParaRPr lang="en-US" sz="1650" dirty="0"/>
           </a:p>
         </p:txBody>
       </p:sp>
@@ -9495,9 +9495,9 @@
               <a:buNone/>
             </a:pPr>
             <a:r>
-              <a:rPr lang="en-US" sz="1300" i="1" dirty="0">
-                <a:solidFill>
-                  <a:srgbClr val="6C7C84"/>
+              <a:rPr lang="en-US" sz="1450" i="1" dirty="0">
+                <a:solidFill>
+                  <a:srgbClr val="4E5E66"/>
                 </a:solidFill>
                 <a:latin typeface="Calibri" pitchFamily="34" charset="0"/>
                 <a:ea typeface="Calibri" pitchFamily="34" charset="-122"/>
@@ -9505,7 +9505,7 @@
               </a:rPr>
               <a:t>A meta-analysis of 66 randomized trials found that slowing eGFR decline by about 0.75 per year predicts a 23% lower risk of hard kidney outcomes. An accepted surrogate, but a surrogate all the same.</a:t>
             </a:r>
-            <a:endParaRPr lang="en-US" sz="1300" dirty="0"/>
+            <a:endParaRPr lang="en-US" sz="1450" dirty="0"/>
           </a:p>
         </p:txBody>
       </p:sp>
@@ -9550,7 +9550,7 @@
             <a:r>
               <a:rPr lang="en-US" sz="900" dirty="0">
                 <a:solidFill>
-                  <a:srgbClr val="6C7C84"/>
+                  <a:srgbClr val="4E5E66"/>
                 </a:solidFill>
                 <a:latin typeface="Calibri" pitchFamily="34" charset="0"/>
                 <a:ea typeface="Calibri" pitchFamily="34" charset="-122"/>
@@ -9589,7 +9589,7 @@
             <a:r>
               <a:rPr lang="en-US" sz="900" dirty="0">
                 <a:solidFill>
-                  <a:srgbClr val="6C7C84"/>
+                  <a:srgbClr val="4E5E66"/>
                 </a:solidFill>
                 <a:latin typeface="Calibri" pitchFamily="34" charset="0"/>
                 <a:ea typeface="Calibri" pitchFamily="34" charset="-122"/>
@@ -9785,7 +9785,7 @@
               <a:buNone/>
             </a:pPr>
             <a:r>
-              <a:rPr lang="en-US" sz="1600" dirty="0">
+              <a:rPr lang="en-US" sz="1750" dirty="0">
                 <a:solidFill>
                   <a:srgbClr val="AFC6D2"/>
                 </a:solidFill>
@@ -9795,7 +9795,7 @@
               </a:rPr>
               <a:t>The eGFR slope, its acute and chronic components, subgroups, and clinical events.</a:t>
             </a:r>
-            <a:endParaRPr lang="en-US" sz="1600" dirty="0"/>
+            <a:endParaRPr lang="en-US" sz="1750" dirty="0"/>
           </a:p>
         </p:txBody>
       </p:sp>
@@ -9924,8 +9924,8 @@
         </p:nvSpPr>
         <p:spPr>
           <a:xfrm>
-            <a:off x="1389888" y="329184"/>
-            <a:ext cx="10158984" cy="566928"/>
+            <a:off x="1389888" y="310896"/>
+            <a:ext cx="10158984" cy="603504"/>
           </a:xfrm>
           <a:prstGeom prst="rect">
             <a:avLst/>
@@ -9941,7 +9941,7 @@
               <a:buNone/>
             </a:pPr>
             <a:r>
-              <a:rPr lang="en-US" sz="2300" b="1" dirty="0">
+              <a:rPr lang="en-US" sz="2600" b="1" dirty="0">
                 <a:solidFill>
                   <a:srgbClr val="0F3446"/>
                 </a:solidFill>
@@ -9951,7 +9951,7 @@
               </a:rPr>
               <a:t>Primary result: eGFR change over time</a:t>
             </a:r>
-            <a:endParaRPr lang="en-US" sz="2300" dirty="0"/>
+            <a:endParaRPr lang="en-US" sz="2600" dirty="0"/>
           </a:p>
         </p:txBody>
       </p:sp>
@@ -9983,7 +9983,7 @@
               <a:buNone/>
             </a:pPr>
             <a:r>
-              <a:rPr lang="en-US" sz="1450" b="1" dirty="0">
+              <a:rPr lang="en-US" sz="1600" b="1" dirty="0">
                 <a:solidFill>
                   <a:srgbClr val="0E8385"/>
                 </a:solidFill>
@@ -9993,7 +9993,7 @@
               </a:rPr>
               <a:t>Finerenone declined more slowly through month 32, and the early dip reversed once treatment stopped.</a:t>
             </a:r>
-            <a:endParaRPr lang="en-US" sz="1450" dirty="0"/>
+            <a:endParaRPr lang="en-US" sz="1600" dirty="0"/>
           </a:p>
         </p:txBody>
       </p:sp>
@@ -10041,7 +10041,7 @@
               <a:buNone/>
             </a:pPr>
             <a:r>
-              <a:rPr lang="en-US" sz="1300" b="1" dirty="0">
+              <a:rPr lang="en-US" sz="1450" b="1" dirty="0">
                 <a:solidFill>
                   <a:srgbClr val="E86A44"/>
                 </a:solidFill>
@@ -10058,9 +10058,9 @@
               <a:buNone/>
             </a:pPr>
             <a:r>
-              <a:rPr lang="en-US" sz="1300" dirty="0">
-                <a:solidFill>
-                  <a:srgbClr val="22343C"/>
+              <a:rPr lang="en-US" sz="1450" dirty="0">
+                <a:solidFill>
+                  <a:srgbClr val="13212A"/>
                 </a:solidFill>
                 <a:latin typeface="Calibri" pitchFamily="34" charset="0"/>
                 <a:ea typeface="Calibri" pitchFamily="34" charset="-122"/>
@@ -10068,7 +10068,7 @@
               </a:rPr>
               <a:t>Finerenone dips faster through month 3 (reversible hemodynamic effect), then declines more slowly and pulls ahead.</a:t>
             </a:r>
-            <a:endParaRPr lang="en-US" sz="1300" dirty="0"/>
+            <a:endParaRPr lang="en-US" sz="1450" dirty="0"/>
           </a:p>
         </p:txBody>
       </p:sp>
@@ -10100,7 +10100,7 @@
               <a:buNone/>
             </a:pPr>
             <a:r>
-              <a:rPr lang="en-US" sz="1300" b="1" dirty="0">
+              <a:rPr lang="en-US" sz="1450" b="1" dirty="0">
                 <a:solidFill>
                   <a:srgbClr val="0E8385"/>
                 </a:solidFill>
@@ -10117,9 +10117,9 @@
               <a:buNone/>
             </a:pPr>
             <a:r>
-              <a:rPr lang="en-US" sz="1300" dirty="0">
-                <a:solidFill>
-                  <a:srgbClr val="22343C"/>
+              <a:rPr lang="en-US" sz="1450" dirty="0">
+                <a:solidFill>
+                  <a:srgbClr val="13212A"/>
                 </a:solidFill>
                 <a:latin typeface="Calibri" pitchFamily="34" charset="0"/>
                 <a:ea typeface="Calibri" pitchFamily="34" charset="-122"/>
@@ -10127,7 +10127,7 @@
               </a:rPr>
               <a:t>Mean eGFR 39.4 (finerenone) vs 38.1 (placebo).</a:t>
             </a:r>
-            <a:endParaRPr lang="en-US" sz="1300" dirty="0"/>
+            <a:endParaRPr lang="en-US" sz="1450" dirty="0"/>
           </a:p>
         </p:txBody>
       </p:sp>
@@ -10159,7 +10159,7 @@
               <a:buNone/>
             </a:pPr>
             <a:r>
-              <a:rPr lang="en-US" sz="1300" b="1" dirty="0">
+              <a:rPr lang="en-US" sz="1450" b="1" dirty="0">
                 <a:solidFill>
                   <a:srgbClr val="0F3446"/>
                 </a:solidFill>
@@ -10176,9 +10176,9 @@
               <a:buNone/>
             </a:pPr>
             <a:r>
-              <a:rPr lang="en-US" sz="1300" dirty="0">
-                <a:solidFill>
-                  <a:srgbClr val="22343C"/>
+              <a:rPr lang="en-US" sz="1450" dirty="0">
+                <a:solidFill>
+                  <a:srgbClr val="13212A"/>
                 </a:solidFill>
                 <a:latin typeface="Calibri" pitchFamily="34" charset="0"/>
                 <a:ea typeface="Calibri" pitchFamily="34" charset="-122"/>
@@ -10186,7 +10186,7 @@
               </a:rPr>
               <a:t>Four weeks after stopping, eGFR rose with finerenone and kept falling with placebo. The dip reverses.</a:t>
             </a:r>
-            <a:endParaRPr lang="en-US" sz="1300" dirty="0"/>
+            <a:endParaRPr lang="en-US" sz="1450" dirty="0"/>
           </a:p>
         </p:txBody>
       </p:sp>
@@ -10217,7 +10217,7 @@
             <a:r>
               <a:rPr lang="en-US" sz="850" i="1" dirty="0">
                 <a:solidFill>
-                  <a:srgbClr val="6C7C84"/>
+                  <a:srgbClr val="4E5E66"/>
                 </a:solidFill>
                 <a:latin typeface="Calibri" pitchFamily="34" charset="0"/>
                 <a:ea typeface="Calibri" pitchFamily="34" charset="-122"/>
@@ -10270,7 +10270,7 @@
             <a:r>
               <a:rPr lang="en-US" sz="900" dirty="0">
                 <a:solidFill>
-                  <a:srgbClr val="6C7C84"/>
+                  <a:srgbClr val="4E5E66"/>
                 </a:solidFill>
                 <a:latin typeface="Calibri" pitchFamily="34" charset="0"/>
                 <a:ea typeface="Calibri" pitchFamily="34" charset="-122"/>
@@ -10309,7 +10309,7 @@
             <a:r>
               <a:rPr lang="en-US" sz="900" dirty="0">
                 <a:solidFill>
-                  <a:srgbClr val="6C7C84"/>
+                  <a:srgbClr val="4E5E66"/>
                 </a:solidFill>
                 <a:latin typeface="Calibri" pitchFamily="34" charset="0"/>
                 <a:ea typeface="Calibri" pitchFamily="34" charset="-122"/>
@@ -10407,8 +10407,8 @@
         </p:nvSpPr>
         <p:spPr>
           <a:xfrm>
-            <a:off x="1389888" y="329184"/>
-            <a:ext cx="10158984" cy="566928"/>
+            <a:off x="1389888" y="310896"/>
+            <a:ext cx="10158984" cy="603504"/>
           </a:xfrm>
           <a:prstGeom prst="rect">
             <a:avLst/>
@@ -10424,7 +10424,7 @@
               <a:buNone/>
             </a:pPr>
             <a:r>
-              <a:rPr lang="en-US" sz="2300" b="1" dirty="0">
+              <a:rPr lang="en-US" sz="2600" b="1" dirty="0">
                 <a:solidFill>
                   <a:srgbClr val="0F3446"/>
                 </a:solidFill>
@@ -10434,7 +10434,7 @@
               </a:rPr>
               <a:t>Reading the eGFR curve: the acute dip is not harm</a:t>
             </a:r>
-            <a:endParaRPr lang="en-US" sz="2300" dirty="0"/>
+            <a:endParaRPr lang="en-US" sz="2600" dirty="0"/>
           </a:p>
         </p:txBody>
       </p:sp>
@@ -10466,7 +10466,7 @@
               <a:buNone/>
             </a:pPr>
             <a:r>
-              <a:rPr lang="en-US" sz="1450" b="1" dirty="0">
+              <a:rPr lang="en-US" sz="1600" b="1" dirty="0">
                 <a:solidFill>
                   <a:srgbClr val="0E8385"/>
                 </a:solidFill>
@@ -10476,7 +10476,7 @@
               </a:rPr>
               <a:t>The early drop is hemodynamic and fully reversible, the same pattern seen with RAS and SGLT2 inhibitors.</a:t>
             </a:r>
-            <a:endParaRPr lang="en-US" sz="1450" dirty="0"/>
+            <a:endParaRPr lang="en-US" sz="1600" dirty="0"/>
           </a:p>
         </p:txBody>
       </p:sp>
@@ -10547,9 +10547,9 @@
               <a:buNone/>
             </a:pPr>
             <a:r>
-              <a:rPr lang="en-US" sz="1200" dirty="0">
-                <a:solidFill>
-                  <a:srgbClr val="22343C"/>
+              <a:rPr lang="en-US" sz="1350" dirty="0">
+                <a:solidFill>
+                  <a:srgbClr val="13212A"/>
                 </a:solidFill>
                 <a:latin typeface="Calibri" pitchFamily="34" charset="0"/>
                 <a:ea typeface="Calibri" pitchFamily="34" charset="-122"/>
@@ -10557,7 +10557,7 @@
               </a:rPr>
               <a:t>steeper acute slope with finerenone over the first 3 months (95% CI −1.7 to −0.6)</a:t>
             </a:r>
-            <a:endParaRPr lang="en-US" sz="1200" dirty="0"/>
+            <a:endParaRPr lang="en-US" sz="1350" dirty="0"/>
           </a:p>
         </p:txBody>
       </p:sp>
@@ -10628,9 +10628,9 @@
               <a:buNone/>
             </a:pPr>
             <a:r>
-              <a:rPr lang="en-US" sz="1200" dirty="0">
-                <a:solidFill>
-                  <a:srgbClr val="22343C"/>
+              <a:rPr lang="en-US" sz="1350" dirty="0">
+                <a:solidFill>
+                  <a:srgbClr val="13212A"/>
                 </a:solidFill>
                 <a:latin typeface="Calibri" pitchFamily="34" charset="0"/>
                 <a:ea typeface="Calibri" pitchFamily="34" charset="-122"/>
@@ -10638,7 +10638,7 @@
               </a:rPr>
               <a:t>less eGFR lost by 4 weeks off-treatment vs placebo (−8.8 vs −11.2 ml/min/1.73 m²)</a:t>
             </a:r>
-            <a:endParaRPr lang="en-US" sz="1200" dirty="0"/>
+            <a:endParaRPr lang="en-US" sz="1350" dirty="0"/>
           </a:p>
         </p:txBody>
       </p:sp>
@@ -10674,9 +10674,9 @@
               <a:buChar char="•"/>
             </a:pPr>
             <a:r>
-              <a:rPr lang="en-US" sz="1350" dirty="0">
-                <a:solidFill>
-                  <a:srgbClr val="22343C"/>
+              <a:rPr lang="en-US" sz="1500" dirty="0">
+                <a:solidFill>
+                  <a:srgbClr val="13212A"/>
                 </a:solidFill>
                 <a:latin typeface="Calibri" pitchFamily="34" charset="0"/>
                 <a:ea typeface="Calibri" pitchFamily="34" charset="-122"/>
@@ -10684,7 +10684,7 @@
               </a:rPr>
               <a:t>MR blockade reduces intraglomerular pressure, so eGFR steps down early. A functional change, not structural injury.</a:t>
             </a:r>
-            <a:endParaRPr lang="en-US" sz="1350" dirty="0"/>
+            <a:endParaRPr lang="en-US" sz="1500" dirty="0"/>
           </a:p>
           <a:p>
             <a:pPr marL="203200" indent="-203200">
@@ -10698,9 +10698,9 @@
               <a:buChar char="•"/>
             </a:pPr>
             <a:r>
-              <a:rPr lang="en-US" sz="1350" dirty="0">
-                <a:solidFill>
-                  <a:srgbClr val="22343C"/>
+              <a:rPr lang="en-US" sz="1500" dirty="0">
+                <a:solidFill>
+                  <a:srgbClr val="13212A"/>
                 </a:solidFill>
                 <a:latin typeface="Calibri" pitchFamily="34" charset="0"/>
                 <a:ea typeface="Calibri" pitchFamily="34" charset="-122"/>
@@ -10708,7 +10708,7 @@
               </a:rPr>
               <a:t>The trajectory after month 3 is what matters: a shallower chronic slope means slower true loss of nephrons.</a:t>
             </a:r>
-            <a:endParaRPr lang="en-US" sz="1350" dirty="0"/>
+            <a:endParaRPr lang="en-US" sz="1500" dirty="0"/>
           </a:p>
           <a:p>
             <a:pPr marL="203200" indent="-203200">
@@ -10722,9 +10722,9 @@
               <a:buChar char="•"/>
             </a:pPr>
             <a:r>
-              <a:rPr lang="en-US" sz="1350" dirty="0">
-                <a:solidFill>
-                  <a:srgbClr val="22343C"/>
+              <a:rPr lang="en-US" sz="1500" dirty="0">
+                <a:solidFill>
+                  <a:srgbClr val="13212A"/>
                 </a:solidFill>
                 <a:latin typeface="Calibri" pitchFamily="34" charset="0"/>
                 <a:ea typeface="Calibri" pitchFamily="34" charset="-122"/>
@@ -10732,7 +10732,7 @@
               </a:rPr>
               <a:t>Stopping the drug undoes the dip: eGFR climbs back with finerenone while placebo keeps falling. A structural loss would not rebound.</a:t>
             </a:r>
-            <a:endParaRPr lang="en-US" sz="1350" dirty="0"/>
+            <a:endParaRPr lang="en-US" sz="1500" dirty="0"/>
           </a:p>
           <a:p>
             <a:pPr marL="203200" indent="-203200">
@@ -10746,9 +10746,9 @@
               <a:buChar char="•"/>
             </a:pPr>
             <a:r>
-              <a:rPr lang="en-US" sz="1350" dirty="0">
-                <a:solidFill>
-                  <a:srgbClr val="22343C"/>
+              <a:rPr lang="en-US" sz="1500" dirty="0">
+                <a:solidFill>
+                  <a:srgbClr val="13212A"/>
                 </a:solidFill>
                 <a:latin typeface="Calibri" pitchFamily="34" charset="0"/>
                 <a:ea typeface="Calibri" pitchFamily="34" charset="-122"/>
@@ -10756,7 +10756,7 @@
               </a:rPr>
               <a:t>The two-slope model exists precisely to keep this reversible dip from masking the chronic benefit.</a:t>
             </a:r>
-            <a:endParaRPr lang="en-US" sz="1350" dirty="0"/>
+            <a:endParaRPr lang="en-US" sz="1500" dirty="0"/>
           </a:p>
         </p:txBody>
       </p:sp>
@@ -10801,7 +10801,7 @@
             <a:r>
               <a:rPr lang="en-US" sz="900" dirty="0">
                 <a:solidFill>
-                  <a:srgbClr val="6C7C84"/>
+                  <a:srgbClr val="4E5E66"/>
                 </a:solidFill>
                 <a:latin typeface="Calibri" pitchFamily="34" charset="0"/>
                 <a:ea typeface="Calibri" pitchFamily="34" charset="-122"/>
@@ -10840,7 +10840,7 @@
             <a:r>
               <a:rPr lang="en-US" sz="900" dirty="0">
                 <a:solidFill>
-                  <a:srgbClr val="6C7C84"/>
+                  <a:srgbClr val="4E5E66"/>
                 </a:solidFill>
                 <a:latin typeface="Calibri" pitchFamily="34" charset="0"/>
                 <a:ea typeface="Calibri" pitchFamily="34" charset="-122"/>
@@ -10938,8 +10938,8 @@
         </p:nvSpPr>
         <p:spPr>
           <a:xfrm>
-            <a:off x="1389888" y="329184"/>
-            <a:ext cx="10158984" cy="566928"/>
+            <a:off x="1389888" y="310896"/>
+            <a:ext cx="10158984" cy="603504"/>
           </a:xfrm>
           <a:prstGeom prst="rect">
             <a:avLst/>
@@ -10955,7 +10955,7 @@
               <a:buNone/>
             </a:pPr>
             <a:r>
-              <a:rPr lang="en-US" sz="2300" b="1" dirty="0">
+              <a:rPr lang="en-US" sz="2600" b="1" dirty="0">
                 <a:solidFill>
                   <a:srgbClr val="0F3446"/>
                 </a:solidFill>
@@ -10965,7 +10965,7 @@
               </a:rPr>
               <a:t>Primary result: total, acute and chronic slope</a:t>
             </a:r>
-            <a:endParaRPr lang="en-US" sz="2300" dirty="0"/>
+            <a:endParaRPr lang="en-US" sz="2600" dirty="0"/>
           </a:p>
         </p:txBody>
       </p:sp>
@@ -10997,7 +10997,7 @@
               <a:buNone/>
             </a:pPr>
             <a:r>
-              <a:rPr lang="en-US" sz="1450" b="1" dirty="0">
+              <a:rPr lang="en-US" sz="1600" b="1" dirty="0">
                 <a:solidFill>
                   <a:srgbClr val="0E8385"/>
                 </a:solidFill>
@@ -11007,7 +11007,7 @@
               </a:rPr>
               <a:t>The chronic slope, 1.2/yr, is the disease-modifying signal, nearly double the headline 0.7.</a:t>
             </a:r>
-            <a:endParaRPr lang="en-US" sz="1450" dirty="0"/>
+            <a:endParaRPr lang="en-US" sz="1600" dirty="0"/>
           </a:p>
         </p:txBody>
       </p:sp>
@@ -11075,7 +11075,7 @@
               <a:buNone/>
             </a:pPr>
             <a:r>
-              <a:rPr lang="en-US" sz="1200" b="1" dirty="0">
+              <a:rPr lang="en-US" sz="1300" b="1" dirty="0">
                 <a:solidFill>
                   <a:srgbClr val="FFFFFF"/>
                 </a:solidFill>
@@ -11085,7 +11085,7 @@
               </a:rPr>
               <a:t>Difference</a:t>
             </a:r>
-            <a:endParaRPr lang="en-US" sz="1200" dirty="0"/>
+            <a:endParaRPr lang="en-US" sz="1300" dirty="0"/>
           </a:p>
         </p:txBody>
       </p:sp>
@@ -11117,7 +11117,7 @@
               <a:buNone/>
             </a:pPr>
             <a:r>
-              <a:rPr lang="en-US" sz="1200" b="1" dirty="0">
+              <a:rPr lang="en-US" sz="1300" b="1" dirty="0">
                 <a:solidFill>
                   <a:srgbClr val="FFFFFF"/>
                 </a:solidFill>
@@ -11127,7 +11127,7 @@
               </a:rPr>
               <a:t>Estimate</a:t>
             </a:r>
-            <a:endParaRPr lang="en-US" sz="1200" dirty="0"/>
+            <a:endParaRPr lang="en-US" sz="1300" dirty="0"/>
           </a:p>
         </p:txBody>
       </p:sp>
@@ -11159,7 +11159,7 @@
               <a:buNone/>
             </a:pPr>
             <a:r>
-              <a:rPr lang="en-US" sz="1200" b="1" dirty="0">
+              <a:rPr lang="en-US" sz="1300" b="1" dirty="0">
                 <a:solidFill>
                   <a:srgbClr val="FFFFFF"/>
                 </a:solidFill>
@@ -11169,7 +11169,7 @@
               </a:rPr>
               <a:t>95% CI</a:t>
             </a:r>
-            <a:endParaRPr lang="en-US" sz="1200" dirty="0"/>
+            <a:endParaRPr lang="en-US" sz="1300" dirty="0"/>
           </a:p>
         </p:txBody>
       </p:sp>
@@ -11224,7 +11224,7 @@
               <a:buNone/>
             </a:pPr>
             <a:r>
-              <a:rPr lang="en-US" sz="1150" b="1" dirty="0">
+              <a:rPr lang="en-US" sz="1300" b="1" dirty="0">
                 <a:solidFill>
                   <a:srgbClr val="0F3446"/>
                 </a:solidFill>
@@ -11234,7 +11234,7 @@
               </a:rPr>
               <a:t>Total</a:t>
             </a:r>
-            <a:endParaRPr lang="en-US" sz="1150" dirty="0"/>
+            <a:endParaRPr lang="en-US" sz="1300" dirty="0"/>
           </a:p>
         </p:txBody>
       </p:sp>
@@ -11266,7 +11266,7 @@
               <a:buNone/>
             </a:pPr>
             <a:r>
-              <a:rPr lang="en-US" sz="1150" b="1" dirty="0">
+              <a:rPr lang="en-US" sz="1300" b="1" dirty="0">
                 <a:solidFill>
                   <a:srgbClr val="0E8385"/>
                 </a:solidFill>
@@ -11276,7 +11276,7 @@
               </a:rPr>
               <a:t>+0.7</a:t>
             </a:r>
-            <a:endParaRPr lang="en-US" sz="1150" dirty="0"/>
+            <a:endParaRPr lang="en-US" sz="1300" dirty="0"/>
           </a:p>
         </p:txBody>
       </p:sp>
@@ -11308,9 +11308,9 @@
               <a:buNone/>
             </a:pPr>
             <a:r>
-              <a:rPr lang="en-US" sz="1150" dirty="0">
-                <a:solidFill>
-                  <a:srgbClr val="22343C"/>
+              <a:rPr lang="en-US" sz="1300" dirty="0">
+                <a:solidFill>
+                  <a:srgbClr val="13212A"/>
                 </a:solidFill>
                 <a:latin typeface="Calibri" pitchFamily="34" charset="0"/>
                 <a:ea typeface="Calibri" pitchFamily="34" charset="-122"/>
@@ -11318,7 +11318,7 @@
               </a:rPr>
               <a:t>0.3 to 1.1</a:t>
             </a:r>
-            <a:endParaRPr lang="en-US" sz="1150" dirty="0"/>
+            <a:endParaRPr lang="en-US" sz="1300" dirty="0"/>
           </a:p>
         </p:txBody>
       </p:sp>
@@ -11373,7 +11373,7 @@
               <a:buNone/>
             </a:pPr>
             <a:r>
-              <a:rPr lang="en-US" sz="1150" b="1" dirty="0">
+              <a:rPr lang="en-US" sz="1300" b="1" dirty="0">
                 <a:solidFill>
                   <a:srgbClr val="0F3446"/>
                 </a:solidFill>
@@ -11383,7 +11383,7 @@
               </a:rPr>
               <a:t>Acute (0–3 mo)</a:t>
             </a:r>
-            <a:endParaRPr lang="en-US" sz="1150" dirty="0"/>
+            <a:endParaRPr lang="en-US" sz="1300" dirty="0"/>
           </a:p>
         </p:txBody>
       </p:sp>
@@ -11415,7 +11415,7 @@
               <a:buNone/>
             </a:pPr>
             <a:r>
-              <a:rPr lang="en-US" sz="1150" b="1" dirty="0">
+              <a:rPr lang="en-US" sz="1300" b="1" dirty="0">
                 <a:solidFill>
                   <a:srgbClr val="0E8385"/>
                 </a:solidFill>
@@ -11425,7 +11425,7 @@
               </a:rPr>
               <a:t>−1.2</a:t>
             </a:r>
-            <a:endParaRPr lang="en-US" sz="1150" dirty="0"/>
+            <a:endParaRPr lang="en-US" sz="1300" dirty="0"/>
           </a:p>
         </p:txBody>
       </p:sp>
@@ -11457,9 +11457,9 @@
               <a:buNone/>
             </a:pPr>
             <a:r>
-              <a:rPr lang="en-US" sz="1150" dirty="0">
-                <a:solidFill>
-                  <a:srgbClr val="22343C"/>
+              <a:rPr lang="en-US" sz="1300" dirty="0">
+                <a:solidFill>
+                  <a:srgbClr val="13212A"/>
                 </a:solidFill>
                 <a:latin typeface="Calibri" pitchFamily="34" charset="0"/>
                 <a:ea typeface="Calibri" pitchFamily="34" charset="-122"/>
@@ -11467,7 +11467,7 @@
               </a:rPr>
               <a:t>−1.7 to −0.6</a:t>
             </a:r>
-            <a:endParaRPr lang="en-US" sz="1150" dirty="0"/>
+            <a:endParaRPr lang="en-US" sz="1300" dirty="0"/>
           </a:p>
         </p:txBody>
       </p:sp>
@@ -11522,7 +11522,7 @@
               <a:buNone/>
             </a:pPr>
             <a:r>
-              <a:rPr lang="en-US" sz="1150" b="1" dirty="0">
+              <a:rPr lang="en-US" sz="1300" b="1" dirty="0">
                 <a:solidFill>
                   <a:srgbClr val="0F3446"/>
                 </a:solidFill>
@@ -11532,7 +11532,7 @@
               </a:rPr>
               <a:t>Chronic slope</a:t>
             </a:r>
-            <a:endParaRPr lang="en-US" sz="1150" dirty="0"/>
+            <a:endParaRPr lang="en-US" sz="1300" dirty="0"/>
           </a:p>
         </p:txBody>
       </p:sp>
@@ -11564,7 +11564,7 @@
               <a:buNone/>
             </a:pPr>
             <a:r>
-              <a:rPr lang="en-US" sz="1150" b="1" dirty="0">
+              <a:rPr lang="en-US" sz="1300" b="1" dirty="0">
                 <a:solidFill>
                   <a:srgbClr val="0E8385"/>
                 </a:solidFill>
@@ -11574,7 +11574,7 @@
               </a:rPr>
               <a:t>+1.2</a:t>
             </a:r>
-            <a:endParaRPr lang="en-US" sz="1150" dirty="0"/>
+            <a:endParaRPr lang="en-US" sz="1300" dirty="0"/>
           </a:p>
         </p:txBody>
       </p:sp>
@@ -11606,9 +11606,9 @@
               <a:buNone/>
             </a:pPr>
             <a:r>
-              <a:rPr lang="en-US" sz="1150" dirty="0">
-                <a:solidFill>
-                  <a:srgbClr val="22343C"/>
+              <a:rPr lang="en-US" sz="1300" dirty="0">
+                <a:solidFill>
+                  <a:srgbClr val="13212A"/>
                 </a:solidFill>
                 <a:latin typeface="Calibri" pitchFamily="34" charset="0"/>
                 <a:ea typeface="Calibri" pitchFamily="34" charset="-122"/>
@@ -11616,7 +11616,7 @@
               </a:rPr>
               <a:t>0.9 to 1.6</a:t>
             </a:r>
-            <a:endParaRPr lang="en-US" sz="1150" dirty="0"/>
+            <a:endParaRPr lang="en-US" sz="1300" dirty="0"/>
           </a:p>
         </p:txBody>
       </p:sp>
@@ -11648,9 +11648,9 @@
               <a:buNone/>
             </a:pPr>
             <a:r>
-              <a:rPr lang="en-US" sz="1100" i="1" dirty="0">
-                <a:solidFill>
-                  <a:srgbClr val="6C7C84"/>
+              <a:rPr lang="en-US" sz="1250" i="1" dirty="0">
+                <a:solidFill>
+                  <a:srgbClr val="4E5E66"/>
                 </a:solidFill>
                 <a:latin typeface="Calibri" pitchFamily="34" charset="0"/>
                 <a:ea typeface="Calibri" pitchFamily="34" charset="-122"/>
@@ -11658,7 +11658,7 @@
               </a:rPr>
               <a:t>P &lt; 0.001 for the total slope. Difference = finerenone minus placebo; positive favors finerenone.</a:t>
             </a:r>
-            <a:endParaRPr lang="en-US" sz="1100" dirty="0"/>
+            <a:endParaRPr lang="en-US" sz="1250" dirty="0"/>
           </a:p>
         </p:txBody>
       </p:sp>
@@ -11689,7 +11689,7 @@
             <a:r>
               <a:rPr lang="en-US" sz="850" i="1" dirty="0">
                 <a:solidFill>
-                  <a:srgbClr val="6C7C84"/>
+                  <a:srgbClr val="4E5E66"/>
                 </a:solidFill>
                 <a:latin typeface="Calibri" pitchFamily="34" charset="0"/>
                 <a:ea typeface="Calibri" pitchFamily="34" charset="-122"/>
@@ -11742,7 +11742,7 @@
             <a:r>
               <a:rPr lang="en-US" sz="900" dirty="0">
                 <a:solidFill>
-                  <a:srgbClr val="6C7C84"/>
+                  <a:srgbClr val="4E5E66"/>
                 </a:solidFill>
                 <a:latin typeface="Calibri" pitchFamily="34" charset="0"/>
                 <a:ea typeface="Calibri" pitchFamily="34" charset="-122"/>
@@ -11781,7 +11781,7 @@
             <a:r>
               <a:rPr lang="en-US" sz="900" dirty="0">
                 <a:solidFill>
-                  <a:srgbClr val="6C7C84"/>
+                  <a:srgbClr val="4E5E66"/>
                 </a:solidFill>
                 <a:latin typeface="Calibri" pitchFamily="34" charset="0"/>
                 <a:ea typeface="Calibri" pitchFamily="34" charset="-122"/>
@@ -11879,8 +11879,8 @@
         </p:nvSpPr>
         <p:spPr>
           <a:xfrm>
-            <a:off x="1389888" y="329184"/>
-            <a:ext cx="10158984" cy="566928"/>
+            <a:off x="1389888" y="310896"/>
+            <a:ext cx="10158984" cy="603504"/>
           </a:xfrm>
           <a:prstGeom prst="rect">
             <a:avLst/>
@@ -11896,7 +11896,7 @@
               <a:buNone/>
             </a:pPr>
             <a:r>
-              <a:rPr lang="en-US" sz="2300" b="1" dirty="0">
+              <a:rPr lang="en-US" sz="2600" b="1" dirty="0">
                 <a:solidFill>
                   <a:srgbClr val="0F3446"/>
                 </a:solidFill>
@@ -11906,7 +11906,7 @@
               </a:rPr>
               <a:t>Consistency across subgroups</a:t>
             </a:r>
-            <a:endParaRPr lang="en-US" sz="2300" dirty="0"/>
+            <a:endParaRPr lang="en-US" sz="2600" dirty="0"/>
           </a:p>
         </p:txBody>
       </p:sp>
@@ -11935,9 +11935,9 @@
               <a:buNone/>
             </a:pPr>
             <a:r>
-              <a:rPr lang="en-US" sz="1300" i="1" dirty="0">
-                <a:solidFill>
-                  <a:srgbClr val="6C7C84"/>
+              <a:rPr lang="en-US" sz="1450" i="1" dirty="0">
+                <a:solidFill>
+                  <a:srgbClr val="4E5E66"/>
                 </a:solidFill>
                 <a:latin typeface="Calibri" pitchFamily="34" charset="0"/>
                 <a:ea typeface="Calibri" pitchFamily="34" charset="-122"/>
@@ -11945,7 +11945,7 @@
               </a:rPr>
               <a:t>Difference in eGFR slope (ml/min/1.73 m² per year). Positive favors finerenone.</a:t>
             </a:r>
-            <a:endParaRPr lang="en-US" sz="1300" dirty="0"/>
+            <a:endParaRPr lang="en-US" sz="1450" dirty="0"/>
           </a:p>
         </p:txBody>
       </p:sp>
@@ -11999,7 +11999,7 @@
             <a:r>
               <a:rPr lang="en-US" sz="950" dirty="0">
                 <a:solidFill>
-                  <a:srgbClr val="6C7C84"/>
+                  <a:srgbClr val="4E5E66"/>
                 </a:solidFill>
                 <a:latin typeface="Calibri" pitchFamily="34" charset="0"/>
                 <a:ea typeface="Calibri" pitchFamily="34" charset="-122"/>
@@ -12061,7 +12061,7 @@
             <a:r>
               <a:rPr lang="en-US" sz="950" dirty="0">
                 <a:solidFill>
-                  <a:srgbClr val="6C7C84"/>
+                  <a:srgbClr val="4E5E66"/>
                 </a:solidFill>
                 <a:latin typeface="Calibri" pitchFamily="34" charset="0"/>
                 <a:ea typeface="Calibri" pitchFamily="34" charset="-122"/>
@@ -12123,7 +12123,7 @@
             <a:r>
               <a:rPr lang="en-US" sz="950" dirty="0">
                 <a:solidFill>
-                  <a:srgbClr val="6C7C84"/>
+                  <a:srgbClr val="4E5E66"/>
                 </a:solidFill>
                 <a:latin typeface="Calibri" pitchFamily="34" charset="0"/>
                 <a:ea typeface="Calibri" pitchFamily="34" charset="-122"/>
@@ -12185,7 +12185,7 @@
             <a:r>
               <a:rPr lang="en-US" sz="950" dirty="0">
                 <a:solidFill>
-                  <a:srgbClr val="6C7C84"/>
+                  <a:srgbClr val="4E5E66"/>
                 </a:solidFill>
                 <a:latin typeface="Calibri" pitchFamily="34" charset="0"/>
                 <a:ea typeface="Calibri" pitchFamily="34" charset="-122"/>
@@ -12224,7 +12224,7 @@
             <a:r>
               <a:rPr lang="en-US" sz="950" i="1" dirty="0">
                 <a:solidFill>
-                  <a:srgbClr val="6C7C84"/>
+                  <a:srgbClr val="4E5E66"/>
                 </a:solidFill>
                 <a:latin typeface="Calibri" pitchFamily="34" charset="0"/>
                 <a:ea typeface="Calibri" pitchFamily="34" charset="-122"/>
@@ -12263,7 +12263,7 @@
             <a:r>
               <a:rPr lang="en-US" sz="950" i="1" dirty="0">
                 <a:solidFill>
-                  <a:srgbClr val="6C7C84"/>
+                  <a:srgbClr val="4E5E66"/>
                 </a:solidFill>
                 <a:latin typeface="Calibri" pitchFamily="34" charset="0"/>
                 <a:ea typeface="Calibri" pitchFamily="34" charset="-122"/>
@@ -12300,7 +12300,7 @@
               <a:buNone/>
             </a:pPr>
             <a:r>
-              <a:rPr lang="en-US" sz="1100" b="1" dirty="0">
+              <a:rPr lang="en-US" sz="1250" b="1" dirty="0">
                 <a:solidFill>
                   <a:srgbClr val="0F3446"/>
                 </a:solidFill>
@@ -12310,7 +12310,7 @@
               </a:rPr>
               <a:t>Overall</a:t>
             </a:r>
-            <a:endParaRPr lang="en-US" sz="1100" dirty="0"/>
+            <a:endParaRPr lang="en-US" sz="1250" dirty="0"/>
           </a:p>
         </p:txBody>
       </p:sp>
@@ -12467,9 +12467,9 @@
               <a:buNone/>
             </a:pPr>
             <a:r>
-              <a:rPr lang="en-US" sz="1100" dirty="0">
-                <a:solidFill>
-                  <a:srgbClr val="22343C"/>
+              <a:rPr lang="en-US" sz="1250" dirty="0">
+                <a:solidFill>
+                  <a:srgbClr val="13212A"/>
                 </a:solidFill>
                 <a:latin typeface="Calibri" pitchFamily="34" charset="0"/>
                 <a:ea typeface="Calibri" pitchFamily="34" charset="-122"/>
@@ -12477,7 +12477,7 @@
               </a:rPr>
               <a:t>Cause: HTN / ischemic</a:t>
             </a:r>
-            <a:endParaRPr lang="en-US" sz="1100" dirty="0"/>
+            <a:endParaRPr lang="en-US" sz="1250" dirty="0"/>
           </a:p>
         </p:txBody>
       </p:sp>
@@ -12597,7 +12597,7 @@
             <a:r>
               <a:rPr lang="en-US" sz="950" dirty="0">
                 <a:solidFill>
-                  <a:srgbClr val="6C7C84"/>
+                  <a:srgbClr val="4E5E66"/>
                 </a:solidFill>
                 <a:latin typeface="Calibri" pitchFamily="34" charset="0"/>
                 <a:ea typeface="Calibri" pitchFamily="34" charset="-122"/>
@@ -12634,9 +12634,9 @@
               <a:buNone/>
             </a:pPr>
             <a:r>
-              <a:rPr lang="en-US" sz="1100" dirty="0">
-                <a:solidFill>
-                  <a:srgbClr val="22343C"/>
+              <a:rPr lang="en-US" sz="1250" dirty="0">
+                <a:solidFill>
+                  <a:srgbClr val="13212A"/>
                 </a:solidFill>
                 <a:latin typeface="Calibri" pitchFamily="34" charset="0"/>
                 <a:ea typeface="Calibri" pitchFamily="34" charset="-122"/>
@@ -12644,7 +12644,7 @@
               </a:rPr>
               <a:t>Cause: chronic GN</a:t>
             </a:r>
-            <a:endParaRPr lang="en-US" sz="1100" dirty="0"/>
+            <a:endParaRPr lang="en-US" sz="1250" dirty="0"/>
           </a:p>
         </p:txBody>
       </p:sp>
@@ -12764,7 +12764,7 @@
             <a:r>
               <a:rPr lang="en-US" sz="950" dirty="0">
                 <a:solidFill>
-                  <a:srgbClr val="6C7C84"/>
+                  <a:srgbClr val="4E5E66"/>
                 </a:solidFill>
                 <a:latin typeface="Calibri" pitchFamily="34" charset="0"/>
                 <a:ea typeface="Calibri" pitchFamily="34" charset="-122"/>
@@ -12801,9 +12801,9 @@
               <a:buNone/>
             </a:pPr>
             <a:r>
-              <a:rPr lang="en-US" sz="1100" dirty="0">
-                <a:solidFill>
-                  <a:srgbClr val="22343C"/>
+              <a:rPr lang="en-US" sz="1250" dirty="0">
+                <a:solidFill>
+                  <a:srgbClr val="13212A"/>
                 </a:solidFill>
                 <a:latin typeface="Calibri" pitchFamily="34" charset="0"/>
                 <a:ea typeface="Calibri" pitchFamily="34" charset="-122"/>
@@ -12811,7 +12811,7 @@
               </a:rPr>
               <a:t>Cause: other / unknown</a:t>
             </a:r>
-            <a:endParaRPr lang="en-US" sz="1100" dirty="0"/>
+            <a:endParaRPr lang="en-US" sz="1250" dirty="0"/>
           </a:p>
         </p:txBody>
       </p:sp>
@@ -12931,7 +12931,7 @@
             <a:r>
               <a:rPr lang="en-US" sz="950" dirty="0">
                 <a:solidFill>
-                  <a:srgbClr val="6C7C84"/>
+                  <a:srgbClr val="4E5E66"/>
                 </a:solidFill>
                 <a:latin typeface="Calibri" pitchFamily="34" charset="0"/>
                 <a:ea typeface="Calibri" pitchFamily="34" charset="-122"/>
@@ -12968,9 +12968,9 @@
               <a:buNone/>
             </a:pPr>
             <a:r>
-              <a:rPr lang="en-US" sz="1100" dirty="0">
-                <a:solidFill>
-                  <a:srgbClr val="22343C"/>
+              <a:rPr lang="en-US" sz="1250" dirty="0">
+                <a:solidFill>
+                  <a:srgbClr val="13212A"/>
                 </a:solidFill>
                 <a:latin typeface="Calibri" pitchFamily="34" charset="0"/>
                 <a:ea typeface="Calibri" pitchFamily="34" charset="-122"/>
@@ -12978,7 +12978,7 @@
               </a:rPr>
               <a:t>eGFR &lt; 45</a:t>
             </a:r>
-            <a:endParaRPr lang="en-US" sz="1100" dirty="0"/>
+            <a:endParaRPr lang="en-US" sz="1250" dirty="0"/>
           </a:p>
         </p:txBody>
       </p:sp>
@@ -13098,7 +13098,7 @@
             <a:r>
               <a:rPr lang="en-US" sz="950" dirty="0">
                 <a:solidFill>
-                  <a:srgbClr val="6C7C84"/>
+                  <a:srgbClr val="4E5E66"/>
                 </a:solidFill>
                 <a:latin typeface="Calibri" pitchFamily="34" charset="0"/>
                 <a:ea typeface="Calibri" pitchFamily="34" charset="-122"/>
@@ -13135,9 +13135,9 @@
               <a:buNone/>
             </a:pPr>
             <a:r>
-              <a:rPr lang="en-US" sz="1100" dirty="0">
-                <a:solidFill>
-                  <a:srgbClr val="22343C"/>
+              <a:rPr lang="en-US" sz="1250" dirty="0">
+                <a:solidFill>
+                  <a:srgbClr val="13212A"/>
                 </a:solidFill>
                 <a:latin typeface="Calibri" pitchFamily="34" charset="0"/>
                 <a:ea typeface="Calibri" pitchFamily="34" charset="-122"/>
@@ -13145,7 +13145,7 @@
               </a:rPr>
               <a:t>eGFR 45 to &lt;60</a:t>
             </a:r>
-            <a:endParaRPr lang="en-US" sz="1100" dirty="0"/>
+            <a:endParaRPr lang="en-US" sz="1250" dirty="0"/>
           </a:p>
         </p:txBody>
       </p:sp>
@@ -13265,7 +13265,7 @@
             <a:r>
               <a:rPr lang="en-US" sz="950" dirty="0">
                 <a:solidFill>
-                  <a:srgbClr val="6C7C84"/>
+                  <a:srgbClr val="4E5E66"/>
                 </a:solidFill>
                 <a:latin typeface="Calibri" pitchFamily="34" charset="0"/>
                 <a:ea typeface="Calibri" pitchFamily="34" charset="-122"/>
@@ -13302,9 +13302,9 @@
               <a:buNone/>
             </a:pPr>
             <a:r>
-              <a:rPr lang="en-US" sz="1100" dirty="0">
-                <a:solidFill>
-                  <a:srgbClr val="22343C"/>
+              <a:rPr lang="en-US" sz="1250" dirty="0">
+                <a:solidFill>
+                  <a:srgbClr val="13212A"/>
                 </a:solidFill>
                 <a:latin typeface="Calibri" pitchFamily="34" charset="0"/>
                 <a:ea typeface="Calibri" pitchFamily="34" charset="-122"/>
@@ -13312,7 +13312,7 @@
               </a:rPr>
               <a:t>eGFR ≥ 60</a:t>
             </a:r>
-            <a:endParaRPr lang="en-US" sz="1100" dirty="0"/>
+            <a:endParaRPr lang="en-US" sz="1250" dirty="0"/>
           </a:p>
         </p:txBody>
       </p:sp>
@@ -13432,7 +13432,7 @@
             <a:r>
               <a:rPr lang="en-US" sz="950" dirty="0">
                 <a:solidFill>
-                  <a:srgbClr val="6C7C84"/>
+                  <a:srgbClr val="4E5E66"/>
                 </a:solidFill>
                 <a:latin typeface="Calibri" pitchFamily="34" charset="0"/>
                 <a:ea typeface="Calibri" pitchFamily="34" charset="-122"/>
@@ -13469,9 +13469,9 @@
               <a:buNone/>
             </a:pPr>
             <a:r>
-              <a:rPr lang="en-US" sz="1100" dirty="0">
-                <a:solidFill>
-                  <a:srgbClr val="22343C"/>
+              <a:rPr lang="en-US" sz="1250" dirty="0">
+                <a:solidFill>
+                  <a:srgbClr val="13212A"/>
                 </a:solidFill>
                 <a:latin typeface="Calibri" pitchFamily="34" charset="0"/>
                 <a:ea typeface="Calibri" pitchFamily="34" charset="-122"/>
@@ -13479,7 +13479,7 @@
               </a:rPr>
               <a:t>UACR ≤ 1000</a:t>
             </a:r>
-            <a:endParaRPr lang="en-US" sz="1100" dirty="0"/>
+            <a:endParaRPr lang="en-US" sz="1250" dirty="0"/>
           </a:p>
         </p:txBody>
       </p:sp>
@@ -13599,7 +13599,7 @@
             <a:r>
               <a:rPr lang="en-US" sz="950" dirty="0">
                 <a:solidFill>
-                  <a:srgbClr val="6C7C84"/>
+                  <a:srgbClr val="4E5E66"/>
                 </a:solidFill>
                 <a:latin typeface="Calibri" pitchFamily="34" charset="0"/>
                 <a:ea typeface="Calibri" pitchFamily="34" charset="-122"/>
@@ -13636,9 +13636,9 @@
               <a:buNone/>
             </a:pPr>
             <a:r>
-              <a:rPr lang="en-US" sz="1100" dirty="0">
-                <a:solidFill>
-                  <a:srgbClr val="22343C"/>
+              <a:rPr lang="en-US" sz="1250" dirty="0">
+                <a:solidFill>
+                  <a:srgbClr val="13212A"/>
                 </a:solidFill>
                 <a:latin typeface="Calibri" pitchFamily="34" charset="0"/>
                 <a:ea typeface="Calibri" pitchFamily="34" charset="-122"/>
@@ -13646,7 +13646,7 @@
               </a:rPr>
               <a:t>UACR &gt; 1000</a:t>
             </a:r>
-            <a:endParaRPr lang="en-US" sz="1100" dirty="0"/>
+            <a:endParaRPr lang="en-US" sz="1250" dirty="0"/>
           </a:p>
         </p:txBody>
       </p:sp>
@@ -13766,7 +13766,7 @@
             <a:r>
               <a:rPr lang="en-US" sz="950" dirty="0">
                 <a:solidFill>
-                  <a:srgbClr val="6C7C84"/>
+                  <a:srgbClr val="4E5E66"/>
                 </a:solidFill>
                 <a:latin typeface="Calibri" pitchFamily="34" charset="0"/>
                 <a:ea typeface="Calibri" pitchFamily="34" charset="-122"/>
@@ -13803,9 +13803,9 @@
               <a:buNone/>
             </a:pPr>
             <a:r>
-              <a:rPr lang="en-US" sz="1100" dirty="0">
-                <a:solidFill>
-                  <a:srgbClr val="22343C"/>
+              <a:rPr lang="en-US" sz="1250" dirty="0">
+                <a:solidFill>
+                  <a:srgbClr val="13212A"/>
                 </a:solidFill>
                 <a:latin typeface="Calibri" pitchFamily="34" charset="0"/>
                 <a:ea typeface="Calibri" pitchFamily="34" charset="-122"/>
@@ -13813,7 +13813,7 @@
               </a:rPr>
               <a:t>SGLT2i: yes</a:t>
             </a:r>
-            <a:endParaRPr lang="en-US" sz="1100" dirty="0"/>
+            <a:endParaRPr lang="en-US" sz="1250" dirty="0"/>
           </a:p>
         </p:txBody>
       </p:sp>
@@ -13933,7 +13933,7 @@
             <a:r>
               <a:rPr lang="en-US" sz="950" dirty="0">
                 <a:solidFill>
-                  <a:srgbClr val="6C7C84"/>
+                  <a:srgbClr val="4E5E66"/>
                 </a:solidFill>
                 <a:latin typeface="Calibri" pitchFamily="34" charset="0"/>
                 <a:ea typeface="Calibri" pitchFamily="34" charset="-122"/>
@@ -13970,9 +13970,9 @@
               <a:buNone/>
             </a:pPr>
             <a:r>
-              <a:rPr lang="en-US" sz="1100" dirty="0">
-                <a:solidFill>
-                  <a:srgbClr val="22343C"/>
+              <a:rPr lang="en-US" sz="1250" dirty="0">
+                <a:solidFill>
+                  <a:srgbClr val="13212A"/>
                 </a:solidFill>
                 <a:latin typeface="Calibri" pitchFamily="34" charset="0"/>
                 <a:ea typeface="Calibri" pitchFamily="34" charset="-122"/>
@@ -13980,7 +13980,7 @@
               </a:rPr>
               <a:t>SGLT2i: no</a:t>
             </a:r>
-            <a:endParaRPr lang="en-US" sz="1100" dirty="0"/>
+            <a:endParaRPr lang="en-US" sz="1250" dirty="0"/>
           </a:p>
         </p:txBody>
       </p:sp>
@@ -14100,7 +14100,7 @@
             <a:r>
               <a:rPr lang="en-US" sz="950" dirty="0">
                 <a:solidFill>
-                  <a:srgbClr val="6C7C84"/>
+                  <a:srgbClr val="4E5E66"/>
                 </a:solidFill>
                 <a:latin typeface="Calibri" pitchFamily="34" charset="0"/>
                 <a:ea typeface="Calibri" pitchFamily="34" charset="-122"/>
@@ -14139,7 +14139,7 @@
             <a:r>
               <a:rPr lang="en-US" sz="850" i="1" dirty="0">
                 <a:solidFill>
-                  <a:srgbClr val="6C7C84"/>
+                  <a:srgbClr val="4E5E66"/>
                 </a:solidFill>
                 <a:latin typeface="Calibri" pitchFamily="34" charset="0"/>
                 <a:ea typeface="Calibri" pitchFamily="34" charset="-122"/>
@@ -14192,7 +14192,7 @@
             <a:r>
               <a:rPr lang="en-US" sz="900" dirty="0">
                 <a:solidFill>
-                  <a:srgbClr val="6C7C84"/>
+                  <a:srgbClr val="4E5E66"/>
                 </a:solidFill>
                 <a:latin typeface="Calibri" pitchFamily="34" charset="0"/>
                 <a:ea typeface="Calibri" pitchFamily="34" charset="-122"/>
@@ -14231,7 +14231,7 @@
             <a:r>
               <a:rPr lang="en-US" sz="900" dirty="0">
                 <a:solidFill>
-                  <a:srgbClr val="6C7C84"/>
+                  <a:srgbClr val="4E5E66"/>
                 </a:solidFill>
                 <a:latin typeface="Calibri" pitchFamily="34" charset="0"/>
                 <a:ea typeface="Calibri" pitchFamily="34" charset="-122"/>
@@ -14329,8 +14329,8 @@
         </p:nvSpPr>
         <p:spPr>
           <a:xfrm>
-            <a:off x="1389888" y="329184"/>
-            <a:ext cx="10158984" cy="566928"/>
+            <a:off x="1389888" y="310896"/>
+            <a:ext cx="10158984" cy="603504"/>
           </a:xfrm>
           <a:prstGeom prst="rect">
             <a:avLst/>
@@ -14346,7 +14346,7 @@
               <a:buNone/>
             </a:pPr>
             <a:r>
-              <a:rPr lang="en-US" sz="2300" b="1" dirty="0">
+              <a:rPr lang="en-US" sz="2600" b="1" dirty="0">
                 <a:solidFill>
                   <a:srgbClr val="0F3446"/>
                 </a:solidFill>
@@ -14356,7 +14356,7 @@
               </a:rPr>
               <a:t>Secondary clinical outcomes</a:t>
             </a:r>
-            <a:endParaRPr lang="en-US" sz="2300" dirty="0"/>
+            <a:endParaRPr lang="en-US" sz="2600" dirty="0"/>
           </a:p>
         </p:txBody>
       </p:sp>
@@ -14388,7 +14388,7 @@
               <a:buNone/>
             </a:pPr>
             <a:r>
-              <a:rPr lang="en-US" sz="1450" b="1" dirty="0">
+              <a:rPr lang="en-US" sz="1600" b="1" dirty="0">
                 <a:solidFill>
                   <a:srgbClr val="0E8385"/>
                 </a:solidFill>
@@ -14398,7 +14398,7 @@
               </a:rPr>
               <a:t>A protected composite: 23% fewer kidney or cardiovascular events.</a:t>
             </a:r>
-            <a:endParaRPr lang="en-US" sz="1450" dirty="0"/>
+            <a:endParaRPr lang="en-US" sz="1600" dirty="0"/>
           </a:p>
         </p:txBody>
       </p:sp>
@@ -14466,7 +14466,7 @@
               <a:buNone/>
             </a:pPr>
             <a:r>
-              <a:rPr lang="en-US" sz="1200" b="1" dirty="0">
+              <a:rPr lang="en-US" sz="1300" b="1" dirty="0">
                 <a:solidFill>
                   <a:srgbClr val="FFFFFF"/>
                 </a:solidFill>
@@ -14476,7 +14476,7 @@
               </a:rPr>
               <a:t>Composite</a:t>
             </a:r>
-            <a:endParaRPr lang="en-US" sz="1200" dirty="0"/>
+            <a:endParaRPr lang="en-US" sz="1300" dirty="0"/>
           </a:p>
         </p:txBody>
       </p:sp>
@@ -14508,7 +14508,7 @@
               <a:buNone/>
             </a:pPr>
             <a:r>
-              <a:rPr lang="en-US" sz="1200" b="1" dirty="0">
+              <a:rPr lang="en-US" sz="1300" b="1" dirty="0">
                 <a:solidFill>
                   <a:srgbClr val="FFFFFF"/>
                 </a:solidFill>
@@ -14518,7 +14518,7 @@
               </a:rPr>
               <a:t>Fin / Plac</a:t>
             </a:r>
-            <a:endParaRPr lang="en-US" sz="1200" dirty="0"/>
+            <a:endParaRPr lang="en-US" sz="1300" dirty="0"/>
           </a:p>
         </p:txBody>
       </p:sp>
@@ -14550,7 +14550,7 @@
               <a:buNone/>
             </a:pPr>
             <a:r>
-              <a:rPr lang="en-US" sz="1200" b="1" dirty="0">
+              <a:rPr lang="en-US" sz="1300" b="1" dirty="0">
                 <a:solidFill>
                   <a:srgbClr val="FFFFFF"/>
                 </a:solidFill>
@@ -14560,7 +14560,7 @@
               </a:rPr>
               <a:t>HR (95% CI)</a:t>
             </a:r>
-            <a:endParaRPr lang="en-US" sz="1200" dirty="0"/>
+            <a:endParaRPr lang="en-US" sz="1300" dirty="0"/>
           </a:p>
         </p:txBody>
       </p:sp>
@@ -14592,7 +14592,7 @@
               <a:buNone/>
             </a:pPr>
             <a:r>
-              <a:rPr lang="en-US" sz="1200" b="1" dirty="0">
+              <a:rPr lang="en-US" sz="1300" b="1" dirty="0">
                 <a:solidFill>
                   <a:srgbClr val="FFFFFF"/>
                 </a:solidFill>
@@ -14602,7 +14602,7 @@
               </a:rPr>
               <a:t>P</a:t>
             </a:r>
-            <a:endParaRPr lang="en-US" sz="1200" dirty="0"/>
+            <a:endParaRPr lang="en-US" sz="1300" dirty="0"/>
           </a:p>
         </p:txBody>
       </p:sp>
@@ -14657,7 +14657,7 @@
               <a:buNone/>
             </a:pPr>
             <a:r>
-              <a:rPr lang="en-US" sz="1100" b="1" dirty="0">
+              <a:rPr lang="en-US" sz="1250" b="1" dirty="0">
                 <a:solidFill>
                   <a:srgbClr val="0F3446"/>
                 </a:solidFill>
@@ -14667,7 +14667,7 @@
               </a:rPr>
               <a:t>Kidney–CV</a:t>
             </a:r>
-            <a:endParaRPr lang="en-US" sz="1100" dirty="0"/>
+            <a:endParaRPr lang="en-US" sz="1250" dirty="0"/>
           </a:p>
         </p:txBody>
       </p:sp>
@@ -14699,9 +14699,9 @@
               <a:buNone/>
             </a:pPr>
             <a:r>
-              <a:rPr lang="en-US" sz="1100" dirty="0">
-                <a:solidFill>
-                  <a:srgbClr val="22343C"/>
+              <a:rPr lang="en-US" sz="1250" dirty="0">
+                <a:solidFill>
+                  <a:srgbClr val="13212A"/>
                 </a:solidFill>
                 <a:latin typeface="Calibri" pitchFamily="34" charset="0"/>
                 <a:ea typeface="Calibri" pitchFamily="34" charset="-122"/>
@@ -14709,7 +14709,7 @@
               </a:rPr>
               <a:t>110 / 134</a:t>
             </a:r>
-            <a:endParaRPr lang="en-US" sz="1100" dirty="0"/>
+            <a:endParaRPr lang="en-US" sz="1250" dirty="0"/>
           </a:p>
         </p:txBody>
       </p:sp>
@@ -14741,7 +14741,7 @@
               <a:buNone/>
             </a:pPr>
             <a:r>
-              <a:rPr lang="en-US" sz="1100" b="1" dirty="0">
+              <a:rPr lang="en-US" sz="1250" b="1" dirty="0">
                 <a:solidFill>
                   <a:srgbClr val="0E8385"/>
                 </a:solidFill>
@@ -14751,7 +14751,7 @@
               </a:rPr>
               <a:t>0.77 (0.60–0.99)</a:t>
             </a:r>
-            <a:endParaRPr lang="en-US" sz="1100" dirty="0"/>
+            <a:endParaRPr lang="en-US" sz="1250" dirty="0"/>
           </a:p>
         </p:txBody>
       </p:sp>
@@ -14783,9 +14783,9 @@
               <a:buNone/>
             </a:pPr>
             <a:r>
-              <a:rPr lang="en-US" sz="1100" dirty="0">
-                <a:solidFill>
-                  <a:srgbClr val="22343C"/>
+              <a:rPr lang="en-US" sz="1250" dirty="0">
+                <a:solidFill>
+                  <a:srgbClr val="13212A"/>
                 </a:solidFill>
                 <a:latin typeface="Calibri" pitchFamily="34" charset="0"/>
                 <a:ea typeface="Calibri" pitchFamily="34" charset="-122"/>
@@ -14793,7 +14793,7 @@
               </a:rPr>
               <a:t>0.04</a:t>
             </a:r>
-            <a:endParaRPr lang="en-US" sz="1100" dirty="0"/>
+            <a:endParaRPr lang="en-US" sz="1250" dirty="0"/>
           </a:p>
         </p:txBody>
       </p:sp>
@@ -14848,7 +14848,7 @@
               <a:buNone/>
             </a:pPr>
             <a:r>
-              <a:rPr lang="en-US" sz="1100" b="1" dirty="0">
+              <a:rPr lang="en-US" sz="1250" b="1" dirty="0">
                 <a:solidFill>
                   <a:srgbClr val="0F3446"/>
                 </a:solidFill>
@@ -14858,7 +14858,7 @@
               </a:rPr>
               <a:t>Kidney</a:t>
             </a:r>
-            <a:endParaRPr lang="en-US" sz="1100" dirty="0"/>
+            <a:endParaRPr lang="en-US" sz="1250" dirty="0"/>
           </a:p>
         </p:txBody>
       </p:sp>
@@ -14890,9 +14890,9 @@
               <a:buNone/>
             </a:pPr>
             <a:r>
-              <a:rPr lang="en-US" sz="1100" dirty="0">
-                <a:solidFill>
-                  <a:srgbClr val="22343C"/>
+              <a:rPr lang="en-US" sz="1250" dirty="0">
+                <a:solidFill>
+                  <a:srgbClr val="13212A"/>
                 </a:solidFill>
                 <a:latin typeface="Calibri" pitchFamily="34" charset="0"/>
                 <a:ea typeface="Calibri" pitchFamily="34" charset="-122"/>
@@ -14900,7 +14900,7 @@
               </a:rPr>
               <a:t>104 / 125</a:t>
             </a:r>
-            <a:endParaRPr lang="en-US" sz="1100" dirty="0"/>
+            <a:endParaRPr lang="en-US" sz="1250" dirty="0"/>
           </a:p>
         </p:txBody>
       </p:sp>
@@ -14932,7 +14932,7 @@
               <a:buNone/>
             </a:pPr>
             <a:r>
-              <a:rPr lang="en-US" sz="1100" b="1" dirty="0">
+              <a:rPr lang="en-US" sz="1250" b="1" dirty="0">
                 <a:solidFill>
                   <a:srgbClr val="0E8385"/>
                 </a:solidFill>
@@ -14942,7 +14942,7 @@
               </a:rPr>
               <a:t>0.78 (0.60–1.01)</a:t>
             </a:r>
-            <a:endParaRPr lang="en-US" sz="1100" dirty="0"/>
+            <a:endParaRPr lang="en-US" sz="1250" dirty="0"/>
           </a:p>
         </p:txBody>
       </p:sp>
@@ -14974,9 +14974,9 @@
               <a:buNone/>
             </a:pPr>
             <a:r>
-              <a:rPr lang="en-US" sz="1100" dirty="0">
-                <a:solidFill>
-                  <a:srgbClr val="22343C"/>
+              <a:rPr lang="en-US" sz="1250" dirty="0">
+                <a:solidFill>
+                  <a:srgbClr val="13212A"/>
                 </a:solidFill>
                 <a:latin typeface="Calibri" pitchFamily="34" charset="0"/>
                 <a:ea typeface="Calibri" pitchFamily="34" charset="-122"/>
@@ -14984,7 +14984,7 @@
               </a:rPr>
               <a:t>0.06</a:t>
             </a:r>
-            <a:endParaRPr lang="en-US" sz="1100" dirty="0"/>
+            <a:endParaRPr lang="en-US" sz="1250" dirty="0"/>
           </a:p>
         </p:txBody>
       </p:sp>
@@ -15039,7 +15039,7 @@
               <a:buNone/>
             </a:pPr>
             <a:r>
-              <a:rPr lang="en-US" sz="1100" b="1" dirty="0">
+              <a:rPr lang="en-US" sz="1250" b="1" dirty="0">
                 <a:solidFill>
                   <a:srgbClr val="0F3446"/>
                 </a:solidFill>
@@ -15049,7 +15049,7 @@
               </a:rPr>
               <a:t>CV</a:t>
             </a:r>
-            <a:endParaRPr lang="en-US" sz="1100" dirty="0"/>
+            <a:endParaRPr lang="en-US" sz="1250" dirty="0"/>
           </a:p>
         </p:txBody>
       </p:sp>
@@ -15081,9 +15081,9 @@
               <a:buNone/>
             </a:pPr>
             <a:r>
-              <a:rPr lang="en-US" sz="1100" dirty="0">
-                <a:solidFill>
-                  <a:srgbClr val="22343C"/>
+              <a:rPr lang="en-US" sz="1250" dirty="0">
+                <a:solidFill>
+                  <a:srgbClr val="13212A"/>
                 </a:solidFill>
                 <a:latin typeface="Calibri" pitchFamily="34" charset="0"/>
                 <a:ea typeface="Calibri" pitchFamily="34" charset="-122"/>
@@ -15091,7 +15091,7 @@
               </a:rPr>
               <a:t>10 / 16</a:t>
             </a:r>
-            <a:endParaRPr lang="en-US" sz="1100" dirty="0"/>
+            <a:endParaRPr lang="en-US" sz="1250" dirty="0"/>
           </a:p>
         </p:txBody>
       </p:sp>
@@ -15123,7 +15123,7 @@
               <a:buNone/>
             </a:pPr>
             <a:r>
-              <a:rPr lang="en-US" sz="1100" b="1" dirty="0">
+              <a:rPr lang="en-US" sz="1250" b="1" dirty="0">
                 <a:solidFill>
                   <a:srgbClr val="0E8385"/>
                 </a:solidFill>
@@ -15133,7 +15133,7 @@
               </a:rPr>
               <a:t>0.60 (0.27–1.33)</a:t>
             </a:r>
-            <a:endParaRPr lang="en-US" sz="1100" dirty="0"/>
+            <a:endParaRPr lang="en-US" sz="1250" dirty="0"/>
           </a:p>
         </p:txBody>
       </p:sp>
@@ -15165,9 +15165,9 @@
               <a:buNone/>
             </a:pPr>
             <a:r>
-              <a:rPr lang="en-US" sz="1100" dirty="0">
-                <a:solidFill>
-                  <a:srgbClr val="22343C"/>
+              <a:rPr lang="en-US" sz="1250" dirty="0">
+                <a:solidFill>
+                  <a:srgbClr val="13212A"/>
                 </a:solidFill>
                 <a:latin typeface="Calibri" pitchFamily="34" charset="0"/>
                 <a:ea typeface="Calibri" pitchFamily="34" charset="-122"/>
@@ -15175,7 +15175,7 @@
               </a:rPr>
               <a:t>—</a:t>
             </a:r>
-            <a:endParaRPr lang="en-US" sz="1100" dirty="0"/>
+            <a:endParaRPr lang="en-US" sz="1250" dirty="0"/>
           </a:p>
         </p:txBody>
       </p:sp>
@@ -15207,9 +15207,9 @@
               <a:buNone/>
             </a:pPr>
             <a:r>
-              <a:rPr lang="en-US" sz="1200" dirty="0">
-                <a:solidFill>
-                  <a:srgbClr val="22343C"/>
+              <a:rPr lang="en-US" sz="1350" dirty="0">
+                <a:solidFill>
+                  <a:srgbClr val="13212A"/>
                 </a:solidFill>
                 <a:latin typeface="Calibri" pitchFamily="34" charset="0"/>
                 <a:ea typeface="Calibri" pitchFamily="34" charset="-122"/>
@@ -15217,7 +15217,7 @@
               </a:rPr>
               <a:t>Finerenone vs placebo, n of events. The hierarchy is protected at the kidney–CV composite; P values below it are nominal, and the CV composite rests on only 26 events.</a:t>
             </a:r>
-            <a:endParaRPr lang="en-US" sz="1200" dirty="0"/>
+            <a:endParaRPr lang="en-US" sz="1350" dirty="0"/>
           </a:p>
         </p:txBody>
       </p:sp>
@@ -15326,7 +15326,7 @@
             <a:r>
               <a:rPr lang="en-US" sz="850" dirty="0">
                 <a:solidFill>
-                  <a:srgbClr val="6C7C84"/>
+                  <a:srgbClr val="4E5E66"/>
                 </a:solidFill>
                 <a:latin typeface="Calibri" pitchFamily="34" charset="0"/>
                 <a:ea typeface="Calibri" pitchFamily="34" charset="-122"/>
@@ -15365,7 +15365,7 @@
             <a:r>
               <a:rPr lang="en-US" sz="850" dirty="0">
                 <a:solidFill>
-                  <a:srgbClr val="22343C"/>
+                  <a:srgbClr val="13212A"/>
                 </a:solidFill>
                 <a:latin typeface="Calibri" pitchFamily="34" charset="0"/>
                 <a:ea typeface="Calibri" pitchFamily="34" charset="-122"/>
@@ -15404,7 +15404,7 @@
             <a:r>
               <a:rPr lang="en-US" sz="850" dirty="0">
                 <a:solidFill>
-                  <a:srgbClr val="22343C"/>
+                  <a:srgbClr val="13212A"/>
                 </a:solidFill>
                 <a:latin typeface="Calibri" pitchFamily="34" charset="0"/>
                 <a:ea typeface="Calibri" pitchFamily="34" charset="-122"/>
@@ -15443,7 +15443,7 @@
             <a:r>
               <a:rPr lang="en-US" sz="850" dirty="0">
                 <a:solidFill>
-                  <a:srgbClr val="22343C"/>
+                  <a:srgbClr val="13212A"/>
                 </a:solidFill>
                 <a:latin typeface="Calibri" pitchFamily="34" charset="0"/>
                 <a:ea typeface="Calibri" pitchFamily="34" charset="-122"/>
@@ -15482,7 +15482,7 @@
             <a:r>
               <a:rPr lang="en-US" sz="850" dirty="0">
                 <a:solidFill>
-                  <a:srgbClr val="22343C"/>
+                  <a:srgbClr val="13212A"/>
                 </a:solidFill>
                 <a:latin typeface="Calibri" pitchFamily="34" charset="0"/>
                 <a:ea typeface="Calibri" pitchFamily="34" charset="-122"/>
@@ -15521,7 +15521,7 @@
             <a:r>
               <a:rPr lang="en-US" sz="850" dirty="0">
                 <a:solidFill>
-                  <a:srgbClr val="22343C"/>
+                  <a:srgbClr val="13212A"/>
                 </a:solidFill>
                 <a:latin typeface="Calibri" pitchFamily="34" charset="0"/>
                 <a:ea typeface="Calibri" pitchFamily="34" charset="-122"/>
@@ -15560,7 +15560,7 @@
             <a:r>
               <a:rPr lang="en-US" sz="850" dirty="0">
                 <a:solidFill>
-                  <a:srgbClr val="22343C"/>
+                  <a:srgbClr val="13212A"/>
                 </a:solidFill>
                 <a:latin typeface="Calibri" pitchFamily="34" charset="0"/>
                 <a:ea typeface="Calibri" pitchFamily="34" charset="-122"/>
@@ -15599,7 +15599,7 @@
             <a:r>
               <a:rPr lang="en-US" sz="850" dirty="0">
                 <a:solidFill>
-                  <a:srgbClr val="22343C"/>
+                  <a:srgbClr val="13212A"/>
                 </a:solidFill>
                 <a:latin typeface="Calibri" pitchFamily="34" charset="0"/>
                 <a:ea typeface="Calibri" pitchFamily="34" charset="-122"/>
@@ -15638,7 +15638,7 @@
             <a:r>
               <a:rPr lang="en-US" sz="850" dirty="0">
                 <a:solidFill>
-                  <a:srgbClr val="22343C"/>
+                  <a:srgbClr val="13212A"/>
                 </a:solidFill>
                 <a:latin typeface="Calibri" pitchFamily="34" charset="0"/>
                 <a:ea typeface="Calibri" pitchFamily="34" charset="-122"/>
@@ -15677,7 +15677,7 @@
             <a:r>
               <a:rPr lang="en-US" sz="850" dirty="0">
                 <a:solidFill>
-                  <a:srgbClr val="22343C"/>
+                  <a:srgbClr val="13212A"/>
                 </a:solidFill>
                 <a:latin typeface="Calibri" pitchFamily="34" charset="0"/>
                 <a:ea typeface="Calibri" pitchFamily="34" charset="-122"/>
@@ -15716,7 +15716,7 @@
             <a:r>
               <a:rPr lang="en-US" sz="850" dirty="0">
                 <a:solidFill>
-                  <a:srgbClr val="22343C"/>
+                  <a:srgbClr val="13212A"/>
                 </a:solidFill>
                 <a:latin typeface="Calibri" pitchFamily="34" charset="0"/>
                 <a:ea typeface="Calibri" pitchFamily="34" charset="-122"/>
@@ -15755,7 +15755,7 @@
             <a:r>
               <a:rPr lang="en-US" sz="850" dirty="0">
                 <a:solidFill>
-                  <a:srgbClr val="22343C"/>
+                  <a:srgbClr val="13212A"/>
                 </a:solidFill>
                 <a:latin typeface="Calibri" pitchFamily="34" charset="0"/>
                 <a:ea typeface="Calibri" pitchFamily="34" charset="-122"/>
@@ -15794,7 +15794,7 @@
             <a:r>
               <a:rPr lang="en-US" sz="850" dirty="0">
                 <a:solidFill>
-                  <a:srgbClr val="22343C"/>
+                  <a:srgbClr val="13212A"/>
                 </a:solidFill>
                 <a:latin typeface="Calibri" pitchFamily="34" charset="0"/>
                 <a:ea typeface="Calibri" pitchFamily="34" charset="-122"/>
@@ -15833,7 +15833,7 @@
             <a:r>
               <a:rPr lang="en-US" sz="850" dirty="0">
                 <a:solidFill>
-                  <a:srgbClr val="22343C"/>
+                  <a:srgbClr val="13212A"/>
                 </a:solidFill>
                 <a:latin typeface="Calibri" pitchFamily="34" charset="0"/>
                 <a:ea typeface="Calibri" pitchFamily="34" charset="-122"/>
@@ -15872,7 +15872,7 @@
             <a:r>
               <a:rPr lang="en-US" sz="850" dirty="0">
                 <a:solidFill>
-                  <a:srgbClr val="22343C"/>
+                  <a:srgbClr val="13212A"/>
                 </a:solidFill>
                 <a:latin typeface="Calibri" pitchFamily="34" charset="0"/>
                 <a:ea typeface="Calibri" pitchFamily="34" charset="-122"/>
@@ -15911,7 +15911,7 @@
             <a:r>
               <a:rPr lang="en-US" sz="850" i="1" dirty="0">
                 <a:solidFill>
-                  <a:srgbClr val="6C7C84"/>
+                  <a:srgbClr val="4E5E66"/>
                 </a:solidFill>
                 <a:latin typeface="Calibri" pitchFamily="34" charset="0"/>
                 <a:ea typeface="Calibri" pitchFamily="34" charset="-122"/>
@@ -15964,7 +15964,7 @@
             <a:r>
               <a:rPr lang="en-US" sz="900" dirty="0">
                 <a:solidFill>
-                  <a:srgbClr val="6C7C84"/>
+                  <a:srgbClr val="4E5E66"/>
                 </a:solidFill>
                 <a:latin typeface="Calibri" pitchFamily="34" charset="0"/>
                 <a:ea typeface="Calibri" pitchFamily="34" charset="-122"/>
@@ -16003,7 +16003,7 @@
             <a:r>
               <a:rPr lang="en-US" sz="900" dirty="0">
                 <a:solidFill>
-                  <a:srgbClr val="6C7C84"/>
+                  <a:srgbClr val="4E5E66"/>
                 </a:solidFill>
                 <a:latin typeface="Calibri" pitchFamily="34" charset="0"/>
                 <a:ea typeface="Calibri" pitchFamily="34" charset="-122"/>
@@ -16101,8 +16101,8 @@
         </p:nvSpPr>
         <p:spPr>
           <a:xfrm>
-            <a:off x="1389888" y="329184"/>
-            <a:ext cx="10158984" cy="566928"/>
+            <a:off x="1389888" y="310896"/>
+            <a:ext cx="10158984" cy="603504"/>
           </a:xfrm>
           <a:prstGeom prst="rect">
             <a:avLst/>
@@ -16118,7 +16118,7 @@
               <a:buNone/>
             </a:pPr>
             <a:r>
-              <a:rPr lang="en-US" sz="2300" b="1" dirty="0">
+              <a:rPr lang="en-US" sz="2600" b="1" dirty="0">
                 <a:solidFill>
                   <a:srgbClr val="0F3446"/>
                 </a:solidFill>
@@ -16128,7 +16128,7 @@
               </a:rPr>
               <a:t>Disclosures &amp; funding</a:t>
             </a:r>
-            <a:endParaRPr lang="en-US" sz="2300" dirty="0"/>
+            <a:endParaRPr lang="en-US" sz="2600" dirty="0"/>
           </a:p>
         </p:txBody>
       </p:sp>
@@ -16164,9 +16164,9 @@
               <a:buChar char="•"/>
             </a:pPr>
             <a:r>
-              <a:rPr lang="en-US" sz="1400" dirty="0">
-                <a:solidFill>
-                  <a:srgbClr val="22343C"/>
+              <a:rPr lang="en-US" sz="1550" dirty="0">
+                <a:solidFill>
+                  <a:srgbClr val="13212A"/>
                 </a:solidFill>
                 <a:latin typeface="Calibri" pitchFamily="34" charset="0"/>
                 <a:ea typeface="Calibri" pitchFamily="34" charset="-122"/>
@@ -16174,7 +16174,7 @@
               </a:rPr>
               <a:t>FIND-CKD was funded by Bayer, the manufacturer of finerenone.</a:t>
             </a:r>
-            <a:endParaRPr lang="en-US" sz="1400" dirty="0"/>
+            <a:endParaRPr lang="en-US" sz="1550" dirty="0"/>
           </a:p>
           <a:p>
             <a:pPr marL="203200" indent="-203200">
@@ -16188,9 +16188,9 @@
               <a:buChar char="•"/>
             </a:pPr>
             <a:r>
-              <a:rPr lang="en-US" sz="1400" dirty="0">
-                <a:solidFill>
-                  <a:srgbClr val="22343C"/>
+              <a:rPr lang="en-US" sz="1550" dirty="0">
+                <a:solidFill>
+                  <a:srgbClr val="13212A"/>
                 </a:solidFill>
                 <a:latin typeface="Calibri" pitchFamily="34" charset="0"/>
                 <a:ea typeface="Calibri" pitchFamily="34" charset="-122"/>
@@ -16198,7 +16198,7 @@
               </a:rPr>
               <a:t>The sponsor took part in trial design and data analysis. The analyses were reproduced independently at University Medical Center Groningen using the original data.</a:t>
             </a:r>
-            <a:endParaRPr lang="en-US" sz="1400" dirty="0"/>
+            <a:endParaRPr lang="en-US" sz="1550" dirty="0"/>
           </a:p>
           <a:p>
             <a:pPr marL="203200" indent="-203200">
@@ -16212,9 +16212,9 @@
               <a:buChar char="•"/>
             </a:pPr>
             <a:r>
-              <a:rPr lang="en-US" sz="1400" dirty="0">
-                <a:solidFill>
-                  <a:srgbClr val="22343C"/>
+              <a:rPr lang="en-US" sz="1550" dirty="0">
+                <a:solidFill>
+                  <a:srgbClr val="13212A"/>
                 </a:solidFill>
                 <a:latin typeface="Calibri" pitchFamily="34" charset="0"/>
                 <a:ea typeface="Calibri" pitchFamily="34" charset="-122"/>
@@ -16222,7 +16222,7 @@
               </a:rPr>
               <a:t>The first and last authors had full access to the data and vouch for its accuracy and completeness.</a:t>
             </a:r>
-            <a:endParaRPr lang="en-US" sz="1400" dirty="0"/>
+            <a:endParaRPr lang="en-US" sz="1550" dirty="0"/>
           </a:p>
           <a:p>
             <a:pPr marL="203200" indent="-203200">
@@ -16236,9 +16236,9 @@
               <a:buChar char="•"/>
             </a:pPr>
             <a:r>
-              <a:rPr lang="en-US" sz="1400" dirty="0">
-                <a:solidFill>
-                  <a:srgbClr val="22343C"/>
+              <a:rPr lang="en-US" sz="1550" dirty="0">
+                <a:solidFill>
+                  <a:srgbClr val="13212A"/>
                 </a:solidFill>
                 <a:latin typeface="Calibri" pitchFamily="34" charset="0"/>
                 <a:ea typeface="Calibri" pitchFamily="34" charset="-122"/>
@@ -16246,7 +16246,7 @@
               </a:rPr>
               <a:t>Presenter disclosures: [state relevant relationships, or “none”].</a:t>
             </a:r>
-            <a:endParaRPr lang="en-US" sz="1400" dirty="0"/>
+            <a:endParaRPr lang="en-US" sz="1550" dirty="0"/>
           </a:p>
           <a:p>
             <a:pPr marL="203200" indent="-203200">
@@ -16260,9 +16260,9 @@
               <a:buChar char="•"/>
             </a:pPr>
             <a:r>
-              <a:rPr lang="en-US" sz="1400" dirty="0">
-                <a:solidFill>
-                  <a:srgbClr val="22343C"/>
+              <a:rPr lang="en-US" sz="1550" dirty="0">
+                <a:solidFill>
+                  <a:srgbClr val="13212A"/>
                 </a:solidFill>
                 <a:latin typeface="Calibri" pitchFamily="34" charset="0"/>
                 <a:ea typeface="Calibri" pitchFamily="34" charset="-122"/>
@@ -16270,7 +16270,7 @@
               </a:rPr>
               <a:t>This is an educational journal-club summary, not promotional material.</a:t>
             </a:r>
-            <a:endParaRPr lang="en-US" sz="1400" dirty="0"/>
+            <a:endParaRPr lang="en-US" sz="1550" dirty="0"/>
           </a:p>
         </p:txBody>
       </p:sp>
@@ -16315,7 +16315,7 @@
             <a:r>
               <a:rPr lang="en-US" sz="900" dirty="0">
                 <a:solidFill>
-                  <a:srgbClr val="6C7C84"/>
+                  <a:srgbClr val="4E5E66"/>
                 </a:solidFill>
                 <a:latin typeface="Calibri" pitchFamily="34" charset="0"/>
                 <a:ea typeface="Calibri" pitchFamily="34" charset="-122"/>
@@ -16354,7 +16354,7 @@
             <a:r>
               <a:rPr lang="en-US" sz="900" dirty="0">
                 <a:solidFill>
-                  <a:srgbClr val="6C7C84"/>
+                  <a:srgbClr val="4E5E66"/>
                 </a:solidFill>
                 <a:latin typeface="Calibri" pitchFamily="34" charset="0"/>
                 <a:ea typeface="Calibri" pitchFamily="34" charset="-122"/>
@@ -16452,8 +16452,8 @@
         </p:nvSpPr>
         <p:spPr>
           <a:xfrm>
-            <a:off x="1389888" y="329184"/>
-            <a:ext cx="10158984" cy="566928"/>
+            <a:off x="1389888" y="310896"/>
+            <a:ext cx="10158984" cy="603504"/>
           </a:xfrm>
           <a:prstGeom prst="rect">
             <a:avLst/>
@@ -16469,7 +16469,7 @@
               <a:buNone/>
             </a:pPr>
             <a:r>
-              <a:rPr lang="en-US" sz="2300" b="1" dirty="0">
+              <a:rPr lang="en-US" sz="2600" b="1" dirty="0">
                 <a:solidFill>
                   <a:srgbClr val="0F3446"/>
                 </a:solidFill>
@@ -16479,7 +16479,7 @@
               </a:rPr>
               <a:t>Albuminuria: an early, large signal</a:t>
             </a:r>
-            <a:endParaRPr lang="en-US" sz="2300" dirty="0"/>
+            <a:endParaRPr lang="en-US" sz="2600" dirty="0"/>
           </a:p>
         </p:txBody>
       </p:sp>
@@ -16511,7 +16511,7 @@
               <a:buNone/>
             </a:pPr>
             <a:r>
-              <a:rPr lang="en-US" sz="1450" b="1" dirty="0">
+              <a:rPr lang="en-US" sz="1600" b="1" dirty="0">
                 <a:solidFill>
                   <a:srgbClr val="0E8385"/>
                 </a:solidFill>
@@ -16521,7 +16521,7 @@
               </a:rPr>
               <a:t>UACR fell about 41% by month 6 with finerenone, against 9% with placebo.</a:t>
             </a:r>
-            <a:endParaRPr lang="en-US" sz="1450" dirty="0"/>
+            <a:endParaRPr lang="en-US" sz="1600" dirty="0"/>
           </a:p>
         </p:txBody>
       </p:sp>
@@ -16592,9 +16592,9 @@
               <a:buNone/>
             </a:pPr>
             <a:r>
-              <a:rPr lang="en-US" sz="1200" dirty="0">
-                <a:solidFill>
-                  <a:srgbClr val="22343C"/>
+              <a:rPr lang="en-US" sz="1350" dirty="0">
+                <a:solidFill>
+                  <a:srgbClr val="13212A"/>
                 </a:solidFill>
                 <a:latin typeface="Calibri" pitchFamily="34" charset="0"/>
                 <a:ea typeface="Calibri" pitchFamily="34" charset="-122"/>
@@ -16602,7 +16602,7 @@
               </a:rPr>
               <a:t>UACR change to month 6 with finerenone vs −9% with placebo</a:t>
             </a:r>
-            <a:endParaRPr lang="en-US" sz="1200" dirty="0"/>
+            <a:endParaRPr lang="en-US" sz="1350" dirty="0"/>
           </a:p>
         </p:txBody>
       </p:sp>
@@ -16673,9 +16673,9 @@
               <a:buNone/>
             </a:pPr>
             <a:r>
-              <a:rPr lang="en-US" sz="1200" dirty="0">
-                <a:solidFill>
-                  <a:srgbClr val="22343C"/>
+              <a:rPr lang="en-US" sz="1350" dirty="0">
+                <a:solidFill>
+                  <a:srgbClr val="13212A"/>
                 </a:solidFill>
                 <a:latin typeface="Calibri" pitchFamily="34" charset="0"/>
                 <a:ea typeface="Calibri" pitchFamily="34" charset="-122"/>
@@ -16683,7 +16683,7 @@
               </a:rPr>
               <a:t>odds of a ≥30% UACR reduction vs placebo (95% CI 3.22–4.95)</a:t>
             </a:r>
-            <a:endParaRPr lang="en-US" sz="1200" dirty="0"/>
+            <a:endParaRPr lang="en-US" sz="1350" dirty="0"/>
           </a:p>
         </p:txBody>
       </p:sp>
@@ -16719,9 +16719,9 @@
               <a:buChar char="•"/>
             </a:pPr>
             <a:r>
-              <a:rPr lang="en-US" sz="1350" dirty="0">
-                <a:solidFill>
-                  <a:srgbClr val="22343C"/>
+              <a:rPr lang="en-US" sz="1500" dirty="0">
+                <a:solidFill>
+                  <a:srgbClr val="13212A"/>
                 </a:solidFill>
                 <a:latin typeface="Calibri" pitchFamily="34" charset="0"/>
                 <a:ea typeface="Calibri" pitchFamily="34" charset="-122"/>
@@ -16729,7 +16729,7 @@
               </a:rPr>
               <a:t>Relative between-group difference in UACR of about 35% (95% CI 30.9 to 39.6), sustained over time.</a:t>
             </a:r>
-            <a:endParaRPr lang="en-US" sz="1350" dirty="0"/>
+            <a:endParaRPr lang="en-US" sz="1500" dirty="0"/>
           </a:p>
           <a:p>
             <a:pPr marL="203200" indent="-203200">
@@ -16743,9 +16743,9 @@
               <a:buChar char="•"/>
             </a:pPr>
             <a:r>
-              <a:rPr lang="en-US" sz="1350" dirty="0">
-                <a:solidFill>
-                  <a:srgbClr val="22343C"/>
+              <a:rPr lang="en-US" sz="1500" dirty="0">
+                <a:solidFill>
+                  <a:srgbClr val="13212A"/>
                 </a:solidFill>
                 <a:latin typeface="Calibri" pitchFamily="34" charset="0"/>
                 <a:ea typeface="Calibri" pitchFamily="34" charset="-122"/>
@@ -16753,7 +16753,7 @@
               </a:rPr>
               <a:t>A ≥30% UACR reduction at month 6 in 56.0% of the finerenone group vs 24.4% of placebo.</a:t>
             </a:r>
-            <a:endParaRPr lang="en-US" sz="1350" dirty="0"/>
+            <a:endParaRPr lang="en-US" sz="1500" dirty="0"/>
           </a:p>
           <a:p>
             <a:pPr marL="203200" indent="-203200">
@@ -16767,9 +16767,9 @@
               <a:buChar char="•"/>
             </a:pPr>
             <a:r>
-              <a:rPr lang="en-US" sz="1350" dirty="0">
-                <a:solidFill>
-                  <a:srgbClr val="22343C"/>
+              <a:rPr lang="en-US" sz="1500" dirty="0">
+                <a:solidFill>
+                  <a:srgbClr val="13212A"/>
                 </a:solidFill>
                 <a:latin typeface="Calibri" pitchFamily="34" charset="0"/>
                 <a:ea typeface="Calibri" pitchFamily="34" charset="-122"/>
@@ -16777,7 +16777,7 @@
               </a:rPr>
               <a:t>Albuminuria lowering is an early, on-treatment marker and tracks with the larger slope benefit in the heavy-albuminuria subgroup.</a:t>
             </a:r>
-            <a:endParaRPr lang="en-US" sz="1350" dirty="0"/>
+            <a:endParaRPr lang="en-US" sz="1500" dirty="0"/>
           </a:p>
           <a:p>
             <a:pPr marL="203200" indent="-203200">
@@ -16791,9 +16791,9 @@
               <a:buChar char="•"/>
             </a:pPr>
             <a:r>
-              <a:rPr lang="en-US" sz="1350" dirty="0">
-                <a:solidFill>
-                  <a:srgbClr val="22343C"/>
+              <a:rPr lang="en-US" sz="1500" dirty="0">
+                <a:solidFill>
+                  <a:srgbClr val="13212A"/>
                 </a:solidFill>
                 <a:latin typeface="Calibri" pitchFamily="34" charset="0"/>
                 <a:ea typeface="Calibri" pitchFamily="34" charset="-122"/>
@@ -16801,7 +16801,7 @@
               </a:rPr>
               <a:t>This is the mechanistic fingerprint of MR blockade, and it appears within months.</a:t>
             </a:r>
-            <a:endParaRPr lang="en-US" sz="1350" dirty="0"/>
+            <a:endParaRPr lang="en-US" sz="1500" dirty="0"/>
           </a:p>
         </p:txBody>
       </p:sp>
@@ -16846,7 +16846,7 @@
             <a:r>
               <a:rPr lang="en-US" sz="900" dirty="0">
                 <a:solidFill>
-                  <a:srgbClr val="6C7C84"/>
+                  <a:srgbClr val="4E5E66"/>
                 </a:solidFill>
                 <a:latin typeface="Calibri" pitchFamily="34" charset="0"/>
                 <a:ea typeface="Calibri" pitchFamily="34" charset="-122"/>
@@ -16885,7 +16885,7 @@
             <a:r>
               <a:rPr lang="en-US" sz="900" dirty="0">
                 <a:solidFill>
-                  <a:srgbClr val="6C7C84"/>
+                  <a:srgbClr val="4E5E66"/>
                 </a:solidFill>
                 <a:latin typeface="Calibri" pitchFamily="34" charset="0"/>
                 <a:ea typeface="Calibri" pitchFamily="34" charset="-122"/>
@@ -16983,8 +16983,8 @@
         </p:nvSpPr>
         <p:spPr>
           <a:xfrm>
-            <a:off x="1389888" y="329184"/>
-            <a:ext cx="10158984" cy="566928"/>
+            <a:off x="1389888" y="310896"/>
+            <a:ext cx="10158984" cy="603504"/>
           </a:xfrm>
           <a:prstGeom prst="rect">
             <a:avLst/>
@@ -17000,7 +17000,7 @@
               <a:buNone/>
             </a:pPr>
             <a:r>
-              <a:rPr lang="en-US" sz="2300" b="1" dirty="0">
+              <a:rPr lang="en-US" sz="2600" b="1" dirty="0">
                 <a:solidFill>
                   <a:srgbClr val="0F3446"/>
                 </a:solidFill>
@@ -17010,7 +17010,7 @@
               </a:rPr>
               <a:t>Blood pressure and other exploratory findings</a:t>
             </a:r>
-            <a:endParaRPr lang="en-US" sz="2300" dirty="0"/>
+            <a:endParaRPr lang="en-US" sz="2600" dirty="0"/>
           </a:p>
         </p:txBody>
       </p:sp>
@@ -17039,7 +17039,7 @@
               <a:buNone/>
             </a:pPr>
             <a:r>
-              <a:rPr lang="en-US" sz="1400" b="1" dirty="0">
+              <a:rPr lang="en-US" sz="1550" b="1" dirty="0">
                 <a:solidFill>
                   <a:srgbClr val="0E8385"/>
                 </a:solidFill>
@@ -17049,7 +17049,7 @@
               </a:rPr>
               <a:t>Blood pressure (to month 3)</a:t>
             </a:r>
-            <a:endParaRPr lang="en-US" sz="1400" dirty="0"/>
+            <a:endParaRPr lang="en-US" sz="1550" dirty="0"/>
           </a:p>
         </p:txBody>
       </p:sp>
@@ -17101,7 +17101,7 @@
               <a:buNone/>
             </a:pPr>
             <a:r>
-              <a:rPr lang="en-US" sz="1200" b="1" dirty="0">
+              <a:rPr lang="en-US" sz="1300" b="1" dirty="0">
                 <a:solidFill>
                   <a:srgbClr val="FFFFFF"/>
                 </a:solidFill>
@@ -17111,7 +17111,7 @@
               </a:rPr>
               <a:t>Change, mm Hg</a:t>
             </a:r>
-            <a:endParaRPr lang="en-US" sz="1200" dirty="0"/>
+            <a:endParaRPr lang="en-US" sz="1300" dirty="0"/>
           </a:p>
         </p:txBody>
       </p:sp>
@@ -17143,7 +17143,7 @@
               <a:buNone/>
             </a:pPr>
             <a:r>
-              <a:rPr lang="en-US" sz="1200" b="1" dirty="0">
+              <a:rPr lang="en-US" sz="1300" b="1" dirty="0">
                 <a:solidFill>
                   <a:srgbClr val="FFFFFF"/>
                 </a:solidFill>
@@ -17153,7 +17153,7 @@
               </a:rPr>
               <a:t>Finer.</a:t>
             </a:r>
-            <a:endParaRPr lang="en-US" sz="1200" dirty="0"/>
+            <a:endParaRPr lang="en-US" sz="1300" dirty="0"/>
           </a:p>
         </p:txBody>
       </p:sp>
@@ -17185,7 +17185,7 @@
               <a:buNone/>
             </a:pPr>
             <a:r>
-              <a:rPr lang="en-US" sz="1200" b="1" dirty="0">
+              <a:rPr lang="en-US" sz="1300" b="1" dirty="0">
                 <a:solidFill>
                   <a:srgbClr val="FFFFFF"/>
                 </a:solidFill>
@@ -17195,7 +17195,7 @@
               </a:rPr>
               <a:t>Placebo</a:t>
             </a:r>
-            <a:endParaRPr lang="en-US" sz="1200" dirty="0"/>
+            <a:endParaRPr lang="en-US" sz="1300" dirty="0"/>
           </a:p>
         </p:txBody>
       </p:sp>
@@ -17250,7 +17250,7 @@
               <a:buNone/>
             </a:pPr>
             <a:r>
-              <a:rPr lang="en-US" sz="1200" b="1" dirty="0">
+              <a:rPr lang="en-US" sz="1350" b="1" dirty="0">
                 <a:solidFill>
                   <a:srgbClr val="0F3446"/>
                 </a:solidFill>
@@ -17260,7 +17260,7 @@
               </a:rPr>
               <a:t>Systolic</a:t>
             </a:r>
-            <a:endParaRPr lang="en-US" sz="1200" dirty="0"/>
+            <a:endParaRPr lang="en-US" sz="1350" dirty="0"/>
           </a:p>
         </p:txBody>
       </p:sp>
@@ -17292,9 +17292,9 @@
               <a:buNone/>
             </a:pPr>
             <a:r>
-              <a:rPr lang="en-US" sz="1200" dirty="0">
-                <a:solidFill>
-                  <a:srgbClr val="22343C"/>
+              <a:rPr lang="en-US" sz="1350" dirty="0">
+                <a:solidFill>
+                  <a:srgbClr val="13212A"/>
                 </a:solidFill>
                 <a:latin typeface="Calibri" pitchFamily="34" charset="0"/>
                 <a:ea typeface="Calibri" pitchFamily="34" charset="-122"/>
@@ -17302,7 +17302,7 @@
               </a:rPr>
               <a:t>−5.1</a:t>
             </a:r>
-            <a:endParaRPr lang="en-US" sz="1200" dirty="0"/>
+            <a:endParaRPr lang="en-US" sz="1350" dirty="0"/>
           </a:p>
         </p:txBody>
       </p:sp>
@@ -17334,9 +17334,9 @@
               <a:buNone/>
             </a:pPr>
             <a:r>
-              <a:rPr lang="en-US" sz="1200" dirty="0">
-                <a:solidFill>
-                  <a:srgbClr val="22343C"/>
+              <a:rPr lang="en-US" sz="1350" dirty="0">
+                <a:solidFill>
+                  <a:srgbClr val="13212A"/>
                 </a:solidFill>
                 <a:latin typeface="Calibri" pitchFamily="34" charset="0"/>
                 <a:ea typeface="Calibri" pitchFamily="34" charset="-122"/>
@@ -17344,7 +17344,7 @@
               </a:rPr>
               <a:t>−0.1</a:t>
             </a:r>
-            <a:endParaRPr lang="en-US" sz="1200" dirty="0"/>
+            <a:endParaRPr lang="en-US" sz="1350" dirty="0"/>
           </a:p>
         </p:txBody>
       </p:sp>
@@ -17399,7 +17399,7 @@
               <a:buNone/>
             </a:pPr>
             <a:r>
-              <a:rPr lang="en-US" sz="1200" b="1" dirty="0">
+              <a:rPr lang="en-US" sz="1350" b="1" dirty="0">
                 <a:solidFill>
                   <a:srgbClr val="0F3446"/>
                 </a:solidFill>
@@ -17409,7 +17409,7 @@
               </a:rPr>
               <a:t>Diastolic</a:t>
             </a:r>
-            <a:endParaRPr lang="en-US" sz="1200" dirty="0"/>
+            <a:endParaRPr lang="en-US" sz="1350" dirty="0"/>
           </a:p>
         </p:txBody>
       </p:sp>
@@ -17441,9 +17441,9 @@
               <a:buNone/>
             </a:pPr>
             <a:r>
-              <a:rPr lang="en-US" sz="1200" dirty="0">
-                <a:solidFill>
-                  <a:srgbClr val="22343C"/>
+              <a:rPr lang="en-US" sz="1350" dirty="0">
+                <a:solidFill>
+                  <a:srgbClr val="13212A"/>
                 </a:solidFill>
                 <a:latin typeface="Calibri" pitchFamily="34" charset="0"/>
                 <a:ea typeface="Calibri" pitchFamily="34" charset="-122"/>
@@ -17451,7 +17451,7 @@
               </a:rPr>
               <a:t>−3.1</a:t>
             </a:r>
-            <a:endParaRPr lang="en-US" sz="1200" dirty="0"/>
+            <a:endParaRPr lang="en-US" sz="1350" dirty="0"/>
           </a:p>
         </p:txBody>
       </p:sp>
@@ -17483,9 +17483,9 @@
               <a:buNone/>
             </a:pPr>
             <a:r>
-              <a:rPr lang="en-US" sz="1200" dirty="0">
-                <a:solidFill>
-                  <a:srgbClr val="22343C"/>
+              <a:rPr lang="en-US" sz="1350" dirty="0">
+                <a:solidFill>
+                  <a:srgbClr val="13212A"/>
                 </a:solidFill>
                 <a:latin typeface="Calibri" pitchFamily="34" charset="0"/>
                 <a:ea typeface="Calibri" pitchFamily="34" charset="-122"/>
@@ -17493,7 +17493,7 @@
               </a:rPr>
               <a:t>&lt;−0.1</a:t>
             </a:r>
-            <a:endParaRPr lang="en-US" sz="1200" dirty="0"/>
+            <a:endParaRPr lang="en-US" sz="1350" dirty="0"/>
           </a:p>
         </p:txBody>
       </p:sp>
@@ -17525,9 +17525,9 @@
               <a:buNone/>
             </a:pPr>
             <a:r>
-              <a:rPr lang="en-US" sz="1250" i="1" dirty="0">
-                <a:solidFill>
-                  <a:srgbClr val="6C7C84"/>
+              <a:rPr lang="en-US" sz="1400" i="1" dirty="0">
+                <a:solidFill>
+                  <a:srgbClr val="4E5E66"/>
                 </a:solidFill>
                 <a:latin typeface="Calibri" pitchFamily="34" charset="0"/>
                 <a:ea typeface="Calibri" pitchFamily="34" charset="-122"/>
@@ -17535,7 +17535,7 @@
               </a:rPr>
               <a:t>A modest BP reduction, in line with the drug's mechanism, but too small to explain the kidney effect on its own.</a:t>
             </a:r>
-            <a:endParaRPr lang="en-US" sz="1250" dirty="0"/>
+            <a:endParaRPr lang="en-US" sz="1400" dirty="0"/>
           </a:p>
         </p:txBody>
       </p:sp>
@@ -17564,7 +17564,7 @@
               <a:buNone/>
             </a:pPr>
             <a:r>
-              <a:rPr lang="en-US" sz="1400" b="1" dirty="0">
+              <a:rPr lang="en-US" sz="1550" b="1" dirty="0">
                 <a:solidFill>
                   <a:srgbClr val="0E8385"/>
                 </a:solidFill>
@@ -17574,7 +17574,7 @@
               </a:rPr>
               <a:t>A broader kidney composite</a:t>
             </a:r>
-            <a:endParaRPr lang="en-US" sz="1400" dirty="0"/>
+            <a:endParaRPr lang="en-US" sz="1550" dirty="0"/>
           </a:p>
         </p:txBody>
       </p:sp>
@@ -17645,9 +17645,9 @@
               <a:buNone/>
             </a:pPr>
             <a:r>
-              <a:rPr lang="en-US" sz="1200" dirty="0">
-                <a:solidFill>
-                  <a:srgbClr val="22343C"/>
+              <a:rPr lang="en-US" sz="1350" dirty="0">
+                <a:solidFill>
+                  <a:srgbClr val="13212A"/>
                 </a:solidFill>
                 <a:latin typeface="Calibri" pitchFamily="34" charset="0"/>
                 <a:ea typeface="Calibri" pitchFamily="34" charset="-122"/>
@@ -17655,7 +17655,7 @@
               </a:rPr>
               <a:t>hazard ratio for sustained ≥40% eGFR decline or kidney failure (95% CI 0.62–0.93)</a:t>
             </a:r>
-            <a:endParaRPr lang="en-US" sz="1200" dirty="0"/>
+            <a:endParaRPr lang="en-US" sz="1350" dirty="0"/>
           </a:p>
         </p:txBody>
       </p:sp>
@@ -17691,9 +17691,9 @@
               <a:buChar char="•"/>
             </a:pPr>
             <a:r>
-              <a:rPr lang="en-US" sz="1250" dirty="0">
-                <a:solidFill>
-                  <a:srgbClr val="22343C"/>
+              <a:rPr lang="en-US" sz="1400" dirty="0">
+                <a:solidFill>
+                  <a:srgbClr val="13212A"/>
                 </a:solidFill>
                 <a:latin typeface="Calibri" pitchFamily="34" charset="0"/>
                 <a:ea typeface="Calibri" pitchFamily="34" charset="-122"/>
@@ -17701,7 +17701,7 @@
               </a:rPr>
               <a:t>168 (21.2%) finerenone vs 206 (26.0%) placebo.</a:t>
             </a:r>
-            <a:endParaRPr lang="en-US" sz="1250" dirty="0"/>
+            <a:endParaRPr lang="en-US" sz="1400" dirty="0"/>
           </a:p>
           <a:p>
             <a:pPr marL="203200" indent="-203200">
@@ -17715,9 +17715,9 @@
               <a:buChar char="•"/>
             </a:pPr>
             <a:r>
-              <a:rPr lang="en-US" sz="1250" dirty="0">
-                <a:solidFill>
-                  <a:srgbClr val="22343C"/>
+              <a:rPr lang="en-US" sz="1400" dirty="0">
+                <a:solidFill>
+                  <a:srgbClr val="13212A"/>
                 </a:solidFill>
                 <a:latin typeface="Calibri" pitchFamily="34" charset="0"/>
                 <a:ea typeface="Calibri" pitchFamily="34" charset="-122"/>
@@ -17725,7 +17725,7 @@
               </a:rPr>
               <a:t>The less stringent ≥40% threshold captures more events and points the same way as the primary.</a:t>
             </a:r>
-            <a:endParaRPr lang="en-US" sz="1250" dirty="0"/>
+            <a:endParaRPr lang="en-US" sz="1400" dirty="0"/>
           </a:p>
         </p:txBody>
       </p:sp>
@@ -17770,7 +17770,7 @@
             <a:r>
               <a:rPr lang="en-US" sz="900" dirty="0">
                 <a:solidFill>
-                  <a:srgbClr val="6C7C84"/>
+                  <a:srgbClr val="4E5E66"/>
                 </a:solidFill>
                 <a:latin typeface="Calibri" pitchFamily="34" charset="0"/>
                 <a:ea typeface="Calibri" pitchFamily="34" charset="-122"/>
@@ -17809,7 +17809,7 @@
             <a:r>
               <a:rPr lang="en-US" sz="900" dirty="0">
                 <a:solidFill>
-                  <a:srgbClr val="6C7C84"/>
+                  <a:srgbClr val="4E5E66"/>
                 </a:solidFill>
                 <a:latin typeface="Calibri" pitchFamily="34" charset="0"/>
                 <a:ea typeface="Calibri" pitchFamily="34" charset="-122"/>
@@ -18005,7 +18005,7 @@
               <a:buNone/>
             </a:pPr>
             <a:r>
-              <a:rPr lang="en-US" sz="1600" dirty="0">
+              <a:rPr lang="en-US" sz="1750" dirty="0">
                 <a:solidFill>
                   <a:srgbClr val="AFC6D2"/>
                 </a:solidFill>
@@ -18015,7 +18015,7 @@
               </a:rPr>
               <a:t>Hyperkalemia in focus, the strengths and limits, and where this sits among the finerenone trials.</a:t>
             </a:r>
-            <a:endParaRPr lang="en-US" sz="1600" dirty="0"/>
+            <a:endParaRPr lang="en-US" sz="1750" dirty="0"/>
           </a:p>
         </p:txBody>
       </p:sp>
@@ -18144,8 +18144,8 @@
         </p:nvSpPr>
         <p:spPr>
           <a:xfrm>
-            <a:off x="1389888" y="329184"/>
-            <a:ext cx="10158984" cy="566928"/>
+            <a:off x="1389888" y="310896"/>
+            <a:ext cx="10158984" cy="603504"/>
           </a:xfrm>
           <a:prstGeom prst="rect">
             <a:avLst/>
@@ -18161,7 +18161,7 @@
               <a:buNone/>
             </a:pPr>
             <a:r>
-              <a:rPr lang="en-US" sz="2300" b="1" dirty="0">
+              <a:rPr lang="en-US" sz="2600" b="1" dirty="0">
                 <a:solidFill>
                   <a:srgbClr val="0F3446"/>
                 </a:solidFill>
@@ -18171,7 +18171,7 @@
               </a:rPr>
               <a:t>Safety: hyperkalemia in focus</a:t>
             </a:r>
-            <a:endParaRPr lang="en-US" sz="2300" dirty="0"/>
+            <a:endParaRPr lang="en-US" sz="2600" dirty="0"/>
           </a:p>
         </p:txBody>
       </p:sp>
@@ -18203,7 +18203,7 @@
               <a:buNone/>
             </a:pPr>
             <a:r>
-              <a:rPr lang="en-US" sz="1450" b="1" dirty="0">
+              <a:rPr lang="en-US" sz="1600" b="1" dirty="0">
                 <a:solidFill>
                   <a:srgbClr val="0E8385"/>
                 </a:solidFill>
@@ -18213,7 +18213,7 @@
               </a:rPr>
               <a:t>Hyperkalemia was the main event, but serious cases were rare and none were fatal.</a:t>
             </a:r>
-            <a:endParaRPr lang="en-US" sz="1450" dirty="0"/>
+            <a:endParaRPr lang="en-US" sz="1600" dirty="0"/>
           </a:p>
         </p:txBody>
       </p:sp>
@@ -18245,9 +18245,9 @@
               <a:buNone/>
             </a:pPr>
             <a:r>
-              <a:rPr lang="en-US" sz="1300" dirty="0">
-                <a:solidFill>
-                  <a:srgbClr val="22343C"/>
+              <a:rPr lang="en-US" sz="1450" dirty="0">
+                <a:solidFill>
+                  <a:srgbClr val="13212A"/>
                 </a:solidFill>
                 <a:latin typeface="Calibri" pitchFamily="34" charset="0"/>
                 <a:ea typeface="Calibri" pitchFamily="34" charset="-122"/>
@@ -18255,7 +18255,7 @@
               </a:rPr>
               <a:t>Overall adverse events (68.3% vs 65.4%) and serious adverse events (20.9% vs 21.2%) were similar. Discontinuations and all-cause death numerically favored finerenone.</a:t>
             </a:r>
-            <a:endParaRPr lang="en-US" sz="1300" dirty="0"/>
+            <a:endParaRPr lang="en-US" sz="1450" dirty="0"/>
           </a:p>
         </p:txBody>
       </p:sp>
@@ -18300,7 +18300,7 @@
               <a:buNone/>
             </a:pPr>
             <a:r>
-              <a:rPr lang="en-US" sz="1400" b="1" dirty="0">
+              <a:rPr lang="en-US" sz="1550" b="1" dirty="0">
                 <a:solidFill>
                   <a:srgbClr val="0E8385"/>
                 </a:solidFill>
@@ -18310,7 +18310,7 @@
               </a:rPr>
               <a:t>What it means</a:t>
             </a:r>
-            <a:endParaRPr lang="en-US" sz="1400" dirty="0"/>
+            <a:endParaRPr lang="en-US" sz="1550" dirty="0"/>
           </a:p>
         </p:txBody>
       </p:sp>
@@ -18346,9 +18346,9 @@
               <a:buChar char="•"/>
             </a:pPr>
             <a:r>
-              <a:rPr lang="en-US" sz="1250" dirty="0">
-                <a:solidFill>
-                  <a:srgbClr val="22343C"/>
+              <a:rPr lang="en-US" sz="1400" dirty="0">
+                <a:solidFill>
+                  <a:srgbClr val="13212A"/>
                 </a:solidFill>
                 <a:latin typeface="Calibri" pitchFamily="34" charset="0"/>
                 <a:ea typeface="Calibri" pitchFamily="34" charset="-122"/>
@@ -18356,7 +18356,7 @@
               </a:rPr>
               <a:t>Hyperkalemia was the signature event; the excess was modest.</a:t>
             </a:r>
-            <a:endParaRPr lang="en-US" sz="1250" dirty="0"/>
+            <a:endParaRPr lang="en-US" sz="1400" dirty="0"/>
           </a:p>
           <a:p>
             <a:pPr marL="203200" indent="-203200">
@@ -18370,9 +18370,9 @@
               <a:buChar char="•"/>
             </a:pPr>
             <a:r>
-              <a:rPr lang="en-US" sz="1250" dirty="0">
-                <a:solidFill>
-                  <a:srgbClr val="22343C"/>
+              <a:rPr lang="en-US" sz="1400" dirty="0">
+                <a:solidFill>
+                  <a:srgbClr val="13212A"/>
                 </a:solidFill>
                 <a:latin typeface="Calibri" pitchFamily="34" charset="0"/>
                 <a:ea typeface="Calibri" pitchFamily="34" charset="-122"/>
@@ -18380,7 +18380,7 @@
               </a:rPr>
               <a:t>Discontinuation for K⁺ 1.5% vs 0.1%; hospitalization 0.9% vs 0.6%; no fatal events.</a:t>
             </a:r>
-            <a:endParaRPr lang="en-US" sz="1250" dirty="0"/>
+            <a:endParaRPr lang="en-US" sz="1400" dirty="0"/>
           </a:p>
           <a:p>
             <a:pPr marL="203200" indent="-203200">
@@ -18394,9 +18394,9 @@
               <a:buChar char="•"/>
             </a:pPr>
             <a:r>
-              <a:rPr lang="en-US" sz="1250" dirty="0">
-                <a:solidFill>
-                  <a:srgbClr val="22343C"/>
+              <a:rPr lang="en-US" sz="1400" dirty="0">
+                <a:solidFill>
+                  <a:srgbClr val="13212A"/>
                 </a:solidFill>
                 <a:latin typeface="Calibri" pitchFamily="34" charset="0"/>
                 <a:ea typeface="Calibri" pitchFamily="34" charset="-122"/>
@@ -18404,7 +18404,7 @@
               </a:rPr>
               <a:t>AKI and hypotension low and similar.</a:t>
             </a:r>
-            <a:endParaRPr lang="en-US" sz="1250" dirty="0"/>
+            <a:endParaRPr lang="en-US" sz="1400" dirty="0"/>
           </a:p>
           <a:p>
             <a:pPr marL="203200" indent="-203200">
@@ -18418,9 +18418,9 @@
               <a:buChar char="•"/>
             </a:pPr>
             <a:r>
-              <a:rPr lang="en-US" sz="1250" dirty="0">
-                <a:solidFill>
-                  <a:srgbClr val="22343C"/>
+              <a:rPr lang="en-US" sz="1400" dirty="0">
+                <a:solidFill>
+                  <a:srgbClr val="13212A"/>
                 </a:solidFill>
                 <a:latin typeface="Calibri" pitchFamily="34" charset="0"/>
                 <a:ea typeface="Calibri" pitchFamily="34" charset="-122"/>
@@ -18428,7 +18428,7 @@
               </a:rPr>
               <a:t>No new safety signal versus the diabetes trials.</a:t>
             </a:r>
-            <a:endParaRPr lang="en-US" sz="1250" dirty="0"/>
+            <a:endParaRPr lang="en-US" sz="1400" dirty="0"/>
           </a:p>
         </p:txBody>
       </p:sp>
@@ -18459,7 +18459,7 @@
             <a:r>
               <a:rPr lang="en-US" sz="850" i="1" dirty="0">
                 <a:solidFill>
-                  <a:srgbClr val="6C7C84"/>
+                  <a:srgbClr val="4E5E66"/>
                 </a:solidFill>
                 <a:latin typeface="Calibri" pitchFamily="34" charset="0"/>
                 <a:ea typeface="Calibri" pitchFamily="34" charset="-122"/>
@@ -18512,7 +18512,7 @@
             <a:r>
               <a:rPr lang="en-US" sz="900" dirty="0">
                 <a:solidFill>
-                  <a:srgbClr val="6C7C84"/>
+                  <a:srgbClr val="4E5E66"/>
                 </a:solidFill>
                 <a:latin typeface="Calibri" pitchFamily="34" charset="0"/>
                 <a:ea typeface="Calibri" pitchFamily="34" charset="-122"/>
@@ -18551,7 +18551,7 @@
             <a:r>
               <a:rPr lang="en-US" sz="900" dirty="0">
                 <a:solidFill>
-                  <a:srgbClr val="6C7C84"/>
+                  <a:srgbClr val="4E5E66"/>
                 </a:solidFill>
                 <a:latin typeface="Calibri" pitchFamily="34" charset="0"/>
                 <a:ea typeface="Calibri" pitchFamily="34" charset="-122"/>
@@ -18649,8 +18649,8 @@
         </p:nvSpPr>
         <p:spPr>
           <a:xfrm>
-            <a:off x="1389888" y="329184"/>
-            <a:ext cx="10158984" cy="566928"/>
+            <a:off x="1389888" y="310896"/>
+            <a:ext cx="10158984" cy="603504"/>
           </a:xfrm>
           <a:prstGeom prst="rect">
             <a:avLst/>
@@ -18666,7 +18666,7 @@
               <a:buNone/>
             </a:pPr>
             <a:r>
-              <a:rPr lang="en-US" sz="2300" b="1" dirty="0">
+              <a:rPr lang="en-US" sz="2600" b="1" dirty="0">
                 <a:solidFill>
                   <a:srgbClr val="0F3446"/>
                 </a:solidFill>
@@ -18676,7 +18676,7 @@
               </a:rPr>
               <a:t>Strengths and limitations</a:t>
             </a:r>
-            <a:endParaRPr lang="en-US" sz="2300" dirty="0"/>
+            <a:endParaRPr lang="en-US" sz="2600" dirty="0"/>
           </a:p>
         </p:txBody>
       </p:sp>
@@ -18705,7 +18705,7 @@
               <a:buNone/>
             </a:pPr>
             <a:r>
-              <a:rPr lang="en-US" sz="1400" b="1" dirty="0">
+              <a:rPr lang="en-US" sz="1550" b="1" dirty="0">
                 <a:solidFill>
                   <a:srgbClr val="0E8385"/>
                 </a:solidFill>
@@ -18715,7 +18715,7 @@
               </a:rPr>
               <a:t>Strengths</a:t>
             </a:r>
-            <a:endParaRPr lang="en-US" sz="1400" dirty="0"/>
+            <a:endParaRPr lang="en-US" sz="1550" dirty="0"/>
           </a:p>
         </p:txBody>
       </p:sp>
@@ -18751,9 +18751,9 @@
               <a:buChar char="•"/>
             </a:pPr>
             <a:r>
-              <a:rPr lang="en-US" sz="1300" dirty="0">
-                <a:solidFill>
-                  <a:srgbClr val="22343C"/>
+              <a:rPr lang="en-US" sz="1450" dirty="0">
+                <a:solidFill>
+                  <a:srgbClr val="13212A"/>
                 </a:solidFill>
                 <a:latin typeface="Calibri" pitchFamily="34" charset="0"/>
                 <a:ea typeface="Calibri" pitchFamily="34" charset="-122"/>
@@ -18761,7 +18761,7 @@
               </a:rPr>
               <a:t>First phase 3 RCT of finerenone in CKD without diabetes; fills the largest evidence gap for the drug.</a:t>
             </a:r>
-            <a:endParaRPr lang="en-US" sz="1300" dirty="0"/>
+            <a:endParaRPr lang="en-US" sz="1450" dirty="0"/>
           </a:p>
           <a:p>
             <a:pPr marL="203200" indent="-203200">
@@ -18775,9 +18775,9 @@
               <a:buChar char="•"/>
             </a:pPr>
             <a:r>
-              <a:rPr lang="en-US" sz="1300" dirty="0">
-                <a:solidFill>
-                  <a:srgbClr val="22343C"/>
+              <a:rPr lang="en-US" sz="1450" dirty="0">
+                <a:solidFill>
+                  <a:srgbClr val="13212A"/>
                 </a:solidFill>
                 <a:latin typeface="Calibri" pitchFamily="34" charset="0"/>
                 <a:ea typeface="Calibri" pitchFamily="34" charset="-122"/>
@@ -18785,7 +18785,7 @@
               </a:rPr>
               <a:t>Double-blind, placebo-controlled, international; sponsor analyses re-run independently at Groningen.</a:t>
             </a:r>
-            <a:endParaRPr lang="en-US" sz="1300" dirty="0"/>
+            <a:endParaRPr lang="en-US" sz="1450" dirty="0"/>
           </a:p>
           <a:p>
             <a:pPr marL="203200" indent="-203200">
@@ -18799,9 +18799,9 @@
               <a:buChar char="•"/>
             </a:pPr>
             <a:r>
-              <a:rPr lang="en-US" sz="1300" dirty="0">
-                <a:solidFill>
-                  <a:srgbClr val="22343C"/>
+              <a:rPr lang="en-US" sz="1450" dirty="0">
+                <a:solidFill>
+                  <a:srgbClr val="13212A"/>
                 </a:solidFill>
                 <a:latin typeface="Calibri" pitchFamily="34" charset="0"/>
                 <a:ea typeface="Calibri" pitchFamily="34" charset="-122"/>
@@ -18809,7 +18809,7 @@
               </a:rPr>
               <a:t>Endpoint modeled correctly, separating the reversible acute dip from the chronic slope.</a:t>
             </a:r>
-            <a:endParaRPr lang="en-US" sz="1300" dirty="0"/>
+            <a:endParaRPr lang="en-US" sz="1450" dirty="0"/>
           </a:p>
           <a:p>
             <a:pPr marL="203200" indent="-203200">
@@ -18823,9 +18823,9 @@
               <a:buChar char="•"/>
             </a:pPr>
             <a:r>
-              <a:rPr lang="en-US" sz="1300" dirty="0">
-                <a:solidFill>
-                  <a:srgbClr val="22343C"/>
+              <a:rPr lang="en-US" sz="1450" dirty="0">
+                <a:solidFill>
+                  <a:srgbClr val="13212A"/>
                 </a:solidFill>
                 <a:latin typeface="Calibri" pitchFamily="34" charset="0"/>
                 <a:ea typeface="Calibri" pitchFamily="34" charset="-122"/>
@@ -18833,7 +18833,7 @@
               </a:rPr>
               <a:t>Robust across cystatin C, shared-parameter and tipping-point analyses, and backed by a protected clinical composite.</a:t>
             </a:r>
-            <a:endParaRPr lang="en-US" sz="1300" dirty="0"/>
+            <a:endParaRPr lang="en-US" sz="1450" dirty="0"/>
           </a:p>
         </p:txBody>
       </p:sp>
@@ -18862,7 +18862,7 @@
               <a:buNone/>
             </a:pPr>
             <a:r>
-              <a:rPr lang="en-US" sz="1400" b="1" dirty="0">
+              <a:rPr lang="en-US" sz="1550" b="1" dirty="0">
                 <a:solidFill>
                   <a:srgbClr val="E86A44"/>
                 </a:solidFill>
@@ -18872,7 +18872,7 @@
               </a:rPr>
               <a:t>Limitations</a:t>
             </a:r>
-            <a:endParaRPr lang="en-US" sz="1400" dirty="0"/>
+            <a:endParaRPr lang="en-US" sz="1550" dirty="0"/>
           </a:p>
         </p:txBody>
       </p:sp>
@@ -18908,9 +18908,9 @@
               <a:buChar char="–"/>
             </a:pPr>
             <a:r>
-              <a:rPr lang="en-US" sz="1300" dirty="0">
-                <a:solidFill>
-                  <a:srgbClr val="22343C"/>
+              <a:rPr lang="en-US" sz="1450" dirty="0">
+                <a:solidFill>
+                  <a:srgbClr val="13212A"/>
                 </a:solidFill>
                 <a:latin typeface="Calibri" pitchFamily="34" charset="0"/>
                 <a:ea typeface="Calibri" pitchFamily="34" charset="-122"/>
@@ -18918,7 +18918,7 @@
               </a:rPr>
               <a:t>Primary endpoint is a surrogate; not powered for hard kidney or CV events.</a:t>
             </a:r>
-            <a:endParaRPr lang="en-US" sz="1300" dirty="0"/>
+            <a:endParaRPr lang="en-US" sz="1450" dirty="0"/>
           </a:p>
           <a:p>
             <a:pPr marL="203200" indent="-203200">
@@ -18932,9 +18932,9 @@
               <a:buChar char="–"/>
             </a:pPr>
             <a:r>
-              <a:rPr lang="en-US" sz="1300" dirty="0">
-                <a:solidFill>
-                  <a:srgbClr val="22343C"/>
+              <a:rPr lang="en-US" sz="1450" dirty="0">
+                <a:solidFill>
+                  <a:srgbClr val="13212A"/>
                 </a:solidFill>
                 <a:latin typeface="Calibri" pitchFamily="34" charset="0"/>
                 <a:ea typeface="Calibri" pitchFamily="34" charset="-122"/>
@@ -18942,7 +18942,7 @@
               </a:rPr>
               <a:t>Two-thirds men, few Black participants, enriched for heavy albuminuria: limited generalizability.</a:t>
             </a:r>
-            <a:endParaRPr lang="en-US" sz="1300" dirty="0"/>
+            <a:endParaRPr lang="en-US" sz="1450" dirty="0"/>
           </a:p>
           <a:p>
             <a:pPr marL="203200" indent="-203200">
@@ -18956,9 +18956,9 @@
               <a:buChar char="–"/>
             </a:pPr>
             <a:r>
-              <a:rPr lang="en-US" sz="1300" dirty="0">
-                <a:solidFill>
-                  <a:srgbClr val="22343C"/>
+              <a:rPr lang="en-US" sz="1450" dirty="0">
+                <a:solidFill>
+                  <a:srgbClr val="13212A"/>
                 </a:solidFill>
                 <a:latin typeface="Calibri" pitchFamily="34" charset="0"/>
                 <a:ea typeface="Calibri" pitchFamily="34" charset="-122"/>
@@ -18966,7 +18966,7 @@
               </a:rPr>
               <a:t>Only 17% on an SGLT2 inhibitor, so the finerenone-plus-SGLT2i question is not directly answered.</a:t>
             </a:r>
-            <a:endParaRPr lang="en-US" sz="1300" dirty="0"/>
+            <a:endParaRPr lang="en-US" sz="1450" dirty="0"/>
           </a:p>
           <a:p>
             <a:pPr marL="203200" indent="-203200">
@@ -18980,9 +18980,9 @@
               <a:buChar char="–"/>
             </a:pPr>
             <a:r>
-              <a:rPr lang="en-US" sz="1300" dirty="0">
-                <a:solidFill>
-                  <a:srgbClr val="22343C"/>
+              <a:rPr lang="en-US" sz="1450" dirty="0">
+                <a:solidFill>
+                  <a:srgbClr val="13212A"/>
                 </a:solidFill>
                 <a:latin typeface="Calibri" pitchFamily="34" charset="0"/>
                 <a:ea typeface="Calibri" pitchFamily="34" charset="-122"/>
@@ -18990,7 +18990,7 @@
               </a:rPr>
               <a:t>ADPKD, lupus nephritis and ANCA vasculitis excluded; ~36-month follow-up is short for lifelong CKD.</a:t>
             </a:r>
-            <a:endParaRPr lang="en-US" sz="1300" dirty="0"/>
+            <a:endParaRPr lang="en-US" sz="1450" dirty="0"/>
           </a:p>
         </p:txBody>
       </p:sp>
@@ -19035,7 +19035,7 @@
             <a:r>
               <a:rPr lang="en-US" sz="900" dirty="0">
                 <a:solidFill>
-                  <a:srgbClr val="6C7C84"/>
+                  <a:srgbClr val="4E5E66"/>
                 </a:solidFill>
                 <a:latin typeface="Calibri" pitchFamily="34" charset="0"/>
                 <a:ea typeface="Calibri" pitchFamily="34" charset="-122"/>
@@ -19074,7 +19074,7 @@
             <a:r>
               <a:rPr lang="en-US" sz="900" dirty="0">
                 <a:solidFill>
-                  <a:srgbClr val="6C7C84"/>
+                  <a:srgbClr val="4E5E66"/>
                 </a:solidFill>
                 <a:latin typeface="Calibri" pitchFamily="34" charset="0"/>
                 <a:ea typeface="Calibri" pitchFamily="34" charset="-122"/>
@@ -19172,8 +19172,8 @@
         </p:nvSpPr>
         <p:spPr>
           <a:xfrm>
-            <a:off x="1389888" y="329184"/>
-            <a:ext cx="10158984" cy="566928"/>
+            <a:off x="1389888" y="310896"/>
+            <a:ext cx="10158984" cy="603504"/>
           </a:xfrm>
           <a:prstGeom prst="rect">
             <a:avLst/>
@@ -19189,7 +19189,7 @@
               <a:buNone/>
             </a:pPr>
             <a:r>
-              <a:rPr lang="en-US" sz="2300" b="1" dirty="0">
+              <a:rPr lang="en-US" sz="2600" b="1" dirty="0">
                 <a:solidFill>
                   <a:srgbClr val="0F3446"/>
                 </a:solidFill>
@@ -19199,7 +19199,7 @@
               </a:rPr>
               <a:t>FIND-CKD in context</a:t>
             </a:r>
-            <a:endParaRPr lang="en-US" sz="2300" dirty="0"/>
+            <a:endParaRPr lang="en-US" sz="2600" dirty="0"/>
           </a:p>
         </p:txBody>
       </p:sp>
@@ -19250,7 +19250,7 @@
               </a:lnSpc>
               <a:buNone/>
             </a:pPr>
-            <a:endParaRPr lang="en-US" sz="1200" dirty="0"/>
+            <a:endParaRPr lang="en-US" sz="1300" dirty="0"/>
           </a:p>
         </p:txBody>
       </p:sp>
@@ -19282,7 +19282,7 @@
               <a:buNone/>
             </a:pPr>
             <a:r>
-              <a:rPr lang="en-US" sz="1200" b="1" dirty="0">
+              <a:rPr lang="en-US" sz="1300" b="1" dirty="0">
                 <a:solidFill>
                   <a:srgbClr val="FFFFFF"/>
                 </a:solidFill>
@@ -19292,7 +19292,7 @@
               </a:rPr>
               <a:t>FIDELIO-DKD</a:t>
             </a:r>
-            <a:endParaRPr lang="en-US" sz="1200" dirty="0"/>
+            <a:endParaRPr lang="en-US" sz="1300" dirty="0"/>
           </a:p>
         </p:txBody>
       </p:sp>
@@ -19324,7 +19324,7 @@
               <a:buNone/>
             </a:pPr>
             <a:r>
-              <a:rPr lang="en-US" sz="1200" b="1" dirty="0">
+              <a:rPr lang="en-US" sz="1300" b="1" dirty="0">
                 <a:solidFill>
                   <a:srgbClr val="FFFFFF"/>
                 </a:solidFill>
@@ -19334,7 +19334,7 @@
               </a:rPr>
               <a:t>FIGARO-DKD</a:t>
             </a:r>
-            <a:endParaRPr lang="en-US" sz="1200" dirty="0"/>
+            <a:endParaRPr lang="en-US" sz="1300" dirty="0"/>
           </a:p>
         </p:txBody>
       </p:sp>
@@ -19366,7 +19366,7 @@
               <a:buNone/>
             </a:pPr>
             <a:r>
-              <a:rPr lang="en-US" sz="1200" b="1" dirty="0">
+              <a:rPr lang="en-US" sz="1300" b="1" dirty="0">
                 <a:solidFill>
                   <a:srgbClr val="FFFFFF"/>
                 </a:solidFill>
@@ -19376,7 +19376,7 @@
               </a:rPr>
               <a:t>FIDELITY</a:t>
             </a:r>
-            <a:endParaRPr lang="en-US" sz="1200" dirty="0"/>
+            <a:endParaRPr lang="en-US" sz="1300" dirty="0"/>
           </a:p>
         </p:txBody>
       </p:sp>
@@ -19408,7 +19408,7 @@
               <a:buNone/>
             </a:pPr>
             <a:r>
-              <a:rPr lang="en-US" sz="1200" b="1" dirty="0">
+              <a:rPr lang="en-US" sz="1300" b="1" dirty="0">
                 <a:solidFill>
                   <a:srgbClr val="FFFFFF"/>
                 </a:solidFill>
@@ -19418,7 +19418,7 @@
               </a:rPr>
               <a:t>FIND-CKD</a:t>
             </a:r>
-            <a:endParaRPr lang="en-US" sz="1200" dirty="0"/>
+            <a:endParaRPr lang="en-US" sz="1300" dirty="0"/>
           </a:p>
         </p:txBody>
       </p:sp>
@@ -19473,7 +19473,7 @@
               <a:buNone/>
             </a:pPr>
             <a:r>
-              <a:rPr lang="en-US" sz="1100" b="1" dirty="0">
+              <a:rPr lang="en-US" sz="1250" b="1" dirty="0">
                 <a:solidFill>
                   <a:srgbClr val="0F3446"/>
                 </a:solidFill>
@@ -19483,7 +19483,7 @@
               </a:rPr>
               <a:t>Population</a:t>
             </a:r>
-            <a:endParaRPr lang="en-US" sz="1100" dirty="0"/>
+            <a:endParaRPr lang="en-US" sz="1250" dirty="0"/>
           </a:p>
         </p:txBody>
       </p:sp>
@@ -19515,9 +19515,9 @@
               <a:buNone/>
             </a:pPr>
             <a:r>
-              <a:rPr lang="en-US" sz="1100" dirty="0">
-                <a:solidFill>
-                  <a:srgbClr val="22343C"/>
+              <a:rPr lang="en-US" sz="1250" dirty="0">
+                <a:solidFill>
+                  <a:srgbClr val="13212A"/>
                 </a:solidFill>
                 <a:latin typeface="Calibri" pitchFamily="34" charset="0"/>
                 <a:ea typeface="Calibri" pitchFamily="34" charset="-122"/>
@@ -19525,7 +19525,7 @@
               </a:rPr>
               <a:t>T2D + CKD</a:t>
             </a:r>
-            <a:endParaRPr lang="en-US" sz="1100" dirty="0"/>
+            <a:endParaRPr lang="en-US" sz="1250" dirty="0"/>
           </a:p>
         </p:txBody>
       </p:sp>
@@ -19557,9 +19557,9 @@
               <a:buNone/>
             </a:pPr>
             <a:r>
-              <a:rPr lang="en-US" sz="1100" dirty="0">
-                <a:solidFill>
-                  <a:srgbClr val="22343C"/>
+              <a:rPr lang="en-US" sz="1250" dirty="0">
+                <a:solidFill>
+                  <a:srgbClr val="13212A"/>
                 </a:solidFill>
                 <a:latin typeface="Calibri" pitchFamily="34" charset="0"/>
                 <a:ea typeface="Calibri" pitchFamily="34" charset="-122"/>
@@ -19567,7 +19567,7 @@
               </a:rPr>
               <a:t>T2D + CKD (earlier)</a:t>
             </a:r>
-            <a:endParaRPr lang="en-US" sz="1100" dirty="0"/>
+            <a:endParaRPr lang="en-US" sz="1250" dirty="0"/>
           </a:p>
         </p:txBody>
       </p:sp>
@@ -19599,9 +19599,9 @@
               <a:buNone/>
             </a:pPr>
             <a:r>
-              <a:rPr lang="en-US" sz="1100" dirty="0">
-                <a:solidFill>
-                  <a:srgbClr val="22343C"/>
+              <a:rPr lang="en-US" sz="1250" dirty="0">
+                <a:solidFill>
+                  <a:srgbClr val="13212A"/>
                 </a:solidFill>
                 <a:latin typeface="Calibri" pitchFamily="34" charset="0"/>
                 <a:ea typeface="Calibri" pitchFamily="34" charset="-122"/>
@@ -19609,7 +19609,7 @@
               </a:rPr>
               <a:t>T2D + CKD (pooled)</a:t>
             </a:r>
-            <a:endParaRPr lang="en-US" sz="1100" dirty="0"/>
+            <a:endParaRPr lang="en-US" sz="1250" dirty="0"/>
           </a:p>
         </p:txBody>
       </p:sp>
@@ -19641,7 +19641,7 @@
               <a:buNone/>
             </a:pPr>
             <a:r>
-              <a:rPr lang="en-US" sz="1100" b="1" dirty="0">
+              <a:rPr lang="en-US" sz="1250" b="1" dirty="0">
                 <a:solidFill>
                   <a:srgbClr val="0E8385"/>
                 </a:solidFill>
@@ -19651,7 +19651,7 @@
               </a:rPr>
               <a:t>CKD, no diabetes</a:t>
             </a:r>
-            <a:endParaRPr lang="en-US" sz="1100" dirty="0"/>
+            <a:endParaRPr lang="en-US" sz="1250" dirty="0"/>
           </a:p>
         </p:txBody>
       </p:sp>
@@ -19706,7 +19706,7 @@
               <a:buNone/>
             </a:pPr>
             <a:r>
-              <a:rPr lang="en-US" sz="1100" b="1" dirty="0">
+              <a:rPr lang="en-US" sz="1250" b="1" dirty="0">
                 <a:solidFill>
                   <a:srgbClr val="0F3446"/>
                 </a:solidFill>
@@ -19716,7 +19716,7 @@
               </a:rPr>
               <a:t>N</a:t>
             </a:r>
-            <a:endParaRPr lang="en-US" sz="1100" dirty="0"/>
+            <a:endParaRPr lang="en-US" sz="1250" dirty="0"/>
           </a:p>
         </p:txBody>
       </p:sp>
@@ -19748,9 +19748,9 @@
               <a:buNone/>
             </a:pPr>
             <a:r>
-              <a:rPr lang="en-US" sz="1100" dirty="0">
-                <a:solidFill>
-                  <a:srgbClr val="22343C"/>
+              <a:rPr lang="en-US" sz="1250" dirty="0">
+                <a:solidFill>
+                  <a:srgbClr val="13212A"/>
                 </a:solidFill>
                 <a:latin typeface="Calibri" pitchFamily="34" charset="0"/>
                 <a:ea typeface="Calibri" pitchFamily="34" charset="-122"/>
@@ -19758,7 +19758,7 @@
               </a:rPr>
               <a:t>5674</a:t>
             </a:r>
-            <a:endParaRPr lang="en-US" sz="1100" dirty="0"/>
+            <a:endParaRPr lang="en-US" sz="1250" dirty="0"/>
           </a:p>
         </p:txBody>
       </p:sp>
@@ -19790,9 +19790,9 @@
               <a:buNone/>
             </a:pPr>
             <a:r>
-              <a:rPr lang="en-US" sz="1100" dirty="0">
-                <a:solidFill>
-                  <a:srgbClr val="22343C"/>
+              <a:rPr lang="en-US" sz="1250" dirty="0">
+                <a:solidFill>
+                  <a:srgbClr val="13212A"/>
                 </a:solidFill>
                 <a:latin typeface="Calibri" pitchFamily="34" charset="0"/>
                 <a:ea typeface="Calibri" pitchFamily="34" charset="-122"/>
@@ -19800,7 +19800,7 @@
               </a:rPr>
               <a:t>7437</a:t>
             </a:r>
-            <a:endParaRPr lang="en-US" sz="1100" dirty="0"/>
+            <a:endParaRPr lang="en-US" sz="1250" dirty="0"/>
           </a:p>
         </p:txBody>
       </p:sp>
@@ -19832,9 +19832,9 @@
               <a:buNone/>
             </a:pPr>
             <a:r>
-              <a:rPr lang="en-US" sz="1100" dirty="0">
-                <a:solidFill>
-                  <a:srgbClr val="22343C"/>
+              <a:rPr lang="en-US" sz="1250" dirty="0">
+                <a:solidFill>
+                  <a:srgbClr val="13212A"/>
                 </a:solidFill>
                 <a:latin typeface="Calibri" pitchFamily="34" charset="0"/>
                 <a:ea typeface="Calibri" pitchFamily="34" charset="-122"/>
@@ -19842,7 +19842,7 @@
               </a:rPr>
               <a:t>13,026</a:t>
             </a:r>
-            <a:endParaRPr lang="en-US" sz="1100" dirty="0"/>
+            <a:endParaRPr lang="en-US" sz="1250" dirty="0"/>
           </a:p>
         </p:txBody>
       </p:sp>
@@ -19874,7 +19874,7 @@
               <a:buNone/>
             </a:pPr>
             <a:r>
-              <a:rPr lang="en-US" sz="1100" b="1" dirty="0">
+              <a:rPr lang="en-US" sz="1250" b="1" dirty="0">
                 <a:solidFill>
                   <a:srgbClr val="0E8385"/>
                 </a:solidFill>
@@ -19884,7 +19884,7 @@
               </a:rPr>
               <a:t>1584</a:t>
             </a:r>
-            <a:endParaRPr lang="en-US" sz="1100" dirty="0"/>
+            <a:endParaRPr lang="en-US" sz="1250" dirty="0"/>
           </a:p>
         </p:txBody>
       </p:sp>
@@ -19939,7 +19939,7 @@
               <a:buNone/>
             </a:pPr>
             <a:r>
-              <a:rPr lang="en-US" sz="1100" b="1" dirty="0">
+              <a:rPr lang="en-US" sz="1250" b="1" dirty="0">
                 <a:solidFill>
                   <a:srgbClr val="0F3446"/>
                 </a:solidFill>
@@ -19949,7 +19949,7 @@
               </a:rPr>
               <a:t>Primary endpoint</a:t>
             </a:r>
-            <a:endParaRPr lang="en-US" sz="1100" dirty="0"/>
+            <a:endParaRPr lang="en-US" sz="1250" dirty="0"/>
           </a:p>
         </p:txBody>
       </p:sp>
@@ -19981,9 +19981,9 @@
               <a:buNone/>
             </a:pPr>
             <a:r>
-              <a:rPr lang="en-US" sz="1100" dirty="0">
-                <a:solidFill>
-                  <a:srgbClr val="22343C"/>
+              <a:rPr lang="en-US" sz="1250" dirty="0">
+                <a:solidFill>
+                  <a:srgbClr val="13212A"/>
                 </a:solidFill>
                 <a:latin typeface="Calibri" pitchFamily="34" charset="0"/>
                 <a:ea typeface="Calibri" pitchFamily="34" charset="-122"/>
@@ -19991,7 +19991,7 @@
               </a:rPr>
               <a:t>Kidney composite</a:t>
             </a:r>
-            <a:endParaRPr lang="en-US" sz="1100" dirty="0"/>
+            <a:endParaRPr lang="en-US" sz="1250" dirty="0"/>
           </a:p>
         </p:txBody>
       </p:sp>
@@ -20023,9 +20023,9 @@
               <a:buNone/>
             </a:pPr>
             <a:r>
-              <a:rPr lang="en-US" sz="1100" dirty="0">
-                <a:solidFill>
-                  <a:srgbClr val="22343C"/>
+              <a:rPr lang="en-US" sz="1250" dirty="0">
+                <a:solidFill>
+                  <a:srgbClr val="13212A"/>
                 </a:solidFill>
                 <a:latin typeface="Calibri" pitchFamily="34" charset="0"/>
                 <a:ea typeface="Calibri" pitchFamily="34" charset="-122"/>
@@ -20033,7 +20033,7 @@
               </a:rPr>
               <a:t>CV composite</a:t>
             </a:r>
-            <a:endParaRPr lang="en-US" sz="1100" dirty="0"/>
+            <a:endParaRPr lang="en-US" sz="1250" dirty="0"/>
           </a:p>
         </p:txBody>
       </p:sp>
@@ -20065,9 +20065,9 @@
               <a:buNone/>
             </a:pPr>
             <a:r>
-              <a:rPr lang="en-US" sz="1100" dirty="0">
-                <a:solidFill>
-                  <a:srgbClr val="22343C"/>
+              <a:rPr lang="en-US" sz="1250" dirty="0">
+                <a:solidFill>
+                  <a:srgbClr val="13212A"/>
                 </a:solidFill>
                 <a:latin typeface="Calibri" pitchFamily="34" charset="0"/>
                 <a:ea typeface="Calibri" pitchFamily="34" charset="-122"/>
@@ -20075,7 +20075,7 @@
               </a:rPr>
               <a:t>(pooled)</a:t>
             </a:r>
-            <a:endParaRPr lang="en-US" sz="1100" dirty="0"/>
+            <a:endParaRPr lang="en-US" sz="1250" dirty="0"/>
           </a:p>
         </p:txBody>
       </p:sp>
@@ -20107,7 +20107,7 @@
               <a:buNone/>
             </a:pPr>
             <a:r>
-              <a:rPr lang="en-US" sz="1100" b="1" dirty="0">
+              <a:rPr lang="en-US" sz="1250" b="1" dirty="0">
                 <a:solidFill>
                   <a:srgbClr val="0E8385"/>
                 </a:solidFill>
@@ -20117,7 +20117,7 @@
               </a:rPr>
               <a:t>eGFR slope</a:t>
             </a:r>
-            <a:endParaRPr lang="en-US" sz="1100" dirty="0"/>
+            <a:endParaRPr lang="en-US" sz="1250" dirty="0"/>
           </a:p>
         </p:txBody>
       </p:sp>
@@ -20172,7 +20172,7 @@
               <a:buNone/>
             </a:pPr>
             <a:r>
-              <a:rPr lang="en-US" sz="1100" b="1" dirty="0">
+              <a:rPr lang="en-US" sz="1250" b="1" dirty="0">
                 <a:solidFill>
                   <a:srgbClr val="0F3446"/>
                 </a:solidFill>
@@ -20182,7 +20182,7 @@
               </a:rPr>
               <a:t>Key kidney result</a:t>
             </a:r>
-            <a:endParaRPr lang="en-US" sz="1100" dirty="0"/>
+            <a:endParaRPr lang="en-US" sz="1250" dirty="0"/>
           </a:p>
         </p:txBody>
       </p:sp>
@@ -20214,9 +20214,9 @@
               <a:buNone/>
             </a:pPr>
             <a:r>
-              <a:rPr lang="en-US" sz="1100" dirty="0">
-                <a:solidFill>
-                  <a:srgbClr val="22343C"/>
+              <a:rPr lang="en-US" sz="1250" dirty="0">
+                <a:solidFill>
+                  <a:srgbClr val="13212A"/>
                 </a:solidFill>
                 <a:latin typeface="Calibri" pitchFamily="34" charset="0"/>
                 <a:ea typeface="Calibri" pitchFamily="34" charset="-122"/>
@@ -20224,7 +20224,7 @@
               </a:rPr>
               <a:t>HR 0.82</a:t>
             </a:r>
-            <a:endParaRPr lang="en-US" sz="1100" dirty="0"/>
+            <a:endParaRPr lang="en-US" sz="1250" dirty="0"/>
           </a:p>
         </p:txBody>
       </p:sp>
@@ -20256,9 +20256,9 @@
               <a:buNone/>
             </a:pPr>
             <a:r>
-              <a:rPr lang="en-US" sz="1100" dirty="0">
-                <a:solidFill>
-                  <a:srgbClr val="22343C"/>
+              <a:rPr lang="en-US" sz="1250" dirty="0">
+                <a:solidFill>
+                  <a:srgbClr val="13212A"/>
                 </a:solidFill>
                 <a:latin typeface="Calibri" pitchFamily="34" charset="0"/>
                 <a:ea typeface="Calibri" pitchFamily="34" charset="-122"/>
@@ -20266,7 +20266,7 @@
               </a:rPr>
               <a:t>HR 0.87 (CV)</a:t>
             </a:r>
-            <a:endParaRPr lang="en-US" sz="1100" dirty="0"/>
+            <a:endParaRPr lang="en-US" sz="1250" dirty="0"/>
           </a:p>
         </p:txBody>
       </p:sp>
@@ -20298,9 +20298,9 @@
               <a:buNone/>
             </a:pPr>
             <a:r>
-              <a:rPr lang="en-US" sz="1100" dirty="0">
-                <a:solidFill>
-                  <a:srgbClr val="22343C"/>
+              <a:rPr lang="en-US" sz="1250" dirty="0">
+                <a:solidFill>
+                  <a:srgbClr val="13212A"/>
                 </a:solidFill>
                 <a:latin typeface="Calibri" pitchFamily="34" charset="0"/>
                 <a:ea typeface="Calibri" pitchFamily="34" charset="-122"/>
@@ -20308,7 +20308,7 @@
               </a:rPr>
               <a:t>Kidney 0.77</a:t>
             </a:r>
-            <a:endParaRPr lang="en-US" sz="1100" dirty="0"/>
+            <a:endParaRPr lang="en-US" sz="1250" dirty="0"/>
           </a:p>
         </p:txBody>
       </p:sp>
@@ -20340,7 +20340,7 @@
               <a:buNone/>
             </a:pPr>
             <a:r>
-              <a:rPr lang="en-US" sz="1100" b="1" dirty="0">
+              <a:rPr lang="en-US" sz="1250" b="1" dirty="0">
                 <a:solidFill>
                   <a:srgbClr val="0E8385"/>
                 </a:solidFill>
@@ -20350,7 +20350,7 @@
               </a:rPr>
               <a:t>Slope +0.7; comp. 0.77</a:t>
             </a:r>
-            <a:endParaRPr lang="en-US" sz="1100" dirty="0"/>
+            <a:endParaRPr lang="en-US" sz="1250" dirty="0"/>
           </a:p>
         </p:txBody>
       </p:sp>
@@ -20405,7 +20405,7 @@
               <a:buNone/>
             </a:pPr>
             <a:r>
-              <a:rPr lang="en-US" sz="1100" b="1" dirty="0">
+              <a:rPr lang="en-US" sz="1250" b="1" dirty="0">
                 <a:solidFill>
                   <a:srgbClr val="0F3446"/>
                 </a:solidFill>
@@ -20415,7 +20415,7 @@
               </a:rPr>
               <a:t>eGFR slope Δ / yr</a:t>
             </a:r>
-            <a:endParaRPr lang="en-US" sz="1100" dirty="0"/>
+            <a:endParaRPr lang="en-US" sz="1250" dirty="0"/>
           </a:p>
         </p:txBody>
       </p:sp>
@@ -20447,9 +20447,9 @@
               <a:buNone/>
             </a:pPr>
             <a:r>
-              <a:rPr lang="en-US" sz="1100" dirty="0">
-                <a:solidFill>
-                  <a:srgbClr val="22343C"/>
+              <a:rPr lang="en-US" sz="1250" dirty="0">
+                <a:solidFill>
+                  <a:srgbClr val="13212A"/>
                 </a:solidFill>
                 <a:latin typeface="Calibri" pitchFamily="34" charset="0"/>
                 <a:ea typeface="Calibri" pitchFamily="34" charset="-122"/>
@@ -20457,7 +20457,7 @@
               </a:rPr>
               <a:t>~0.7</a:t>
             </a:r>
-            <a:endParaRPr lang="en-US" sz="1100" dirty="0"/>
+            <a:endParaRPr lang="en-US" sz="1250" dirty="0"/>
           </a:p>
         </p:txBody>
       </p:sp>
@@ -20489,9 +20489,9 @@
               <a:buNone/>
             </a:pPr>
             <a:r>
-              <a:rPr lang="en-US" sz="1100" dirty="0">
-                <a:solidFill>
-                  <a:srgbClr val="22343C"/>
+              <a:rPr lang="en-US" sz="1250" dirty="0">
+                <a:solidFill>
+                  <a:srgbClr val="13212A"/>
                 </a:solidFill>
                 <a:latin typeface="Calibri" pitchFamily="34" charset="0"/>
                 <a:ea typeface="Calibri" pitchFamily="34" charset="-122"/>
@@ -20499,7 +20499,7 @@
               </a:rPr>
               <a:t>n/r</a:t>
             </a:r>
-            <a:endParaRPr lang="en-US" sz="1100" dirty="0"/>
+            <a:endParaRPr lang="en-US" sz="1250" dirty="0"/>
           </a:p>
         </p:txBody>
       </p:sp>
@@ -20531,9 +20531,9 @@
               <a:buNone/>
             </a:pPr>
             <a:r>
-              <a:rPr lang="en-US" sz="1100" dirty="0">
-                <a:solidFill>
-                  <a:srgbClr val="22343C"/>
+              <a:rPr lang="en-US" sz="1250" dirty="0">
+                <a:solidFill>
+                  <a:srgbClr val="13212A"/>
                 </a:solidFill>
                 <a:latin typeface="Calibri" pitchFamily="34" charset="0"/>
                 <a:ea typeface="Calibri" pitchFamily="34" charset="-122"/>
@@ -20541,7 +20541,7 @@
               </a:rPr>
               <a:t>n/r</a:t>
             </a:r>
-            <a:endParaRPr lang="en-US" sz="1100" dirty="0"/>
+            <a:endParaRPr lang="en-US" sz="1250" dirty="0"/>
           </a:p>
         </p:txBody>
       </p:sp>
@@ -20573,7 +20573,7 @@
               <a:buNone/>
             </a:pPr>
             <a:r>
-              <a:rPr lang="en-US" sz="1100" b="1" dirty="0">
+              <a:rPr lang="en-US" sz="1250" b="1" dirty="0">
                 <a:solidFill>
                   <a:srgbClr val="0E8385"/>
                 </a:solidFill>
@@ -20583,7 +20583,7 @@
               </a:rPr>
               <a:t>0.7 (chronic 1.2)</a:t>
             </a:r>
-            <a:endParaRPr lang="en-US" sz="1100" dirty="0"/>
+            <a:endParaRPr lang="en-US" sz="1250" dirty="0"/>
           </a:p>
         </p:txBody>
       </p:sp>
@@ -20615,9 +20615,9 @@
               <a:buNone/>
             </a:pPr>
             <a:r>
-              <a:rPr lang="en-US" sz="1350" dirty="0">
-                <a:solidFill>
-                  <a:srgbClr val="22343C"/>
+              <a:rPr lang="en-US" sz="1500" dirty="0">
+                <a:solidFill>
+                  <a:srgbClr val="13212A"/>
                 </a:solidFill>
                 <a:latin typeface="Calibri" pitchFamily="34" charset="0"/>
                 <a:ea typeface="Calibri" pitchFamily="34" charset="-122"/>
@@ -20625,7 +20625,7 @@
               </a:rPr>
               <a:t>The ~0.7/yr slope effect finerenone produced in diabetic CKD reproduces almost exactly in non-diabetic CKD, and the chronic slope of 1.2 sits right alongside RAS and SGLT2 inhibitors (0.5–1.0). Same drug, same mechanism, in a population never before tested.</a:t>
             </a:r>
-            <a:endParaRPr lang="en-US" sz="1350" dirty="0"/>
+            <a:endParaRPr lang="en-US" sz="1500" dirty="0"/>
           </a:p>
         </p:txBody>
       </p:sp>
@@ -20656,7 +20656,7 @@
             <a:r>
               <a:rPr lang="en-US" sz="850" i="1" dirty="0">
                 <a:solidFill>
-                  <a:srgbClr val="6C7C84"/>
+                  <a:srgbClr val="4E5E66"/>
                 </a:solidFill>
                 <a:latin typeface="Calibri" pitchFamily="34" charset="0"/>
                 <a:ea typeface="Calibri" pitchFamily="34" charset="-122"/>
@@ -20709,7 +20709,7 @@
             <a:r>
               <a:rPr lang="en-US" sz="900" dirty="0">
                 <a:solidFill>
-                  <a:srgbClr val="6C7C84"/>
+                  <a:srgbClr val="4E5E66"/>
                 </a:solidFill>
                 <a:latin typeface="Calibri" pitchFamily="34" charset="0"/>
                 <a:ea typeface="Calibri" pitchFamily="34" charset="-122"/>
@@ -20748,7 +20748,7 @@
             <a:r>
               <a:rPr lang="en-US" sz="900" dirty="0">
                 <a:solidFill>
-                  <a:srgbClr val="6C7C84"/>
+                  <a:srgbClr val="4E5E66"/>
                 </a:solidFill>
                 <a:latin typeface="Calibri" pitchFamily="34" charset="0"/>
                 <a:ea typeface="Calibri" pitchFamily="34" charset="-122"/>
@@ -20944,7 +20944,7 @@
               <a:buNone/>
             </a:pPr>
             <a:r>
-              <a:rPr lang="en-US" sz="1600" dirty="0">
+              <a:rPr lang="en-US" sz="1750" dirty="0">
                 <a:solidFill>
                   <a:srgbClr val="AFC6D2"/>
                 </a:solidFill>
@@ -20954,7 +20954,7 @@
               </a:rPr>
               <a:t>Where finerenone fits in practice, what is still open, and the take-home.</a:t>
             </a:r>
-            <a:endParaRPr lang="en-US" sz="1600" dirty="0"/>
+            <a:endParaRPr lang="en-US" sz="1750" dirty="0"/>
           </a:p>
         </p:txBody>
       </p:sp>
@@ -21083,8 +21083,8 @@
         </p:nvSpPr>
         <p:spPr>
           <a:xfrm>
-            <a:off x="1389888" y="329184"/>
-            <a:ext cx="10158984" cy="566928"/>
+            <a:off x="1389888" y="310896"/>
+            <a:ext cx="10158984" cy="603504"/>
           </a:xfrm>
           <a:prstGeom prst="rect">
             <a:avLst/>
@@ -21100,7 +21100,7 @@
               <a:buNone/>
             </a:pPr>
             <a:r>
-              <a:rPr lang="en-US" sz="2300" b="1" dirty="0">
+              <a:rPr lang="en-US" sz="2600" b="1" dirty="0">
                 <a:solidFill>
                   <a:srgbClr val="0F3446"/>
                 </a:solidFill>
@@ -21110,7 +21110,7 @@
               </a:rPr>
               <a:t>Where finerenone fits in practice</a:t>
             </a:r>
-            <a:endParaRPr lang="en-US" sz="2300" dirty="0"/>
+            <a:endParaRPr lang="en-US" sz="2600" dirty="0"/>
           </a:p>
         </p:txBody>
       </p:sp>
@@ -21142,7 +21142,7 @@
               <a:buNone/>
             </a:pPr>
             <a:r>
-              <a:rPr lang="en-US" sz="1450" b="1" dirty="0">
+              <a:rPr lang="en-US" sz="1600" b="1" dirty="0">
                 <a:solidFill>
                   <a:srgbClr val="0E8385"/>
                 </a:solidFill>
@@ -21152,7 +21152,7 @@
               </a:rPr>
               <a:t>A candidate third agent for albuminuric CKD, now with evidence beyond diabetes.</a:t>
             </a:r>
-            <a:endParaRPr lang="en-US" sz="1450" dirty="0"/>
+            <a:endParaRPr lang="en-US" sz="1600" dirty="0"/>
           </a:p>
         </p:txBody>
       </p:sp>
@@ -21203,7 +21203,7 @@
               <a:buNone/>
             </a:pPr>
             <a:r>
-              <a:rPr lang="en-US" sz="1400" b="1" dirty="0">
+              <a:rPr lang="en-US" sz="1550" b="1" dirty="0">
                 <a:solidFill>
                   <a:srgbClr val="0F3446"/>
                 </a:solidFill>
@@ -21213,7 +21213,7 @@
               </a:rPr>
               <a:t>RAS inhibitor</a:t>
             </a:r>
-            <a:endParaRPr lang="en-US" sz="1400" dirty="0"/>
+            <a:endParaRPr lang="en-US" sz="1550" dirty="0"/>
           </a:p>
         </p:txBody>
       </p:sp>
@@ -21245,9 +21245,9 @@
               <a:buNone/>
             </a:pPr>
             <a:r>
-              <a:rPr lang="en-US" sz="1050" dirty="0">
-                <a:solidFill>
-                  <a:srgbClr val="6C7C84"/>
+              <a:rPr lang="en-US" sz="1200" dirty="0">
+                <a:solidFill>
+                  <a:srgbClr val="4E5E66"/>
                 </a:solidFill>
                 <a:latin typeface="Calibri" pitchFamily="34" charset="0"/>
                 <a:ea typeface="Calibri" pitchFamily="34" charset="-122"/>
@@ -21255,7 +21255,7 @@
               </a:rPr>
               <a:t>foundation, required background</a:t>
             </a:r>
-            <a:endParaRPr lang="en-US" sz="1050" dirty="0"/>
+            <a:endParaRPr lang="en-US" sz="1200" dirty="0"/>
           </a:p>
         </p:txBody>
       </p:sp>
@@ -21306,7 +21306,7 @@
               <a:buNone/>
             </a:pPr>
             <a:r>
-              <a:rPr lang="en-US" sz="1400" b="1" dirty="0">
+              <a:rPr lang="en-US" sz="1550" b="1" dirty="0">
                 <a:solidFill>
                   <a:srgbClr val="0F3446"/>
                 </a:solidFill>
@@ -21316,7 +21316,7 @@
               </a:rPr>
               <a:t>SGLT2 inhibitor</a:t>
             </a:r>
-            <a:endParaRPr lang="en-US" sz="1400" dirty="0"/>
+            <a:endParaRPr lang="en-US" sz="1550" dirty="0"/>
           </a:p>
         </p:txBody>
       </p:sp>
@@ -21348,9 +21348,9 @@
               <a:buNone/>
             </a:pPr>
             <a:r>
-              <a:rPr lang="en-US" sz="1050" dirty="0">
-                <a:solidFill>
-                  <a:srgbClr val="6C7C84"/>
+              <a:rPr lang="en-US" sz="1200" dirty="0">
+                <a:solidFill>
+                  <a:srgbClr val="4E5E66"/>
                 </a:solidFill>
                 <a:latin typeface="Calibri" pitchFamily="34" charset="0"/>
                 <a:ea typeface="Calibri" pitchFamily="34" charset="-122"/>
@@ -21358,7 +21358,7 @@
               </a:rPr>
               <a:t>guideline-recommended pillar</a:t>
             </a:r>
-            <a:endParaRPr lang="en-US" sz="1050" dirty="0"/>
+            <a:endParaRPr lang="en-US" sz="1200" dirty="0"/>
           </a:p>
         </p:txBody>
       </p:sp>
@@ -21409,7 +21409,7 @@
               <a:buNone/>
             </a:pPr>
             <a:r>
-              <a:rPr lang="en-US" sz="1400" b="1" dirty="0">
+              <a:rPr lang="en-US" sz="1550" b="1" dirty="0">
                 <a:solidFill>
                   <a:srgbClr val="FFFFFF"/>
                 </a:solidFill>
@@ -21419,7 +21419,7 @@
               </a:rPr>
               <a:t>Finerenone</a:t>
             </a:r>
-            <a:endParaRPr lang="en-US" sz="1400" dirty="0"/>
+            <a:endParaRPr lang="en-US" sz="1550" dirty="0"/>
           </a:p>
         </p:txBody>
       </p:sp>
@@ -21451,7 +21451,7 @@
               <a:buNone/>
             </a:pPr>
             <a:r>
-              <a:rPr lang="en-US" sz="1050" dirty="0">
+              <a:rPr lang="en-US" sz="1200" dirty="0">
                 <a:solidFill>
                   <a:srgbClr val="E7F4F4"/>
                 </a:solidFill>
@@ -21461,7 +21461,7 @@
               </a:rPr>
               <a:t>MR blockade, now non-diabetic too</a:t>
             </a:r>
-            <a:endParaRPr lang="en-US" sz="1050" dirty="0"/>
+            <a:endParaRPr lang="en-US" sz="1200" dirty="0"/>
           </a:p>
         </p:txBody>
       </p:sp>
@@ -21490,7 +21490,7 @@
               <a:buNone/>
             </a:pPr>
             <a:r>
-              <a:rPr lang="en-US" sz="1400" b="1" dirty="0">
+              <a:rPr lang="en-US" sz="1550" b="1" dirty="0">
                 <a:solidFill>
                   <a:srgbClr val="0E8385"/>
                 </a:solidFill>
@@ -21500,7 +21500,7 @@
               </a:rPr>
               <a:t>Who to consider</a:t>
             </a:r>
-            <a:endParaRPr lang="en-US" sz="1400" dirty="0"/>
+            <a:endParaRPr lang="en-US" sz="1550" dirty="0"/>
           </a:p>
         </p:txBody>
       </p:sp>
@@ -21536,9 +21536,9 @@
               <a:buChar char="•"/>
             </a:pPr>
             <a:r>
-              <a:rPr lang="en-US" sz="1250" dirty="0">
-                <a:solidFill>
-                  <a:srgbClr val="22343C"/>
+              <a:rPr lang="en-US" sz="1400" dirty="0">
+                <a:solidFill>
+                  <a:srgbClr val="13212A"/>
                 </a:solidFill>
                 <a:latin typeface="Calibri" pitchFamily="34" charset="0"/>
                 <a:ea typeface="Calibri" pitchFamily="34" charset="-122"/>
@@ -21546,7 +21546,7 @@
               </a:rPr>
               <a:t>Non-diabetic CKD with persistent albuminuria despite a maximally tolerated RAS inhibitor.</a:t>
             </a:r>
-            <a:endParaRPr lang="en-US" sz="1250" dirty="0"/>
+            <a:endParaRPr lang="en-US" sz="1400" dirty="0"/>
           </a:p>
           <a:p>
             <a:pPr marL="203200" indent="-203200">
@@ -21560,9 +21560,9 @@
               <a:buChar char="•"/>
             </a:pPr>
             <a:r>
-              <a:rPr lang="en-US" sz="1250" dirty="0">
-                <a:solidFill>
-                  <a:srgbClr val="22343C"/>
+              <a:rPr lang="en-US" sz="1400" dirty="0">
+                <a:solidFill>
+                  <a:srgbClr val="13212A"/>
                 </a:solidFill>
                 <a:latin typeface="Calibri" pitchFamily="34" charset="0"/>
                 <a:ea typeface="Calibri" pitchFamily="34" charset="-122"/>
@@ -21570,7 +21570,7 @@
               </a:rPr>
               <a:t>Greatest expected benefit with UACR &gt;1000 mg/g.</a:t>
             </a:r>
-            <a:endParaRPr lang="en-US" sz="1250" dirty="0"/>
+            <a:endParaRPr lang="en-US" sz="1400" dirty="0"/>
           </a:p>
           <a:p>
             <a:pPr marL="203200" indent="-203200">
@@ -21584,9 +21584,9 @@
               <a:buChar char="•"/>
             </a:pPr>
             <a:r>
-              <a:rPr lang="en-US" sz="1250" dirty="0">
-                <a:solidFill>
-                  <a:srgbClr val="22343C"/>
+              <a:rPr lang="en-US" sz="1400" dirty="0">
+                <a:solidFill>
+                  <a:srgbClr val="13212A"/>
                 </a:solidFill>
                 <a:latin typeface="Calibri" pitchFamily="34" charset="0"/>
                 <a:ea typeface="Calibri" pitchFamily="34" charset="-122"/>
@@ -21594,7 +21594,7 @@
               </a:rPr>
               <a:t>Serum potassium ≤4.8–5.0 and an eGFR that supports the starting dose.</a:t>
             </a:r>
-            <a:endParaRPr lang="en-US" sz="1250" dirty="0"/>
+            <a:endParaRPr lang="en-US" sz="1400" dirty="0"/>
           </a:p>
         </p:txBody>
       </p:sp>
@@ -21623,7 +21623,7 @@
               <a:buNone/>
             </a:pPr>
             <a:r>
-              <a:rPr lang="en-US" sz="1400" b="1" dirty="0">
+              <a:rPr lang="en-US" sz="1550" b="1" dirty="0">
                 <a:solidFill>
                   <a:srgbClr val="0E8385"/>
                 </a:solidFill>
@@ -21633,7 +21633,7 @@
               </a:rPr>
               <a:t>How to use it safely</a:t>
             </a:r>
-            <a:endParaRPr lang="en-US" sz="1400" dirty="0"/>
+            <a:endParaRPr lang="en-US" sz="1550" dirty="0"/>
           </a:p>
         </p:txBody>
       </p:sp>
@@ -21669,9 +21669,9 @@
               <a:buChar char="•"/>
             </a:pPr>
             <a:r>
-              <a:rPr lang="en-US" sz="1250" dirty="0">
-                <a:solidFill>
-                  <a:srgbClr val="22343C"/>
+              <a:rPr lang="en-US" sz="1400" dirty="0">
+                <a:solidFill>
+                  <a:srgbClr val="13212A"/>
                 </a:solidFill>
                 <a:latin typeface="Calibri" pitchFamily="34" charset="0"/>
                 <a:ea typeface="Calibri" pitchFamily="34" charset="-122"/>
@@ -21679,7 +21679,7 @@
               </a:rPr>
               <a:t>Check potassium at baseline, at 1 month, and after any dose change.</a:t>
             </a:r>
-            <a:endParaRPr lang="en-US" sz="1250" dirty="0"/>
+            <a:endParaRPr lang="en-US" sz="1400" dirty="0"/>
           </a:p>
           <a:p>
             <a:pPr marL="203200" indent="-203200">
@@ -21693,9 +21693,9 @@
               <a:buChar char="•"/>
             </a:pPr>
             <a:r>
-              <a:rPr lang="en-US" sz="1250" dirty="0">
-                <a:solidFill>
-                  <a:srgbClr val="22343C"/>
+              <a:rPr lang="en-US" sz="1400" dirty="0">
+                <a:solidFill>
+                  <a:srgbClr val="13212A"/>
                 </a:solidFill>
                 <a:latin typeface="Calibri" pitchFamily="34" charset="0"/>
                 <a:ea typeface="Calibri" pitchFamily="34" charset="-122"/>
@@ -21703,7 +21703,7 @@
               </a:rPr>
               <a:t>Withhold at K⁺ &gt;5.5 and restart at 10 mg once ≤5.0.</a:t>
             </a:r>
-            <a:endParaRPr lang="en-US" sz="1250" dirty="0"/>
+            <a:endParaRPr lang="en-US" sz="1400" dirty="0"/>
           </a:p>
           <a:p>
             <a:pPr marL="203200" indent="-203200">
@@ -21717,9 +21717,9 @@
               <a:buChar char="•"/>
             </a:pPr>
             <a:r>
-              <a:rPr lang="en-US" sz="1250" dirty="0">
-                <a:solidFill>
-                  <a:srgbClr val="22343C"/>
+              <a:rPr lang="en-US" sz="1400" dirty="0">
+                <a:solidFill>
+                  <a:srgbClr val="13212A"/>
                 </a:solidFill>
                 <a:latin typeface="Calibri" pitchFamily="34" charset="0"/>
                 <a:ea typeface="Calibri" pitchFamily="34" charset="-122"/>
@@ -21727,7 +21727,7 @@
               </a:rPr>
               <a:t>The combination with an SGLT2 inhibitor looks additive, though it was not formally tested here.</a:t>
             </a:r>
-            <a:endParaRPr lang="en-US" sz="1250" dirty="0"/>
+            <a:endParaRPr lang="en-US" sz="1400" dirty="0"/>
           </a:p>
         </p:txBody>
       </p:sp>
@@ -21772,7 +21772,7 @@
             <a:r>
               <a:rPr lang="en-US" sz="900" dirty="0">
                 <a:solidFill>
-                  <a:srgbClr val="6C7C84"/>
+                  <a:srgbClr val="4E5E66"/>
                 </a:solidFill>
                 <a:latin typeface="Calibri" pitchFamily="34" charset="0"/>
                 <a:ea typeface="Calibri" pitchFamily="34" charset="-122"/>
@@ -21811,7 +21811,7 @@
             <a:r>
               <a:rPr lang="en-US" sz="900" dirty="0">
                 <a:solidFill>
-                  <a:srgbClr val="6C7C84"/>
+                  <a:srgbClr val="4E5E66"/>
                 </a:solidFill>
                 <a:latin typeface="Calibri" pitchFamily="34" charset="0"/>
                 <a:ea typeface="Calibri" pitchFamily="34" charset="-122"/>
@@ -21909,8 +21909,8 @@
         </p:nvSpPr>
         <p:spPr>
           <a:xfrm>
-            <a:off x="1389888" y="329184"/>
-            <a:ext cx="10158984" cy="566928"/>
+            <a:off x="1389888" y="310896"/>
+            <a:ext cx="10158984" cy="603504"/>
           </a:xfrm>
           <a:prstGeom prst="rect">
             <a:avLst/>
@@ -21926,7 +21926,7 @@
               <a:buNone/>
             </a:pPr>
             <a:r>
-              <a:rPr lang="en-US" sz="2300" b="1" dirty="0">
+              <a:rPr lang="en-US" sz="2600" b="1" dirty="0">
                 <a:solidFill>
                   <a:srgbClr val="0F3446"/>
                 </a:solidFill>
@@ -21936,7 +21936,7 @@
               </a:rPr>
               <a:t>What is still open</a:t>
             </a:r>
-            <a:endParaRPr lang="en-US" sz="2300" dirty="0"/>
+            <a:endParaRPr lang="en-US" sz="2600" dirty="0"/>
           </a:p>
         </p:txBody>
       </p:sp>
@@ -21972,9 +21972,9 @@
               <a:buChar char="•"/>
             </a:pPr>
             <a:r>
-              <a:rPr lang="en-US" sz="1450" dirty="0">
-                <a:solidFill>
-                  <a:srgbClr val="22343C"/>
+              <a:rPr lang="en-US" sz="1600" dirty="0">
+                <a:solidFill>
+                  <a:srgbClr val="13212A"/>
                 </a:solidFill>
                 <a:latin typeface="Calibri" pitchFamily="34" charset="0"/>
                 <a:ea typeface="Calibri" pitchFamily="34" charset="-122"/>
@@ -21982,7 +21982,7 @@
               </a:rPr>
               <a:t>Hard outcomes. The trial moved a surrogate, not kidney failure or death. A hard-outcome trial in non-diabetic CKD is the missing piece.</a:t>
             </a:r>
-            <a:endParaRPr lang="en-US" sz="1450" dirty="0"/>
+            <a:endParaRPr lang="en-US" sz="1600" dirty="0"/>
           </a:p>
           <a:p>
             <a:pPr marL="203200" indent="-203200">
@@ -21996,9 +21996,9 @@
               <a:buChar char="•"/>
             </a:pPr>
             <a:r>
-              <a:rPr lang="en-US" sz="1450" dirty="0">
-                <a:solidFill>
-                  <a:srgbClr val="22343C"/>
+              <a:rPr lang="en-US" sz="1600" dirty="0">
+                <a:solidFill>
+                  <a:srgbClr val="13212A"/>
                 </a:solidFill>
                 <a:latin typeface="Calibri" pitchFamily="34" charset="0"/>
                 <a:ea typeface="Calibri" pitchFamily="34" charset="-122"/>
@@ -22006,7 +22006,7 @@
               </a:rPr>
               <a:t>The SGLT2 inhibitor combination. Only 17% were on one; whether finerenone and an SGLT2 inhibitor are truly additive needs a dedicated study.</a:t>
             </a:r>
-            <a:endParaRPr lang="en-US" sz="1450" dirty="0"/>
+            <a:endParaRPr lang="en-US" sz="1600" dirty="0"/>
           </a:p>
           <a:p>
             <a:pPr marL="203200" indent="-203200">
@@ -22020,9 +22020,9 @@
               <a:buChar char="•"/>
             </a:pPr>
             <a:r>
-              <a:rPr lang="en-US" sz="1450" dirty="0">
-                <a:solidFill>
-                  <a:srgbClr val="22343C"/>
+              <a:rPr lang="en-US" sz="1600" dirty="0">
+                <a:solidFill>
+                  <a:srgbClr val="13212A"/>
                 </a:solidFill>
                 <a:latin typeface="Calibri" pitchFamily="34" charset="0"/>
                 <a:ea typeface="Calibri" pitchFamily="34" charset="-122"/>
@@ -22030,7 +22030,7 @@
               </a:rPr>
               <a:t>Underrepresented groups. Women, Black patients, and low-albuminuria CKD were thin in this cohort.</a:t>
             </a:r>
-            <a:endParaRPr lang="en-US" sz="1450" dirty="0"/>
+            <a:endParaRPr lang="en-US" sz="1600" dirty="0"/>
           </a:p>
           <a:p>
             <a:pPr marL="203200" indent="-203200">
@@ -22044,9 +22044,9 @@
               <a:buChar char="•"/>
             </a:pPr>
             <a:r>
-              <a:rPr lang="en-US" sz="1450" dirty="0">
-                <a:solidFill>
-                  <a:srgbClr val="22343C"/>
+              <a:rPr lang="en-US" sz="1600" dirty="0">
+                <a:solidFill>
+                  <a:srgbClr val="13212A"/>
                 </a:solidFill>
                 <a:latin typeface="Calibri" pitchFamily="34" charset="0"/>
                 <a:ea typeface="Calibri" pitchFamily="34" charset="-122"/>
@@ -22054,7 +22054,7 @@
               </a:rPr>
               <a:t>Diseases left out. No data in ADPKD, lupus nephritis, or ANCA vasculitis, where the biology and treatment differ.</a:t>
             </a:r>
-            <a:endParaRPr lang="en-US" sz="1450" dirty="0"/>
+            <a:endParaRPr lang="en-US" sz="1600" dirty="0"/>
           </a:p>
           <a:p>
             <a:pPr marL="203200" indent="-203200">
@@ -22068,9 +22068,9 @@
               <a:buChar char="•"/>
             </a:pPr>
             <a:r>
-              <a:rPr lang="en-US" sz="1450" dirty="0">
-                <a:solidFill>
-                  <a:srgbClr val="22343C"/>
+              <a:rPr lang="en-US" sz="1600" dirty="0">
+                <a:solidFill>
+                  <a:srgbClr val="13212A"/>
                 </a:solidFill>
                 <a:latin typeface="Calibri" pitchFamily="34" charset="0"/>
                 <a:ea typeface="Calibri" pitchFamily="34" charset="-122"/>
@@ -22078,7 +22078,7 @@
               </a:rPr>
               <a:t>Durability. Effects beyond about 36 months, over the decades these patients live with CKD, remain unknown.</a:t>
             </a:r>
-            <a:endParaRPr lang="en-US" sz="1450" dirty="0"/>
+            <a:endParaRPr lang="en-US" sz="1600" dirty="0"/>
           </a:p>
         </p:txBody>
       </p:sp>
@@ -22123,7 +22123,7 @@
             <a:r>
               <a:rPr lang="en-US" sz="900" dirty="0">
                 <a:solidFill>
-                  <a:srgbClr val="6C7C84"/>
+                  <a:srgbClr val="4E5E66"/>
                 </a:solidFill>
                 <a:latin typeface="Calibri" pitchFamily="34" charset="0"/>
                 <a:ea typeface="Calibri" pitchFamily="34" charset="-122"/>
@@ -22162,7 +22162,7 @@
             <a:r>
               <a:rPr lang="en-US" sz="900" dirty="0">
                 <a:solidFill>
-                  <a:srgbClr val="6C7C84"/>
+                  <a:srgbClr val="4E5E66"/>
                 </a:solidFill>
                 <a:latin typeface="Calibri" pitchFamily="34" charset="0"/>
                 <a:ea typeface="Calibri" pitchFamily="34" charset="-122"/>
@@ -22277,7 +22277,7 @@
               <a:buNone/>
             </a:pPr>
             <a:r>
-              <a:rPr lang="en-US" sz="1400" dirty="0">
+              <a:rPr lang="en-US" sz="1550" dirty="0">
                 <a:solidFill>
                   <a:srgbClr val="9FBBC6"/>
                 </a:solidFill>
@@ -22287,7 +22287,7 @@
               </a:rPr>
               <a:t>Conclusions</a:t>
             </a:r>
-            <a:endParaRPr lang="en-US" sz="1400" dirty="0"/>
+            <a:endParaRPr lang="en-US" sz="1550" dirty="0"/>
           </a:p>
         </p:txBody>
       </p:sp>
@@ -22361,7 +22361,7 @@
               <a:buNone/>
             </a:pPr>
             <a:r>
-              <a:rPr lang="en-US" sz="1500" b="1" dirty="0">
+              <a:rPr lang="en-US" sz="1650" b="1" dirty="0">
                 <a:solidFill>
                   <a:srgbClr val="12A3A6"/>
                 </a:solidFill>
@@ -22378,7 +22378,7 @@
               <a:buNone/>
             </a:pPr>
             <a:r>
-              <a:rPr lang="en-US" sz="1500" dirty="0">
+              <a:rPr lang="en-US" sz="1650" dirty="0">
                 <a:solidFill>
                   <a:srgbClr val="E7F1F4"/>
                 </a:solidFill>
@@ -22388,7 +22388,7 @@
               </a:rPr>
               <a:t>Finerenone slowed the total eGFR slope by 0.7 ml/min/1.73 m²/yr (P&lt;0.001), with a chronic slope of 1.2 and a protected kidney–CV composite of 0.77.</a:t>
             </a:r>
-            <a:endParaRPr lang="en-US" sz="1500" dirty="0"/>
+            <a:endParaRPr lang="en-US" sz="1650" dirty="0"/>
           </a:p>
         </p:txBody>
       </p:sp>
@@ -22420,7 +22420,7 @@
               <a:buNone/>
             </a:pPr>
             <a:r>
-              <a:rPr lang="en-US" sz="1500" b="1" dirty="0">
+              <a:rPr lang="en-US" sz="1650" b="1" dirty="0">
                 <a:solidFill>
                   <a:srgbClr val="12A3A6"/>
                 </a:solidFill>
@@ -22437,7 +22437,7 @@
               <a:buNone/>
             </a:pPr>
             <a:r>
-              <a:rPr lang="en-US" sz="1500" dirty="0">
+              <a:rPr lang="en-US" sz="1650" dirty="0">
                 <a:solidFill>
                   <a:srgbClr val="E7F1F4"/>
                 </a:solidFill>
@@ -22447,7 +22447,7 @@
               </a:rPr>
               <a:t>The candidate is the albuminuric non-diabetic CKD patient on a RAS inhibitor. The effect is largest with UACR &gt;1000 and looks additive to SGLT2 inhibitors.</a:t>
             </a:r>
-            <a:endParaRPr lang="en-US" sz="1500" dirty="0"/>
+            <a:endParaRPr lang="en-US" sz="1650" dirty="0"/>
           </a:p>
         </p:txBody>
       </p:sp>
@@ -22479,7 +22479,7 @@
               <a:buNone/>
             </a:pPr>
             <a:r>
-              <a:rPr lang="en-US" sz="1500" b="1" dirty="0">
+              <a:rPr lang="en-US" sz="1650" b="1" dirty="0">
                 <a:solidFill>
                   <a:srgbClr val="12A3A6"/>
                 </a:solidFill>
@@ -22496,7 +22496,7 @@
               <a:buNone/>
             </a:pPr>
             <a:r>
-              <a:rPr lang="en-US" sz="1500" dirty="0">
+              <a:rPr lang="en-US" sz="1650" dirty="0">
                 <a:solidFill>
                   <a:srgbClr val="E7F1F4"/>
                 </a:solidFill>
@@ -22506,7 +22506,7 @@
               </a:rPr>
               <a:t>Hyperkalemia is the trade-off: modest, protocol-manageable, no fatal events, no new signal versus the diabetes trials.</a:t>
             </a:r>
-            <a:endParaRPr lang="en-US" sz="1500" dirty="0"/>
+            <a:endParaRPr lang="en-US" sz="1650" dirty="0"/>
           </a:p>
         </p:txBody>
       </p:sp>
@@ -22538,7 +22538,7 @@
               <a:buNone/>
             </a:pPr>
             <a:r>
-              <a:rPr lang="en-US" sz="1500" b="1" dirty="0">
+              <a:rPr lang="en-US" sz="1650" b="1" dirty="0">
                 <a:solidFill>
                   <a:srgbClr val="12A3A6"/>
                 </a:solidFill>
@@ -22555,7 +22555,7 @@
               <a:buNone/>
             </a:pPr>
             <a:r>
-              <a:rPr lang="en-US" sz="1500" dirty="0">
+              <a:rPr lang="en-US" sz="1650" dirty="0">
                 <a:solidFill>
                   <a:srgbClr val="BCD2DA"/>
                 </a:solidFill>
@@ -22565,7 +22565,7 @@
               </a:rPr>
               <a:t>Read the slope, not just the headline: the primary is a surrogate in an enriched, mostly male cohort, so a hard-outcome trial would still be the definitive word.</a:t>
             </a:r>
-            <a:endParaRPr lang="en-US" sz="1500" dirty="0"/>
+            <a:endParaRPr lang="en-US" sz="1650" dirty="0"/>
           </a:p>
         </p:txBody>
       </p:sp>
@@ -22792,7 +22792,7 @@
               <a:buNone/>
             </a:pPr>
             <a:r>
-              <a:rPr lang="en-US" sz="1600" dirty="0">
+              <a:rPr lang="en-US" sz="1750" dirty="0">
                 <a:solidFill>
                   <a:srgbClr val="AFC6D2"/>
                 </a:solidFill>
@@ -22802,7 +22802,7 @@
               </a:rPr>
               <a:t>Why finerenone, why now, and why a trial in CKD without diabetes.</a:t>
             </a:r>
-            <a:endParaRPr lang="en-US" sz="1600" dirty="0"/>
+            <a:endParaRPr lang="en-US" sz="1750" dirty="0"/>
           </a:p>
         </p:txBody>
       </p:sp>
@@ -22931,8 +22931,8 @@
         </p:nvSpPr>
         <p:spPr>
           <a:xfrm>
-            <a:off x="1389888" y="329184"/>
-            <a:ext cx="10158984" cy="566928"/>
+            <a:off x="1389888" y="310896"/>
+            <a:ext cx="10158984" cy="603504"/>
           </a:xfrm>
           <a:prstGeom prst="rect">
             <a:avLst/>
@@ -22948,7 +22948,7 @@
               <a:buNone/>
             </a:pPr>
             <a:r>
-              <a:rPr lang="en-US" sz="2300" b="1" dirty="0">
+              <a:rPr lang="en-US" sz="2600" b="1" dirty="0">
                 <a:solidFill>
                   <a:srgbClr val="0F3446"/>
                 </a:solidFill>
@@ -22958,7 +22958,7 @@
               </a:rPr>
               <a:t>Why this trial was needed</a:t>
             </a:r>
-            <a:endParaRPr lang="en-US" sz="2300" dirty="0"/>
+            <a:endParaRPr lang="en-US" sz="2600" dirty="0"/>
           </a:p>
         </p:txBody>
       </p:sp>
@@ -22990,9 +22990,9 @@
               <a:buNone/>
             </a:pPr>
             <a:r>
-              <a:rPr lang="en-US" sz="1450" dirty="0">
-                <a:solidFill>
-                  <a:srgbClr val="22343C"/>
+              <a:rPr lang="en-US" sz="1600" dirty="0">
+                <a:solidFill>
+                  <a:srgbClr val="13212A"/>
                 </a:solidFill>
                 <a:latin typeface="Calibri" pitchFamily="34" charset="0"/>
                 <a:ea typeface="Calibri" pitchFamily="34" charset="-122"/>
@@ -23000,7 +23000,7 @@
               </a:rPr>
               <a:t>CKD affects roughly 800 million adults, and its prevalence has more than doubled since 1990. More than half of those cases have nothing to do with diabetes.</a:t>
             </a:r>
-            <a:endParaRPr lang="en-US" sz="1450" dirty="0"/>
+            <a:endParaRPr lang="en-US" sz="1600" dirty="0"/>
           </a:p>
         </p:txBody>
       </p:sp>
@@ -23036,9 +23036,9 @@
               <a:buChar char="•"/>
             </a:pPr>
             <a:r>
-              <a:rPr lang="en-US" sz="1400" dirty="0">
-                <a:solidFill>
-                  <a:srgbClr val="22343C"/>
+              <a:rPr lang="en-US" sz="1550" dirty="0">
+                <a:solidFill>
+                  <a:srgbClr val="13212A"/>
                 </a:solidFill>
                 <a:latin typeface="Calibri" pitchFamily="34" charset="0"/>
                 <a:ea typeface="Calibri" pitchFamily="34" charset="-122"/>
@@ -23046,7 +23046,7 @@
               </a:rPr>
               <a:t>RAS and SGLT2 inhibitors slow CKD with or without diabetes, but progression and cardiovascular events continue, particularly with heavy albuminuria.</a:t>
             </a:r>
-            <a:endParaRPr lang="en-US" sz="1400" dirty="0"/>
+            <a:endParaRPr lang="en-US" sz="1550" dirty="0"/>
           </a:p>
           <a:p>
             <a:pPr marL="203200" indent="-203200">
@@ -23060,9 +23060,9 @@
               <a:buChar char="•"/>
             </a:pPr>
             <a:r>
-              <a:rPr lang="en-US" sz="1400" dirty="0">
-                <a:solidFill>
-                  <a:srgbClr val="22343C"/>
+              <a:rPr lang="en-US" sz="1550" dirty="0">
+                <a:solidFill>
+                  <a:srgbClr val="13212A"/>
                 </a:solidFill>
                 <a:latin typeface="Calibri" pitchFamily="34" charset="0"/>
                 <a:ea typeface="Calibri" pitchFamily="34" charset="-122"/>
@@ -23070,7 +23070,7 @@
               </a:rPr>
               <a:t>Mineralocorticoid receptor overactivation drives sodium retention, inflammation and fibrosis. That pathway is not specific to diabetes.</a:t>
             </a:r>
-            <a:endParaRPr lang="en-US" sz="1400" dirty="0"/>
+            <a:endParaRPr lang="en-US" sz="1550" dirty="0"/>
           </a:p>
           <a:p>
             <a:pPr marL="203200" indent="-203200">
@@ -23084,9 +23084,9 @@
               <a:buChar char="•"/>
             </a:pPr>
             <a:r>
-              <a:rPr lang="en-US" sz="1400" dirty="0">
-                <a:solidFill>
-                  <a:srgbClr val="22343C"/>
+              <a:rPr lang="en-US" sz="1550" dirty="0">
+                <a:solidFill>
+                  <a:srgbClr val="13212A"/>
                 </a:solidFill>
                 <a:latin typeface="Calibri" pitchFamily="34" charset="0"/>
                 <a:ea typeface="Calibri" pitchFamily="34" charset="-122"/>
@@ -23094,7 +23094,7 @@
               </a:rPr>
               <a:t>Finerenone reduced kidney and cardiovascular events in diabetic CKD (FIDELIO-DKD, FIGARO-DKD, FIDELITY pooled).</a:t>
             </a:r>
-            <a:endParaRPr lang="en-US" sz="1400" dirty="0"/>
+            <a:endParaRPr lang="en-US" sz="1550" dirty="0"/>
           </a:p>
           <a:p>
             <a:pPr marL="203200" indent="-203200">
@@ -23108,9 +23108,9 @@
               <a:buChar char="•"/>
             </a:pPr>
             <a:r>
-              <a:rPr lang="en-US" sz="1400" dirty="0">
-                <a:solidFill>
-                  <a:srgbClr val="22343C"/>
+              <a:rPr lang="en-US" sz="1550" dirty="0">
+                <a:solidFill>
+                  <a:srgbClr val="13212A"/>
                 </a:solidFill>
                 <a:latin typeface="Calibri" pitchFamily="34" charset="0"/>
                 <a:ea typeface="Calibri" pitchFamily="34" charset="-122"/>
@@ -23118,7 +23118,7 @@
               </a:rPr>
               <a:t>None of that had been tested in CKD without diabetes.</a:t>
             </a:r>
-            <a:endParaRPr lang="en-US" sz="1400" dirty="0"/>
+            <a:endParaRPr lang="en-US" sz="1550" dirty="0"/>
           </a:p>
         </p:txBody>
       </p:sp>
@@ -23172,7 +23172,7 @@
               <a:buNone/>
             </a:pPr>
             <a:r>
-              <a:rPr lang="en-US" sz="1550" b="1" dirty="0">
+              <a:rPr lang="en-US" sz="1700" b="1" dirty="0">
                 <a:solidFill>
                   <a:srgbClr val="0F3446"/>
                 </a:solidFill>
@@ -23189,7 +23189,7 @@
               <a:buNone/>
             </a:pPr>
             <a:r>
-              <a:rPr lang="en-US" sz="1550" i="1" dirty="0">
+              <a:rPr lang="en-US" sz="1700" i="1" dirty="0">
                 <a:solidFill>
                   <a:srgbClr val="0E8385"/>
                 </a:solidFill>
@@ -23199,7 +23199,7 @@
               </a:rPr>
               <a:t>does finerenone protect the kidney in non-diabetic CKD, the way it does in diabetic kidney disease?</a:t>
             </a:r>
-            <a:endParaRPr lang="en-US" sz="1550" dirty="0"/>
+            <a:endParaRPr lang="en-US" sz="1700" dirty="0"/>
           </a:p>
         </p:txBody>
       </p:sp>
@@ -23244,7 +23244,7 @@
             <a:r>
               <a:rPr lang="en-US" sz="900" dirty="0">
                 <a:solidFill>
-                  <a:srgbClr val="6C7C84"/>
+                  <a:srgbClr val="4E5E66"/>
                 </a:solidFill>
                 <a:latin typeface="Calibri" pitchFamily="34" charset="0"/>
                 <a:ea typeface="Calibri" pitchFamily="34" charset="-122"/>
@@ -23283,7 +23283,7 @@
             <a:r>
               <a:rPr lang="en-US" sz="900" dirty="0">
                 <a:solidFill>
-                  <a:srgbClr val="6C7C84"/>
+                  <a:srgbClr val="4E5E66"/>
                 </a:solidFill>
                 <a:latin typeface="Calibri" pitchFamily="34" charset="0"/>
                 <a:ea typeface="Calibri" pitchFamily="34" charset="-122"/>
@@ -23381,8 +23381,8 @@
         </p:nvSpPr>
         <p:spPr>
           <a:xfrm>
-            <a:off x="1389888" y="329184"/>
-            <a:ext cx="10158984" cy="566928"/>
+            <a:off x="1389888" y="310896"/>
+            <a:ext cx="10158984" cy="603504"/>
           </a:xfrm>
           <a:prstGeom prst="rect">
             <a:avLst/>
@@ -23398,7 +23398,7 @@
               <a:buNone/>
             </a:pPr>
             <a:r>
-              <a:rPr lang="en-US" sz="2300" b="1" dirty="0">
+              <a:rPr lang="en-US" sz="2600" b="1" dirty="0">
                 <a:solidFill>
                   <a:srgbClr val="0F3446"/>
                 </a:solidFill>
@@ -23408,7 +23408,7 @@
               </a:rPr>
               <a:t>The rationale: a nonsteroidal MR antagonist</a:t>
             </a:r>
-            <a:endParaRPr lang="en-US" sz="2300" dirty="0"/>
+            <a:endParaRPr lang="en-US" sz="2600" dirty="0"/>
           </a:p>
         </p:txBody>
       </p:sp>
@@ -23440,7 +23440,7 @@
               <a:buNone/>
             </a:pPr>
             <a:r>
-              <a:rPr lang="en-US" sz="1450" b="1" dirty="0">
+              <a:rPr lang="en-US" sz="1600" b="1" dirty="0">
                 <a:solidFill>
                   <a:srgbClr val="0E8385"/>
                 </a:solidFill>
@@ -23450,7 +23450,7 @@
               </a:rPr>
               <a:t>Block a fibrotic pathway active in CKD with or without diabetes, without the endocrine baggage of the old MRAs.</a:t>
             </a:r>
-            <a:endParaRPr lang="en-US" sz="1450" dirty="0"/>
+            <a:endParaRPr lang="en-US" sz="1600" dirty="0"/>
           </a:p>
         </p:txBody>
       </p:sp>
@@ -23479,7 +23479,7 @@
               <a:buNone/>
             </a:pPr>
             <a:r>
-              <a:rPr lang="en-US" sz="1400" b="1" dirty="0">
+              <a:rPr lang="en-US" sz="1550" b="1" dirty="0">
                 <a:solidFill>
                   <a:srgbClr val="0E8385"/>
                 </a:solidFill>
@@ -23489,7 +23489,7 @@
               </a:rPr>
               <a:t>Why the mineralocorticoid receptor</a:t>
             </a:r>
-            <a:endParaRPr lang="en-US" sz="1400" dirty="0"/>
+            <a:endParaRPr lang="en-US" sz="1550" dirty="0"/>
           </a:p>
         </p:txBody>
       </p:sp>
@@ -23525,9 +23525,9 @@
               <a:buChar char="•"/>
             </a:pPr>
             <a:r>
-              <a:rPr lang="en-US" sz="1300" dirty="0">
-                <a:solidFill>
-                  <a:srgbClr val="22343C"/>
+              <a:rPr lang="en-US" sz="1450" dirty="0">
+                <a:solidFill>
+                  <a:srgbClr val="13212A"/>
                 </a:solidFill>
                 <a:latin typeface="Calibri" pitchFamily="34" charset="0"/>
                 <a:ea typeface="Calibri" pitchFamily="34" charset="-122"/>
@@ -23535,7 +23535,7 @@
               </a:rPr>
               <a:t>MR overactivation promotes sodium and fluid retention.</a:t>
             </a:r>
-            <a:endParaRPr lang="en-US" sz="1300" dirty="0"/>
+            <a:endParaRPr lang="en-US" sz="1450" dirty="0"/>
           </a:p>
           <a:p>
             <a:pPr marL="203200" indent="-203200">
@@ -23549,9 +23549,9 @@
               <a:buChar char="•"/>
             </a:pPr>
             <a:r>
-              <a:rPr lang="en-US" sz="1300" dirty="0">
-                <a:solidFill>
-                  <a:srgbClr val="22343C"/>
+              <a:rPr lang="en-US" sz="1450" dirty="0">
+                <a:solidFill>
+                  <a:srgbClr val="13212A"/>
                 </a:solidFill>
                 <a:latin typeface="Calibri" pitchFamily="34" charset="0"/>
                 <a:ea typeface="Calibri" pitchFamily="34" charset="-122"/>
@@ -23559,7 +23559,7 @@
               </a:rPr>
               <a:t>It also drives inflammation and fibrosis in the kidney and heart, independent of blood pressure and glucose.</a:t>
             </a:r>
-            <a:endParaRPr lang="en-US" sz="1300" dirty="0"/>
+            <a:endParaRPr lang="en-US" sz="1450" dirty="0"/>
           </a:p>
           <a:p>
             <a:pPr marL="203200" indent="-203200">
@@ -23573,9 +23573,9 @@
               <a:buChar char="•"/>
             </a:pPr>
             <a:r>
-              <a:rPr lang="en-US" sz="1300" dirty="0">
-                <a:solidFill>
-                  <a:srgbClr val="22343C"/>
+              <a:rPr lang="en-US" sz="1450" dirty="0">
+                <a:solidFill>
+                  <a:srgbClr val="13212A"/>
                 </a:solidFill>
                 <a:latin typeface="Calibri" pitchFamily="34" charset="0"/>
                 <a:ea typeface="Calibri" pitchFamily="34" charset="-122"/>
@@ -23583,7 +23583,7 @@
               </a:rPr>
               <a:t>A plausible driver of progression in non-diabetic CKD, not only diabetic disease.</a:t>
             </a:r>
-            <a:endParaRPr lang="en-US" sz="1300" dirty="0"/>
+            <a:endParaRPr lang="en-US" sz="1450" dirty="0"/>
           </a:p>
         </p:txBody>
       </p:sp>
@@ -23612,7 +23612,7 @@
               <a:buNone/>
             </a:pPr>
             <a:r>
-              <a:rPr lang="en-US" sz="1400" b="1" dirty="0">
+              <a:rPr lang="en-US" sz="1550" b="1" dirty="0">
                 <a:solidFill>
                   <a:srgbClr val="0E8385"/>
                 </a:solidFill>
@@ -23622,7 +23622,7 @@
               </a:rPr>
               <a:t>Why finerenone, not spironolactone</a:t>
             </a:r>
-            <a:endParaRPr lang="en-US" sz="1400" dirty="0"/>
+            <a:endParaRPr lang="en-US" sz="1550" dirty="0"/>
           </a:p>
         </p:txBody>
       </p:sp>
@@ -23658,9 +23658,9 @@
               <a:buChar char="•"/>
             </a:pPr>
             <a:r>
-              <a:rPr lang="en-US" sz="1300" dirty="0">
-                <a:solidFill>
-                  <a:srgbClr val="22343C"/>
+              <a:rPr lang="en-US" sz="1450" dirty="0">
+                <a:solidFill>
+                  <a:srgbClr val="13212A"/>
                 </a:solidFill>
                 <a:latin typeface="Calibri" pitchFamily="34" charset="0"/>
                 <a:ea typeface="Calibri" pitchFamily="34" charset="-122"/>
@@ -23668,7 +23668,7 @@
               </a:rPr>
               <a:t>Nonsteroidal and selective: no active metabolites, balanced kidney and heart distribution, short half-life.</a:t>
             </a:r>
-            <a:endParaRPr lang="en-US" sz="1300" dirty="0"/>
+            <a:endParaRPr lang="en-US" sz="1450" dirty="0"/>
           </a:p>
           <a:p>
             <a:pPr marL="203200" indent="-203200">
@@ -23682,9 +23682,9 @@
               <a:buChar char="•"/>
             </a:pPr>
             <a:r>
-              <a:rPr lang="en-US" sz="1300" dirty="0">
-                <a:solidFill>
-                  <a:srgbClr val="22343C"/>
+              <a:rPr lang="en-US" sz="1450" dirty="0">
+                <a:solidFill>
+                  <a:srgbClr val="13212A"/>
                 </a:solidFill>
                 <a:latin typeface="Calibri" pitchFamily="34" charset="0"/>
                 <a:ea typeface="Calibri" pitchFamily="34" charset="-122"/>
@@ -23692,7 +23692,7 @@
               </a:rPr>
               <a:t>Steroidal MRAs bind androgen and progesterone receptors, causing gynecomastia and other endocrine effects.</a:t>
             </a:r>
-            <a:endParaRPr lang="en-US" sz="1300" dirty="0"/>
+            <a:endParaRPr lang="en-US" sz="1450" dirty="0"/>
           </a:p>
           <a:p>
             <a:pPr marL="203200" indent="-203200">
@@ -23706,9 +23706,9 @@
               <a:buChar char="•"/>
             </a:pPr>
             <a:r>
-              <a:rPr lang="en-US" sz="1300" dirty="0">
-                <a:solidFill>
-                  <a:srgbClr val="22343C"/>
+              <a:rPr lang="en-US" sz="1450" dirty="0">
+                <a:solidFill>
+                  <a:srgbClr val="13212A"/>
                 </a:solidFill>
                 <a:latin typeface="Calibri" pitchFamily="34" charset="0"/>
                 <a:ea typeface="Calibri" pitchFamily="34" charset="-122"/>
@@ -23716,7 +23716,7 @@
               </a:rPr>
               <a:t>In BARACK-D, over half of CKD patients stopped spironolactone within 6 months on safety grounds, mostly AKI and hyperkalemia.</a:t>
             </a:r>
-            <a:endParaRPr lang="en-US" sz="1300" dirty="0"/>
+            <a:endParaRPr lang="en-US" sz="1450" dirty="0"/>
           </a:p>
         </p:txBody>
       </p:sp>
@@ -23745,9 +23745,9 @@
               <a:buNone/>
             </a:pPr>
             <a:r>
-              <a:rPr lang="en-US" sz="1250" i="1" dirty="0">
-                <a:solidFill>
-                  <a:srgbClr val="6C7C84"/>
+              <a:rPr lang="en-US" sz="1400" i="1" dirty="0">
+                <a:solidFill>
+                  <a:srgbClr val="4E5E66"/>
                 </a:solidFill>
                 <a:latin typeface="Calibri" pitchFamily="34" charset="0"/>
                 <a:ea typeface="Calibri" pitchFamily="34" charset="-122"/>
@@ -23755,7 +23755,7 @@
               </a:rPr>
               <a:t>The open part was whether these effects translate into kidney protection in people with CKD but no diabetes.</a:t>
             </a:r>
-            <a:endParaRPr lang="en-US" sz="1250" dirty="0"/>
+            <a:endParaRPr lang="en-US" sz="1400" dirty="0"/>
           </a:p>
         </p:txBody>
       </p:sp>
@@ -23800,7 +23800,7 @@
             <a:r>
               <a:rPr lang="en-US" sz="900" dirty="0">
                 <a:solidFill>
-                  <a:srgbClr val="6C7C84"/>
+                  <a:srgbClr val="4E5E66"/>
                 </a:solidFill>
                 <a:latin typeface="Calibri" pitchFamily="34" charset="0"/>
                 <a:ea typeface="Calibri" pitchFamily="34" charset="-122"/>
@@ -23839,7 +23839,7 @@
             <a:r>
               <a:rPr lang="en-US" sz="900" dirty="0">
                 <a:solidFill>
-                  <a:srgbClr val="6C7C84"/>
+                  <a:srgbClr val="4E5E66"/>
                 </a:solidFill>
                 <a:latin typeface="Calibri" pitchFamily="34" charset="0"/>
                 <a:ea typeface="Calibri" pitchFamily="34" charset="-122"/>
@@ -23937,8 +23937,8 @@
         </p:nvSpPr>
         <p:spPr>
           <a:xfrm>
-            <a:off x="1389888" y="329184"/>
-            <a:ext cx="10158984" cy="566928"/>
+            <a:off x="1389888" y="310896"/>
+            <a:ext cx="10158984" cy="603504"/>
           </a:xfrm>
           <a:prstGeom prst="rect">
             <a:avLst/>
@@ -23954,7 +23954,7 @@
               <a:buNone/>
             </a:pPr>
             <a:r>
-              <a:rPr lang="en-US" sz="2300" b="1" dirty="0">
+              <a:rPr lang="en-US" sz="2600" b="1" dirty="0">
                 <a:solidFill>
                   <a:srgbClr val="0F3446"/>
                 </a:solidFill>
@@ -23964,7 +23964,7 @@
               </a:rPr>
               <a:t>What we already knew: finerenone in diabetes</a:t>
             </a:r>
-            <a:endParaRPr lang="en-US" sz="2300" dirty="0"/>
+            <a:endParaRPr lang="en-US" sz="2600" dirty="0"/>
           </a:p>
         </p:txBody>
       </p:sp>
@@ -23993,9 +23993,9 @@
               <a:buNone/>
             </a:pPr>
             <a:r>
-              <a:rPr lang="en-US" sz="1300" i="1" dirty="0">
-                <a:solidFill>
-                  <a:srgbClr val="6C7C84"/>
+              <a:rPr lang="en-US" sz="1450" i="1" dirty="0">
+                <a:solidFill>
+                  <a:srgbClr val="4E5E66"/>
                 </a:solidFill>
                 <a:latin typeface="Calibri" pitchFamily="34" charset="0"/>
                 <a:ea typeface="Calibri" pitchFamily="34" charset="-122"/>
@@ -24003,7 +24003,7 @@
               </a:rPr>
               <a:t>Every phase 3 finerenone kidney trial before FIND-CKD enrolled only patients with type 2 diabetes.</a:t>
             </a:r>
-            <a:endParaRPr lang="en-US" sz="1300" dirty="0"/>
+            <a:endParaRPr lang="en-US" sz="1450" dirty="0"/>
           </a:p>
         </p:txBody>
       </p:sp>
@@ -24055,7 +24055,7 @@
               <a:buNone/>
             </a:pPr>
             <a:r>
-              <a:rPr lang="en-US" sz="1200" b="1" dirty="0">
+              <a:rPr lang="en-US" sz="1300" b="1" dirty="0">
                 <a:solidFill>
                   <a:srgbClr val="FFFFFF"/>
                 </a:solidFill>
@@ -24065,7 +24065,7 @@
               </a:rPr>
               <a:t>Trial (year)</a:t>
             </a:r>
-            <a:endParaRPr lang="en-US" sz="1200" dirty="0"/>
+            <a:endParaRPr lang="en-US" sz="1300" dirty="0"/>
           </a:p>
         </p:txBody>
       </p:sp>
@@ -24097,7 +24097,7 @@
               <a:buNone/>
             </a:pPr>
             <a:r>
-              <a:rPr lang="en-US" sz="1200" b="1" dirty="0">
+              <a:rPr lang="en-US" sz="1300" b="1" dirty="0">
                 <a:solidFill>
                   <a:srgbClr val="FFFFFF"/>
                 </a:solidFill>
@@ -24107,7 +24107,7 @@
               </a:rPr>
               <a:t>Population</a:t>
             </a:r>
-            <a:endParaRPr lang="en-US" sz="1200" dirty="0"/>
+            <a:endParaRPr lang="en-US" sz="1300" dirty="0"/>
           </a:p>
         </p:txBody>
       </p:sp>
@@ -24139,7 +24139,7 @@
               <a:buNone/>
             </a:pPr>
             <a:r>
-              <a:rPr lang="en-US" sz="1200" b="1" dirty="0">
+              <a:rPr lang="en-US" sz="1300" b="1" dirty="0">
                 <a:solidFill>
                   <a:srgbClr val="FFFFFF"/>
                 </a:solidFill>
@@ -24149,7 +24149,7 @@
               </a:rPr>
               <a:t>Primary outcome</a:t>
             </a:r>
-            <a:endParaRPr lang="en-US" sz="1200" dirty="0"/>
+            <a:endParaRPr lang="en-US" sz="1300" dirty="0"/>
           </a:p>
         </p:txBody>
       </p:sp>
@@ -24181,7 +24181,7 @@
               <a:buNone/>
             </a:pPr>
             <a:r>
-              <a:rPr lang="en-US" sz="1200" b="1" dirty="0">
+              <a:rPr lang="en-US" sz="1300" b="1" dirty="0">
                 <a:solidFill>
                   <a:srgbClr val="FFFFFF"/>
                 </a:solidFill>
@@ -24191,7 +24191,7 @@
               </a:rPr>
               <a:t>HR (95% CI)</a:t>
             </a:r>
-            <a:endParaRPr lang="en-US" sz="1200" dirty="0"/>
+            <a:endParaRPr lang="en-US" sz="1300" dirty="0"/>
           </a:p>
         </p:txBody>
       </p:sp>
@@ -24246,7 +24246,7 @@
               <a:buNone/>
             </a:pPr>
             <a:r>
-              <a:rPr lang="en-US" sz="1150" b="1" dirty="0">
+              <a:rPr lang="en-US" sz="1300" b="1" dirty="0">
                 <a:solidFill>
                   <a:srgbClr val="0F3446"/>
                 </a:solidFill>
@@ -24256,7 +24256,7 @@
               </a:rPr>
               <a:t>FIDELIO-DKD (2020)</a:t>
             </a:r>
-            <a:endParaRPr lang="en-US" sz="1150" dirty="0"/>
+            <a:endParaRPr lang="en-US" sz="1300" dirty="0"/>
           </a:p>
         </p:txBody>
       </p:sp>
@@ -24288,9 +24288,9 @@
               <a:buNone/>
             </a:pPr>
             <a:r>
-              <a:rPr lang="en-US" sz="1150" dirty="0">
-                <a:solidFill>
-                  <a:srgbClr val="22343C"/>
+              <a:rPr lang="en-US" sz="1300" dirty="0">
+                <a:solidFill>
+                  <a:srgbClr val="13212A"/>
                 </a:solidFill>
                 <a:latin typeface="Calibri" pitchFamily="34" charset="0"/>
                 <a:ea typeface="Calibri" pitchFamily="34" charset="-122"/>
@@ -24298,7 +24298,7 @@
               </a:rPr>
               <a:t>T2D + CKD, mostly UACR &gt;300; N=5674</a:t>
             </a:r>
-            <a:endParaRPr lang="en-US" sz="1150" dirty="0"/>
+            <a:endParaRPr lang="en-US" sz="1300" dirty="0"/>
           </a:p>
         </p:txBody>
       </p:sp>
@@ -24330,9 +24330,9 @@
               <a:buNone/>
             </a:pPr>
             <a:r>
-              <a:rPr lang="en-US" sz="1150" dirty="0">
-                <a:solidFill>
-                  <a:srgbClr val="22343C"/>
+              <a:rPr lang="en-US" sz="1300" dirty="0">
+                <a:solidFill>
+                  <a:srgbClr val="13212A"/>
                 </a:solidFill>
                 <a:latin typeface="Calibri" pitchFamily="34" charset="0"/>
                 <a:ea typeface="Calibri" pitchFamily="34" charset="-122"/>
@@ -24340,7 +24340,7 @@
               </a:rPr>
               <a:t>Kidney: kidney failure, sustained ≥40% eGFR decline, or renal death</a:t>
             </a:r>
-            <a:endParaRPr lang="en-US" sz="1150" dirty="0"/>
+            <a:endParaRPr lang="en-US" sz="1300" dirty="0"/>
           </a:p>
         </p:txBody>
       </p:sp>
@@ -24372,7 +24372,7 @@
               <a:buNone/>
             </a:pPr>
             <a:r>
-              <a:rPr lang="en-US" sz="1150" b="1" dirty="0">
+              <a:rPr lang="en-US" sz="1300" b="1" dirty="0">
                 <a:solidFill>
                   <a:srgbClr val="0E8385"/>
                 </a:solidFill>
@@ -24382,7 +24382,7 @@
               </a:rPr>
               <a:t>0.82 (0.73–0.93)</a:t>
             </a:r>
-            <a:endParaRPr lang="en-US" sz="1150" dirty="0"/>
+            <a:endParaRPr lang="en-US" sz="1300" dirty="0"/>
           </a:p>
         </p:txBody>
       </p:sp>
@@ -24437,7 +24437,7 @@
               <a:buNone/>
             </a:pPr>
             <a:r>
-              <a:rPr lang="en-US" sz="1150" b="1" dirty="0">
+              <a:rPr lang="en-US" sz="1300" b="1" dirty="0">
                 <a:solidFill>
                   <a:srgbClr val="0F3446"/>
                 </a:solidFill>
@@ -24447,7 +24447,7 @@
               </a:rPr>
               <a:t>FIGARO-DKD (2021)</a:t>
             </a:r>
-            <a:endParaRPr lang="en-US" sz="1150" dirty="0"/>
+            <a:endParaRPr lang="en-US" sz="1300" dirty="0"/>
           </a:p>
         </p:txBody>
       </p:sp>
@@ -24479,9 +24479,9 @@
               <a:buNone/>
             </a:pPr>
             <a:r>
-              <a:rPr lang="en-US" sz="1150" dirty="0">
-                <a:solidFill>
-                  <a:srgbClr val="22343C"/>
+              <a:rPr lang="en-US" sz="1300" dirty="0">
+                <a:solidFill>
+                  <a:srgbClr val="13212A"/>
                 </a:solidFill>
                 <a:latin typeface="Calibri" pitchFamily="34" charset="0"/>
                 <a:ea typeface="Calibri" pitchFamily="34" charset="-122"/>
@@ -24489,7 +24489,7 @@
               </a:rPr>
               <a:t>T2D + CKD, earlier stage; N=7437</a:t>
             </a:r>
-            <a:endParaRPr lang="en-US" sz="1150" dirty="0"/>
+            <a:endParaRPr lang="en-US" sz="1300" dirty="0"/>
           </a:p>
         </p:txBody>
       </p:sp>
@@ -24521,9 +24521,9 @@
               <a:buNone/>
             </a:pPr>
             <a:r>
-              <a:rPr lang="en-US" sz="1150" dirty="0">
-                <a:solidFill>
-                  <a:srgbClr val="22343C"/>
+              <a:rPr lang="en-US" sz="1300" dirty="0">
+                <a:solidFill>
+                  <a:srgbClr val="13212A"/>
                 </a:solidFill>
                 <a:latin typeface="Calibri" pitchFamily="34" charset="0"/>
                 <a:ea typeface="Calibri" pitchFamily="34" charset="-122"/>
@@ -24531,7 +24531,7 @@
               </a:rPr>
               <a:t>CV: CV death, MI, stroke, or HF hospitalization</a:t>
             </a:r>
-            <a:endParaRPr lang="en-US" sz="1150" dirty="0"/>
+            <a:endParaRPr lang="en-US" sz="1300" dirty="0"/>
           </a:p>
         </p:txBody>
       </p:sp>
@@ -24563,7 +24563,7 @@
               <a:buNone/>
             </a:pPr>
             <a:r>
-              <a:rPr lang="en-US" sz="1150" b="1" dirty="0">
+              <a:rPr lang="en-US" sz="1300" b="1" dirty="0">
                 <a:solidFill>
                   <a:srgbClr val="0E8385"/>
                 </a:solidFill>
@@ -24573,7 +24573,7 @@
               </a:rPr>
               <a:t>0.87 (0.76–0.98)</a:t>
             </a:r>
-            <a:endParaRPr lang="en-US" sz="1150" dirty="0"/>
+            <a:endParaRPr lang="en-US" sz="1300" dirty="0"/>
           </a:p>
         </p:txBody>
       </p:sp>
@@ -24628,7 +24628,7 @@
               <a:buNone/>
             </a:pPr>
             <a:r>
-              <a:rPr lang="en-US" sz="1150" b="1" dirty="0">
+              <a:rPr lang="en-US" sz="1300" b="1" dirty="0">
                 <a:solidFill>
                   <a:srgbClr val="0F3446"/>
                 </a:solidFill>
@@ -24638,7 +24638,7 @@
               </a:rPr>
               <a:t>FIDELITY (2022)</a:t>
             </a:r>
-            <a:endParaRPr lang="en-US" sz="1150" dirty="0"/>
+            <a:endParaRPr lang="en-US" sz="1300" dirty="0"/>
           </a:p>
         </p:txBody>
       </p:sp>
@@ -24670,9 +24670,9 @@
               <a:buNone/>
             </a:pPr>
             <a:r>
-              <a:rPr lang="en-US" sz="1150" dirty="0">
-                <a:solidFill>
-                  <a:srgbClr val="22343C"/>
+              <a:rPr lang="en-US" sz="1300" dirty="0">
+                <a:solidFill>
+                  <a:srgbClr val="13212A"/>
                 </a:solidFill>
                 <a:latin typeface="Calibri" pitchFamily="34" charset="0"/>
                 <a:ea typeface="Calibri" pitchFamily="34" charset="-122"/>
@@ -24680,7 +24680,7 @@
               </a:rPr>
               <a:t>Pre-specified pooling; N=13,026</a:t>
             </a:r>
-            <a:endParaRPr lang="en-US" sz="1150" dirty="0"/>
+            <a:endParaRPr lang="en-US" sz="1300" dirty="0"/>
           </a:p>
         </p:txBody>
       </p:sp>
@@ -24712,9 +24712,9 @@
               <a:buNone/>
             </a:pPr>
             <a:r>
-              <a:rPr lang="en-US" sz="1150" dirty="0">
-                <a:solidFill>
-                  <a:srgbClr val="22343C"/>
+              <a:rPr lang="en-US" sz="1300" dirty="0">
+                <a:solidFill>
+                  <a:srgbClr val="13212A"/>
                 </a:solidFill>
                 <a:latin typeface="Calibri" pitchFamily="34" charset="0"/>
                 <a:ea typeface="Calibri" pitchFamily="34" charset="-122"/>
@@ -24722,7 +24722,7 @@
               </a:rPr>
               <a:t>CV composite / kidney composite (≥57% decline)</a:t>
             </a:r>
-            <a:endParaRPr lang="en-US" sz="1150" dirty="0"/>
+            <a:endParaRPr lang="en-US" sz="1300" dirty="0"/>
           </a:p>
         </p:txBody>
       </p:sp>
@@ -24754,7 +24754,7 @@
               <a:buNone/>
             </a:pPr>
             <a:r>
-              <a:rPr lang="en-US" sz="1150" b="1" dirty="0">
+              <a:rPr lang="en-US" sz="1300" b="1" dirty="0">
                 <a:solidFill>
                   <a:srgbClr val="0E8385"/>
                 </a:solidFill>
@@ -24764,7 +24764,7 @@
               </a:rPr>
               <a:t>CV 0.86 (0.78–0.95)</a:t>
             </a:r>
-            <a:endParaRPr lang="en-US" sz="1150" dirty="0"/>
+            <a:endParaRPr lang="en-US" sz="1300" dirty="0"/>
           </a:p>
           <a:p>
             <a:pPr algn="l" indent="0" marL="0">
@@ -24774,7 +24774,7 @@
               <a:buNone/>
             </a:pPr>
             <a:r>
-              <a:rPr lang="en-US" sz="1150" b="1" dirty="0">
+              <a:rPr lang="en-US" sz="1300" b="1" dirty="0">
                 <a:solidFill>
                   <a:srgbClr val="0E8385"/>
                 </a:solidFill>
@@ -24784,7 +24784,7 @@
               </a:rPr>
               <a:t>Kidney 0.77 (0.67–0.88)</a:t>
             </a:r>
-            <a:endParaRPr lang="en-US" sz="1150" dirty="0"/>
+            <a:endParaRPr lang="en-US" sz="1300" dirty="0"/>
           </a:p>
         </p:txBody>
       </p:sp>
@@ -24813,9 +24813,9 @@
               <a:buNone/>
             </a:pPr>
             <a:r>
-              <a:rPr lang="en-US" sz="1350" i="1" dirty="0">
-                <a:solidFill>
-                  <a:srgbClr val="22343C"/>
+              <a:rPr lang="en-US" sz="1500" i="1" dirty="0">
+                <a:solidFill>
+                  <a:srgbClr val="13212A"/>
                 </a:solidFill>
                 <a:latin typeface="Calibri" pitchFamily="34" charset="0"/>
                 <a:ea typeface="Calibri" pitchFamily="34" charset="-122"/>
@@ -24823,7 +24823,7 @@
               </a:rPr>
               <a:t>Consistent kidney and cardiovascular benefit, and a clear effect on eGFR slope, but only in diabetic CKD.</a:t>
             </a:r>
-            <a:endParaRPr lang="en-US" sz="1350" dirty="0"/>
+            <a:endParaRPr lang="en-US" sz="1500" dirty="0"/>
           </a:p>
         </p:txBody>
       </p:sp>
@@ -24868,7 +24868,7 @@
             <a:r>
               <a:rPr lang="en-US" sz="900" dirty="0">
                 <a:solidFill>
-                  <a:srgbClr val="6C7C84"/>
+                  <a:srgbClr val="4E5E66"/>
                 </a:solidFill>
                 <a:latin typeface="Calibri" pitchFamily="34" charset="0"/>
                 <a:ea typeface="Calibri" pitchFamily="34" charset="-122"/>
@@ -24907,7 +24907,7 @@
             <a:r>
               <a:rPr lang="en-US" sz="900" dirty="0">
                 <a:solidFill>
-                  <a:srgbClr val="6C7C84"/>
+                  <a:srgbClr val="4E5E66"/>
                 </a:solidFill>
                 <a:latin typeface="Calibri" pitchFamily="34" charset="0"/>
                 <a:ea typeface="Calibri" pitchFamily="34" charset="-122"/>
@@ -25103,7 +25103,7 @@
               <a:buNone/>
             </a:pPr>
             <a:r>
-              <a:rPr lang="en-US" sz="1600" dirty="0">
+              <a:rPr lang="en-US" sz="1750" dirty="0">
                 <a:solidFill>
                   <a:srgbClr val="AFC6D2"/>
                 </a:solidFill>
@@ -25113,7 +25113,7 @@
               </a:rPr>
               <a:t>Design, population, dosing, endpoints, and how the eGFR slope was analyzed.</a:t>
             </a:r>
-            <a:endParaRPr lang="en-US" sz="1600" dirty="0"/>
+            <a:endParaRPr lang="en-US" sz="1750" dirty="0"/>
           </a:p>
         </p:txBody>
       </p:sp>
@@ -25242,8 +25242,8 @@
         </p:nvSpPr>
         <p:spPr>
           <a:xfrm>
-            <a:off x="1389888" y="329184"/>
-            <a:ext cx="10158984" cy="566928"/>
+            <a:off x="1389888" y="310896"/>
+            <a:ext cx="10158984" cy="603504"/>
           </a:xfrm>
           <a:prstGeom prst="rect">
             <a:avLst/>
@@ -25259,7 +25259,7 @@
               <a:buNone/>
             </a:pPr>
             <a:r>
-              <a:rPr lang="en-US" sz="2300" b="1" dirty="0">
+              <a:rPr lang="en-US" sz="2600" b="1" dirty="0">
                 <a:solidFill>
                   <a:srgbClr val="0F3446"/>
                 </a:solidFill>
@@ -25269,7 +25269,7 @@
               </a:rPr>
               <a:t>Trial design</a:t>
             </a:r>
-            <a:endParaRPr lang="en-US" sz="2300" dirty="0"/>
+            <a:endParaRPr lang="en-US" sz="2600" dirty="0"/>
           </a:p>
         </p:txBody>
       </p:sp>
@@ -25301,9 +25301,9 @@
               <a:buNone/>
             </a:pPr>
             <a:r>
-              <a:rPr lang="en-US" sz="1400" dirty="0">
-                <a:solidFill>
-                  <a:srgbClr val="22343C"/>
+              <a:rPr lang="en-US" sz="1550" dirty="0">
+                <a:solidFill>
+                  <a:srgbClr val="13212A"/>
                 </a:solidFill>
                 <a:latin typeface="Calibri" pitchFamily="34" charset="0"/>
                 <a:ea typeface="Calibri" pitchFamily="34" charset="-122"/>
@@ -25311,7 +25311,7 @@
               </a:rPr>
               <a:t>Phase 3, international, double-blind, placebo-controlled. 1:1 randomization. At least 32 months of treatment; median treatment 36.6 months.</a:t>
             </a:r>
-            <a:endParaRPr lang="en-US" sz="1400" dirty="0"/>
+            <a:endParaRPr lang="en-US" sz="1550" dirty="0"/>
           </a:p>
         </p:txBody>
       </p:sp>
@@ -25362,7 +25362,7 @@
               <a:buNone/>
             </a:pPr>
             <a:r>
-              <a:rPr lang="en-US" sz="1500" b="1" dirty="0">
+              <a:rPr lang="en-US" sz="1650" b="1" dirty="0">
                 <a:solidFill>
                   <a:srgbClr val="0F3446"/>
                 </a:solidFill>
@@ -25372,7 +25372,7 @@
               </a:rPr>
               <a:t>3231 assessed</a:t>
             </a:r>
-            <a:endParaRPr lang="en-US" sz="1500" dirty="0"/>
+            <a:endParaRPr lang="en-US" sz="1650" dirty="0"/>
           </a:p>
         </p:txBody>
       </p:sp>
@@ -25404,9 +25404,9 @@
               <a:buNone/>
             </a:pPr>
             <a:r>
-              <a:rPr lang="en-US" sz="1050" dirty="0">
-                <a:solidFill>
-                  <a:srgbClr val="6C7C84"/>
+              <a:rPr lang="en-US" sz="1200" dirty="0">
+                <a:solidFill>
+                  <a:srgbClr val="4E5E66"/>
                 </a:solidFill>
                 <a:latin typeface="Calibri" pitchFamily="34" charset="0"/>
                 <a:ea typeface="Calibri" pitchFamily="34" charset="-122"/>
@@ -25414,7 +25414,7 @@
               </a:rPr>
               <a:t>Sept 2021 – May 2023</a:t>
             </a:r>
-            <a:endParaRPr lang="en-US" sz="1050" dirty="0"/>
+            <a:endParaRPr lang="en-US" sz="1200" dirty="0"/>
           </a:p>
         </p:txBody>
       </p:sp>
@@ -25485,7 +25485,7 @@
               <a:buNone/>
             </a:pPr>
             <a:r>
-              <a:rPr lang="en-US" sz="1500" b="1" dirty="0">
+              <a:rPr lang="en-US" sz="1650" b="1" dirty="0">
                 <a:solidFill>
                   <a:srgbClr val="FFFFFF"/>
                 </a:solidFill>
@@ -25495,7 +25495,7 @@
               </a:rPr>
               <a:t>1584 randomized</a:t>
             </a:r>
-            <a:endParaRPr lang="en-US" sz="1500" dirty="0"/>
+            <a:endParaRPr lang="en-US" sz="1650" dirty="0"/>
           </a:p>
         </p:txBody>
       </p:sp>
@@ -25527,7 +25527,7 @@
               <a:buNone/>
             </a:pPr>
             <a:r>
-              <a:rPr lang="en-US" sz="1050" dirty="0">
+              <a:rPr lang="en-US" sz="1200" dirty="0">
                 <a:solidFill>
                   <a:srgbClr val="D2E4E8"/>
                 </a:solidFill>
@@ -25537,7 +25537,7 @@
               </a:rPr>
               <a:t>Full analysis set (all randomized)</a:t>
             </a:r>
-            <a:endParaRPr lang="en-US" sz="1050" dirty="0"/>
+            <a:endParaRPr lang="en-US" sz="1200" dirty="0"/>
           </a:p>
         </p:txBody>
       </p:sp>
@@ -25608,7 +25608,7 @@
               <a:buNone/>
             </a:pPr>
             <a:r>
-              <a:rPr lang="en-US" sz="1350" b="1" dirty="0">
+              <a:rPr lang="en-US" sz="1500" b="1" dirty="0">
                 <a:solidFill>
                   <a:srgbClr val="FFFFFF"/>
                 </a:solidFill>
@@ -25622,7 +25622,7 @@
               <a:buNone/>
             </a:pPr>
             <a:r>
-              <a:rPr lang="en-US" sz="1250" dirty="0">
+              <a:rPr lang="en-US" sz="1400" dirty="0">
                 <a:solidFill>
                   <a:srgbClr val="E7F4F4"/>
                 </a:solidFill>
@@ -25632,7 +25632,7 @@
               </a:rPr>
               <a:t>793</a:t>
             </a:r>
-            <a:endParaRPr lang="en-US" sz="1350" dirty="0"/>
+            <a:endParaRPr lang="en-US" sz="1500" dirty="0"/>
           </a:p>
         </p:txBody>
       </p:sp>
@@ -25683,7 +25683,7 @@
               <a:buNone/>
             </a:pPr>
             <a:r>
-              <a:rPr lang="en-US" sz="1350" b="1" dirty="0">
+              <a:rPr lang="en-US" sz="1500" b="1" dirty="0">
                 <a:solidFill>
                   <a:srgbClr val="FFFFFF"/>
                 </a:solidFill>
@@ -25697,7 +25697,7 @@
               <a:buNone/>
             </a:pPr>
             <a:r>
-              <a:rPr lang="en-US" sz="1250" dirty="0">
+              <a:rPr lang="en-US" sz="1400" dirty="0">
                 <a:solidFill>
                   <a:srgbClr val="F1F5F6"/>
                 </a:solidFill>
@@ -25707,7 +25707,7 @@
               </a:rPr>
               <a:t>791</a:t>
             </a:r>
-            <a:endParaRPr lang="en-US" sz="1350" dirty="0"/>
+            <a:endParaRPr lang="en-US" sz="1500" dirty="0"/>
           </a:p>
         </p:txBody>
       </p:sp>
@@ -25736,7 +25736,7 @@
               <a:buNone/>
             </a:pPr>
             <a:r>
-              <a:rPr lang="en-US" sz="1400" b="1" dirty="0">
+              <a:rPr lang="en-US" sz="1550" b="1" dirty="0">
                 <a:solidFill>
                   <a:srgbClr val="0E8385"/>
                 </a:solidFill>
@@ -25746,7 +25746,7 @@
               </a:rPr>
               <a:t>Randomization &amp; stratification</a:t>
             </a:r>
-            <a:endParaRPr lang="en-US" sz="1400" dirty="0"/>
+            <a:endParaRPr lang="en-US" sz="1550" dirty="0"/>
           </a:p>
         </p:txBody>
       </p:sp>
@@ -25782,9 +25782,9 @@
               <a:buChar char="•"/>
             </a:pPr>
             <a:r>
-              <a:rPr lang="en-US" sz="1250" dirty="0">
-                <a:solidFill>
-                  <a:srgbClr val="22343C"/>
+              <a:rPr lang="en-US" sz="1400" dirty="0">
+                <a:solidFill>
+                  <a:srgbClr val="13212A"/>
                 </a:solidFill>
                 <a:latin typeface="Calibri" pitchFamily="34" charset="0"/>
                 <a:ea typeface="Calibri" pitchFamily="34" charset="-122"/>
@@ -25792,7 +25792,7 @@
               </a:rPr>
               <a:t>Baseline SGLT2 inhibitor use (yes vs. no)</a:t>
             </a:r>
-            <a:endParaRPr lang="en-US" sz="1250" dirty="0"/>
+            <a:endParaRPr lang="en-US" sz="1400" dirty="0"/>
           </a:p>
           <a:p>
             <a:pPr marL="203200" indent="-203200">
@@ -25806,9 +25806,9 @@
               <a:buChar char="•"/>
             </a:pPr>
             <a:r>
-              <a:rPr lang="en-US" sz="1250" dirty="0">
-                <a:solidFill>
-                  <a:srgbClr val="22343C"/>
+              <a:rPr lang="en-US" sz="1400" dirty="0">
+                <a:solidFill>
+                  <a:srgbClr val="13212A"/>
                 </a:solidFill>
                 <a:latin typeface="Calibri" pitchFamily="34" charset="0"/>
                 <a:ea typeface="Calibri" pitchFamily="34" charset="-122"/>
@@ -25816,7 +25816,7 @@
               </a:rPr>
               <a:t>Screening UACR (≤1000 vs. &gt;1000 mg/g)</a:t>
             </a:r>
-            <a:endParaRPr lang="en-US" sz="1250" dirty="0"/>
+            <a:endParaRPr lang="en-US" sz="1400" dirty="0"/>
           </a:p>
           <a:p>
             <a:pPr marL="203200" indent="-203200">
@@ -25830,9 +25830,9 @@
               <a:buChar char="•"/>
             </a:pPr>
             <a:r>
-              <a:rPr lang="en-US" sz="1250" dirty="0">
-                <a:solidFill>
-                  <a:srgbClr val="22343C"/>
+              <a:rPr lang="en-US" sz="1400" dirty="0">
+                <a:solidFill>
+                  <a:srgbClr val="13212A"/>
                 </a:solidFill>
                 <a:latin typeface="Calibri" pitchFamily="34" charset="0"/>
                 <a:ea typeface="Calibri" pitchFamily="34" charset="-122"/>
@@ -25840,7 +25840,7 @@
               </a:rPr>
               <a:t>Treatment-policy estimand: eGFR after stopping the regimen still counted in the analysis.</a:t>
             </a:r>
-            <a:endParaRPr lang="en-US" sz="1250" dirty="0"/>
+            <a:endParaRPr lang="en-US" sz="1400" dirty="0"/>
           </a:p>
         </p:txBody>
       </p:sp>
@@ -25869,7 +25869,7 @@
               <a:buNone/>
             </a:pPr>
             <a:r>
-              <a:rPr lang="en-US" sz="1400" b="1" dirty="0">
+              <a:rPr lang="en-US" sz="1550" b="1" dirty="0">
                 <a:solidFill>
                   <a:srgbClr val="0E8385"/>
                 </a:solidFill>
@@ -25879,7 +25879,7 @@
               </a:rPr>
               <a:t>Oversight</a:t>
             </a:r>
-            <a:endParaRPr lang="en-US" sz="1400" dirty="0"/>
+            <a:endParaRPr lang="en-US" sz="1550" dirty="0"/>
           </a:p>
         </p:txBody>
       </p:sp>
@@ -25915,9 +25915,9 @@
               <a:buChar char="•"/>
             </a:pPr>
             <a:r>
-              <a:rPr lang="en-US" sz="1250" dirty="0">
-                <a:solidFill>
-                  <a:srgbClr val="22343C"/>
+              <a:rPr lang="en-US" sz="1400" dirty="0">
+                <a:solidFill>
+                  <a:srgbClr val="13212A"/>
                 </a:solidFill>
                 <a:latin typeface="Calibri" pitchFamily="34" charset="0"/>
                 <a:ea typeface="Calibri" pitchFamily="34" charset="-122"/>
@@ -25925,7 +25925,7 @@
               </a:rPr>
               <a:t>Designed by the steering committee and Bayer (sponsor).</a:t>
             </a:r>
-            <a:endParaRPr lang="en-US" sz="1250" dirty="0"/>
+            <a:endParaRPr lang="en-US" sz="1400" dirty="0"/>
           </a:p>
           <a:p>
             <a:pPr marL="203200" indent="-203200">
@@ -25939,9 +25939,9 @@
               <a:buChar char="•"/>
             </a:pPr>
             <a:r>
-              <a:rPr lang="en-US" sz="1250" dirty="0">
-                <a:solidFill>
-                  <a:srgbClr val="22343C"/>
+              <a:rPr lang="en-US" sz="1400" dirty="0">
+                <a:solidFill>
+                  <a:srgbClr val="13212A"/>
                 </a:solidFill>
                 <a:latin typeface="Calibri" pitchFamily="34" charset="0"/>
                 <a:ea typeface="Calibri" pitchFamily="34" charset="-122"/>
@@ -25949,7 +25949,7 @@
               </a:rPr>
               <a:t>Independent data and safety monitoring committee throughout.</a:t>
             </a:r>
-            <a:endParaRPr lang="en-US" sz="1250" dirty="0"/>
+            <a:endParaRPr lang="en-US" sz="1400" dirty="0"/>
           </a:p>
           <a:p>
             <a:pPr marL="203200" indent="-203200">
@@ -25963,9 +25963,9 @@
               <a:buChar char="•"/>
             </a:pPr>
             <a:r>
-              <a:rPr lang="en-US" sz="1250" dirty="0">
-                <a:solidFill>
-                  <a:srgbClr val="22343C"/>
+              <a:rPr lang="en-US" sz="1400" dirty="0">
+                <a:solidFill>
+                  <a:srgbClr val="13212A"/>
                 </a:solidFill>
                 <a:latin typeface="Calibri" pitchFamily="34" charset="0"/>
                 <a:ea typeface="Calibri" pitchFamily="34" charset="-122"/>
@@ -25973,7 +25973,7 @@
               </a:rPr>
               <a:t>Sponsor analyses re-run independently at UMC Groningen on the original data.</a:t>
             </a:r>
-            <a:endParaRPr lang="en-US" sz="1250" dirty="0"/>
+            <a:endParaRPr lang="en-US" sz="1400" dirty="0"/>
           </a:p>
         </p:txBody>
       </p:sp>
@@ -26018,7 +26018,7 @@
             <a:r>
               <a:rPr lang="en-US" sz="900" dirty="0">
                 <a:solidFill>
-                  <a:srgbClr val="6C7C84"/>
+                  <a:srgbClr val="4E5E66"/>
                 </a:solidFill>
                 <a:latin typeface="Calibri" pitchFamily="34" charset="0"/>
                 <a:ea typeface="Calibri" pitchFamily="34" charset="-122"/>
@@ -26057,7 +26057,7 @@
             <a:r>
               <a:rPr lang="en-US" sz="900" dirty="0">
                 <a:solidFill>
-                  <a:srgbClr val="6C7C84"/>
+                  <a:srgbClr val="4E5E66"/>
                 </a:solidFill>
                 <a:latin typeface="Calibri" pitchFamily="34" charset="0"/>
                 <a:ea typeface="Calibri" pitchFamily="34" charset="-122"/>
@@ -26155,8 +26155,8 @@
         </p:nvSpPr>
         <p:spPr>
           <a:xfrm>
-            <a:off x="1389888" y="329184"/>
-            <a:ext cx="10158984" cy="566928"/>
+            <a:off x="1389888" y="310896"/>
+            <a:ext cx="10158984" cy="603504"/>
           </a:xfrm>
           <a:prstGeom prst="rect">
             <a:avLst/>
@@ -26172,7 +26172,7 @@
               <a:buNone/>
             </a:pPr>
             <a:r>
-              <a:rPr lang="en-US" sz="2300" b="1" dirty="0">
+              <a:rPr lang="en-US" sz="2600" b="1" dirty="0">
                 <a:solidFill>
                   <a:srgbClr val="0F3446"/>
                 </a:solidFill>
@@ -26182,7 +26182,7 @@
               </a:rPr>
               <a:t>Who was studied</a:t>
             </a:r>
-            <a:endParaRPr lang="en-US" sz="2300" dirty="0"/>
+            <a:endParaRPr lang="en-US" sz="2600" dirty="0"/>
           </a:p>
         </p:txBody>
       </p:sp>
@@ -26211,7 +26211,7 @@
               <a:buNone/>
             </a:pPr>
             <a:r>
-              <a:rPr lang="en-US" sz="1400" b="1" dirty="0">
+              <a:rPr lang="en-US" sz="1550" b="1" dirty="0">
                 <a:solidFill>
                   <a:srgbClr val="0E8385"/>
                 </a:solidFill>
@@ -26221,7 +26221,7 @@
               </a:rPr>
               <a:t>Key inclusion criteria</a:t>
             </a:r>
-            <a:endParaRPr lang="en-US" sz="1400" dirty="0"/>
+            <a:endParaRPr lang="en-US" sz="1550" dirty="0"/>
           </a:p>
         </p:txBody>
       </p:sp>
@@ -26257,9 +26257,9 @@
               <a:buChar char="•"/>
             </a:pPr>
             <a:r>
-              <a:rPr lang="en-US" sz="1350" dirty="0">
-                <a:solidFill>
-                  <a:srgbClr val="22343C"/>
+              <a:rPr lang="en-US" sz="1500" dirty="0">
+                <a:solidFill>
+                  <a:srgbClr val="13212A"/>
                 </a:solidFill>
                 <a:latin typeface="Calibri" pitchFamily="34" charset="0"/>
                 <a:ea typeface="Calibri" pitchFamily="34" charset="-122"/>
@@ -26267,7 +26267,7 @@
               </a:rPr>
               <a:t>Adults with a clinical diagnosis of CKD, without diabetes</a:t>
             </a:r>
-            <a:endParaRPr lang="en-US" sz="1350" dirty="0"/>
+            <a:endParaRPr lang="en-US" sz="1500" dirty="0"/>
           </a:p>
           <a:p>
             <a:pPr marL="203200" indent="-203200">
@@ -26281,9 +26281,9 @@
               <a:buChar char="•"/>
             </a:pPr>
             <a:r>
-              <a:rPr lang="en-US" sz="1350" dirty="0">
-                <a:solidFill>
-                  <a:srgbClr val="22343C"/>
+              <a:rPr lang="en-US" sz="1500" dirty="0">
+                <a:solidFill>
+                  <a:srgbClr val="13212A"/>
                 </a:solidFill>
                 <a:latin typeface="Calibri" pitchFamily="34" charset="0"/>
                 <a:ea typeface="Calibri" pitchFamily="34" charset="-122"/>
@@ -26291,7 +26291,7 @@
               </a:rPr>
               <a:t>eGFR 25 to &lt;60 with UACR 200–500 mg/g, or eGFR 25 to &lt;90 with UACR 500–3500 mg/g</a:t>
             </a:r>
-            <a:endParaRPr lang="en-US" sz="1350" dirty="0"/>
+            <a:endParaRPr lang="en-US" sz="1500" dirty="0"/>
           </a:p>
           <a:p>
             <a:pPr marL="203200" indent="-203200">
@@ -26305,9 +26305,9 @@
               <a:buChar char="•"/>
             </a:pPr>
             <a:r>
-              <a:rPr lang="en-US" sz="1350" dirty="0">
-                <a:solidFill>
-                  <a:srgbClr val="22343C"/>
+              <a:rPr lang="en-US" sz="1500" dirty="0">
+                <a:solidFill>
+                  <a:srgbClr val="13212A"/>
                 </a:solidFill>
                 <a:latin typeface="Calibri" pitchFamily="34" charset="0"/>
                 <a:ea typeface="Calibri" pitchFamily="34" charset="-122"/>
@@ -26315,7 +26315,7 @@
               </a:rPr>
               <a:t>On a stable ACE inhibitor or ARB for ≥4 weeks</a:t>
             </a:r>
-            <a:endParaRPr lang="en-US" sz="1350" dirty="0"/>
+            <a:endParaRPr lang="en-US" sz="1500" dirty="0"/>
           </a:p>
           <a:p>
             <a:pPr marL="203200" indent="-203200">
@@ -26329,9 +26329,9 @@
               <a:buChar char="•"/>
             </a:pPr>
             <a:r>
-              <a:rPr lang="en-US" sz="1350" dirty="0">
-                <a:solidFill>
-                  <a:srgbClr val="22343C"/>
+              <a:rPr lang="en-US" sz="1500" dirty="0">
+                <a:solidFill>
+                  <a:srgbClr val="13212A"/>
                 </a:solidFill>
                 <a:latin typeface="Calibri" pitchFamily="34" charset="0"/>
                 <a:ea typeface="Calibri" pitchFamily="34" charset="-122"/>
@@ -26339,7 +26339,7 @@
               </a:rPr>
               <a:t>Serum potassium ≤4.8 mmol/L at screening</a:t>
             </a:r>
-            <a:endParaRPr lang="en-US" sz="1350" dirty="0"/>
+            <a:endParaRPr lang="en-US" sz="1500" dirty="0"/>
           </a:p>
         </p:txBody>
       </p:sp>
@@ -26368,7 +26368,7 @@
               <a:buNone/>
             </a:pPr>
             <a:r>
-              <a:rPr lang="en-US" sz="1400" b="1" dirty="0">
+              <a:rPr lang="en-US" sz="1550" b="1" dirty="0">
                 <a:solidFill>
                   <a:srgbClr val="E86A44"/>
                 </a:solidFill>
@@ -26378,7 +26378,7 @@
               </a:rPr>
               <a:t>Key exclusion criteria</a:t>
             </a:r>
-            <a:endParaRPr lang="en-US" sz="1400" dirty="0"/>
+            <a:endParaRPr lang="en-US" sz="1550" dirty="0"/>
           </a:p>
         </p:txBody>
       </p:sp>
@@ -26414,9 +26414,9 @@
               <a:buChar char="–"/>
             </a:pPr>
             <a:r>
-              <a:rPr lang="en-US" sz="1350" dirty="0">
-                <a:solidFill>
-                  <a:srgbClr val="22343C"/>
+              <a:rPr lang="en-US" sz="1500" dirty="0">
+                <a:solidFill>
+                  <a:srgbClr val="13212A"/>
                 </a:solidFill>
                 <a:latin typeface="Calibri" pitchFamily="34" charset="0"/>
                 <a:ea typeface="Calibri" pitchFamily="34" charset="-122"/>
@@ -26424,7 +26424,7 @@
               </a:rPr>
               <a:t>Type 1 or type 2 diabetes, or HbA1c ≥6.5%</a:t>
             </a:r>
-            <a:endParaRPr lang="en-US" sz="1350" dirty="0"/>
+            <a:endParaRPr lang="en-US" sz="1500" dirty="0"/>
           </a:p>
           <a:p>
             <a:pPr marL="203200" indent="-203200">
@@ -26438,9 +26438,9 @@
               <a:buChar char="–"/>
             </a:pPr>
             <a:r>
-              <a:rPr lang="en-US" sz="1350" dirty="0">
-                <a:solidFill>
-                  <a:srgbClr val="22343C"/>
+              <a:rPr lang="en-US" sz="1500" dirty="0">
+                <a:solidFill>
+                  <a:srgbClr val="13212A"/>
                 </a:solidFill>
                 <a:latin typeface="Calibri" pitchFamily="34" charset="0"/>
                 <a:ea typeface="Calibri" pitchFamily="34" charset="-122"/>
@@ -26448,7 +26448,7 @@
               </a:rPr>
               <a:t>Indication for a steroidal MRA</a:t>
             </a:r>
-            <a:endParaRPr lang="en-US" sz="1350" dirty="0"/>
+            <a:endParaRPr lang="en-US" sz="1500" dirty="0"/>
           </a:p>
           <a:p>
             <a:pPr marL="203200" indent="-203200">
@@ -26462,9 +26462,9 @@
               <a:buChar char="–"/>
             </a:pPr>
             <a:r>
-              <a:rPr lang="en-US" sz="1350" dirty="0">
-                <a:solidFill>
-                  <a:srgbClr val="22343C"/>
+              <a:rPr lang="en-US" sz="1500" dirty="0">
+                <a:solidFill>
+                  <a:srgbClr val="13212A"/>
                 </a:solidFill>
                 <a:latin typeface="Calibri" pitchFamily="34" charset="0"/>
                 <a:ea typeface="Calibri" pitchFamily="34" charset="-122"/>
@@ -26472,7 +26472,7 @@
               </a:rPr>
               <a:t>Polycystic kidney disease</a:t>
             </a:r>
-            <a:endParaRPr lang="en-US" sz="1350" dirty="0"/>
+            <a:endParaRPr lang="en-US" sz="1500" dirty="0"/>
           </a:p>
           <a:p>
             <a:pPr marL="203200" indent="-203200">
@@ -26486,9 +26486,9 @@
               <a:buChar char="–"/>
             </a:pPr>
             <a:r>
-              <a:rPr lang="en-US" sz="1350" dirty="0">
-                <a:solidFill>
-                  <a:srgbClr val="22343C"/>
+              <a:rPr lang="en-US" sz="1500" dirty="0">
+                <a:solidFill>
+                  <a:srgbClr val="13212A"/>
                 </a:solidFill>
                 <a:latin typeface="Calibri" pitchFamily="34" charset="0"/>
                 <a:ea typeface="Calibri" pitchFamily="34" charset="-122"/>
@@ -26496,7 +26496,7 @@
               </a:rPr>
               <a:t>Lupus nephritis or ANCA-associated vasculitis</a:t>
             </a:r>
-            <a:endParaRPr lang="en-US" sz="1350" dirty="0"/>
+            <a:endParaRPr lang="en-US" sz="1500" dirty="0"/>
           </a:p>
           <a:p>
             <a:pPr marL="203200" indent="-203200">
@@ -26510,9 +26510,9 @@
               <a:buChar char="–"/>
             </a:pPr>
             <a:r>
-              <a:rPr lang="en-US" sz="1350" dirty="0">
-                <a:solidFill>
-                  <a:srgbClr val="22343C"/>
+              <a:rPr lang="en-US" sz="1500" dirty="0">
+                <a:solidFill>
+                  <a:srgbClr val="13212A"/>
                 </a:solidFill>
                 <a:latin typeface="Calibri" pitchFamily="34" charset="0"/>
                 <a:ea typeface="Calibri" pitchFamily="34" charset="-122"/>
@@ -26520,7 +26520,7 @@
               </a:rPr>
               <a:t>Immunosuppression within the prior 6 months</a:t>
             </a:r>
-            <a:endParaRPr lang="en-US" sz="1350" dirty="0"/>
+            <a:endParaRPr lang="en-US" sz="1500" dirty="0"/>
           </a:p>
         </p:txBody>
       </p:sp>
@@ -26574,9 +26574,9 @@
               <a:buNone/>
             </a:pPr>
             <a:r>
-              <a:rPr lang="en-US" sz="1250" i="1" dirty="0">
-                <a:solidFill>
-                  <a:srgbClr val="22343C"/>
+              <a:rPr lang="en-US" sz="1400" i="1" dirty="0">
+                <a:solidFill>
+                  <a:srgbClr val="13212A"/>
                 </a:solidFill>
                 <a:latin typeface="Calibri" pitchFamily="34" charset="0"/>
                 <a:ea typeface="Calibri" pitchFamily="34" charset="-122"/>
@@ -26584,7 +26584,7 @@
               </a:rPr>
               <a:t>In practice, an enriched higher-risk phenotype: mostly glomerular disease with heavy albuminuria and preserved-to-moderately-reduced eGFR, on a RAS inhibitor, kept clear of diseases that need other therapy.</a:t>
             </a:r>
-            <a:endParaRPr lang="en-US" sz="1250" dirty="0"/>
+            <a:endParaRPr lang="en-US" sz="1400" dirty="0"/>
           </a:p>
         </p:txBody>
       </p:sp>
@@ -26629,7 +26629,7 @@
             <a:r>
               <a:rPr lang="en-US" sz="900" dirty="0">
                 <a:solidFill>
-                  <a:srgbClr val="6C7C84"/>
+                  <a:srgbClr val="4E5E66"/>
                 </a:solidFill>
                 <a:latin typeface="Calibri" pitchFamily="34" charset="0"/>
                 <a:ea typeface="Calibri" pitchFamily="34" charset="-122"/>
@@ -26668,7 +26668,7 @@
             <a:r>
               <a:rPr lang="en-US" sz="900" dirty="0">
                 <a:solidFill>
-                  <a:srgbClr val="6C7C84"/>
+                  <a:srgbClr val="4E5E66"/>
                 </a:solidFill>
                 <a:latin typeface="Calibri" pitchFamily="34" charset="0"/>
                 <a:ea typeface="Calibri" pitchFamily="34" charset="-122"/>

--- a/FIND-CKD.pptx
+++ b/FIND-CKD.pptx
@@ -137,577 +137,6 @@
 </file>
 
 <file path=ppt/charts/chart1.xml><?xml version="1.0" encoding="utf-8"?>
-<c:chartSpace xmlns:c="http://schemas.openxmlformats.org/drawingml/2006/chart" xmlns:a="http://schemas.openxmlformats.org/drawingml/2006/main" xmlns:r="http://schemas.openxmlformats.org/officeDocument/2006/relationships">
-  <c:date1904 val="0"/>
-  <c:roundedCorners val="1"/>
-  <c:chart>
-    <c:autoTitleDeleted val="1"/>
-    <c:plotArea>
-      <c:layout/>
-      <c:lineChart>
-        <c:varyColors val="0"/>
-        <c:ser>
-          <c:idx val="0"/>
-          <c:order val="0"/>
-          <c:tx>
-            <c:strRef>
-              <c:f>Sheet1!$B$1</c:f>
-              <c:strCache>
-                <c:ptCount val="1"/>
-                <c:pt idx="0">
-                  <c:v>Finerenone</c:v>
-                </c:pt>
-              </c:strCache>
-            </c:strRef>
-          </c:tx>
-          <c:spPr>
-            <a:solidFill>
-              <a:srgbClr val="12A3A6"/>
-            </a:solidFill>
-            <a:ln w="40640" cap="flat">
-              <a:solidFill>
-                <a:srgbClr val="12A3A6"/>
-              </a:solidFill>
-              <a:prstDash val="solid"/>
-              <a:round/>
-            </a:ln>
-            <a:effectLst/>
-          </c:spPr>
-          <c:invertIfNegative val="0"/>
-          <c:dLbls>
-            <c:numFmt formatCode="#,##0" sourceLinked="0"/>
-            <c:txPr>
-              <a:bodyPr/>
-              <a:lstStyle/>
-              <a:p>
-                <a:pPr>
-                  <a:defRPr b="0" i="0" strike="noStrike" sz="1200" u="none">
-                    <a:solidFill>
-                      <a:srgbClr val="000000"/>
-                    </a:solidFill>
-                    <a:latin typeface="Arial"/>
-                  </a:defRPr>
-                </a:pPr>
-              </a:p>
-            </c:txPr>
-            <c:showLegendKey val="0"/>
-            <c:showVal val="0"/>
-            <c:showCatName val="0"/>
-            <c:showSerName val="0"/>
-            <c:showPercent val="0"/>
-            <c:showBubbleSize val="0"/>
-            <c:showLeaderLines val="0"/>
-          </c:dLbls>
-          <c:marker>
-            <c:symbol val="none"/>
-            <c:size val="6"/>
-            <c:spPr>
-              <a:solidFill>
-                <a:srgbClr val="12A3A6"/>
-              </a:solidFill>
-              <a:ln w="9525" cap="flat">
-                <a:solidFill>
-                  <a:srgbClr val="12A3A6"/>
-                </a:solidFill>
-                <a:prstDash val="solid"/>
-                <a:round/>
-              </a:ln>
-              <a:effectLst/>
-            </c:spPr>
-          </c:marker>
-          <c:cat>
-            <c:multiLvlStrRef>
-              <c:f>Sheet1!$A$2:$A$14</c:f>
-              <c:multiLvlStrCache>
-                <c:ptCount val="13"/>
-                <c:lvl>
-                  <c:pt idx="0">
-                    <c:v>0</c:v>
-                  </c:pt>
-                  <c:pt idx="1">
-                    <c:v>1</c:v>
-                  </c:pt>
-                  <c:pt idx="2">
-                    <c:v>3</c:v>
-                  </c:pt>
-                  <c:pt idx="3">
-                    <c:v>6</c:v>
-                  </c:pt>
-                  <c:pt idx="4">
-                    <c:v>9</c:v>
-                  </c:pt>
-                  <c:pt idx="5">
-                    <c:v>12</c:v>
-                  </c:pt>
-                  <c:pt idx="6">
-                    <c:v>16</c:v>
-                  </c:pt>
-                  <c:pt idx="7">
-                    <c:v>20</c:v>
-                  </c:pt>
-                  <c:pt idx="8">
-                    <c:v>24</c:v>
-                  </c:pt>
-                  <c:pt idx="9">
-                    <c:v>28</c:v>
-                  </c:pt>
-                  <c:pt idx="10">
-                    <c:v>32</c:v>
-                  </c:pt>
-                  <c:pt idx="11">
-                    <c:v>EOT</c:v>
-                  </c:pt>
-                  <c:pt idx="12">
-                    <c:v>+4wk</c:v>
-                  </c:pt>
-                </c:lvl>
-              </c:multiLvlStrCache>
-            </c:multiLvlStrRef>
-          </c:cat>
-          <c:val>
-            <c:numRef>
-              <c:f>Sheet1!$B$2:$B$14</c:f>
-              <c:numCache>
-                <c:formatCode>General</c:formatCode>
-                <c:ptCount val="13"/>
-                <c:pt idx="0">
-                  <c:v>0</c:v>
-                </c:pt>
-                <c:pt idx="1">
-                  <c:v>-1.2</c:v>
-                </c:pt>
-                <c:pt idx="2">
-                  <c:v>-2</c:v>
-                </c:pt>
-                <c:pt idx="3">
-                  <c:v>-2.6</c:v>
-                </c:pt>
-                <c:pt idx="4">
-                  <c:v>-3.2</c:v>
-                </c:pt>
-                <c:pt idx="5">
-                  <c:v>-3.9</c:v>
-                </c:pt>
-                <c:pt idx="6">
-                  <c:v>-4.8</c:v>
-                </c:pt>
-                <c:pt idx="7">
-                  <c:v>-5.6</c:v>
-                </c:pt>
-                <c:pt idx="8">
-                  <c:v>-6.3</c:v>
-                </c:pt>
-                <c:pt idx="9">
-                  <c:v>-6.9</c:v>
-                </c:pt>
-                <c:pt idx="10">
-                  <c:v>-7.4</c:v>
-                </c:pt>
-                <c:pt idx="11">
-                  <c:v>-9.6</c:v>
-                </c:pt>
-                <c:pt idx="12">
-                  <c:v>-8.8</c:v>
-                </c:pt>
-              </c:numCache>
-            </c:numRef>
-          </c:val>
-          <c:smooth val="1"/>
-        </c:ser>
-        <c:ser>
-          <c:idx val="1"/>
-          <c:order val="1"/>
-          <c:tx>
-            <c:strRef>
-              <c:f>Sheet1!$C$1</c:f>
-              <c:strCache>
-                <c:ptCount val="1"/>
-                <c:pt idx="0">
-                  <c:v>Placebo</c:v>
-                </c:pt>
-              </c:strCache>
-            </c:strRef>
-          </c:tx>
-          <c:spPr>
-            <a:solidFill>
-              <a:srgbClr val="9AA7AD"/>
-            </a:solidFill>
-            <a:ln w="40640" cap="flat">
-              <a:solidFill>
-                <a:srgbClr val="9AA7AD"/>
-              </a:solidFill>
-              <a:prstDash val="solid"/>
-              <a:round/>
-            </a:ln>
-            <a:effectLst/>
-          </c:spPr>
-          <c:invertIfNegative val="0"/>
-          <c:dLbls>
-            <c:numFmt formatCode="#,##0" sourceLinked="0"/>
-            <c:txPr>
-              <a:bodyPr/>
-              <a:lstStyle/>
-              <a:p>
-                <a:pPr>
-                  <a:defRPr b="0" i="0" strike="noStrike" sz="1200" u="none">
-                    <a:solidFill>
-                      <a:srgbClr val="000000"/>
-                    </a:solidFill>
-                    <a:latin typeface="Arial"/>
-                  </a:defRPr>
-                </a:pPr>
-              </a:p>
-            </c:txPr>
-            <c:showLegendKey val="0"/>
-            <c:showVal val="0"/>
-            <c:showCatName val="0"/>
-            <c:showSerName val="0"/>
-            <c:showPercent val="0"/>
-            <c:showBubbleSize val="0"/>
-            <c:showLeaderLines val="0"/>
-          </c:dLbls>
-          <c:marker>
-            <c:symbol val="none"/>
-            <c:size val="6"/>
-            <c:spPr>
-              <a:solidFill>
-                <a:srgbClr val="9AA7AD"/>
-              </a:solidFill>
-              <a:ln w="9525" cap="flat">
-                <a:solidFill>
-                  <a:srgbClr val="9AA7AD"/>
-                </a:solidFill>
-                <a:prstDash val="solid"/>
-                <a:round/>
-              </a:ln>
-              <a:effectLst/>
-            </c:spPr>
-          </c:marker>
-          <c:cat>
-            <c:multiLvlStrRef>
-              <c:f>Sheet1!$A$2:$A$14</c:f>
-              <c:multiLvlStrCache>
-                <c:ptCount val="13"/>
-                <c:lvl>
-                  <c:pt idx="0">
-                    <c:v>0</c:v>
-                  </c:pt>
-                  <c:pt idx="1">
-                    <c:v>1</c:v>
-                  </c:pt>
-                  <c:pt idx="2">
-                    <c:v>3</c:v>
-                  </c:pt>
-                  <c:pt idx="3">
-                    <c:v>6</c:v>
-                  </c:pt>
-                  <c:pt idx="4">
-                    <c:v>9</c:v>
-                  </c:pt>
-                  <c:pt idx="5">
-                    <c:v>12</c:v>
-                  </c:pt>
-                  <c:pt idx="6">
-                    <c:v>16</c:v>
-                  </c:pt>
-                  <c:pt idx="7">
-                    <c:v>20</c:v>
-                  </c:pt>
-                  <c:pt idx="8">
-                    <c:v>24</c:v>
-                  </c:pt>
-                  <c:pt idx="9">
-                    <c:v>28</c:v>
-                  </c:pt>
-                  <c:pt idx="10">
-                    <c:v>32</c:v>
-                  </c:pt>
-                  <c:pt idx="11">
-                    <c:v>EOT</c:v>
-                  </c:pt>
-                  <c:pt idx="12">
-                    <c:v>+4wk</c:v>
-                  </c:pt>
-                </c:lvl>
-              </c:multiLvlStrCache>
-            </c:multiLvlStrRef>
-          </c:cat>
-          <c:val>
-            <c:numRef>
-              <c:f>Sheet1!$C$2:$C$14</c:f>
-              <c:numCache>
-                <c:formatCode>General</c:formatCode>
-                <c:ptCount val="13"/>
-                <c:pt idx="0">
-                  <c:v>0</c:v>
-                </c:pt>
-                <c:pt idx="1">
-                  <c:v>-0.4</c:v>
-                </c:pt>
-                <c:pt idx="2">
-                  <c:v>-0.8</c:v>
-                </c:pt>
-                <c:pt idx="3">
-                  <c:v>-1.8</c:v>
-                </c:pt>
-                <c:pt idx="4">
-                  <c:v>-2.7</c:v>
-                </c:pt>
-                <c:pt idx="5">
-                  <c:v>-3.6</c:v>
-                </c:pt>
-                <c:pt idx="6">
-                  <c:v>-4.8</c:v>
-                </c:pt>
-                <c:pt idx="7">
-                  <c:v>-5.7</c:v>
-                </c:pt>
-                <c:pt idx="8">
-                  <c:v>-6.6</c:v>
-                </c:pt>
-                <c:pt idx="9">
-                  <c:v>-7.5</c:v>
-                </c:pt>
-                <c:pt idx="10">
-                  <c:v>-8.5</c:v>
-                </c:pt>
-                <c:pt idx="11">
-                  <c:v>-10.6</c:v>
-                </c:pt>
-                <c:pt idx="12">
-                  <c:v>-11.2</c:v>
-                </c:pt>
-              </c:numCache>
-            </c:numRef>
-          </c:val>
-          <c:smooth val="1"/>
-        </c:ser>
-        <c:dLbls>
-          <c:numFmt formatCode="#,##0" sourceLinked="0"/>
-          <c:txPr>
-            <a:bodyPr/>
-            <a:lstStyle/>
-            <a:p>
-              <a:pPr>
-                <a:defRPr b="0" i="0" strike="noStrike" sz="1200" u="none">
-                  <a:solidFill>
-                    <a:srgbClr val="000000"/>
-                  </a:solidFill>
-                  <a:latin typeface="Arial"/>
-                </a:defRPr>
-              </a:pPr>
-            </a:p>
-          </c:txPr>
-          <c:showLegendKey val="0"/>
-          <c:showVal val="0"/>
-          <c:showCatName val="0"/>
-          <c:showSerName val="0"/>
-          <c:showPercent val="0"/>
-          <c:showBubbleSize val="0"/>
-          <c:showLeaderLines val="0"/>
-        </c:dLbls>
-        <c:marker val="1"/>
-        <c:axId val="2094734554"/>
-        <c:axId val="2094734552"/>
-        <c:axId val="2094734556"/>
-      </c:lineChart>
-      <c:catAx>
-        <c:axId val="2094734554"/>
-        <c:scaling>
-          <c:orientation val="minMax"/>
-        </c:scaling>
-        <c:delete val="0"/>
-        <c:axPos val="b"/>
-        <c:title>
-          <c:tx>
-            <c:rich>
-              <a:bodyPr/>
-              <a:lstStyle/>
-              <a:p>
-                <a:pPr>
-                  <a:defRPr sz="1100" b="0" i="0" u="none" strike="noStrike">
-                    <a:solidFill>
-                      <a:srgbClr val="4E5E66"/>
-                    </a:solidFill>
-                    <a:latin typeface="Arial"/>
-                  </a:defRPr>
-                </a:pPr>
-                <a:r>
-                  <a:rPr sz="1100" b="0" i="0" u="none" strike="noStrike">
-                    <a:solidFill>
-                      <a:srgbClr val="4E5E66"/>
-                    </a:solidFill>
-                    <a:latin typeface="Arial"/>
-                  </a:rPr>
-                  <a:t>Months since randomization</a:t>
-                </a:r>
-              </a:p>
-            </c:rich>
-          </c:tx>
-          <c:layout/>
-          <c:overlay val="0"/>
-        </c:title>
-        <c:numFmt formatCode="General" sourceLinked="1"/>
-        <c:majorTickMark val="out"/>
-        <c:minorTickMark val="none"/>
-        <c:tickLblPos val="low"/>
-        <c:spPr>
-          <a:ln w="12700" cap="flat">
-            <a:solidFill>
-              <a:srgbClr val="888888"/>
-            </a:solidFill>
-            <a:prstDash val="solid"/>
-            <a:round/>
-          </a:ln>
-        </c:spPr>
-        <c:txPr>
-          <a:bodyPr/>
-          <a:lstStyle/>
-          <a:p>
-            <a:pPr>
-              <a:defRPr sz="1000" b="0" i="0" u="none" strike="noStrike">
-                <a:solidFill>
-                  <a:srgbClr val="4E5E66"/>
-                </a:solidFill>
-                <a:latin typeface="Calibri"/>
-              </a:defRPr>
-            </a:pPr>
-            <a:endParaRPr lang="en-US"/>
-          </a:p>
-        </c:txPr>
-        <c:crossAx val="2094734552"/>
-        <c:crosses val="autoZero"/>
-        <c:auto val="1"/>
-        <c:lblAlgn val="ctr"/>
-        <c:noMultiLvlLbl val="1"/>
-      </c:catAx>
-      <c:valAx>
-        <c:axId val="2094734552"/>
-        <c:scaling>
-          <c:orientation val="minMax"/>
-          <c:max val="2"/>
-          <c:min val="-12"/>
-        </c:scaling>
-        <c:delete val="0"/>
-        <c:axPos val="l"/>
-        <c:majorGridlines>
-          <c:spPr>
-            <a:ln w="12700" cap="flat">
-              <a:solidFill>
-                <a:srgbClr val="ECF2F2"/>
-              </a:solidFill>
-              <a:prstDash val="solid"/>
-              <a:round/>
-            </a:ln>
-          </c:spPr>
-        </c:majorGridlines>
-        <c:title>
-          <c:tx>
-            <c:rich>
-              <a:bodyPr/>
-              <a:lstStyle/>
-              <a:p>
-                <a:pPr>
-                  <a:defRPr sz="1100" b="0" i="0" u="none" strike="noStrike">
-                    <a:solidFill>
-                      <a:srgbClr val="4E5E66"/>
-                    </a:solidFill>
-                    <a:latin typeface="Arial"/>
-                  </a:defRPr>
-                </a:pPr>
-                <a:r>
-                  <a:rPr sz="1100" b="0" i="0" u="none" strike="noStrike">
-                    <a:solidFill>
-                      <a:srgbClr val="4E5E66"/>
-                    </a:solidFill>
-                    <a:latin typeface="Arial"/>
-                  </a:rPr>
-                  <a:t>Mean change in eGFR from baseline (ml/min/1.73 m²)</a:t>
-                </a:r>
-              </a:p>
-            </c:rich>
-          </c:tx>
-          <c:layout/>
-          <c:overlay val="0"/>
-        </c:title>
-        <c:numFmt formatCode="General" sourceLinked="0"/>
-        <c:majorTickMark val="out"/>
-        <c:minorTickMark val="none"/>
-        <c:tickLblPos val="nextTo"/>
-        <c:spPr>
-          <a:ln w="12700" cap="flat">
-            <a:solidFill>
-              <a:srgbClr val="888888"/>
-            </a:solidFill>
-            <a:prstDash val="solid"/>
-            <a:round/>
-          </a:ln>
-        </c:spPr>
-        <c:txPr>
-          <a:bodyPr/>
-          <a:lstStyle/>
-          <a:p>
-            <a:pPr>
-              <a:defRPr sz="1000" b="0" i="0" u="none" strike="noStrike">
-                <a:solidFill>
-                  <a:srgbClr val="4E5E66"/>
-                </a:solidFill>
-                <a:latin typeface="Calibri"/>
-              </a:defRPr>
-            </a:pPr>
-            <a:endParaRPr lang="en-US"/>
-          </a:p>
-        </c:txPr>
-        <c:crossAx val="2094734554"/>
-        <c:crosses val="autoZero"/>
-        <c:crossBetween val="between"/>
-        <c:majorUnit val="2"/>
-      </c:valAx>
-      <c:spPr>
-        <a:noFill/>
-        <a:ln>
-          <a:noFill/>
-        </a:ln>
-        <a:effectLst/>
-      </c:spPr>
-    </c:plotArea>
-    <c:legend>
-      <c:legendPos val="t"/>
-      <c:overlay val="0"/>
-      <c:txPr>
-        <a:bodyPr/>
-        <a:lstStyle/>
-        <a:p>
-          <a:pPr>
-            <a:defRPr sz="1200">
-              <a:solidFill>
-                <a:srgbClr val="13212A"/>
-              </a:solidFill>
-              <a:latin typeface="Calibri"/>
-              <a:cs typeface="Calibri"/>
-            </a:defRPr>
-          </a:pPr>
-          <a:endParaRPr lang="en-US"/>
-        </a:p>
-      </c:txPr>
-    </c:legend>
-    <c:plotVisOnly val="1"/>
-    <c:dispBlanksAs val="span"/>
-  </c:chart>
-  <c:spPr>
-    <a:noFill/>
-    <a:ln>
-      <a:noFill/>
-    </a:ln>
-    <a:effectLst/>
-  </c:spPr>
-  <c:externalData r:id="rId1">
-    <c:autoUpdate val="0"/>
-  </c:externalData>
-</c:chartSpace>
-</file>
-
-<file path=ppt/charts/chart2.xml><?xml version="1.0" encoding="utf-8"?>
 <c:chartSpace xmlns:c="http://schemas.openxmlformats.org/drawingml/2006/chart" xmlns:a="http://schemas.openxmlformats.org/drawingml/2006/main" xmlns:r="http://schemas.openxmlformats.org/officeDocument/2006/relationships">
   <c:date1904 val="0"/>
   <c:roundedCorners val="1"/>
@@ -1088,535 +517,7 @@
 </c:chartSpace>
 </file>
 
-<file path=ppt/charts/chart3.xml><?xml version="1.0" encoding="utf-8"?>
-<c:chartSpace xmlns:c="http://schemas.openxmlformats.org/drawingml/2006/chart" xmlns:a="http://schemas.openxmlformats.org/drawingml/2006/main" xmlns:r="http://schemas.openxmlformats.org/officeDocument/2006/relationships">
-  <c:date1904 val="0"/>
-  <c:roundedCorners val="1"/>
-  <c:chart>
-    <c:title>
-      <c:tx>
-        <c:rich>
-          <a:bodyPr/>
-          <a:lstStyle/>
-          <a:p>
-            <a:pPr>
-              <a:defRPr sz="1300" b="1" i="0" u="none" strike="noStrike">
-                <a:solidFill>
-                  <a:srgbClr val="0F3446"/>
-                </a:solidFill>
-                <a:latin typeface="Calibri"/>
-              </a:defRPr>
-            </a:pPr>
-            <a:r>
-              <a:rPr sz="1300" b="1" i="0" u="none" strike="noStrike">
-                <a:solidFill>
-                  <a:srgbClr val="0F3446"/>
-                </a:solidFill>
-                <a:latin typeface="Calibri"/>
-              </a:rPr>
-              <a:t>Composite kidney–CV outcome</a:t>
-            </a:r>
-          </a:p>
-        </c:rich>
-      </c:tx>
-      <c:layout/>
-      <c:overlay val="0"/>
-    </c:title>
-    <c:autoTitleDeleted val="0"/>
-    <c:plotArea>
-      <c:layout/>
-      <c:lineChart>
-        <c:varyColors val="0"/>
-        <c:ser>
-          <c:idx val="0"/>
-          <c:order val="0"/>
-          <c:tx>
-            <c:strRef>
-              <c:f>Sheet1!$B$1</c:f>
-              <c:strCache>
-                <c:ptCount val="1"/>
-                <c:pt idx="0">
-                  <c:v>Finerenone</c:v>
-                </c:pt>
-              </c:strCache>
-            </c:strRef>
-          </c:tx>
-          <c:spPr>
-            <a:solidFill>
-              <a:srgbClr val="12A3A6"/>
-            </a:solidFill>
-            <a:ln w="38100" cap="flat">
-              <a:solidFill>
-                <a:srgbClr val="12A3A6"/>
-              </a:solidFill>
-              <a:prstDash val="solid"/>
-              <a:round/>
-            </a:ln>
-            <a:effectLst/>
-          </c:spPr>
-          <c:invertIfNegative val="0"/>
-          <c:dLbls>
-            <c:numFmt formatCode="#,##0" sourceLinked="0"/>
-            <c:txPr>
-              <a:bodyPr/>
-              <a:lstStyle/>
-              <a:p>
-                <a:pPr>
-                  <a:defRPr b="0" i="0" strike="noStrike" sz="1200" u="none">
-                    <a:solidFill>
-                      <a:srgbClr val="000000"/>
-                    </a:solidFill>
-                    <a:latin typeface="Arial"/>
-                  </a:defRPr>
-                </a:pPr>
-              </a:p>
-            </c:txPr>
-            <c:showLegendKey val="0"/>
-            <c:showVal val="0"/>
-            <c:showCatName val="0"/>
-            <c:showSerName val="0"/>
-            <c:showPercent val="0"/>
-            <c:showBubbleSize val="0"/>
-            <c:showLeaderLines val="0"/>
-          </c:dLbls>
-          <c:marker>
-            <c:symbol val="none"/>
-            <c:size val="6"/>
-            <c:spPr>
-              <a:solidFill>
-                <a:srgbClr val="12A3A6"/>
-              </a:solidFill>
-              <a:ln w="9525" cap="flat">
-                <a:solidFill>
-                  <a:srgbClr val="12A3A6"/>
-                </a:solidFill>
-                <a:prstDash val="solid"/>
-                <a:round/>
-              </a:ln>
-              <a:effectLst/>
-            </c:spPr>
-          </c:marker>
-          <c:cat>
-            <c:multiLvlStrRef>
-              <c:f>Sheet1!$A$2:$A$8</c:f>
-              <c:multiLvlStrCache>
-                <c:ptCount val="7"/>
-                <c:lvl>
-                  <c:pt idx="0">
-                    <c:v>0</c:v>
-                  </c:pt>
-                  <c:pt idx="1">
-                    <c:v>6</c:v>
-                  </c:pt>
-                  <c:pt idx="2">
-                    <c:v>12</c:v>
-                  </c:pt>
-                  <c:pt idx="3">
-                    <c:v>20</c:v>
-                  </c:pt>
-                  <c:pt idx="4">
-                    <c:v>28</c:v>
-                  </c:pt>
-                  <c:pt idx="5">
-                    <c:v>36</c:v>
-                  </c:pt>
-                  <c:pt idx="6">
-                    <c:v>44</c:v>
-                  </c:pt>
-                </c:lvl>
-              </c:multiLvlStrCache>
-            </c:multiLvlStrRef>
-          </c:cat>
-          <c:val>
-            <c:numRef>
-              <c:f>Sheet1!$B$2:$B$8</c:f>
-              <c:numCache>
-                <c:formatCode>General</c:formatCode>
-                <c:ptCount val="7"/>
-                <c:pt idx="0">
-                  <c:v>0</c:v>
-                </c:pt>
-                <c:pt idx="1">
-                  <c:v>2</c:v>
-                </c:pt>
-                <c:pt idx="2">
-                  <c:v>4.2</c:v>
-                </c:pt>
-                <c:pt idx="3">
-                  <c:v>6.8</c:v>
-                </c:pt>
-                <c:pt idx="4">
-                  <c:v>9.5</c:v>
-                </c:pt>
-                <c:pt idx="5">
-                  <c:v>12.3</c:v>
-                </c:pt>
-                <c:pt idx="6">
-                  <c:v>13.9</c:v>
-                </c:pt>
-              </c:numCache>
-            </c:numRef>
-          </c:val>
-          <c:smooth val="1"/>
-        </c:ser>
-        <c:ser>
-          <c:idx val="1"/>
-          <c:order val="1"/>
-          <c:tx>
-            <c:strRef>
-              <c:f>Sheet1!$C$1</c:f>
-              <c:strCache>
-                <c:ptCount val="1"/>
-                <c:pt idx="0">
-                  <c:v>Placebo</c:v>
-                </c:pt>
-              </c:strCache>
-            </c:strRef>
-          </c:tx>
-          <c:spPr>
-            <a:solidFill>
-              <a:srgbClr val="9AA7AD"/>
-            </a:solidFill>
-            <a:ln w="38100" cap="flat">
-              <a:solidFill>
-                <a:srgbClr val="9AA7AD"/>
-              </a:solidFill>
-              <a:prstDash val="solid"/>
-              <a:round/>
-            </a:ln>
-            <a:effectLst/>
-          </c:spPr>
-          <c:invertIfNegative val="0"/>
-          <c:dLbls>
-            <c:numFmt formatCode="#,##0" sourceLinked="0"/>
-            <c:txPr>
-              <a:bodyPr/>
-              <a:lstStyle/>
-              <a:p>
-                <a:pPr>
-                  <a:defRPr b="0" i="0" strike="noStrike" sz="1200" u="none">
-                    <a:solidFill>
-                      <a:srgbClr val="000000"/>
-                    </a:solidFill>
-                    <a:latin typeface="Arial"/>
-                  </a:defRPr>
-                </a:pPr>
-              </a:p>
-            </c:txPr>
-            <c:showLegendKey val="0"/>
-            <c:showVal val="0"/>
-            <c:showCatName val="0"/>
-            <c:showSerName val="0"/>
-            <c:showPercent val="0"/>
-            <c:showBubbleSize val="0"/>
-            <c:showLeaderLines val="0"/>
-          </c:dLbls>
-          <c:marker>
-            <c:symbol val="none"/>
-            <c:size val="6"/>
-            <c:spPr>
-              <a:solidFill>
-                <a:srgbClr val="9AA7AD"/>
-              </a:solidFill>
-              <a:ln w="9525" cap="flat">
-                <a:solidFill>
-                  <a:srgbClr val="9AA7AD"/>
-                </a:solidFill>
-                <a:prstDash val="solid"/>
-                <a:round/>
-              </a:ln>
-              <a:effectLst/>
-            </c:spPr>
-          </c:marker>
-          <c:cat>
-            <c:multiLvlStrRef>
-              <c:f>Sheet1!$A$2:$A$8</c:f>
-              <c:multiLvlStrCache>
-                <c:ptCount val="7"/>
-                <c:lvl>
-                  <c:pt idx="0">
-                    <c:v>0</c:v>
-                  </c:pt>
-                  <c:pt idx="1">
-                    <c:v>6</c:v>
-                  </c:pt>
-                  <c:pt idx="2">
-                    <c:v>12</c:v>
-                  </c:pt>
-                  <c:pt idx="3">
-                    <c:v>20</c:v>
-                  </c:pt>
-                  <c:pt idx="4">
-                    <c:v>28</c:v>
-                  </c:pt>
-                  <c:pt idx="5">
-                    <c:v>36</c:v>
-                  </c:pt>
-                  <c:pt idx="6">
-                    <c:v>44</c:v>
-                  </c:pt>
-                </c:lvl>
-              </c:multiLvlStrCache>
-            </c:multiLvlStrRef>
-          </c:cat>
-          <c:val>
-            <c:numRef>
-              <c:f>Sheet1!$C$2:$C$8</c:f>
-              <c:numCache>
-                <c:formatCode>General</c:formatCode>
-                <c:ptCount val="7"/>
-                <c:pt idx="0">
-                  <c:v>0</c:v>
-                </c:pt>
-                <c:pt idx="1">
-                  <c:v>2.5</c:v>
-                </c:pt>
-                <c:pt idx="2">
-                  <c:v>5.2</c:v>
-                </c:pt>
-                <c:pt idx="3">
-                  <c:v>8.5</c:v>
-                </c:pt>
-                <c:pt idx="4">
-                  <c:v>11.8</c:v>
-                </c:pt>
-                <c:pt idx="5">
-                  <c:v>15</c:v>
-                </c:pt>
-                <c:pt idx="6">
-                  <c:v>16.9</c:v>
-                </c:pt>
-              </c:numCache>
-            </c:numRef>
-          </c:val>
-          <c:smooth val="1"/>
-        </c:ser>
-        <c:dLbls>
-          <c:numFmt formatCode="#,##0" sourceLinked="0"/>
-          <c:txPr>
-            <a:bodyPr/>
-            <a:lstStyle/>
-            <a:p>
-              <a:pPr>
-                <a:defRPr b="0" i="0" strike="noStrike" sz="1200" u="none">
-                  <a:solidFill>
-                    <a:srgbClr val="000000"/>
-                  </a:solidFill>
-                  <a:latin typeface="Arial"/>
-                </a:defRPr>
-              </a:pPr>
-            </a:p>
-          </c:txPr>
-          <c:showLegendKey val="0"/>
-          <c:showVal val="0"/>
-          <c:showCatName val="0"/>
-          <c:showSerName val="0"/>
-          <c:showPercent val="0"/>
-          <c:showBubbleSize val="0"/>
-          <c:showLeaderLines val="0"/>
-        </c:dLbls>
-        <c:marker val="1"/>
-        <c:axId val="2094734554"/>
-        <c:axId val="2094734552"/>
-        <c:axId val="2094734556"/>
-      </c:lineChart>
-      <c:catAx>
-        <c:axId val="2094734554"/>
-        <c:scaling>
-          <c:orientation val="minMax"/>
-        </c:scaling>
-        <c:delete val="0"/>
-        <c:axPos val="b"/>
-        <c:title>
-          <c:tx>
-            <c:rich>
-              <a:bodyPr/>
-              <a:lstStyle/>
-              <a:p>
-                <a:pPr>
-                  <a:defRPr sz="1050" b="0" i="0" u="none" strike="noStrike">
-                    <a:solidFill>
-                      <a:srgbClr val="4E5E66"/>
-                    </a:solidFill>
-                    <a:latin typeface="Arial"/>
-                  </a:defRPr>
-                </a:pPr>
-                <a:r>
-                  <a:rPr sz="1050" b="0" i="0" u="none" strike="noStrike">
-                    <a:solidFill>
-                      <a:srgbClr val="4E5E66"/>
-                    </a:solidFill>
-                    <a:latin typeface="Arial"/>
-                  </a:rPr>
-                  <a:t>Months since randomization</a:t>
-                </a:r>
-              </a:p>
-            </c:rich>
-          </c:tx>
-          <c:layout/>
-          <c:overlay val="0"/>
-        </c:title>
-        <c:numFmt formatCode="General" sourceLinked="1"/>
-        <c:majorTickMark val="out"/>
-        <c:minorTickMark val="none"/>
-        <c:tickLblPos val="low"/>
-        <c:spPr>
-          <a:ln w="12700" cap="flat">
-            <a:solidFill>
-              <a:srgbClr val="888888"/>
-            </a:solidFill>
-            <a:prstDash val="solid"/>
-            <a:round/>
-          </a:ln>
-        </c:spPr>
-        <c:txPr>
-          <a:bodyPr/>
-          <a:lstStyle/>
-          <a:p>
-            <a:pPr>
-              <a:defRPr sz="1000" b="0" i="0" u="none" strike="noStrike">
-                <a:solidFill>
-                  <a:srgbClr val="4E5E66"/>
-                </a:solidFill>
-                <a:latin typeface="Calibri"/>
-              </a:defRPr>
-            </a:pPr>
-            <a:endParaRPr lang="en-US"/>
-          </a:p>
-        </c:txPr>
-        <c:crossAx val="2094734552"/>
-        <c:crosses val="autoZero"/>
-        <c:auto val="1"/>
-        <c:lblAlgn val="ctr"/>
-        <c:noMultiLvlLbl val="1"/>
-      </c:catAx>
-      <c:valAx>
-        <c:axId val="2094734552"/>
-        <c:scaling>
-          <c:orientation val="minMax"/>
-          <c:max val="20"/>
-          <c:min val="0"/>
-        </c:scaling>
-        <c:delete val="0"/>
-        <c:axPos val="l"/>
-        <c:majorGridlines>
-          <c:spPr>
-            <a:ln w="12700" cap="flat">
-              <a:solidFill>
-                <a:srgbClr val="ECF2F2"/>
-              </a:solidFill>
-              <a:prstDash val="solid"/>
-              <a:round/>
-            </a:ln>
-          </c:spPr>
-        </c:majorGridlines>
-        <c:title>
-          <c:tx>
-            <c:rich>
-              <a:bodyPr/>
-              <a:lstStyle/>
-              <a:p>
-                <a:pPr>
-                  <a:defRPr sz="1050" b="0" i="0" u="none" strike="noStrike">
-                    <a:solidFill>
-                      <a:srgbClr val="4E5E66"/>
-                    </a:solidFill>
-                    <a:latin typeface="Arial"/>
-                  </a:defRPr>
-                </a:pPr>
-                <a:r>
-                  <a:rPr sz="1050" b="0" i="0" u="none" strike="noStrike">
-                    <a:solidFill>
-                      <a:srgbClr val="4E5E66"/>
-                    </a:solidFill>
-                    <a:latin typeface="Arial"/>
-                  </a:rPr>
-                  <a:t>Cumulative incidence (%)</a:t>
-                </a:r>
-              </a:p>
-            </c:rich>
-          </c:tx>
-          <c:layout/>
-          <c:overlay val="0"/>
-        </c:title>
-        <c:numFmt formatCode="General" sourceLinked="0"/>
-        <c:majorTickMark val="out"/>
-        <c:minorTickMark val="none"/>
-        <c:tickLblPos val="nextTo"/>
-        <c:spPr>
-          <a:ln w="12700" cap="flat">
-            <a:solidFill>
-              <a:srgbClr val="888888"/>
-            </a:solidFill>
-            <a:prstDash val="solid"/>
-            <a:round/>
-          </a:ln>
-        </c:spPr>
-        <c:txPr>
-          <a:bodyPr/>
-          <a:lstStyle/>
-          <a:p>
-            <a:pPr>
-              <a:defRPr sz="1000" b="0" i="0" u="none" strike="noStrike">
-                <a:solidFill>
-                  <a:srgbClr val="4E5E66"/>
-                </a:solidFill>
-                <a:latin typeface="Calibri"/>
-              </a:defRPr>
-            </a:pPr>
-            <a:endParaRPr lang="en-US"/>
-          </a:p>
-        </c:txPr>
-        <c:crossAx val="2094734554"/>
-        <c:crosses val="autoZero"/>
-        <c:crossBetween val="between"/>
-        <c:majorUnit val="5"/>
-      </c:valAx>
-      <c:spPr>
-        <a:noFill/>
-        <a:ln>
-          <a:noFill/>
-        </a:ln>
-        <a:effectLst/>
-      </c:spPr>
-    </c:plotArea>
-    <c:legend>
-      <c:legendPos val="t"/>
-      <c:overlay val="0"/>
-      <c:txPr>
-        <a:bodyPr/>
-        <a:lstStyle/>
-        <a:p>
-          <a:pPr>
-            <a:defRPr sz="1150">
-              <a:solidFill>
-                <a:srgbClr val="13212A"/>
-              </a:solidFill>
-              <a:latin typeface="Calibri"/>
-              <a:cs typeface="Calibri"/>
-            </a:defRPr>
-          </a:pPr>
-          <a:endParaRPr lang="en-US"/>
-        </a:p>
-      </c:txPr>
-    </c:legend>
-    <c:plotVisOnly val="1"/>
-    <c:dispBlanksAs val="span"/>
-  </c:chart>
-  <c:spPr>
-    <a:noFill/>
-    <a:ln>
-      <a:noFill/>
-    </a:ln>
-    <a:effectLst/>
-  </c:spPr>
-  <c:externalData r:id="rId1">
-    <c:autoUpdate val="0"/>
-  </c:externalData>
-</c:chartSpace>
-</file>
-
-<file path=ppt/charts/chart4.xml><?xml version="1.0" encoding="utf-8"?>
+<file path=ppt/charts/chart2.xml><?xml version="1.0" encoding="utf-8"?>
 <c:chartSpace xmlns:c="http://schemas.openxmlformats.org/drawingml/2006/chart" xmlns:a="http://schemas.openxmlformats.org/drawingml/2006/main" xmlns:r="http://schemas.openxmlformats.org/officeDocument/2006/relationships">
   <c:date1904 val="0"/>
   <c:roundedCorners val="1"/>
@@ -10817,202 +9718,33 @@
           </a:p>
         </p:txBody>
       </p:sp>
-      <p:graphicFrame>
-        <p:nvGraphicFramePr>
-          <p:cNvPr id="7" name="Chart 0" descr=""/>
-          <p:cNvGraphicFramePr/>
-          <p:nvPr/>
-        </p:nvGraphicFramePr>
-        <p:xfrm>
-          <a:off x="640080" y="1554480"/>
-          <a:ext cx="7680960" cy="4434840"/>
-        </p:xfrm>
-        <a:graphic xmlns:a="http://schemas.openxmlformats.org/drawingml/2006/main">
-          <a:graphicData uri="http://schemas.openxmlformats.org/drawingml/2006/chart">
-            <c:chart xmlns:c="http://schemas.openxmlformats.org/drawingml/2006/chart" r:id="rId2"/>
-          </a:graphicData>
-        </a:graphic>
-      </p:graphicFrame>
+      <p:pic>
+        <p:nvPicPr>
+          <p:cNvPr id="7" name="Image 1" descr="fig1A.png">    </p:cNvPr>
+          <p:cNvPicPr>
+            <a:picLocks noChangeAspect="1"/>
+          </p:cNvPicPr>
+          <p:nvPr/>
+        </p:nvPicPr>
+        <p:blipFill>
+          <a:blip r:embed="rId2"/>
+          <a:stretch>
+            <a:fillRect/>
+          </a:stretch>
+        </p:blipFill>
+        <p:spPr>
+          <a:xfrm>
+            <a:off x="1435608" y="1572768"/>
+            <a:ext cx="9326880" cy="4434840"/>
+          </a:xfrm>
+          <a:prstGeom prst="rect">
+            <a:avLst/>
+          </a:prstGeom>
+        </p:spPr>
+      </p:pic>
       <p:sp>
         <p:nvSpPr>
           <p:cNvPr id="8" name="Text 4"/>
-          <p:cNvSpPr/>
-          <p:nvPr/>
-        </p:nvSpPr>
-        <p:spPr>
-          <a:xfrm>
-            <a:off x="8595360" y="1828800"/>
-            <a:ext cx="2953512" cy="1371600"/>
-          </a:xfrm>
-          <a:prstGeom prst="rect">
-            <a:avLst/>
-          </a:prstGeom>
-          <a:noFill/>
-          <a:ln/>
-        </p:spPr>
-        <p:txBody>
-          <a:bodyPr wrap="square" lIns="0" tIns="0" rIns="0" bIns="0" rtlCol="0" anchor="ctr"/>
-          <a:lstStyle/>
-          <a:p>
-            <a:pPr indent="0" marL="0">
-              <a:lnSpc>
-                <a:spcPct val="120000"/>
-              </a:lnSpc>
-              <a:buNone/>
-            </a:pPr>
-            <a:r>
-              <a:rPr lang="en-US" sz="1450" b="1" dirty="0">
-                <a:solidFill>
-                  <a:srgbClr val="E86A44"/>
-                </a:solidFill>
-                <a:latin typeface="Calibri" pitchFamily="34" charset="0"/>
-                <a:ea typeface="Calibri" pitchFamily="34" charset="-122"/>
-                <a:cs typeface="Calibri" pitchFamily="34" charset="-120"/>
-              </a:rPr>
-              <a:t>Early crossover.  </a:t>
-            </a:r>
-            <a:pPr indent="0" marL="0">
-              <a:lnSpc>
-                <a:spcPct val="120000"/>
-              </a:lnSpc>
-              <a:buNone/>
-            </a:pPr>
-            <a:r>
-              <a:rPr lang="en-US" sz="1450" dirty="0">
-                <a:solidFill>
-                  <a:srgbClr val="13212A"/>
-                </a:solidFill>
-                <a:latin typeface="Calibri" pitchFamily="34" charset="0"/>
-                <a:ea typeface="Calibri" pitchFamily="34" charset="-122"/>
-                <a:cs typeface="Calibri" pitchFamily="34" charset="-120"/>
-              </a:rPr>
-              <a:t>Finerenone dips faster through month 3 (reversible hemodynamic effect), then declines more slowly and pulls ahead.</a:t>
-            </a:r>
-            <a:endParaRPr lang="en-US" sz="1450" dirty="0"/>
-          </a:p>
-        </p:txBody>
-      </p:sp>
-      <p:sp>
-        <p:nvSpPr>
-          <p:cNvPr id="9" name="Text 5"/>
-          <p:cNvSpPr/>
-          <p:nvPr/>
-        </p:nvSpPr>
-        <p:spPr>
-          <a:xfrm>
-            <a:off x="8595360" y="3291840"/>
-            <a:ext cx="2953512" cy="822960"/>
-          </a:xfrm>
-          <a:prstGeom prst="rect">
-            <a:avLst/>
-          </a:prstGeom>
-          <a:noFill/>
-          <a:ln/>
-        </p:spPr>
-        <p:txBody>
-          <a:bodyPr wrap="square" lIns="0" tIns="0" rIns="0" bIns="0" rtlCol="0" anchor="ctr"/>
-          <a:lstStyle/>
-          <a:p>
-            <a:pPr indent="0" marL="0">
-              <a:lnSpc>
-                <a:spcPct val="120000"/>
-              </a:lnSpc>
-              <a:buNone/>
-            </a:pPr>
-            <a:r>
-              <a:rPr lang="en-US" sz="1450" b="1" dirty="0">
-                <a:solidFill>
-                  <a:srgbClr val="0E8385"/>
-                </a:solidFill>
-                <a:latin typeface="Calibri" pitchFamily="34" charset="0"/>
-                <a:ea typeface="Calibri" pitchFamily="34" charset="-122"/>
-                <a:cs typeface="Calibri" pitchFamily="34" charset="-120"/>
-              </a:rPr>
-              <a:t>At month 32.  </a:t>
-            </a:r>
-            <a:pPr indent="0" marL="0">
-              <a:lnSpc>
-                <a:spcPct val="120000"/>
-              </a:lnSpc>
-              <a:buNone/>
-            </a:pPr>
-            <a:r>
-              <a:rPr lang="en-US" sz="1450" dirty="0">
-                <a:solidFill>
-                  <a:srgbClr val="13212A"/>
-                </a:solidFill>
-                <a:latin typeface="Calibri" pitchFamily="34" charset="0"/>
-                <a:ea typeface="Calibri" pitchFamily="34" charset="-122"/>
-                <a:cs typeface="Calibri" pitchFamily="34" charset="-120"/>
-              </a:rPr>
-              <a:t>Mean eGFR 39.4 (finerenone) vs 38.1 (placebo).</a:t>
-            </a:r>
-            <a:endParaRPr lang="en-US" sz="1450" dirty="0"/>
-          </a:p>
-        </p:txBody>
-      </p:sp>
-      <p:sp>
-        <p:nvSpPr>
-          <p:cNvPr id="10" name="Text 6"/>
-          <p:cNvSpPr/>
-          <p:nvPr/>
-        </p:nvSpPr>
-        <p:spPr>
-          <a:xfrm>
-            <a:off x="8595360" y="4251960"/>
-            <a:ext cx="2953512" cy="1463040"/>
-          </a:xfrm>
-          <a:prstGeom prst="rect">
-            <a:avLst/>
-          </a:prstGeom>
-          <a:noFill/>
-          <a:ln/>
-        </p:spPr>
-        <p:txBody>
-          <a:bodyPr wrap="square" lIns="0" tIns="0" rIns="0" bIns="0" rtlCol="0" anchor="ctr"/>
-          <a:lstStyle/>
-          <a:p>
-            <a:pPr indent="0" marL="0">
-              <a:lnSpc>
-                <a:spcPct val="120000"/>
-              </a:lnSpc>
-              <a:buNone/>
-            </a:pPr>
-            <a:r>
-              <a:rPr lang="en-US" sz="1450" b="1" dirty="0">
-                <a:solidFill>
-                  <a:srgbClr val="0F3446"/>
-                </a:solidFill>
-                <a:latin typeface="Calibri" pitchFamily="34" charset="0"/>
-                <a:ea typeface="Calibri" pitchFamily="34" charset="-122"/>
-                <a:cs typeface="Calibri" pitchFamily="34" charset="-120"/>
-              </a:rPr>
-              <a:t>Off-treatment.  </a:t>
-            </a:r>
-            <a:pPr indent="0" marL="0">
-              <a:lnSpc>
-                <a:spcPct val="120000"/>
-              </a:lnSpc>
-              <a:buNone/>
-            </a:pPr>
-            <a:r>
-              <a:rPr lang="en-US" sz="1450" dirty="0">
-                <a:solidFill>
-                  <a:srgbClr val="13212A"/>
-                </a:solidFill>
-                <a:latin typeface="Calibri" pitchFamily="34" charset="0"/>
-                <a:ea typeface="Calibri" pitchFamily="34" charset="-122"/>
-                <a:cs typeface="Calibri" pitchFamily="34" charset="-120"/>
-              </a:rPr>
-              <a:t>Four weeks after stopping, eGFR rose with finerenone and kept falling with placebo. The dip reverses.</a:t>
-            </a:r>
-            <a:endParaRPr lang="en-US" sz="1450" dirty="0"/>
-          </a:p>
-        </p:txBody>
-      </p:sp>
-      <p:sp>
-        <p:nvSpPr>
-          <p:cNvPr id="11" name="Text 7"/>
           <p:cNvSpPr/>
           <p:nvPr/>
         </p:nvSpPr>
@@ -11043,7 +9775,7 @@
                 <a:ea typeface="Calibri" pitchFamily="34" charset="-122"/>
                 <a:cs typeface="Calibri" pitchFamily="34" charset="-120"/>
               </a:rPr>
-              <a:t>Adapted from Figure 1A (curve reconstructed from reported values).</a:t>
+              <a:t>Figure 1A.  Heerspink et al., N Engl J Med 2026.</a:t>
             </a:r>
             <a:endParaRPr lang="en-US" sz="850" dirty="0"/>
           </a:p>
@@ -11051,7 +9783,7 @@
       </p:sp>
       <p:sp>
         <p:nvSpPr>
-          <p:cNvPr id="12" name="Text 8"/>
+          <p:cNvPr id="9" name="Text 5"/>
           <p:cNvSpPr/>
           <p:nvPr/>
         </p:nvSpPr>
@@ -11104,7 +9836,7 @@
       </p:sp>
       <p:sp>
         <p:nvSpPr>
-          <p:cNvPr id="13" name="Text 9"/>
+          <p:cNvPr id="10" name="Text 6"/>
           <p:cNvSpPr/>
           <p:nvPr/>
         </p:nvSpPr>
@@ -15673,22 +14405,30 @@
           </a:p>
         </p:txBody>
       </p:sp>
-      <p:graphicFrame>
-        <p:nvGraphicFramePr>
-          <p:cNvPr id="7" name="Chart 0" descr=""/>
-          <p:cNvGraphicFramePr/>
-          <p:nvPr/>
-        </p:nvGraphicFramePr>
-        <p:xfrm>
-          <a:off x="640080" y="1600200"/>
-          <a:ext cx="5943600" cy="3383280"/>
-        </p:xfrm>
-        <a:graphic xmlns:a="http://schemas.openxmlformats.org/drawingml/2006/main">
-          <a:graphicData uri="http://schemas.openxmlformats.org/drawingml/2006/chart">
-            <c:chart xmlns:c="http://schemas.openxmlformats.org/drawingml/2006/chart" r:id="rId2"/>
-          </a:graphicData>
-        </a:graphic>
-      </p:graphicFrame>
+      <p:pic>
+        <p:nvPicPr>
+          <p:cNvPr id="7" name="Image 1" descr="fig3A.png">    </p:cNvPr>
+          <p:cNvPicPr>
+            <a:picLocks noChangeAspect="1"/>
+          </p:cNvPicPr>
+          <p:nvPr/>
+        </p:nvPicPr>
+        <p:blipFill>
+          <a:blip r:embed="rId2"/>
+          <a:stretch>
+            <a:fillRect/>
+          </a:stretch>
+        </p:blipFill>
+        <p:spPr>
+          <a:xfrm>
+            <a:off x="640080" y="1600200"/>
+            <a:ext cx="6126480" cy="3017520"/>
+          </a:xfrm>
+          <a:prstGeom prst="rect">
+            <a:avLst/>
+          </a:prstGeom>
+        </p:spPr>
+      </p:pic>
       <p:sp>
         <p:nvSpPr>
           <p:cNvPr id="8" name="Shape 4"/>
@@ -16500,669 +15240,6 @@
         </p:nvSpPr>
         <p:spPr>
           <a:xfrm>
-            <a:off x="640080" y="5029200"/>
-            <a:ext cx="1828800" cy="182880"/>
-          </a:xfrm>
-          <a:prstGeom prst="rect">
-            <a:avLst/>
-          </a:prstGeom>
-          <a:noFill/>
-          <a:ln/>
-        </p:spPr>
-        <p:txBody>
-          <a:bodyPr wrap="square" lIns="0" tIns="0" rIns="0" bIns="0" rtlCol="0" anchor="ctr"/>
-          <a:lstStyle/>
-          <a:p>
-            <a:pPr indent="0" marL="0">
-              <a:buNone/>
-            </a:pPr>
-            <a:r>
-              <a:rPr lang="en-US" sz="900" b="1" dirty="0">
-                <a:solidFill>
-                  <a:srgbClr val="0F3446"/>
-                </a:solidFill>
-                <a:latin typeface="Calibri" pitchFamily="34" charset="0"/>
-                <a:ea typeface="Calibri" pitchFamily="34" charset="-122"/>
-                <a:cs typeface="Calibri" pitchFamily="34" charset="-120"/>
-              </a:rPr>
-              <a:t>No. at risk</a:t>
-            </a:r>
-            <a:endParaRPr lang="en-US" sz="900" dirty="0"/>
-          </a:p>
-        </p:txBody>
-      </p:sp>
-      <p:sp>
-        <p:nvSpPr>
-          <p:cNvPr id="30" name="Text 26"/>
-          <p:cNvSpPr/>
-          <p:nvPr/>
-        </p:nvSpPr>
-        <p:spPr>
-          <a:xfrm>
-            <a:off x="640080" y="5230368"/>
-            <a:ext cx="868680" cy="182880"/>
-          </a:xfrm>
-          <a:prstGeom prst="rect">
-            <a:avLst/>
-          </a:prstGeom>
-          <a:noFill/>
-          <a:ln/>
-        </p:spPr>
-        <p:txBody>
-          <a:bodyPr wrap="square" lIns="0" tIns="0" rIns="0" bIns="0" rtlCol="0" anchor="ctr"/>
-          <a:lstStyle/>
-          <a:p>
-            <a:pPr indent="0" marL="0">
-              <a:buNone/>
-            </a:pPr>
-            <a:r>
-              <a:rPr lang="en-US" sz="850" dirty="0">
-                <a:solidFill>
-                  <a:srgbClr val="0E8385"/>
-                </a:solidFill>
-                <a:latin typeface="Calibri" pitchFamily="34" charset="0"/>
-                <a:ea typeface="Calibri" pitchFamily="34" charset="-122"/>
-                <a:cs typeface="Calibri" pitchFamily="34" charset="-120"/>
-              </a:rPr>
-              <a:t>Finerenone</a:t>
-            </a:r>
-            <a:endParaRPr lang="en-US" sz="850" dirty="0"/>
-          </a:p>
-        </p:txBody>
-      </p:sp>
-      <p:sp>
-        <p:nvSpPr>
-          <p:cNvPr id="31" name="Text 27"/>
-          <p:cNvSpPr/>
-          <p:nvPr/>
-        </p:nvSpPr>
-        <p:spPr>
-          <a:xfrm>
-            <a:off x="640080" y="5449824"/>
-            <a:ext cx="868680" cy="182880"/>
-          </a:xfrm>
-          <a:prstGeom prst="rect">
-            <a:avLst/>
-          </a:prstGeom>
-          <a:noFill/>
-          <a:ln/>
-        </p:spPr>
-        <p:txBody>
-          <a:bodyPr wrap="square" lIns="0" tIns="0" rIns="0" bIns="0" rtlCol="0" anchor="ctr"/>
-          <a:lstStyle/>
-          <a:p>
-            <a:pPr indent="0" marL="0">
-              <a:buNone/>
-            </a:pPr>
-            <a:r>
-              <a:rPr lang="en-US" sz="850" dirty="0">
-                <a:solidFill>
-                  <a:srgbClr val="4E5E66"/>
-                </a:solidFill>
-                <a:latin typeface="Calibri" pitchFamily="34" charset="0"/>
-                <a:ea typeface="Calibri" pitchFamily="34" charset="-122"/>
-                <a:cs typeface="Calibri" pitchFamily="34" charset="-120"/>
-              </a:rPr>
-              <a:t>Placebo</a:t>
-            </a:r>
-            <a:endParaRPr lang="en-US" sz="850" dirty="0"/>
-          </a:p>
-        </p:txBody>
-      </p:sp>
-      <p:sp>
-        <p:nvSpPr>
-          <p:cNvPr id="32" name="Text 28"/>
-          <p:cNvSpPr/>
-          <p:nvPr/>
-        </p:nvSpPr>
-        <p:spPr>
-          <a:xfrm>
-            <a:off x="1307592" y="5230368"/>
-            <a:ext cx="585216" cy="182880"/>
-          </a:xfrm>
-          <a:prstGeom prst="rect">
-            <a:avLst/>
-          </a:prstGeom>
-          <a:noFill/>
-          <a:ln/>
-        </p:spPr>
-        <p:txBody>
-          <a:bodyPr wrap="square" lIns="0" tIns="0" rIns="0" bIns="0" rtlCol="0" anchor="ctr"/>
-          <a:lstStyle/>
-          <a:p>
-            <a:pPr algn="ctr" indent="0" marL="0">
-              <a:buNone/>
-            </a:pPr>
-            <a:r>
-              <a:rPr lang="en-US" sz="850" dirty="0">
-                <a:solidFill>
-                  <a:srgbClr val="13212A"/>
-                </a:solidFill>
-                <a:latin typeface="Calibri" pitchFamily="34" charset="0"/>
-                <a:ea typeface="Calibri" pitchFamily="34" charset="-122"/>
-                <a:cs typeface="Calibri" pitchFamily="34" charset="-120"/>
-              </a:rPr>
-              <a:t>793</a:t>
-            </a:r>
-            <a:endParaRPr lang="en-US" sz="850" dirty="0"/>
-          </a:p>
-        </p:txBody>
-      </p:sp>
-      <p:sp>
-        <p:nvSpPr>
-          <p:cNvPr id="33" name="Text 29"/>
-          <p:cNvSpPr/>
-          <p:nvPr/>
-        </p:nvSpPr>
-        <p:spPr>
-          <a:xfrm>
-            <a:off x="1307592" y="5449824"/>
-            <a:ext cx="585216" cy="182880"/>
-          </a:xfrm>
-          <a:prstGeom prst="rect">
-            <a:avLst/>
-          </a:prstGeom>
-          <a:noFill/>
-          <a:ln/>
-        </p:spPr>
-        <p:txBody>
-          <a:bodyPr wrap="square" lIns="0" tIns="0" rIns="0" bIns="0" rtlCol="0" anchor="ctr"/>
-          <a:lstStyle/>
-          <a:p>
-            <a:pPr algn="ctr" indent="0" marL="0">
-              <a:buNone/>
-            </a:pPr>
-            <a:r>
-              <a:rPr lang="en-US" sz="850" dirty="0">
-                <a:solidFill>
-                  <a:srgbClr val="13212A"/>
-                </a:solidFill>
-                <a:latin typeface="Calibri" pitchFamily="34" charset="0"/>
-                <a:ea typeface="Calibri" pitchFamily="34" charset="-122"/>
-                <a:cs typeface="Calibri" pitchFamily="34" charset="-120"/>
-              </a:rPr>
-              <a:t>791</a:t>
-            </a:r>
-            <a:endParaRPr lang="en-US" sz="850" dirty="0"/>
-          </a:p>
-        </p:txBody>
-      </p:sp>
-      <p:sp>
-        <p:nvSpPr>
-          <p:cNvPr id="34" name="Text 30"/>
-          <p:cNvSpPr/>
-          <p:nvPr/>
-        </p:nvSpPr>
-        <p:spPr>
-          <a:xfrm>
-            <a:off x="2119884" y="5230368"/>
-            <a:ext cx="585216" cy="182880"/>
-          </a:xfrm>
-          <a:prstGeom prst="rect">
-            <a:avLst/>
-          </a:prstGeom>
-          <a:noFill/>
-          <a:ln/>
-        </p:spPr>
-        <p:txBody>
-          <a:bodyPr wrap="square" lIns="0" tIns="0" rIns="0" bIns="0" rtlCol="0" anchor="ctr"/>
-          <a:lstStyle/>
-          <a:p>
-            <a:pPr algn="ctr" indent="0" marL="0">
-              <a:buNone/>
-            </a:pPr>
-            <a:r>
-              <a:rPr lang="en-US" sz="850" dirty="0">
-                <a:solidFill>
-                  <a:srgbClr val="13212A"/>
-                </a:solidFill>
-                <a:latin typeface="Calibri" pitchFamily="34" charset="0"/>
-                <a:ea typeface="Calibri" pitchFamily="34" charset="-122"/>
-                <a:cs typeface="Calibri" pitchFamily="34" charset="-120"/>
-              </a:rPr>
-              <a:t>777</a:t>
-            </a:r>
-            <a:endParaRPr lang="en-US" sz="850" dirty="0"/>
-          </a:p>
-        </p:txBody>
-      </p:sp>
-      <p:sp>
-        <p:nvSpPr>
-          <p:cNvPr id="35" name="Text 31"/>
-          <p:cNvSpPr/>
-          <p:nvPr/>
-        </p:nvSpPr>
-        <p:spPr>
-          <a:xfrm>
-            <a:off x="2119884" y="5449824"/>
-            <a:ext cx="585216" cy="182880"/>
-          </a:xfrm>
-          <a:prstGeom prst="rect">
-            <a:avLst/>
-          </a:prstGeom>
-          <a:noFill/>
-          <a:ln/>
-        </p:spPr>
-        <p:txBody>
-          <a:bodyPr wrap="square" lIns="0" tIns="0" rIns="0" bIns="0" rtlCol="0" anchor="ctr"/>
-          <a:lstStyle/>
-          <a:p>
-            <a:pPr algn="ctr" indent="0" marL="0">
-              <a:buNone/>
-            </a:pPr>
-            <a:r>
-              <a:rPr lang="en-US" sz="850" dirty="0">
-                <a:solidFill>
-                  <a:srgbClr val="13212A"/>
-                </a:solidFill>
-                <a:latin typeface="Calibri" pitchFamily="34" charset="0"/>
-                <a:ea typeface="Calibri" pitchFamily="34" charset="-122"/>
-                <a:cs typeface="Calibri" pitchFamily="34" charset="-120"/>
-              </a:rPr>
-              <a:t>778</a:t>
-            </a:r>
-            <a:endParaRPr lang="en-US" sz="850" dirty="0"/>
-          </a:p>
-        </p:txBody>
-      </p:sp>
-      <p:sp>
-        <p:nvSpPr>
-          <p:cNvPr id="36" name="Text 32"/>
-          <p:cNvSpPr/>
-          <p:nvPr/>
-        </p:nvSpPr>
-        <p:spPr>
-          <a:xfrm>
-            <a:off x="2932176" y="5230368"/>
-            <a:ext cx="585216" cy="182880"/>
-          </a:xfrm>
-          <a:prstGeom prst="rect">
-            <a:avLst/>
-          </a:prstGeom>
-          <a:noFill/>
-          <a:ln/>
-        </p:spPr>
-        <p:txBody>
-          <a:bodyPr wrap="square" lIns="0" tIns="0" rIns="0" bIns="0" rtlCol="0" anchor="ctr"/>
-          <a:lstStyle/>
-          <a:p>
-            <a:pPr algn="ctr" indent="0" marL="0">
-              <a:buNone/>
-            </a:pPr>
-            <a:r>
-              <a:rPr lang="en-US" sz="850" dirty="0">
-                <a:solidFill>
-                  <a:srgbClr val="13212A"/>
-                </a:solidFill>
-                <a:latin typeface="Calibri" pitchFamily="34" charset="0"/>
-                <a:ea typeface="Calibri" pitchFamily="34" charset="-122"/>
-                <a:cs typeface="Calibri" pitchFamily="34" charset="-120"/>
-              </a:rPr>
-              <a:t>753</a:t>
-            </a:r>
-            <a:endParaRPr lang="en-US" sz="850" dirty="0"/>
-          </a:p>
-        </p:txBody>
-      </p:sp>
-      <p:sp>
-        <p:nvSpPr>
-          <p:cNvPr id="37" name="Text 33"/>
-          <p:cNvSpPr/>
-          <p:nvPr/>
-        </p:nvSpPr>
-        <p:spPr>
-          <a:xfrm>
-            <a:off x="2932176" y="5449824"/>
-            <a:ext cx="585216" cy="182880"/>
-          </a:xfrm>
-          <a:prstGeom prst="rect">
-            <a:avLst/>
-          </a:prstGeom>
-          <a:noFill/>
-          <a:ln/>
-        </p:spPr>
-        <p:txBody>
-          <a:bodyPr wrap="square" lIns="0" tIns="0" rIns="0" bIns="0" rtlCol="0" anchor="ctr"/>
-          <a:lstStyle/>
-          <a:p>
-            <a:pPr algn="ctr" indent="0" marL="0">
-              <a:buNone/>
-            </a:pPr>
-            <a:r>
-              <a:rPr lang="en-US" sz="850" dirty="0">
-                <a:solidFill>
-                  <a:srgbClr val="13212A"/>
-                </a:solidFill>
-                <a:latin typeface="Calibri" pitchFamily="34" charset="0"/>
-                <a:ea typeface="Calibri" pitchFamily="34" charset="-122"/>
-                <a:cs typeface="Calibri" pitchFamily="34" charset="-120"/>
-              </a:rPr>
-              <a:t>755</a:t>
-            </a:r>
-            <a:endParaRPr lang="en-US" sz="850" dirty="0"/>
-          </a:p>
-        </p:txBody>
-      </p:sp>
-      <p:sp>
-        <p:nvSpPr>
-          <p:cNvPr id="38" name="Text 34"/>
-          <p:cNvSpPr/>
-          <p:nvPr/>
-        </p:nvSpPr>
-        <p:spPr>
-          <a:xfrm>
-            <a:off x="3744468" y="5230368"/>
-            <a:ext cx="585216" cy="182880"/>
-          </a:xfrm>
-          <a:prstGeom prst="rect">
-            <a:avLst/>
-          </a:prstGeom>
-          <a:noFill/>
-          <a:ln/>
-        </p:spPr>
-        <p:txBody>
-          <a:bodyPr wrap="square" lIns="0" tIns="0" rIns="0" bIns="0" rtlCol="0" anchor="ctr"/>
-          <a:lstStyle/>
-          <a:p>
-            <a:pPr algn="ctr" indent="0" marL="0">
-              <a:buNone/>
-            </a:pPr>
-            <a:r>
-              <a:rPr lang="en-US" sz="850" dirty="0">
-                <a:solidFill>
-                  <a:srgbClr val="13212A"/>
-                </a:solidFill>
-                <a:latin typeface="Calibri" pitchFamily="34" charset="0"/>
-                <a:ea typeface="Calibri" pitchFamily="34" charset="-122"/>
-                <a:cs typeface="Calibri" pitchFamily="34" charset="-120"/>
-              </a:rPr>
-              <a:t>724</a:t>
-            </a:r>
-            <a:endParaRPr lang="en-US" sz="850" dirty="0"/>
-          </a:p>
-        </p:txBody>
-      </p:sp>
-      <p:sp>
-        <p:nvSpPr>
-          <p:cNvPr id="39" name="Text 35"/>
-          <p:cNvSpPr/>
-          <p:nvPr/>
-        </p:nvSpPr>
-        <p:spPr>
-          <a:xfrm>
-            <a:off x="3744468" y="5449824"/>
-            <a:ext cx="585216" cy="182880"/>
-          </a:xfrm>
-          <a:prstGeom prst="rect">
-            <a:avLst/>
-          </a:prstGeom>
-          <a:noFill/>
-          <a:ln/>
-        </p:spPr>
-        <p:txBody>
-          <a:bodyPr wrap="square" lIns="0" tIns="0" rIns="0" bIns="0" rtlCol="0" anchor="ctr"/>
-          <a:lstStyle/>
-          <a:p>
-            <a:pPr algn="ctr" indent="0" marL="0">
-              <a:buNone/>
-            </a:pPr>
-            <a:r>
-              <a:rPr lang="en-US" sz="850" dirty="0">
-                <a:solidFill>
-                  <a:srgbClr val="13212A"/>
-                </a:solidFill>
-                <a:latin typeface="Calibri" pitchFamily="34" charset="0"/>
-                <a:ea typeface="Calibri" pitchFamily="34" charset="-122"/>
-                <a:cs typeface="Calibri" pitchFamily="34" charset="-120"/>
-              </a:rPr>
-              <a:t>731</a:t>
-            </a:r>
-            <a:endParaRPr lang="en-US" sz="850" dirty="0"/>
-          </a:p>
-        </p:txBody>
-      </p:sp>
-      <p:sp>
-        <p:nvSpPr>
-          <p:cNvPr id="40" name="Text 36"/>
-          <p:cNvSpPr/>
-          <p:nvPr/>
-        </p:nvSpPr>
-        <p:spPr>
-          <a:xfrm>
-            <a:off x="4556760" y="5230368"/>
-            <a:ext cx="585216" cy="182880"/>
-          </a:xfrm>
-          <a:prstGeom prst="rect">
-            <a:avLst/>
-          </a:prstGeom>
-          <a:noFill/>
-          <a:ln/>
-        </p:spPr>
-        <p:txBody>
-          <a:bodyPr wrap="square" lIns="0" tIns="0" rIns="0" bIns="0" rtlCol="0" anchor="ctr"/>
-          <a:lstStyle/>
-          <a:p>
-            <a:pPr algn="ctr" indent="0" marL="0">
-              <a:buNone/>
-            </a:pPr>
-            <a:r>
-              <a:rPr lang="en-US" sz="850" dirty="0">
-                <a:solidFill>
-                  <a:srgbClr val="13212A"/>
-                </a:solidFill>
-                <a:latin typeface="Calibri" pitchFamily="34" charset="0"/>
-                <a:ea typeface="Calibri" pitchFamily="34" charset="-122"/>
-                <a:cs typeface="Calibri" pitchFamily="34" charset="-120"/>
-              </a:rPr>
-              <a:t>688</a:t>
-            </a:r>
-            <a:endParaRPr lang="en-US" sz="850" dirty="0"/>
-          </a:p>
-        </p:txBody>
-      </p:sp>
-      <p:sp>
-        <p:nvSpPr>
-          <p:cNvPr id="41" name="Text 37"/>
-          <p:cNvSpPr/>
-          <p:nvPr/>
-        </p:nvSpPr>
-        <p:spPr>
-          <a:xfrm>
-            <a:off x="4556760" y="5449824"/>
-            <a:ext cx="585216" cy="182880"/>
-          </a:xfrm>
-          <a:prstGeom prst="rect">
-            <a:avLst/>
-          </a:prstGeom>
-          <a:noFill/>
-          <a:ln/>
-        </p:spPr>
-        <p:txBody>
-          <a:bodyPr wrap="square" lIns="0" tIns="0" rIns="0" bIns="0" rtlCol="0" anchor="ctr"/>
-          <a:lstStyle/>
-          <a:p>
-            <a:pPr algn="ctr" indent="0" marL="0">
-              <a:buNone/>
-            </a:pPr>
-            <a:r>
-              <a:rPr lang="en-US" sz="850" dirty="0">
-                <a:solidFill>
-                  <a:srgbClr val="13212A"/>
-                </a:solidFill>
-                <a:latin typeface="Calibri" pitchFamily="34" charset="0"/>
-                <a:ea typeface="Calibri" pitchFamily="34" charset="-122"/>
-                <a:cs typeface="Calibri" pitchFamily="34" charset="-120"/>
-              </a:rPr>
-              <a:t>680</a:t>
-            </a:r>
-            <a:endParaRPr lang="en-US" sz="850" dirty="0"/>
-          </a:p>
-        </p:txBody>
-      </p:sp>
-      <p:sp>
-        <p:nvSpPr>
-          <p:cNvPr id="42" name="Text 38"/>
-          <p:cNvSpPr/>
-          <p:nvPr/>
-        </p:nvSpPr>
-        <p:spPr>
-          <a:xfrm>
-            <a:off x="5369052" y="5230368"/>
-            <a:ext cx="585216" cy="182880"/>
-          </a:xfrm>
-          <a:prstGeom prst="rect">
-            <a:avLst/>
-          </a:prstGeom>
-          <a:noFill/>
-          <a:ln/>
-        </p:spPr>
-        <p:txBody>
-          <a:bodyPr wrap="square" lIns="0" tIns="0" rIns="0" bIns="0" rtlCol="0" anchor="ctr"/>
-          <a:lstStyle/>
-          <a:p>
-            <a:pPr algn="ctr" indent="0" marL="0">
-              <a:buNone/>
-            </a:pPr>
-            <a:r>
-              <a:rPr lang="en-US" sz="850" dirty="0">
-                <a:solidFill>
-                  <a:srgbClr val="13212A"/>
-                </a:solidFill>
-                <a:latin typeface="Calibri" pitchFamily="34" charset="0"/>
-                <a:ea typeface="Calibri" pitchFamily="34" charset="-122"/>
-                <a:cs typeface="Calibri" pitchFamily="34" charset="-120"/>
-              </a:rPr>
-              <a:t>471</a:t>
-            </a:r>
-            <a:endParaRPr lang="en-US" sz="850" dirty="0"/>
-          </a:p>
-        </p:txBody>
-      </p:sp>
-      <p:sp>
-        <p:nvSpPr>
-          <p:cNvPr id="43" name="Text 39"/>
-          <p:cNvSpPr/>
-          <p:nvPr/>
-        </p:nvSpPr>
-        <p:spPr>
-          <a:xfrm>
-            <a:off x="5369052" y="5449824"/>
-            <a:ext cx="585216" cy="182880"/>
-          </a:xfrm>
-          <a:prstGeom prst="rect">
-            <a:avLst/>
-          </a:prstGeom>
-          <a:noFill/>
-          <a:ln/>
-        </p:spPr>
-        <p:txBody>
-          <a:bodyPr wrap="square" lIns="0" tIns="0" rIns="0" bIns="0" rtlCol="0" anchor="ctr"/>
-          <a:lstStyle/>
-          <a:p>
-            <a:pPr algn="ctr" indent="0" marL="0">
-              <a:buNone/>
-            </a:pPr>
-            <a:r>
-              <a:rPr lang="en-US" sz="850" dirty="0">
-                <a:solidFill>
-                  <a:srgbClr val="13212A"/>
-                </a:solidFill>
-                <a:latin typeface="Calibri" pitchFamily="34" charset="0"/>
-                <a:ea typeface="Calibri" pitchFamily="34" charset="-122"/>
-                <a:cs typeface="Calibri" pitchFamily="34" charset="-120"/>
-              </a:rPr>
-              <a:t>429</a:t>
-            </a:r>
-            <a:endParaRPr lang="en-US" sz="850" dirty="0"/>
-          </a:p>
-        </p:txBody>
-      </p:sp>
-      <p:sp>
-        <p:nvSpPr>
-          <p:cNvPr id="44" name="Text 40"/>
-          <p:cNvSpPr/>
-          <p:nvPr/>
-        </p:nvSpPr>
-        <p:spPr>
-          <a:xfrm>
-            <a:off x="6181344" y="5230368"/>
-            <a:ext cx="585216" cy="182880"/>
-          </a:xfrm>
-          <a:prstGeom prst="rect">
-            <a:avLst/>
-          </a:prstGeom>
-          <a:noFill/>
-          <a:ln/>
-        </p:spPr>
-        <p:txBody>
-          <a:bodyPr wrap="square" lIns="0" tIns="0" rIns="0" bIns="0" rtlCol="0" anchor="ctr"/>
-          <a:lstStyle/>
-          <a:p>
-            <a:pPr algn="ctr" indent="0" marL="0">
-              <a:buNone/>
-            </a:pPr>
-            <a:r>
-              <a:rPr lang="en-US" sz="850" dirty="0">
-                <a:solidFill>
-                  <a:srgbClr val="13212A"/>
-                </a:solidFill>
-                <a:latin typeface="Calibri" pitchFamily="34" charset="0"/>
-                <a:ea typeface="Calibri" pitchFamily="34" charset="-122"/>
-                <a:cs typeface="Calibri" pitchFamily="34" charset="-120"/>
-              </a:rPr>
-              <a:t>152</a:t>
-            </a:r>
-            <a:endParaRPr lang="en-US" sz="850" dirty="0"/>
-          </a:p>
-        </p:txBody>
-      </p:sp>
-      <p:sp>
-        <p:nvSpPr>
-          <p:cNvPr id="45" name="Text 41"/>
-          <p:cNvSpPr/>
-          <p:nvPr/>
-        </p:nvSpPr>
-        <p:spPr>
-          <a:xfrm>
-            <a:off x="6181344" y="5449824"/>
-            <a:ext cx="585216" cy="182880"/>
-          </a:xfrm>
-          <a:prstGeom prst="rect">
-            <a:avLst/>
-          </a:prstGeom>
-          <a:noFill/>
-          <a:ln/>
-        </p:spPr>
-        <p:txBody>
-          <a:bodyPr wrap="square" lIns="0" tIns="0" rIns="0" bIns="0" rtlCol="0" anchor="ctr"/>
-          <a:lstStyle/>
-          <a:p>
-            <a:pPr algn="ctr" indent="0" marL="0">
-              <a:buNone/>
-            </a:pPr>
-            <a:r>
-              <a:rPr lang="en-US" sz="850" dirty="0">
-                <a:solidFill>
-                  <a:srgbClr val="13212A"/>
-                </a:solidFill>
-                <a:latin typeface="Calibri" pitchFamily="34" charset="0"/>
-                <a:ea typeface="Calibri" pitchFamily="34" charset="-122"/>
-                <a:cs typeface="Calibri" pitchFamily="34" charset="-120"/>
-              </a:rPr>
-              <a:t>124</a:t>
-            </a:r>
-            <a:endParaRPr lang="en-US" sz="850" dirty="0"/>
-          </a:p>
-        </p:txBody>
-      </p:sp>
-      <p:sp>
-        <p:nvSpPr>
-          <p:cNvPr id="46" name="Text 42"/>
-          <p:cNvSpPr/>
-          <p:nvPr/>
-        </p:nvSpPr>
-        <p:spPr>
-          <a:xfrm>
             <a:off x="640080" y="6291072"/>
             <a:ext cx="9144000" cy="201168"/>
           </a:xfrm>
@@ -17188,7 +15265,7 @@
                 <a:ea typeface="Calibri" pitchFamily="34" charset="-122"/>
                 <a:cs typeface="Calibri" pitchFamily="34" charset="-120"/>
               </a:rPr>
-              <a:t>Adapted from Figure 3 (cumulative incidence reconstructed).</a:t>
+              <a:t>Figure 3, Panel A.  Heerspink et al., N Engl J Med 2026.</a:t>
             </a:r>
             <a:endParaRPr lang="en-US" sz="850" dirty="0"/>
           </a:p>
@@ -17196,7 +15273,7 @@
       </p:sp>
       <p:sp>
         <p:nvSpPr>
-          <p:cNvPr id="47" name="Text 43"/>
+          <p:cNvPr id="30" name="Text 26"/>
           <p:cNvSpPr/>
           <p:nvPr/>
         </p:nvSpPr>
@@ -17249,7 +15326,7 @@
       </p:sp>
       <p:sp>
         <p:nvSpPr>
-          <p:cNvPr id="48" name="Text 44"/>
+          <p:cNvPr id="31" name="Text 27"/>
           <p:cNvSpPr/>
           <p:nvPr/>
         </p:nvSpPr>

--- a/FIND-CKD.pptx
+++ b/FIND-CKD.pptx
@@ -2913,7 +2913,7 @@
           <a:p>
             <a:r>
               <a:rPr lang="en-US" dirty="0"/>
-              <a:t>FIDELIO kidney 0.82, FIGARO CV 0.87, FIDELITY kidney 0.77. FIND-CKD, a fifth of that sample, no diabetic patient, gives the same slope 0.7 total and 1.2 chronic plus composite 0.77, in the range of RAS and SGLT2 inhibitors. The mechanistic bet paid off.</a:t>
+              <a:t>Line them up. FIDELITY, ~13,000 diabetic patients, kidney composite 0.77 and CV composite 0.86. FIND-CKD, a fifth of that sample with no diabetic patient, gives a kidney composite of 0.78, essentially identical, plus a protected kidney-CV composite of 0.77 and a slope of 0.7 (chronic 1.2). Same drug, same mechanism, extended past diabetes. The CV number in FIND-CKD rests on few events, so read it cautiously.</a:t>
             </a:r>
             <a:endParaRPr lang="en-US" dirty="0"/>
           </a:p>
@@ -3705,7 +3705,7 @@
           <a:p>
             <a:r>
               <a:rPr lang="en-US" dirty="0"/>
-              <a:t>FIDELIO the kidney trial, FIGARO the CV trial, FIDELITY pooled ~13,000 for a kidney composite 0.77. FIDELITY used the same ≥57% decline definition FIND-CKD adopts. All diabetic.</a:t>
+              <a:t>FIDELITY pooled FIDELIO and FIGARO, ~13,000 patients, for a CV composite of 0.86 and a kidney composite of 0.77, using the same ≥57% eGFR-decline definition FIND-CKD adopts. All diabetic. That is the gap FIND-CKD fills.</a:t>
             </a:r>
             <a:endParaRPr lang="en-US" dirty="0"/>
           </a:p>
@@ -18294,7 +18294,7 @@
                 <a:ea typeface="Arial" pitchFamily="34" charset="-122"/>
                 <a:cs typeface="Arial" pitchFamily="34" charset="-120"/>
               </a:rPr>
-              <a:t>FIND-CKD in context</a:t>
+              <a:t>In context: same drug, two populations</a:t>
             </a:r>
             <a:endParaRPr lang="en-US" sz="2400" dirty="0"/>
           </a:p>
@@ -18302,14 +18302,56 @@
       </p:sp>
       <p:sp>
         <p:nvSpPr>
-          <p:cNvPr id="6" name="Shape 3"/>
-          <p:cNvSpPr/>
-          <p:nvPr/>
-        </p:nvSpPr>
-        <p:spPr>
-          <a:xfrm>
-            <a:off x="640080" y="1371600"/>
-            <a:ext cx="10908792" cy="457200"/>
+          <p:cNvPr id="6" name="Text 3"/>
+          <p:cNvSpPr/>
+          <p:nvPr/>
+        </p:nvSpPr>
+        <p:spPr>
+          <a:xfrm>
+            <a:off x="640080" y="987552"/>
+            <a:ext cx="10908792" cy="420624"/>
+          </a:xfrm>
+          <a:prstGeom prst="rect">
+            <a:avLst/>
+          </a:prstGeom>
+          <a:noFill/>
+          <a:ln/>
+        </p:spPr>
+        <p:txBody>
+          <a:bodyPr wrap="square" lIns="0" tIns="0" rIns="0" bIns="0" rtlCol="0" anchor="ctr"/>
+          <a:lstStyle/>
+          <a:p>
+            <a:pPr indent="0" marL="0">
+              <a:lnSpc>
+                <a:spcPct val="105000"/>
+              </a:lnSpc>
+              <a:buNone/>
+            </a:pPr>
+            <a:r>
+              <a:rPr lang="en-US" sz="1600" b="1" dirty="0">
+                <a:solidFill>
+                  <a:srgbClr val="0E8385"/>
+                </a:solidFill>
+                <a:latin typeface="Calibri" pitchFamily="34" charset="0"/>
+                <a:ea typeface="Calibri" pitchFamily="34" charset="-122"/>
+                <a:cs typeface="Calibri" pitchFamily="34" charset="-120"/>
+              </a:rPr>
+              <a:t>The kidney composite is 0.77 in diabetic CKD and 0.78 without diabetes, essentially identical.</a:t>
+            </a:r>
+            <a:endParaRPr lang="en-US" sz="1600" dirty="0"/>
+          </a:p>
+        </p:txBody>
+      </p:sp>
+      <p:sp>
+        <p:nvSpPr>
+          <p:cNvPr id="7" name="Shape 4"/>
+          <p:cNvSpPr/>
+          <p:nvPr/>
+        </p:nvSpPr>
+        <p:spPr>
+          <a:xfrm>
+            <a:off x="640080" y="1600200"/>
+            <a:ext cx="10908792" cy="475488"/>
           </a:xfrm>
           <a:prstGeom prst="rect">
             <a:avLst/>
@@ -18322,14 +18364,14 @@
       </p:sp>
       <p:sp>
         <p:nvSpPr>
-          <p:cNvPr id="7" name="Text 4"/>
-          <p:cNvSpPr/>
-          <p:nvPr/>
-        </p:nvSpPr>
-        <p:spPr>
-          <a:xfrm>
-            <a:off x="749808" y="1371600"/>
-            <a:ext cx="2560320" cy="457200"/>
+          <p:cNvPr id="8" name="Text 5"/>
+          <p:cNvSpPr/>
+          <p:nvPr/>
+        </p:nvSpPr>
+        <p:spPr>
+          <a:xfrm>
+            <a:off x="749808" y="1600200"/>
+            <a:ext cx="2926080" cy="475488"/>
           </a:xfrm>
           <a:prstGeom prst="rect">
             <a:avLst/>
@@ -18353,14 +18395,14 @@
       </p:sp>
       <p:sp>
         <p:nvSpPr>
-          <p:cNvPr id="8" name="Text 5"/>
-          <p:cNvSpPr/>
-          <p:nvPr/>
-        </p:nvSpPr>
-        <p:spPr>
-          <a:xfrm>
-            <a:off x="3493008" y="1371600"/>
-            <a:ext cx="2011680" cy="457200"/>
+          <p:cNvPr id="9" name="Text 6"/>
+          <p:cNvSpPr/>
+          <p:nvPr/>
+        </p:nvSpPr>
+        <p:spPr>
+          <a:xfrm>
+            <a:off x="3858768" y="1600200"/>
+            <a:ext cx="3703320" cy="475488"/>
           </a:xfrm>
           <a:prstGeom prst="rect">
             <a:avLst/>
@@ -18387,7 +18429,7 @@
                 <a:ea typeface="Calibri" pitchFamily="34" charset="-122"/>
                 <a:cs typeface="Calibri" pitchFamily="34" charset="-120"/>
               </a:rPr>
-              <a:t>FIDELIO-DKD</a:t>
+              <a:t>FIDELITY — diabetic CKD</a:t>
             </a:r>
             <a:endParaRPr lang="en-US" sz="1300" dirty="0"/>
           </a:p>
@@ -18395,14 +18437,14 @@
       </p:sp>
       <p:sp>
         <p:nvSpPr>
-          <p:cNvPr id="9" name="Text 6"/>
-          <p:cNvSpPr/>
-          <p:nvPr/>
-        </p:nvSpPr>
-        <p:spPr>
-          <a:xfrm>
-            <a:off x="5687568" y="1371600"/>
-            <a:ext cx="2011680" cy="457200"/>
+          <p:cNvPr id="10" name="Text 7"/>
+          <p:cNvSpPr/>
+          <p:nvPr/>
+        </p:nvSpPr>
+        <p:spPr>
+          <a:xfrm>
+            <a:off x="7744968" y="1600200"/>
+            <a:ext cx="3730752" cy="475488"/>
           </a:xfrm>
           <a:prstGeom prst="rect">
             <a:avLst/>
@@ -18429,7 +18471,7 @@
                 <a:ea typeface="Calibri" pitchFamily="34" charset="-122"/>
                 <a:cs typeface="Calibri" pitchFamily="34" charset="-120"/>
               </a:rPr>
-              <a:t>FIGARO-DKD</a:t>
+              <a:t>FIND-CKD — no diabetes</a:t>
             </a:r>
             <a:endParaRPr lang="en-US" sz="1300" dirty="0"/>
           </a:p>
@@ -18437,97 +18479,13 @@
       </p:sp>
       <p:sp>
         <p:nvSpPr>
-          <p:cNvPr id="10" name="Text 7"/>
-          <p:cNvSpPr/>
-          <p:nvPr/>
-        </p:nvSpPr>
-        <p:spPr>
-          <a:xfrm>
-            <a:off x="7882128" y="1371600"/>
-            <a:ext cx="2011680" cy="457200"/>
-          </a:xfrm>
-          <a:prstGeom prst="rect">
-            <a:avLst/>
-          </a:prstGeom>
-          <a:noFill/>
-          <a:ln/>
-        </p:spPr>
-        <p:txBody>
-          <a:bodyPr wrap="square" lIns="0" tIns="0" rIns="0" bIns="0" rtlCol="0" anchor="ctr"/>
-          <a:lstStyle/>
-          <a:p>
-            <a:pPr algn="ctr" indent="0" marL="0">
-              <a:lnSpc>
-                <a:spcPct val="98000"/>
-              </a:lnSpc>
-              <a:buNone/>
-            </a:pPr>
-            <a:r>
-              <a:rPr lang="en-US" sz="1300" b="1" dirty="0">
-                <a:solidFill>
-                  <a:srgbClr val="FFFFFF"/>
-                </a:solidFill>
-                <a:latin typeface="Calibri" pitchFamily="34" charset="0"/>
-                <a:ea typeface="Calibri" pitchFamily="34" charset="-122"/>
-                <a:cs typeface="Calibri" pitchFamily="34" charset="-120"/>
-              </a:rPr>
-              <a:t>FIDELITY</a:t>
-            </a:r>
-            <a:endParaRPr lang="en-US" sz="1300" dirty="0"/>
-          </a:p>
-        </p:txBody>
-      </p:sp>
-      <p:sp>
-        <p:nvSpPr>
-          <p:cNvPr id="11" name="Text 8"/>
-          <p:cNvSpPr/>
-          <p:nvPr/>
-        </p:nvSpPr>
-        <p:spPr>
-          <a:xfrm>
-            <a:off x="10076688" y="1371600"/>
-            <a:ext cx="1399032" cy="457200"/>
-          </a:xfrm>
-          <a:prstGeom prst="rect">
-            <a:avLst/>
-          </a:prstGeom>
-          <a:noFill/>
-          <a:ln/>
-        </p:spPr>
-        <p:txBody>
-          <a:bodyPr wrap="square" lIns="0" tIns="0" rIns="0" bIns="0" rtlCol="0" anchor="ctr"/>
-          <a:lstStyle/>
-          <a:p>
-            <a:pPr algn="ctr" indent="0" marL="0">
-              <a:lnSpc>
-                <a:spcPct val="98000"/>
-              </a:lnSpc>
-              <a:buNone/>
-            </a:pPr>
-            <a:r>
-              <a:rPr lang="en-US" sz="1300" b="1" dirty="0">
-                <a:solidFill>
-                  <a:srgbClr val="FFFFFF"/>
-                </a:solidFill>
-                <a:latin typeface="Calibri" pitchFamily="34" charset="0"/>
-                <a:ea typeface="Calibri" pitchFamily="34" charset="-122"/>
-                <a:cs typeface="Calibri" pitchFamily="34" charset="-120"/>
-              </a:rPr>
-              <a:t>FIND-CKD</a:t>
-            </a:r>
-            <a:endParaRPr lang="en-US" sz="1300" dirty="0"/>
-          </a:p>
-        </p:txBody>
-      </p:sp>
-      <p:sp>
-        <p:nvSpPr>
-          <p:cNvPr id="12" name="Shape 9"/>
-          <p:cNvSpPr/>
-          <p:nvPr/>
-        </p:nvSpPr>
-        <p:spPr>
-          <a:xfrm>
-            <a:off x="640080" y="2377440"/>
+          <p:cNvPr id="11" name="Shape 8"/>
+          <p:cNvSpPr/>
+          <p:nvPr/>
+        </p:nvSpPr>
+        <p:spPr>
+          <a:xfrm>
+            <a:off x="640080" y="2587752"/>
             <a:ext cx="10908792" cy="0"/>
           </a:xfrm>
           <a:prstGeom prst="line">
@@ -18544,14 +18502,14 @@
       </p:sp>
       <p:sp>
         <p:nvSpPr>
-          <p:cNvPr id="13" name="Text 10"/>
-          <p:cNvSpPr/>
-          <p:nvPr/>
-        </p:nvSpPr>
-        <p:spPr>
-          <a:xfrm>
-            <a:off x="749808" y="1828800"/>
-            <a:ext cx="2560320" cy="548640"/>
+          <p:cNvPr id="12" name="Text 9"/>
+          <p:cNvSpPr/>
+          <p:nvPr/>
+        </p:nvSpPr>
+        <p:spPr>
+          <a:xfrm>
+            <a:off x="749808" y="2075688"/>
+            <a:ext cx="2926080" cy="512064"/>
           </a:xfrm>
           <a:prstGeom prst="rect">
             <a:avLst/>
@@ -18570,7 +18528,7 @@
               <a:buNone/>
             </a:pPr>
             <a:r>
-              <a:rPr lang="en-US" sz="1250" b="1" dirty="0">
+              <a:rPr lang="en-US" sz="1300" b="1" dirty="0">
                 <a:solidFill>
                   <a:srgbClr val="0F3446"/>
                 </a:solidFill>
@@ -18578,22 +18536,22 @@
                 <a:ea typeface="Calibri" pitchFamily="34" charset="-122"/>
                 <a:cs typeface="Calibri" pitchFamily="34" charset="-120"/>
               </a:rPr>
-              <a:t>Population</a:t>
-            </a:r>
-            <a:endParaRPr lang="en-US" sz="1250" dirty="0"/>
-          </a:p>
-        </p:txBody>
-      </p:sp>
-      <p:sp>
-        <p:nvSpPr>
-          <p:cNvPr id="14" name="Text 11"/>
-          <p:cNvSpPr/>
-          <p:nvPr/>
-        </p:nvSpPr>
-        <p:spPr>
-          <a:xfrm>
-            <a:off x="3493008" y="1828800"/>
-            <a:ext cx="2011680" cy="548640"/>
+              <a:t>Pooled / N</a:t>
+            </a:r>
+            <a:endParaRPr lang="en-US" sz="1300" dirty="0"/>
+          </a:p>
+        </p:txBody>
+      </p:sp>
+      <p:sp>
+        <p:nvSpPr>
+          <p:cNvPr id="13" name="Text 10"/>
+          <p:cNvSpPr/>
+          <p:nvPr/>
+        </p:nvSpPr>
+        <p:spPr>
+          <a:xfrm>
+            <a:off x="3858768" y="2075688"/>
+            <a:ext cx="3703320" cy="512064"/>
           </a:xfrm>
           <a:prstGeom prst="rect">
             <a:avLst/>
@@ -18612,7 +18570,7 @@
               <a:buNone/>
             </a:pPr>
             <a:r>
-              <a:rPr lang="en-US" sz="1250" dirty="0">
+              <a:rPr lang="en-US" sz="1300" dirty="0">
                 <a:solidFill>
                   <a:srgbClr val="13212A"/>
                 </a:solidFill>
@@ -18620,22 +18578,22 @@
                 <a:ea typeface="Calibri" pitchFamily="34" charset="-122"/>
                 <a:cs typeface="Calibri" pitchFamily="34" charset="-120"/>
               </a:rPr>
-              <a:t>T2D + CKD</a:t>
-            </a:r>
-            <a:endParaRPr lang="en-US" sz="1250" dirty="0"/>
-          </a:p>
-        </p:txBody>
-      </p:sp>
-      <p:sp>
-        <p:nvSpPr>
-          <p:cNvPr id="15" name="Text 12"/>
-          <p:cNvSpPr/>
-          <p:nvPr/>
-        </p:nvSpPr>
-        <p:spPr>
-          <a:xfrm>
-            <a:off x="5687568" y="1828800"/>
-            <a:ext cx="2011680" cy="548640"/>
+              <a:t>FIDELIO + FIGARO; 13,026</a:t>
+            </a:r>
+            <a:endParaRPr lang="en-US" sz="1300" dirty="0"/>
+          </a:p>
+        </p:txBody>
+      </p:sp>
+      <p:sp>
+        <p:nvSpPr>
+          <p:cNvPr id="14" name="Text 11"/>
+          <p:cNvSpPr/>
+          <p:nvPr/>
+        </p:nvSpPr>
+        <p:spPr>
+          <a:xfrm>
+            <a:off x="7744968" y="2075688"/>
+            <a:ext cx="3730752" cy="512064"/>
           </a:xfrm>
           <a:prstGeom prst="rect">
             <a:avLst/>
@@ -18654,91 +18612,7 @@
               <a:buNone/>
             </a:pPr>
             <a:r>
-              <a:rPr lang="en-US" sz="1250" dirty="0">
-                <a:solidFill>
-                  <a:srgbClr val="13212A"/>
-                </a:solidFill>
-                <a:latin typeface="Calibri" pitchFamily="34" charset="0"/>
-                <a:ea typeface="Calibri" pitchFamily="34" charset="-122"/>
-                <a:cs typeface="Calibri" pitchFamily="34" charset="-120"/>
-              </a:rPr>
-              <a:t>T2D + CKD (earlier)</a:t>
-            </a:r>
-            <a:endParaRPr lang="en-US" sz="1250" dirty="0"/>
-          </a:p>
-        </p:txBody>
-      </p:sp>
-      <p:sp>
-        <p:nvSpPr>
-          <p:cNvPr id="16" name="Text 13"/>
-          <p:cNvSpPr/>
-          <p:nvPr/>
-        </p:nvSpPr>
-        <p:spPr>
-          <a:xfrm>
-            <a:off x="7882128" y="1828800"/>
-            <a:ext cx="2011680" cy="548640"/>
-          </a:xfrm>
-          <a:prstGeom prst="rect">
-            <a:avLst/>
-          </a:prstGeom>
-          <a:noFill/>
-          <a:ln/>
-        </p:spPr>
-        <p:txBody>
-          <a:bodyPr wrap="square" lIns="0" tIns="0" rIns="0" bIns="0" rtlCol="0" anchor="ctr"/>
-          <a:lstStyle/>
-          <a:p>
-            <a:pPr algn="ctr" indent="0" marL="0">
-              <a:lnSpc>
-                <a:spcPct val="98000"/>
-              </a:lnSpc>
-              <a:buNone/>
-            </a:pPr>
-            <a:r>
-              <a:rPr lang="en-US" sz="1250" dirty="0">
-                <a:solidFill>
-                  <a:srgbClr val="13212A"/>
-                </a:solidFill>
-                <a:latin typeface="Calibri" pitchFamily="34" charset="0"/>
-                <a:ea typeface="Calibri" pitchFamily="34" charset="-122"/>
-                <a:cs typeface="Calibri" pitchFamily="34" charset="-120"/>
-              </a:rPr>
-              <a:t>T2D + CKD (pooled)</a:t>
-            </a:r>
-            <a:endParaRPr lang="en-US" sz="1250" dirty="0"/>
-          </a:p>
-        </p:txBody>
-      </p:sp>
-      <p:sp>
-        <p:nvSpPr>
-          <p:cNvPr id="17" name="Text 14"/>
-          <p:cNvSpPr/>
-          <p:nvPr/>
-        </p:nvSpPr>
-        <p:spPr>
-          <a:xfrm>
-            <a:off x="10076688" y="1828800"/>
-            <a:ext cx="1399032" cy="548640"/>
-          </a:xfrm>
-          <a:prstGeom prst="rect">
-            <a:avLst/>
-          </a:prstGeom>
-          <a:noFill/>
-          <a:ln/>
-        </p:spPr>
-        <p:txBody>
-          <a:bodyPr wrap="square" lIns="0" tIns="0" rIns="0" bIns="0" rtlCol="0" anchor="ctr"/>
-          <a:lstStyle/>
-          <a:p>
-            <a:pPr algn="ctr" indent="0" marL="0">
-              <a:lnSpc>
-                <a:spcPct val="98000"/>
-              </a:lnSpc>
-              <a:buNone/>
-            </a:pPr>
-            <a:r>
-              <a:rPr lang="en-US" sz="1250" b="1" dirty="0">
+              <a:rPr lang="en-US" sz="1300" b="1" dirty="0">
                 <a:solidFill>
                   <a:srgbClr val="0E8385"/>
                 </a:solidFill>
@@ -18746,21 +18620,21 @@
                 <a:ea typeface="Calibri" pitchFamily="34" charset="-122"/>
                 <a:cs typeface="Calibri" pitchFamily="34" charset="-120"/>
               </a:rPr>
-              <a:t>CKD, no diabetes</a:t>
-            </a:r>
-            <a:endParaRPr lang="en-US" sz="1250" dirty="0"/>
-          </a:p>
-        </p:txBody>
-      </p:sp>
-      <p:sp>
-        <p:nvSpPr>
-          <p:cNvPr id="18" name="Shape 15"/>
-          <p:cNvSpPr/>
-          <p:nvPr/>
-        </p:nvSpPr>
-        <p:spPr>
-          <a:xfrm>
-            <a:off x="640080" y="2926080"/>
+              <a:t>Single RCT; 1,584</a:t>
+            </a:r>
+            <a:endParaRPr lang="en-US" sz="1300" dirty="0"/>
+          </a:p>
+        </p:txBody>
+      </p:sp>
+      <p:sp>
+        <p:nvSpPr>
+          <p:cNvPr id="15" name="Shape 12"/>
+          <p:cNvSpPr/>
+          <p:nvPr/>
+        </p:nvSpPr>
+        <p:spPr>
+          <a:xfrm>
+            <a:off x="640080" y="3099816"/>
             <a:ext cx="10908792" cy="0"/>
           </a:xfrm>
           <a:prstGeom prst="line">
@@ -18777,14 +18651,14 @@
       </p:sp>
       <p:sp>
         <p:nvSpPr>
-          <p:cNvPr id="19" name="Text 16"/>
-          <p:cNvSpPr/>
-          <p:nvPr/>
-        </p:nvSpPr>
-        <p:spPr>
-          <a:xfrm>
-            <a:off x="749808" y="2377440"/>
-            <a:ext cx="2560320" cy="548640"/>
+          <p:cNvPr id="16" name="Text 13"/>
+          <p:cNvSpPr/>
+          <p:nvPr/>
+        </p:nvSpPr>
+        <p:spPr>
+          <a:xfrm>
+            <a:off x="749808" y="2587752"/>
+            <a:ext cx="2926080" cy="512064"/>
           </a:xfrm>
           <a:prstGeom prst="rect">
             <a:avLst/>
@@ -18803,7 +18677,7 @@
               <a:buNone/>
             </a:pPr>
             <a:r>
-              <a:rPr lang="en-US" sz="1250" b="1" dirty="0">
+              <a:rPr lang="en-US" sz="1300" b="1" dirty="0">
                 <a:solidFill>
                   <a:srgbClr val="0F3446"/>
                 </a:solidFill>
@@ -18811,22 +18685,22 @@
                 <a:ea typeface="Calibri" pitchFamily="34" charset="-122"/>
                 <a:cs typeface="Calibri" pitchFamily="34" charset="-120"/>
               </a:rPr>
-              <a:t>N</a:t>
-            </a:r>
-            <a:endParaRPr lang="en-US" sz="1250" dirty="0"/>
-          </a:p>
-        </p:txBody>
-      </p:sp>
-      <p:sp>
-        <p:nvSpPr>
-          <p:cNvPr id="20" name="Text 17"/>
-          <p:cNvSpPr/>
-          <p:nvPr/>
-        </p:nvSpPr>
-        <p:spPr>
-          <a:xfrm>
-            <a:off x="3493008" y="2377440"/>
-            <a:ext cx="2011680" cy="548640"/>
+              <a:t>Primary endpoint</a:t>
+            </a:r>
+            <a:endParaRPr lang="en-US" sz="1300" dirty="0"/>
+          </a:p>
+        </p:txBody>
+      </p:sp>
+      <p:sp>
+        <p:nvSpPr>
+          <p:cNvPr id="17" name="Text 14"/>
+          <p:cNvSpPr/>
+          <p:nvPr/>
+        </p:nvSpPr>
+        <p:spPr>
+          <a:xfrm>
+            <a:off x="3858768" y="2587752"/>
+            <a:ext cx="3703320" cy="512064"/>
           </a:xfrm>
           <a:prstGeom prst="rect">
             <a:avLst/>
@@ -18845,7 +18719,7 @@
               <a:buNone/>
             </a:pPr>
             <a:r>
-              <a:rPr lang="en-US" sz="1250" dirty="0">
+              <a:rPr lang="en-US" sz="1300" dirty="0">
                 <a:solidFill>
                   <a:srgbClr val="13212A"/>
                 </a:solidFill>
@@ -18853,22 +18727,22 @@
                 <a:ea typeface="Calibri" pitchFamily="34" charset="-122"/>
                 <a:cs typeface="Calibri" pitchFamily="34" charset="-120"/>
               </a:rPr>
-              <a:t>5674</a:t>
-            </a:r>
-            <a:endParaRPr lang="en-US" sz="1250" dirty="0"/>
-          </a:p>
-        </p:txBody>
-      </p:sp>
-      <p:sp>
-        <p:nvSpPr>
-          <p:cNvPr id="21" name="Text 18"/>
-          <p:cNvSpPr/>
-          <p:nvPr/>
-        </p:nvSpPr>
-        <p:spPr>
-          <a:xfrm>
-            <a:off x="5687568" y="2377440"/>
-            <a:ext cx="2011680" cy="548640"/>
+              <a:t>CV &amp; kidney composites</a:t>
+            </a:r>
+            <a:endParaRPr lang="en-US" sz="1300" dirty="0"/>
+          </a:p>
+        </p:txBody>
+      </p:sp>
+      <p:sp>
+        <p:nvSpPr>
+          <p:cNvPr id="18" name="Text 15"/>
+          <p:cNvSpPr/>
+          <p:nvPr/>
+        </p:nvSpPr>
+        <p:spPr>
+          <a:xfrm>
+            <a:off x="7744968" y="2587752"/>
+            <a:ext cx="3730752" cy="512064"/>
           </a:xfrm>
           <a:prstGeom prst="rect">
             <a:avLst/>
@@ -18887,91 +18761,7 @@
               <a:buNone/>
             </a:pPr>
             <a:r>
-              <a:rPr lang="en-US" sz="1250" dirty="0">
-                <a:solidFill>
-                  <a:srgbClr val="13212A"/>
-                </a:solidFill>
-                <a:latin typeface="Calibri" pitchFamily="34" charset="0"/>
-                <a:ea typeface="Calibri" pitchFamily="34" charset="-122"/>
-                <a:cs typeface="Calibri" pitchFamily="34" charset="-120"/>
-              </a:rPr>
-              <a:t>7437</a:t>
-            </a:r>
-            <a:endParaRPr lang="en-US" sz="1250" dirty="0"/>
-          </a:p>
-        </p:txBody>
-      </p:sp>
-      <p:sp>
-        <p:nvSpPr>
-          <p:cNvPr id="22" name="Text 19"/>
-          <p:cNvSpPr/>
-          <p:nvPr/>
-        </p:nvSpPr>
-        <p:spPr>
-          <a:xfrm>
-            <a:off x="7882128" y="2377440"/>
-            <a:ext cx="2011680" cy="548640"/>
-          </a:xfrm>
-          <a:prstGeom prst="rect">
-            <a:avLst/>
-          </a:prstGeom>
-          <a:noFill/>
-          <a:ln/>
-        </p:spPr>
-        <p:txBody>
-          <a:bodyPr wrap="square" lIns="0" tIns="0" rIns="0" bIns="0" rtlCol="0" anchor="ctr"/>
-          <a:lstStyle/>
-          <a:p>
-            <a:pPr algn="ctr" indent="0" marL="0">
-              <a:lnSpc>
-                <a:spcPct val="98000"/>
-              </a:lnSpc>
-              <a:buNone/>
-            </a:pPr>
-            <a:r>
-              <a:rPr lang="en-US" sz="1250" dirty="0">
-                <a:solidFill>
-                  <a:srgbClr val="13212A"/>
-                </a:solidFill>
-                <a:latin typeface="Calibri" pitchFamily="34" charset="0"/>
-                <a:ea typeface="Calibri" pitchFamily="34" charset="-122"/>
-                <a:cs typeface="Calibri" pitchFamily="34" charset="-120"/>
-              </a:rPr>
-              <a:t>13,026</a:t>
-            </a:r>
-            <a:endParaRPr lang="en-US" sz="1250" dirty="0"/>
-          </a:p>
-        </p:txBody>
-      </p:sp>
-      <p:sp>
-        <p:nvSpPr>
-          <p:cNvPr id="23" name="Text 20"/>
-          <p:cNvSpPr/>
-          <p:nvPr/>
-        </p:nvSpPr>
-        <p:spPr>
-          <a:xfrm>
-            <a:off x="10076688" y="2377440"/>
-            <a:ext cx="1399032" cy="548640"/>
-          </a:xfrm>
-          <a:prstGeom prst="rect">
-            <a:avLst/>
-          </a:prstGeom>
-          <a:noFill/>
-          <a:ln/>
-        </p:spPr>
-        <p:txBody>
-          <a:bodyPr wrap="square" lIns="0" tIns="0" rIns="0" bIns="0" rtlCol="0" anchor="ctr"/>
-          <a:lstStyle/>
-          <a:p>
-            <a:pPr algn="ctr" indent="0" marL="0">
-              <a:lnSpc>
-                <a:spcPct val="98000"/>
-              </a:lnSpc>
-              <a:buNone/>
-            </a:pPr>
-            <a:r>
-              <a:rPr lang="en-US" sz="1250" b="1" dirty="0">
+              <a:rPr lang="en-US" sz="1300" b="1" dirty="0">
                 <a:solidFill>
                   <a:srgbClr val="0E8385"/>
                 </a:solidFill>
@@ -18979,21 +18769,21 @@
                 <a:ea typeface="Calibri" pitchFamily="34" charset="-122"/>
                 <a:cs typeface="Calibri" pitchFamily="34" charset="-120"/>
               </a:rPr>
-              <a:t>1584</a:t>
-            </a:r>
-            <a:endParaRPr lang="en-US" sz="1250" dirty="0"/>
-          </a:p>
-        </p:txBody>
-      </p:sp>
-      <p:sp>
-        <p:nvSpPr>
-          <p:cNvPr id="24" name="Shape 21"/>
-          <p:cNvSpPr/>
-          <p:nvPr/>
-        </p:nvSpPr>
-        <p:spPr>
-          <a:xfrm>
-            <a:off x="640080" y="3474720"/>
+              <a:t>Total eGFR slope</a:t>
+            </a:r>
+            <a:endParaRPr lang="en-US" sz="1300" dirty="0"/>
+          </a:p>
+        </p:txBody>
+      </p:sp>
+      <p:sp>
+        <p:nvSpPr>
+          <p:cNvPr id="19" name="Shape 16"/>
+          <p:cNvSpPr/>
+          <p:nvPr/>
+        </p:nvSpPr>
+        <p:spPr>
+          <a:xfrm>
+            <a:off x="640080" y="3611880"/>
             <a:ext cx="10908792" cy="0"/>
           </a:xfrm>
           <a:prstGeom prst="line">
@@ -19010,14 +18800,14 @@
       </p:sp>
       <p:sp>
         <p:nvSpPr>
-          <p:cNvPr id="25" name="Text 22"/>
-          <p:cNvSpPr/>
-          <p:nvPr/>
-        </p:nvSpPr>
-        <p:spPr>
-          <a:xfrm>
-            <a:off x="749808" y="2926080"/>
-            <a:ext cx="2560320" cy="548640"/>
+          <p:cNvPr id="20" name="Text 17"/>
+          <p:cNvSpPr/>
+          <p:nvPr/>
+        </p:nvSpPr>
+        <p:spPr>
+          <a:xfrm>
+            <a:off x="749808" y="3099816"/>
+            <a:ext cx="2926080" cy="512064"/>
           </a:xfrm>
           <a:prstGeom prst="rect">
             <a:avLst/>
@@ -19036,7 +18826,7 @@
               <a:buNone/>
             </a:pPr>
             <a:r>
-              <a:rPr lang="en-US" sz="1250" b="1" dirty="0">
+              <a:rPr lang="en-US" sz="1300" b="1" dirty="0">
                 <a:solidFill>
                   <a:srgbClr val="0F3446"/>
                 </a:solidFill>
@@ -19044,22 +18834,22 @@
                 <a:ea typeface="Calibri" pitchFamily="34" charset="-122"/>
                 <a:cs typeface="Calibri" pitchFamily="34" charset="-120"/>
               </a:rPr>
-              <a:t>Primary endpoint</a:t>
-            </a:r>
-            <a:endParaRPr lang="en-US" sz="1250" dirty="0"/>
-          </a:p>
-        </p:txBody>
-      </p:sp>
-      <p:sp>
-        <p:nvSpPr>
-          <p:cNvPr id="26" name="Text 23"/>
-          <p:cNvSpPr/>
-          <p:nvPr/>
-        </p:nvSpPr>
-        <p:spPr>
-          <a:xfrm>
-            <a:off x="3493008" y="2926080"/>
-            <a:ext cx="2011680" cy="548640"/>
+              <a:t>Kidney composite (≥57%)</a:t>
+            </a:r>
+            <a:endParaRPr lang="en-US" sz="1300" dirty="0"/>
+          </a:p>
+        </p:txBody>
+      </p:sp>
+      <p:sp>
+        <p:nvSpPr>
+          <p:cNvPr id="21" name="Text 18"/>
+          <p:cNvSpPr/>
+          <p:nvPr/>
+        </p:nvSpPr>
+        <p:spPr>
+          <a:xfrm>
+            <a:off x="3858768" y="3099816"/>
+            <a:ext cx="3703320" cy="512064"/>
           </a:xfrm>
           <a:prstGeom prst="rect">
             <a:avLst/>
@@ -19078,7 +18868,7 @@
               <a:buNone/>
             </a:pPr>
             <a:r>
-              <a:rPr lang="en-US" sz="1250" dirty="0">
+              <a:rPr lang="en-US" sz="1300" dirty="0">
                 <a:solidFill>
                   <a:srgbClr val="13212A"/>
                 </a:solidFill>
@@ -19086,22 +18876,22 @@
                 <a:ea typeface="Calibri" pitchFamily="34" charset="-122"/>
                 <a:cs typeface="Calibri" pitchFamily="34" charset="-120"/>
               </a:rPr>
-              <a:t>Kidney composite</a:t>
-            </a:r>
-            <a:endParaRPr lang="en-US" sz="1250" dirty="0"/>
-          </a:p>
-        </p:txBody>
-      </p:sp>
-      <p:sp>
-        <p:nvSpPr>
-          <p:cNvPr id="27" name="Text 24"/>
-          <p:cNvSpPr/>
-          <p:nvPr/>
-        </p:nvSpPr>
-        <p:spPr>
-          <a:xfrm>
-            <a:off x="5687568" y="2926080"/>
-            <a:ext cx="2011680" cy="548640"/>
+              <a:t>0.77 (0.67–0.88)</a:t>
+            </a:r>
+            <a:endParaRPr lang="en-US" sz="1300" dirty="0"/>
+          </a:p>
+        </p:txBody>
+      </p:sp>
+      <p:sp>
+        <p:nvSpPr>
+          <p:cNvPr id="22" name="Text 19"/>
+          <p:cNvSpPr/>
+          <p:nvPr/>
+        </p:nvSpPr>
+        <p:spPr>
+          <a:xfrm>
+            <a:off x="7744968" y="3099816"/>
+            <a:ext cx="3730752" cy="512064"/>
           </a:xfrm>
           <a:prstGeom prst="rect">
             <a:avLst/>
@@ -19120,91 +18910,7 @@
               <a:buNone/>
             </a:pPr>
             <a:r>
-              <a:rPr lang="en-US" sz="1250" dirty="0">
-                <a:solidFill>
-                  <a:srgbClr val="13212A"/>
-                </a:solidFill>
-                <a:latin typeface="Calibri" pitchFamily="34" charset="0"/>
-                <a:ea typeface="Calibri" pitchFamily="34" charset="-122"/>
-                <a:cs typeface="Calibri" pitchFamily="34" charset="-120"/>
-              </a:rPr>
-              <a:t>CV composite</a:t>
-            </a:r>
-            <a:endParaRPr lang="en-US" sz="1250" dirty="0"/>
-          </a:p>
-        </p:txBody>
-      </p:sp>
-      <p:sp>
-        <p:nvSpPr>
-          <p:cNvPr id="28" name="Text 25"/>
-          <p:cNvSpPr/>
-          <p:nvPr/>
-        </p:nvSpPr>
-        <p:spPr>
-          <a:xfrm>
-            <a:off x="7882128" y="2926080"/>
-            <a:ext cx="2011680" cy="548640"/>
-          </a:xfrm>
-          <a:prstGeom prst="rect">
-            <a:avLst/>
-          </a:prstGeom>
-          <a:noFill/>
-          <a:ln/>
-        </p:spPr>
-        <p:txBody>
-          <a:bodyPr wrap="square" lIns="0" tIns="0" rIns="0" bIns="0" rtlCol="0" anchor="ctr"/>
-          <a:lstStyle/>
-          <a:p>
-            <a:pPr algn="ctr" indent="0" marL="0">
-              <a:lnSpc>
-                <a:spcPct val="98000"/>
-              </a:lnSpc>
-              <a:buNone/>
-            </a:pPr>
-            <a:r>
-              <a:rPr lang="en-US" sz="1250" dirty="0">
-                <a:solidFill>
-                  <a:srgbClr val="13212A"/>
-                </a:solidFill>
-                <a:latin typeface="Calibri" pitchFamily="34" charset="0"/>
-                <a:ea typeface="Calibri" pitchFamily="34" charset="-122"/>
-                <a:cs typeface="Calibri" pitchFamily="34" charset="-120"/>
-              </a:rPr>
-              <a:t>(pooled)</a:t>
-            </a:r>
-            <a:endParaRPr lang="en-US" sz="1250" dirty="0"/>
-          </a:p>
-        </p:txBody>
-      </p:sp>
-      <p:sp>
-        <p:nvSpPr>
-          <p:cNvPr id="29" name="Text 26"/>
-          <p:cNvSpPr/>
-          <p:nvPr/>
-        </p:nvSpPr>
-        <p:spPr>
-          <a:xfrm>
-            <a:off x="10076688" y="2926080"/>
-            <a:ext cx="1399032" cy="548640"/>
-          </a:xfrm>
-          <a:prstGeom prst="rect">
-            <a:avLst/>
-          </a:prstGeom>
-          <a:noFill/>
-          <a:ln/>
-        </p:spPr>
-        <p:txBody>
-          <a:bodyPr wrap="square" lIns="0" tIns="0" rIns="0" bIns="0" rtlCol="0" anchor="ctr"/>
-          <a:lstStyle/>
-          <a:p>
-            <a:pPr algn="ctr" indent="0" marL="0">
-              <a:lnSpc>
-                <a:spcPct val="98000"/>
-              </a:lnSpc>
-              <a:buNone/>
-            </a:pPr>
-            <a:r>
-              <a:rPr lang="en-US" sz="1250" b="1" dirty="0">
+              <a:rPr lang="en-US" sz="1300" b="1" dirty="0">
                 <a:solidFill>
                   <a:srgbClr val="0E8385"/>
                 </a:solidFill>
@@ -19212,21 +18918,21 @@
                 <a:ea typeface="Calibri" pitchFamily="34" charset="-122"/>
                 <a:cs typeface="Calibri" pitchFamily="34" charset="-120"/>
               </a:rPr>
-              <a:t>eGFR slope</a:t>
-            </a:r>
-            <a:endParaRPr lang="en-US" sz="1250" dirty="0"/>
-          </a:p>
-        </p:txBody>
-      </p:sp>
-      <p:sp>
-        <p:nvSpPr>
-          <p:cNvPr id="30" name="Shape 27"/>
-          <p:cNvSpPr/>
-          <p:nvPr/>
-        </p:nvSpPr>
-        <p:spPr>
-          <a:xfrm>
-            <a:off x="640080" y="4023360"/>
+              <a:t>0.78 (0.60–1.01)</a:t>
+            </a:r>
+            <a:endParaRPr lang="en-US" sz="1300" dirty="0"/>
+          </a:p>
+        </p:txBody>
+      </p:sp>
+      <p:sp>
+        <p:nvSpPr>
+          <p:cNvPr id="23" name="Shape 20"/>
+          <p:cNvSpPr/>
+          <p:nvPr/>
+        </p:nvSpPr>
+        <p:spPr>
+          <a:xfrm>
+            <a:off x="640080" y="4123944"/>
             <a:ext cx="10908792" cy="0"/>
           </a:xfrm>
           <a:prstGeom prst="line">
@@ -19243,14 +18949,14 @@
       </p:sp>
       <p:sp>
         <p:nvSpPr>
-          <p:cNvPr id="31" name="Text 28"/>
-          <p:cNvSpPr/>
-          <p:nvPr/>
-        </p:nvSpPr>
-        <p:spPr>
-          <a:xfrm>
-            <a:off x="749808" y="3474720"/>
-            <a:ext cx="2560320" cy="548640"/>
+          <p:cNvPr id="24" name="Text 21"/>
+          <p:cNvSpPr/>
+          <p:nvPr/>
+        </p:nvSpPr>
+        <p:spPr>
+          <a:xfrm>
+            <a:off x="749808" y="3611880"/>
+            <a:ext cx="2926080" cy="512064"/>
           </a:xfrm>
           <a:prstGeom prst="rect">
             <a:avLst/>
@@ -19269,7 +18975,7 @@
               <a:buNone/>
             </a:pPr>
             <a:r>
-              <a:rPr lang="en-US" sz="1250" b="1" dirty="0">
+              <a:rPr lang="en-US" sz="1300" b="1" dirty="0">
                 <a:solidFill>
                   <a:srgbClr val="0F3446"/>
                 </a:solidFill>
@@ -19277,22 +18983,22 @@
                 <a:ea typeface="Calibri" pitchFamily="34" charset="-122"/>
                 <a:cs typeface="Calibri" pitchFamily="34" charset="-120"/>
               </a:rPr>
-              <a:t>Key kidney result</a:t>
-            </a:r>
-            <a:endParaRPr lang="en-US" sz="1250" dirty="0"/>
-          </a:p>
-        </p:txBody>
-      </p:sp>
-      <p:sp>
-        <p:nvSpPr>
-          <p:cNvPr id="32" name="Text 29"/>
-          <p:cNvSpPr/>
-          <p:nvPr/>
-        </p:nvSpPr>
-        <p:spPr>
-          <a:xfrm>
-            <a:off x="3493008" y="3474720"/>
-            <a:ext cx="2011680" cy="548640"/>
+              <a:t>Composite kidney–CV</a:t>
+            </a:r>
+            <a:endParaRPr lang="en-US" sz="1300" dirty="0"/>
+          </a:p>
+        </p:txBody>
+      </p:sp>
+      <p:sp>
+        <p:nvSpPr>
+          <p:cNvPr id="25" name="Text 22"/>
+          <p:cNvSpPr/>
+          <p:nvPr/>
+        </p:nvSpPr>
+        <p:spPr>
+          <a:xfrm>
+            <a:off x="3858768" y="3611880"/>
+            <a:ext cx="3703320" cy="512064"/>
           </a:xfrm>
           <a:prstGeom prst="rect">
             <a:avLst/>
@@ -19311,7 +19017,7 @@
               <a:buNone/>
             </a:pPr>
             <a:r>
-              <a:rPr lang="en-US" sz="1250" dirty="0">
+              <a:rPr lang="en-US" sz="1300" dirty="0">
                 <a:solidFill>
                   <a:srgbClr val="13212A"/>
                 </a:solidFill>
@@ -19319,22 +19025,22 @@
                 <a:ea typeface="Calibri" pitchFamily="34" charset="-122"/>
                 <a:cs typeface="Calibri" pitchFamily="34" charset="-120"/>
               </a:rPr>
-              <a:t>HR 0.82</a:t>
-            </a:r>
-            <a:endParaRPr lang="en-US" sz="1250" dirty="0"/>
-          </a:p>
-        </p:txBody>
-      </p:sp>
-      <p:sp>
-        <p:nvSpPr>
-          <p:cNvPr id="33" name="Text 30"/>
-          <p:cNvSpPr/>
-          <p:nvPr/>
-        </p:nvSpPr>
-        <p:spPr>
-          <a:xfrm>
-            <a:off x="5687568" y="3474720"/>
-            <a:ext cx="2011680" cy="548640"/>
+              <a:t>not reported</a:t>
+            </a:r>
+            <a:endParaRPr lang="en-US" sz="1300" dirty="0"/>
+          </a:p>
+        </p:txBody>
+      </p:sp>
+      <p:sp>
+        <p:nvSpPr>
+          <p:cNvPr id="26" name="Text 23"/>
+          <p:cNvSpPr/>
+          <p:nvPr/>
+        </p:nvSpPr>
+        <p:spPr>
+          <a:xfrm>
+            <a:off x="7744968" y="3611880"/>
+            <a:ext cx="3730752" cy="512064"/>
           </a:xfrm>
           <a:prstGeom prst="rect">
             <a:avLst/>
@@ -19353,91 +19059,7 @@
               <a:buNone/>
             </a:pPr>
             <a:r>
-              <a:rPr lang="en-US" sz="1250" dirty="0">
-                <a:solidFill>
-                  <a:srgbClr val="13212A"/>
-                </a:solidFill>
-                <a:latin typeface="Calibri" pitchFamily="34" charset="0"/>
-                <a:ea typeface="Calibri" pitchFamily="34" charset="-122"/>
-                <a:cs typeface="Calibri" pitchFamily="34" charset="-120"/>
-              </a:rPr>
-              <a:t>HR 0.87 (CV)</a:t>
-            </a:r>
-            <a:endParaRPr lang="en-US" sz="1250" dirty="0"/>
-          </a:p>
-        </p:txBody>
-      </p:sp>
-      <p:sp>
-        <p:nvSpPr>
-          <p:cNvPr id="34" name="Text 31"/>
-          <p:cNvSpPr/>
-          <p:nvPr/>
-        </p:nvSpPr>
-        <p:spPr>
-          <a:xfrm>
-            <a:off x="7882128" y="3474720"/>
-            <a:ext cx="2011680" cy="548640"/>
-          </a:xfrm>
-          <a:prstGeom prst="rect">
-            <a:avLst/>
-          </a:prstGeom>
-          <a:noFill/>
-          <a:ln/>
-        </p:spPr>
-        <p:txBody>
-          <a:bodyPr wrap="square" lIns="0" tIns="0" rIns="0" bIns="0" rtlCol="0" anchor="ctr"/>
-          <a:lstStyle/>
-          <a:p>
-            <a:pPr algn="ctr" indent="0" marL="0">
-              <a:lnSpc>
-                <a:spcPct val="98000"/>
-              </a:lnSpc>
-              <a:buNone/>
-            </a:pPr>
-            <a:r>
-              <a:rPr lang="en-US" sz="1250" dirty="0">
-                <a:solidFill>
-                  <a:srgbClr val="13212A"/>
-                </a:solidFill>
-                <a:latin typeface="Calibri" pitchFamily="34" charset="0"/>
-                <a:ea typeface="Calibri" pitchFamily="34" charset="-122"/>
-                <a:cs typeface="Calibri" pitchFamily="34" charset="-120"/>
-              </a:rPr>
-              <a:t>Kidney 0.77</a:t>
-            </a:r>
-            <a:endParaRPr lang="en-US" sz="1250" dirty="0"/>
-          </a:p>
-        </p:txBody>
-      </p:sp>
-      <p:sp>
-        <p:nvSpPr>
-          <p:cNvPr id="35" name="Text 32"/>
-          <p:cNvSpPr/>
-          <p:nvPr/>
-        </p:nvSpPr>
-        <p:spPr>
-          <a:xfrm>
-            <a:off x="10076688" y="3474720"/>
-            <a:ext cx="1399032" cy="548640"/>
-          </a:xfrm>
-          <a:prstGeom prst="rect">
-            <a:avLst/>
-          </a:prstGeom>
-          <a:noFill/>
-          <a:ln/>
-        </p:spPr>
-        <p:txBody>
-          <a:bodyPr wrap="square" lIns="0" tIns="0" rIns="0" bIns="0" rtlCol="0" anchor="ctr"/>
-          <a:lstStyle/>
-          <a:p>
-            <a:pPr algn="ctr" indent="0" marL="0">
-              <a:lnSpc>
-                <a:spcPct val="98000"/>
-              </a:lnSpc>
-              <a:buNone/>
-            </a:pPr>
-            <a:r>
-              <a:rPr lang="en-US" sz="1250" b="1" dirty="0">
+              <a:rPr lang="en-US" sz="1300" b="1" dirty="0">
                 <a:solidFill>
                   <a:srgbClr val="0E8385"/>
                 </a:solidFill>
@@ -19445,21 +19067,21 @@
                 <a:ea typeface="Calibri" pitchFamily="34" charset="-122"/>
                 <a:cs typeface="Calibri" pitchFamily="34" charset="-120"/>
               </a:rPr>
-              <a:t>Slope +0.7; comp. 0.77</a:t>
-            </a:r>
-            <a:endParaRPr lang="en-US" sz="1250" dirty="0"/>
-          </a:p>
-        </p:txBody>
-      </p:sp>
-      <p:sp>
-        <p:nvSpPr>
-          <p:cNvPr id="36" name="Shape 33"/>
-          <p:cNvSpPr/>
-          <p:nvPr/>
-        </p:nvSpPr>
-        <p:spPr>
-          <a:xfrm>
-            <a:off x="640080" y="4572000"/>
+              <a:t>0.77 (0.60–0.99)</a:t>
+            </a:r>
+            <a:endParaRPr lang="en-US" sz="1300" dirty="0"/>
+          </a:p>
+        </p:txBody>
+      </p:sp>
+      <p:sp>
+        <p:nvSpPr>
+          <p:cNvPr id="27" name="Shape 24"/>
+          <p:cNvSpPr/>
+          <p:nvPr/>
+        </p:nvSpPr>
+        <p:spPr>
+          <a:xfrm>
+            <a:off x="640080" y="4636008"/>
             <a:ext cx="10908792" cy="0"/>
           </a:xfrm>
           <a:prstGeom prst="line">
@@ -19476,14 +19098,14 @@
       </p:sp>
       <p:sp>
         <p:nvSpPr>
-          <p:cNvPr id="37" name="Text 34"/>
-          <p:cNvSpPr/>
-          <p:nvPr/>
-        </p:nvSpPr>
-        <p:spPr>
-          <a:xfrm>
-            <a:off x="749808" y="4023360"/>
-            <a:ext cx="2560320" cy="548640"/>
+          <p:cNvPr id="28" name="Text 25"/>
+          <p:cNvSpPr/>
+          <p:nvPr/>
+        </p:nvSpPr>
+        <p:spPr>
+          <a:xfrm>
+            <a:off x="749808" y="4123944"/>
+            <a:ext cx="2926080" cy="512064"/>
           </a:xfrm>
           <a:prstGeom prst="rect">
             <a:avLst/>
@@ -19502,7 +19124,7 @@
               <a:buNone/>
             </a:pPr>
             <a:r>
-              <a:rPr lang="en-US" sz="1250" b="1" dirty="0">
+              <a:rPr lang="en-US" sz="1300" b="1" dirty="0">
                 <a:solidFill>
                   <a:srgbClr val="0F3446"/>
                 </a:solidFill>
@@ -19510,22 +19132,22 @@
                 <a:ea typeface="Calibri" pitchFamily="34" charset="-122"/>
                 <a:cs typeface="Calibri" pitchFamily="34" charset="-120"/>
               </a:rPr>
-              <a:t>eGFR slope Δ / yr</a:t>
-            </a:r>
-            <a:endParaRPr lang="en-US" sz="1250" dirty="0"/>
-          </a:p>
-        </p:txBody>
-      </p:sp>
-      <p:sp>
-        <p:nvSpPr>
-          <p:cNvPr id="38" name="Text 35"/>
-          <p:cNvSpPr/>
-          <p:nvPr/>
-        </p:nvSpPr>
-        <p:spPr>
-          <a:xfrm>
-            <a:off x="3493008" y="4023360"/>
-            <a:ext cx="2011680" cy="548640"/>
+              <a:t>CV composite</a:t>
+            </a:r>
+            <a:endParaRPr lang="en-US" sz="1300" dirty="0"/>
+          </a:p>
+        </p:txBody>
+      </p:sp>
+      <p:sp>
+        <p:nvSpPr>
+          <p:cNvPr id="29" name="Text 26"/>
+          <p:cNvSpPr/>
+          <p:nvPr/>
+        </p:nvSpPr>
+        <p:spPr>
+          <a:xfrm>
+            <a:off x="3858768" y="4123944"/>
+            <a:ext cx="3703320" cy="512064"/>
           </a:xfrm>
           <a:prstGeom prst="rect">
             <a:avLst/>
@@ -19544,7 +19166,7 @@
               <a:buNone/>
             </a:pPr>
             <a:r>
-              <a:rPr lang="en-US" sz="1250" dirty="0">
+              <a:rPr lang="en-US" sz="1300" dirty="0">
                 <a:solidFill>
                   <a:srgbClr val="13212A"/>
                 </a:solidFill>
@@ -19552,22 +19174,22 @@
                 <a:ea typeface="Calibri" pitchFamily="34" charset="-122"/>
                 <a:cs typeface="Calibri" pitchFamily="34" charset="-120"/>
               </a:rPr>
-              <a:t>~0.7</a:t>
-            </a:r>
-            <a:endParaRPr lang="en-US" sz="1250" dirty="0"/>
-          </a:p>
-        </p:txBody>
-      </p:sp>
-      <p:sp>
-        <p:nvSpPr>
-          <p:cNvPr id="39" name="Text 36"/>
-          <p:cNvSpPr/>
-          <p:nvPr/>
-        </p:nvSpPr>
-        <p:spPr>
-          <a:xfrm>
-            <a:off x="5687568" y="4023360"/>
-            <a:ext cx="2011680" cy="548640"/>
+              <a:t>0.86 (0.78–0.95)</a:t>
+            </a:r>
+            <a:endParaRPr lang="en-US" sz="1300" dirty="0"/>
+          </a:p>
+        </p:txBody>
+      </p:sp>
+      <p:sp>
+        <p:nvSpPr>
+          <p:cNvPr id="30" name="Text 27"/>
+          <p:cNvSpPr/>
+          <p:nvPr/>
+        </p:nvSpPr>
+        <p:spPr>
+          <a:xfrm>
+            <a:off x="7744968" y="4123944"/>
+            <a:ext cx="3730752" cy="512064"/>
           </a:xfrm>
           <a:prstGeom prst="rect">
             <a:avLst/>
@@ -19586,30 +19208,95 @@
               <a:buNone/>
             </a:pPr>
             <a:r>
-              <a:rPr lang="en-US" sz="1250" dirty="0">
-                <a:solidFill>
-                  <a:srgbClr val="13212A"/>
-                </a:solidFill>
-                <a:latin typeface="Calibri" pitchFamily="34" charset="0"/>
-                <a:ea typeface="Calibri" pitchFamily="34" charset="-122"/>
-                <a:cs typeface="Calibri" pitchFamily="34" charset="-120"/>
-              </a:rPr>
-              <a:t>n/r</a:t>
-            </a:r>
-            <a:endParaRPr lang="en-US" sz="1250" dirty="0"/>
-          </a:p>
-        </p:txBody>
-      </p:sp>
-      <p:sp>
-        <p:nvSpPr>
-          <p:cNvPr id="40" name="Text 37"/>
-          <p:cNvSpPr/>
-          <p:nvPr/>
-        </p:nvSpPr>
-        <p:spPr>
-          <a:xfrm>
-            <a:off x="7882128" y="4023360"/>
-            <a:ext cx="2011680" cy="548640"/>
+              <a:rPr lang="en-US" sz="1300" b="1" dirty="0">
+                <a:solidFill>
+                  <a:srgbClr val="0E8385"/>
+                </a:solidFill>
+                <a:latin typeface="Calibri" pitchFamily="34" charset="0"/>
+                <a:ea typeface="Calibri" pitchFamily="34" charset="-122"/>
+                <a:cs typeface="Calibri" pitchFamily="34" charset="-120"/>
+              </a:rPr>
+              <a:t>0.60 (0.27–1.33)</a:t>
+            </a:r>
+            <a:endParaRPr lang="en-US" sz="1300" dirty="0"/>
+          </a:p>
+        </p:txBody>
+      </p:sp>
+      <p:sp>
+        <p:nvSpPr>
+          <p:cNvPr id="31" name="Shape 28"/>
+          <p:cNvSpPr/>
+          <p:nvPr/>
+        </p:nvSpPr>
+        <p:spPr>
+          <a:xfrm>
+            <a:off x="640080" y="5148072"/>
+            <a:ext cx="10908792" cy="0"/>
+          </a:xfrm>
+          <a:prstGeom prst="line">
+            <a:avLst/>
+          </a:prstGeom>
+          <a:noFill/>
+          <a:ln w="9525">
+            <a:solidFill>
+              <a:srgbClr val="CFDDDD"/>
+            </a:solidFill>
+            <a:prstDash val="solid"/>
+          </a:ln>
+        </p:spPr>
+      </p:sp>
+      <p:sp>
+        <p:nvSpPr>
+          <p:cNvPr id="32" name="Text 29"/>
+          <p:cNvSpPr/>
+          <p:nvPr/>
+        </p:nvSpPr>
+        <p:spPr>
+          <a:xfrm>
+            <a:off x="749808" y="4636008"/>
+            <a:ext cx="2926080" cy="512064"/>
+          </a:xfrm>
+          <a:prstGeom prst="rect">
+            <a:avLst/>
+          </a:prstGeom>
+          <a:noFill/>
+          <a:ln/>
+        </p:spPr>
+        <p:txBody>
+          <a:bodyPr wrap="square" lIns="0" tIns="0" rIns="0" bIns="0" rtlCol="0" anchor="ctr"/>
+          <a:lstStyle/>
+          <a:p>
+            <a:pPr algn="l" indent="0" marL="0">
+              <a:lnSpc>
+                <a:spcPct val="98000"/>
+              </a:lnSpc>
+              <a:buNone/>
+            </a:pPr>
+            <a:r>
+              <a:rPr lang="en-US" sz="1300" b="1" dirty="0">
+                <a:solidFill>
+                  <a:srgbClr val="0F3446"/>
+                </a:solidFill>
+                <a:latin typeface="Calibri" pitchFamily="34" charset="0"/>
+                <a:ea typeface="Calibri" pitchFamily="34" charset="-122"/>
+                <a:cs typeface="Calibri" pitchFamily="34" charset="-120"/>
+              </a:rPr>
+              <a:t>eGFR slope Δ / yr</a:t>
+            </a:r>
+            <a:endParaRPr lang="en-US" sz="1300" dirty="0"/>
+          </a:p>
+        </p:txBody>
+      </p:sp>
+      <p:sp>
+        <p:nvSpPr>
+          <p:cNvPr id="33" name="Text 30"/>
+          <p:cNvSpPr/>
+          <p:nvPr/>
+        </p:nvSpPr>
+        <p:spPr>
+          <a:xfrm>
+            <a:off x="3858768" y="4636008"/>
+            <a:ext cx="3703320" cy="512064"/>
           </a:xfrm>
           <a:prstGeom prst="rect">
             <a:avLst/>
@@ -19628,7 +19315,7 @@
               <a:buNone/>
             </a:pPr>
             <a:r>
-              <a:rPr lang="en-US" sz="1250" dirty="0">
+              <a:rPr lang="en-US" sz="1300" dirty="0">
                 <a:solidFill>
                   <a:srgbClr val="13212A"/>
                 </a:solidFill>
@@ -19636,22 +19323,22 @@
                 <a:ea typeface="Calibri" pitchFamily="34" charset="-122"/>
                 <a:cs typeface="Calibri" pitchFamily="34" charset="-120"/>
               </a:rPr>
-              <a:t>n/r</a:t>
-            </a:r>
-            <a:endParaRPr lang="en-US" sz="1250" dirty="0"/>
-          </a:p>
-        </p:txBody>
-      </p:sp>
-      <p:sp>
-        <p:nvSpPr>
-          <p:cNvPr id="41" name="Text 38"/>
-          <p:cNvSpPr/>
-          <p:nvPr/>
-        </p:nvSpPr>
-        <p:spPr>
-          <a:xfrm>
-            <a:off x="10076688" y="4023360"/>
-            <a:ext cx="1399032" cy="548640"/>
+              <a:t>not reported</a:t>
+            </a:r>
+            <a:endParaRPr lang="en-US" sz="1300" dirty="0"/>
+          </a:p>
+        </p:txBody>
+      </p:sp>
+      <p:sp>
+        <p:nvSpPr>
+          <p:cNvPr id="34" name="Text 31"/>
+          <p:cNvSpPr/>
+          <p:nvPr/>
+        </p:nvSpPr>
+        <p:spPr>
+          <a:xfrm>
+            <a:off x="7744968" y="4636008"/>
+            <a:ext cx="3730752" cy="512064"/>
           </a:xfrm>
           <a:prstGeom prst="rect">
             <a:avLst/>
@@ -19670,7 +19357,7 @@
               <a:buNone/>
             </a:pPr>
             <a:r>
-              <a:rPr lang="en-US" sz="1250" b="1" dirty="0">
+              <a:rPr lang="en-US" sz="1300" b="1" dirty="0">
                 <a:solidFill>
                   <a:srgbClr val="0E8385"/>
                 </a:solidFill>
@@ -19680,20 +19367,20 @@
               </a:rPr>
               <a:t>0.7 (chronic 1.2)</a:t>
             </a:r>
-            <a:endParaRPr lang="en-US" sz="1250" dirty="0"/>
-          </a:p>
-        </p:txBody>
-      </p:sp>
-      <p:sp>
-        <p:nvSpPr>
-          <p:cNvPr id="42" name="Text 39"/>
-          <p:cNvSpPr/>
-          <p:nvPr/>
-        </p:nvSpPr>
-        <p:spPr>
-          <a:xfrm>
-            <a:off x="640080" y="4800600"/>
-            <a:ext cx="10908792" cy="822960"/>
+            <a:endParaRPr lang="en-US" sz="1300" dirty="0"/>
+          </a:p>
+        </p:txBody>
+      </p:sp>
+      <p:sp>
+        <p:nvSpPr>
+          <p:cNvPr id="35" name="Text 32"/>
+          <p:cNvSpPr/>
+          <p:nvPr/>
+        </p:nvSpPr>
+        <p:spPr>
+          <a:xfrm>
+            <a:off x="640080" y="5376672"/>
+            <a:ext cx="10908792" cy="640080"/>
           </a:xfrm>
           <a:prstGeom prst="rect">
             <a:avLst/>
@@ -19712,7 +19399,7 @@
               <a:buNone/>
             </a:pPr>
             <a:r>
-              <a:rPr lang="en-US" sz="1500" dirty="0">
+              <a:rPr lang="en-US" sz="1400" dirty="0">
                 <a:solidFill>
                   <a:srgbClr val="13212A"/>
                 </a:solidFill>
@@ -19720,15 +19407,15 @@
                 <a:ea typeface="Calibri" pitchFamily="34" charset="-122"/>
                 <a:cs typeface="Calibri" pitchFamily="34" charset="-120"/>
               </a:rPr>
-              <a:t>The ~0.7/yr slope effect finerenone produced in diabetic CKD reproduces almost exactly in non-diabetic CKD, and the chronic slope of 1.2 sits right alongside RAS and SGLT2 inhibitors (0.5–1.0). Same drug, same mechanism, in a population never before tested.</a:t>
-            </a:r>
-            <a:endParaRPr lang="en-US" sz="1500" dirty="0"/>
-          </a:p>
-        </p:txBody>
-      </p:sp>
-      <p:sp>
-        <p:nvSpPr>
-          <p:cNvPr id="43" name="Text 40"/>
+              <a:t>Same drug, same ≥57% kidney definition, a population never before tested. FIND-CKD was not powered for cardiovascular events, so its CV estimate is imprecise.</a:t>
+            </a:r>
+            <a:endParaRPr lang="en-US" sz="1400" dirty="0"/>
+          </a:p>
+        </p:txBody>
+      </p:sp>
+      <p:sp>
+        <p:nvSpPr>
+          <p:cNvPr id="36" name="Text 33"/>
           <p:cNvSpPr/>
           <p:nvPr/>
         </p:nvSpPr>
@@ -19759,7 +19446,7 @@
                 <a:ea typeface="Calibri" pitchFamily="34" charset="-122"/>
                 <a:cs typeface="Calibri" pitchFamily="34" charset="-120"/>
               </a:rPr>
-              <a:t>Diabetes-trial figures from their primary publications, shown for context (no head-to-head).</a:t>
+              <a:t>FIDELITY: Agarwal et al., Eur Heart J 2022.  FIND-CKD: Heerspink et al., N Engl J Med 2026.</a:t>
             </a:r>
             <a:endParaRPr lang="en-US" sz="850" dirty="0"/>
           </a:p>
@@ -19767,7 +19454,7 @@
       </p:sp>
       <p:sp>
         <p:nvSpPr>
-          <p:cNvPr id="44" name="Text 41"/>
+          <p:cNvPr id="37" name="Text 34"/>
           <p:cNvSpPr/>
           <p:nvPr/>
         </p:nvSpPr>
@@ -19820,7 +19507,7 @@
       </p:sp>
       <p:sp>
         <p:nvSpPr>
-          <p:cNvPr id="45" name="Text 42"/>
+          <p:cNvPr id="38" name="Text 35"/>
           <p:cNvSpPr/>
           <p:nvPr/>
         </p:nvSpPr>
@@ -21488,7 +21175,7 @@
                 <a:ea typeface="Calibri" pitchFamily="34" charset="-122"/>
                 <a:cs typeface="Calibri" pitchFamily="34" charset="-120"/>
               </a:rPr>
-              <a:t>Review why finerenone was tested in CKD without diabetes, and how FIND-CKD relates to FIDELIO, FIGARO and FIDELITY.</a:t>
+              <a:t>Review why finerenone was tested in CKD without diabetes, and how FIND-CKD relates to the finerenone evidence in diabetic CKD (the FIDELITY analysis).</a:t>
             </a:r>
             <a:endParaRPr lang="en-US" sz="1550" dirty="0"/>
           </a:p>
@@ -23238,7 +22925,7 @@
                 <a:ea typeface="Calibri" pitchFamily="34" charset="-122"/>
                 <a:cs typeface="Calibri" pitchFamily="34" charset="-120"/>
               </a:rPr>
-              <a:t>In BARACK-D, over half of CKD patients stopped spironolactone within 6 months on safety grounds, mostly AKI and hyperkalemia.</a:t>
+              <a:t>In BARACK-D, the steroidal MRA spironolactone did not reduce cardiovascular events in stage 3b CKD (HR 1.05), and about two-thirds of patients stopped it within 6 months, mainly for falling eGFR and hyperkalemia.</a:t>
             </a:r>
             <a:endParaRPr lang="en-US" sz="1450" dirty="0"/>
           </a:p>
@@ -23506,7 +23193,7 @@
                 <a:ea typeface="Arial" pitchFamily="34" charset="-122"/>
                 <a:cs typeface="Arial" pitchFamily="34" charset="-120"/>
               </a:rPr>
-              <a:t>What we already knew: finerenone in diabetes</a:t>
+              <a:t>What we knew: finerenone in diabetic CKD</a:t>
             </a:r>
             <a:endParaRPr lang="en-US" sz="2400" dirty="0"/>
           </a:p>
@@ -23545,7 +23232,7 @@
                 <a:ea typeface="Calibri" pitchFamily="34" charset="-122"/>
                 <a:cs typeface="Calibri" pitchFamily="34" charset="-120"/>
               </a:rPr>
-              <a:t>Every phase 3 finerenone kidney trial before FIND-CKD enrolled only patients with type 2 diabetes.</a:t>
+              <a:t>FIDELITY pooled the FIDELIO-DKD and FIGARO-DKD trials: 13,026 patients with type 2 diabetes and CKD.</a:t>
             </a:r>
             <a:endParaRPr lang="en-US" sz="1350" dirty="0"/>
           </a:p>
@@ -23560,7 +23247,7 @@
         <p:spPr>
           <a:xfrm>
             <a:off x="640080" y="1554480"/>
-            <a:ext cx="11055096" cy="457200"/>
+            <a:ext cx="10908792" cy="457200"/>
           </a:xfrm>
           <a:prstGeom prst="rect">
             <a:avLst/>
@@ -23580,7 +23267,7 @@
         <p:spPr>
           <a:xfrm>
             <a:off x="749808" y="1554480"/>
-            <a:ext cx="2468880" cy="457200"/>
+            <a:ext cx="4572000" cy="457200"/>
           </a:xfrm>
           <a:prstGeom prst="rect">
             <a:avLst/>
@@ -23607,7 +23294,7 @@
                 <a:ea typeface="Calibri" pitchFamily="34" charset="-122"/>
                 <a:cs typeface="Calibri" pitchFamily="34" charset="-120"/>
               </a:rPr>
-              <a:t>Trial (year)</a:t>
+              <a:t>Outcome (FIDELITY pooled analysis)</a:t>
             </a:r>
             <a:endParaRPr lang="en-US" sz="1300" dirty="0"/>
           </a:p>
@@ -23621,20 +23308,20 @@
         </p:nvSpPr>
         <p:spPr>
           <a:xfrm>
-            <a:off x="3401568" y="1554480"/>
-            <a:ext cx="3017520" cy="457200"/>
-          </a:xfrm>
-          <a:prstGeom prst="rect">
-            <a:avLst/>
-          </a:prstGeom>
-          <a:noFill/>
-          <a:ln/>
-        </p:spPr>
-        <p:txBody>
-          <a:bodyPr wrap="square" lIns="0" tIns="0" rIns="0" bIns="0" rtlCol="0" anchor="ctr"/>
-          <a:lstStyle/>
-          <a:p>
-            <a:pPr algn="l" indent="0" marL="0">
+            <a:off x="5504688" y="1554480"/>
+            <a:ext cx="2468880" cy="457200"/>
+          </a:xfrm>
+          <a:prstGeom prst="rect">
+            <a:avLst/>
+          </a:prstGeom>
+          <a:noFill/>
+          <a:ln/>
+        </p:spPr>
+        <p:txBody>
+          <a:bodyPr wrap="square" lIns="0" tIns="0" rIns="0" bIns="0" rtlCol="0" anchor="ctr"/>
+          <a:lstStyle/>
+          <a:p>
+            <a:pPr algn="ctr" indent="0" marL="0">
               <a:lnSpc>
                 <a:spcPct val="98000"/>
               </a:lnSpc>
@@ -23649,7 +23336,7 @@
                 <a:ea typeface="Calibri" pitchFamily="34" charset="-122"/>
                 <a:cs typeface="Calibri" pitchFamily="34" charset="-120"/>
               </a:rPr>
-              <a:t>Population</a:t>
+              <a:t>Fin vs plac</a:t>
             </a:r>
             <a:endParaRPr lang="en-US" sz="1300" dirty="0"/>
           </a:p>
@@ -23663,20 +23350,20 @@
         </p:nvSpPr>
         <p:spPr>
           <a:xfrm>
-            <a:off x="6601968" y="1554480"/>
-            <a:ext cx="2926080" cy="457200"/>
-          </a:xfrm>
-          <a:prstGeom prst="rect">
-            <a:avLst/>
-          </a:prstGeom>
-          <a:noFill/>
-          <a:ln/>
-        </p:spPr>
-        <p:txBody>
-          <a:bodyPr wrap="square" lIns="0" tIns="0" rIns="0" bIns="0" rtlCol="0" anchor="ctr"/>
-          <a:lstStyle/>
-          <a:p>
-            <a:pPr algn="l" indent="0" marL="0">
+            <a:off x="8156448" y="1554480"/>
+            <a:ext cx="2011680" cy="457200"/>
+          </a:xfrm>
+          <a:prstGeom prst="rect">
+            <a:avLst/>
+          </a:prstGeom>
+          <a:noFill/>
+          <a:ln/>
+        </p:spPr>
+        <p:txBody>
+          <a:bodyPr wrap="square" lIns="0" tIns="0" rIns="0" bIns="0" rtlCol="0" anchor="ctr"/>
+          <a:lstStyle/>
+          <a:p>
+            <a:pPr algn="ctr" indent="0" marL="0">
               <a:lnSpc>
                 <a:spcPct val="98000"/>
               </a:lnSpc>
@@ -23691,7 +23378,7 @@
                 <a:ea typeface="Calibri" pitchFamily="34" charset="-122"/>
                 <a:cs typeface="Calibri" pitchFamily="34" charset="-120"/>
               </a:rPr>
-              <a:t>Primary outcome</a:t>
+              <a:t>HR (95% CI)</a:t>
             </a:r>
             <a:endParaRPr lang="en-US" sz="1300" dirty="0"/>
           </a:p>
@@ -23705,20 +23392,20 @@
         </p:nvSpPr>
         <p:spPr>
           <a:xfrm>
-            <a:off x="9710928" y="1554480"/>
-            <a:ext cx="1911096" cy="457200"/>
-          </a:xfrm>
-          <a:prstGeom prst="rect">
-            <a:avLst/>
-          </a:prstGeom>
-          <a:noFill/>
-          <a:ln/>
-        </p:spPr>
-        <p:txBody>
-          <a:bodyPr wrap="square" lIns="0" tIns="0" rIns="0" bIns="0" rtlCol="0" anchor="ctr"/>
-          <a:lstStyle/>
-          <a:p>
-            <a:pPr algn="l" indent="0" marL="0">
+            <a:off x="10351008" y="1554480"/>
+            <a:ext cx="1124712" cy="457200"/>
+          </a:xfrm>
+          <a:prstGeom prst="rect">
+            <a:avLst/>
+          </a:prstGeom>
+          <a:noFill/>
+          <a:ln/>
+        </p:spPr>
+        <p:txBody>
+          <a:bodyPr wrap="square" lIns="0" tIns="0" rIns="0" bIns="0" rtlCol="0" anchor="ctr"/>
+          <a:lstStyle/>
+          <a:p>
+            <a:pPr algn="ctr" indent="0" marL="0">
               <a:lnSpc>
                 <a:spcPct val="98000"/>
               </a:lnSpc>
@@ -23733,7 +23420,7 @@
                 <a:ea typeface="Calibri" pitchFamily="34" charset="-122"/>
                 <a:cs typeface="Calibri" pitchFamily="34" charset="-120"/>
               </a:rPr>
-              <a:t>HR (95% CI)</a:t>
+              <a:t>P</a:t>
             </a:r>
             <a:endParaRPr lang="en-US" sz="1300" dirty="0"/>
           </a:p>
@@ -23747,8 +23434,8 @@
         </p:nvSpPr>
         <p:spPr>
           <a:xfrm>
-            <a:off x="640080" y="2761488"/>
-            <a:ext cx="11055096" cy="0"/>
+            <a:off x="640080" y="3017520"/>
+            <a:ext cx="10908792" cy="0"/>
           </a:xfrm>
           <a:prstGeom prst="line">
             <a:avLst/>
@@ -23771,7 +23458,7 @@
         <p:spPr>
           <a:xfrm>
             <a:off x="749808" y="2011680"/>
-            <a:ext cx="2468880" cy="749808"/>
+            <a:ext cx="4572000" cy="1005840"/>
           </a:xfrm>
           <a:prstGeom prst="rect">
             <a:avLst/>
@@ -23790,7 +23477,7 @@
               <a:buNone/>
             </a:pPr>
             <a:r>
-              <a:rPr lang="en-US" sz="1300" b="1" dirty="0">
+              <a:rPr lang="en-US" sz="1250" b="1" dirty="0">
                 <a:solidFill>
                   <a:srgbClr val="0F3446"/>
                 </a:solidFill>
@@ -23798,9 +23485,9 @@
                 <a:ea typeface="Calibri" pitchFamily="34" charset="-122"/>
                 <a:cs typeface="Calibri" pitchFamily="34" charset="-120"/>
               </a:rPr>
-              <a:t>FIDELIO-DKD (2020)</a:t>
-            </a:r>
-            <a:endParaRPr lang="en-US" sz="1300" dirty="0"/>
+              <a:t>Cardiovascular composite (CV death, MI, stroke, or HF hospitalization)</a:t>
+            </a:r>
+            <a:endParaRPr lang="en-US" sz="1250" dirty="0"/>
           </a:p>
         </p:txBody>
       </p:sp>
@@ -23812,27 +23499,27 @@
         </p:nvSpPr>
         <p:spPr>
           <a:xfrm>
-            <a:off x="3401568" y="2011680"/>
-            <a:ext cx="3017520" cy="749808"/>
-          </a:xfrm>
-          <a:prstGeom prst="rect">
-            <a:avLst/>
-          </a:prstGeom>
-          <a:noFill/>
-          <a:ln/>
-        </p:spPr>
-        <p:txBody>
-          <a:bodyPr wrap="square" lIns="0" tIns="0" rIns="0" bIns="0" rtlCol="0" anchor="ctr"/>
-          <a:lstStyle/>
-          <a:p>
-            <a:pPr algn="l" indent="0" marL="0">
+            <a:off x="5504688" y="2011680"/>
+            <a:ext cx="2468880" cy="1005840"/>
+          </a:xfrm>
+          <a:prstGeom prst="rect">
+            <a:avLst/>
+          </a:prstGeom>
+          <a:noFill/>
+          <a:ln/>
+        </p:spPr>
+        <p:txBody>
+          <a:bodyPr wrap="square" lIns="0" tIns="0" rIns="0" bIns="0" rtlCol="0" anchor="ctr"/>
+          <a:lstStyle/>
+          <a:p>
+            <a:pPr algn="ctr" indent="0" marL="0">
               <a:lnSpc>
                 <a:spcPct val="98000"/>
               </a:lnSpc>
               <a:buNone/>
             </a:pPr>
             <a:r>
-              <a:rPr lang="en-US" sz="1300" dirty="0">
+              <a:rPr lang="en-US" sz="1250" dirty="0">
                 <a:solidFill>
                   <a:srgbClr val="13212A"/>
                 </a:solidFill>
@@ -23840,9 +23527,9 @@
                 <a:ea typeface="Calibri" pitchFamily="34" charset="-122"/>
                 <a:cs typeface="Calibri" pitchFamily="34" charset="-120"/>
               </a:rPr>
-              <a:t>T2D + CKD, mostly UACR &gt;300; N=5674</a:t>
-            </a:r>
-            <a:endParaRPr lang="en-US" sz="1300" dirty="0"/>
+              <a:t>12.7% vs 14.4%</a:t>
+            </a:r>
+            <a:endParaRPr lang="en-US" sz="1250" dirty="0"/>
           </a:p>
         </p:txBody>
       </p:sp>
@@ -23854,37 +23541,37 @@
         </p:nvSpPr>
         <p:spPr>
           <a:xfrm>
-            <a:off x="6601968" y="2011680"/>
-            <a:ext cx="2926080" cy="749808"/>
-          </a:xfrm>
-          <a:prstGeom prst="rect">
-            <a:avLst/>
-          </a:prstGeom>
-          <a:noFill/>
-          <a:ln/>
-        </p:spPr>
-        <p:txBody>
-          <a:bodyPr wrap="square" lIns="0" tIns="0" rIns="0" bIns="0" rtlCol="0" anchor="ctr"/>
-          <a:lstStyle/>
-          <a:p>
-            <a:pPr algn="l" indent="0" marL="0">
+            <a:off x="8156448" y="2011680"/>
+            <a:ext cx="2011680" cy="1005840"/>
+          </a:xfrm>
+          <a:prstGeom prst="rect">
+            <a:avLst/>
+          </a:prstGeom>
+          <a:noFill/>
+          <a:ln/>
+        </p:spPr>
+        <p:txBody>
+          <a:bodyPr wrap="square" lIns="0" tIns="0" rIns="0" bIns="0" rtlCol="0" anchor="ctr"/>
+          <a:lstStyle/>
+          <a:p>
+            <a:pPr algn="ctr" indent="0" marL="0">
               <a:lnSpc>
                 <a:spcPct val="98000"/>
               </a:lnSpc>
               <a:buNone/>
             </a:pPr>
             <a:r>
-              <a:rPr lang="en-US" sz="1300" dirty="0">
-                <a:solidFill>
-                  <a:srgbClr val="13212A"/>
-                </a:solidFill>
-                <a:latin typeface="Calibri" pitchFamily="34" charset="0"/>
-                <a:ea typeface="Calibri" pitchFamily="34" charset="-122"/>
-                <a:cs typeface="Calibri" pitchFamily="34" charset="-120"/>
-              </a:rPr>
-              <a:t>Kidney: kidney failure, sustained ≥40% eGFR decline, or renal death</a:t>
-            </a:r>
-            <a:endParaRPr lang="en-US" sz="1300" dirty="0"/>
+              <a:rPr lang="en-US" sz="1250" b="1" dirty="0">
+                <a:solidFill>
+                  <a:srgbClr val="0E8385"/>
+                </a:solidFill>
+                <a:latin typeface="Calibri" pitchFamily="34" charset="0"/>
+                <a:ea typeface="Calibri" pitchFamily="34" charset="-122"/>
+                <a:cs typeface="Calibri" pitchFamily="34" charset="-120"/>
+              </a:rPr>
+              <a:t>0.86 (0.78–0.95)</a:t>
+            </a:r>
+            <a:endParaRPr lang="en-US" sz="1250" dirty="0"/>
           </a:p>
         </p:txBody>
       </p:sp>
@@ -23896,37 +23583,37 @@
         </p:nvSpPr>
         <p:spPr>
           <a:xfrm>
-            <a:off x="9710928" y="2011680"/>
-            <a:ext cx="1911096" cy="749808"/>
-          </a:xfrm>
-          <a:prstGeom prst="rect">
-            <a:avLst/>
-          </a:prstGeom>
-          <a:noFill/>
-          <a:ln/>
-        </p:spPr>
-        <p:txBody>
-          <a:bodyPr wrap="square" lIns="0" tIns="0" rIns="0" bIns="0" rtlCol="0" anchor="ctr"/>
-          <a:lstStyle/>
-          <a:p>
-            <a:pPr algn="l" indent="0" marL="0">
+            <a:off x="10351008" y="2011680"/>
+            <a:ext cx="1124712" cy="1005840"/>
+          </a:xfrm>
+          <a:prstGeom prst="rect">
+            <a:avLst/>
+          </a:prstGeom>
+          <a:noFill/>
+          <a:ln/>
+        </p:spPr>
+        <p:txBody>
+          <a:bodyPr wrap="square" lIns="0" tIns="0" rIns="0" bIns="0" rtlCol="0" anchor="ctr"/>
+          <a:lstStyle/>
+          <a:p>
+            <a:pPr algn="ctr" indent="0" marL="0">
               <a:lnSpc>
                 <a:spcPct val="98000"/>
               </a:lnSpc>
               <a:buNone/>
             </a:pPr>
             <a:r>
-              <a:rPr lang="en-US" sz="1300" b="1" dirty="0">
-                <a:solidFill>
-                  <a:srgbClr val="0E8385"/>
-                </a:solidFill>
-                <a:latin typeface="Calibri" pitchFamily="34" charset="0"/>
-                <a:ea typeface="Calibri" pitchFamily="34" charset="-122"/>
-                <a:cs typeface="Calibri" pitchFamily="34" charset="-120"/>
-              </a:rPr>
-              <a:t>0.82 (0.73–0.93)</a:t>
-            </a:r>
-            <a:endParaRPr lang="en-US" sz="1300" dirty="0"/>
+              <a:rPr lang="en-US" sz="1250" dirty="0">
+                <a:solidFill>
+                  <a:srgbClr val="13212A"/>
+                </a:solidFill>
+                <a:latin typeface="Calibri" pitchFamily="34" charset="0"/>
+                <a:ea typeface="Calibri" pitchFamily="34" charset="-122"/>
+                <a:cs typeface="Calibri" pitchFamily="34" charset="-120"/>
+              </a:rPr>
+              <a:t>0.0018</a:t>
+            </a:r>
+            <a:endParaRPr lang="en-US" sz="1250" dirty="0"/>
           </a:p>
         </p:txBody>
       </p:sp>
@@ -23938,8 +23625,8 @@
         </p:nvSpPr>
         <p:spPr>
           <a:xfrm>
-            <a:off x="640080" y="3511296"/>
-            <a:ext cx="11055096" cy="0"/>
+            <a:off x="640080" y="4023360"/>
+            <a:ext cx="10908792" cy="0"/>
           </a:xfrm>
           <a:prstGeom prst="line">
             <a:avLst/>
@@ -23961,8 +23648,8 @@
         </p:nvSpPr>
         <p:spPr>
           <a:xfrm>
-            <a:off x="749808" y="2761488"/>
-            <a:ext cx="2468880" cy="749808"/>
+            <a:off x="749808" y="3017520"/>
+            <a:ext cx="4572000" cy="1005840"/>
           </a:xfrm>
           <a:prstGeom prst="rect">
             <a:avLst/>
@@ -23981,7 +23668,7 @@
               <a:buNone/>
             </a:pPr>
             <a:r>
-              <a:rPr lang="en-US" sz="1300" b="1" dirty="0">
+              <a:rPr lang="en-US" sz="1250" b="1" dirty="0">
                 <a:solidFill>
                   <a:srgbClr val="0F3446"/>
                 </a:solidFill>
@@ -23989,9 +23676,9 @@
                 <a:ea typeface="Calibri" pitchFamily="34" charset="-122"/>
                 <a:cs typeface="Calibri" pitchFamily="34" charset="-120"/>
               </a:rPr>
-              <a:t>FIGARO-DKD (2021)</a:t>
-            </a:r>
-            <a:endParaRPr lang="en-US" sz="1300" dirty="0"/>
+              <a:t>Kidney composite (kidney failure, sustained ≥57% eGFR decline, or renal death)</a:t>
+            </a:r>
+            <a:endParaRPr lang="en-US" sz="1250" dirty="0"/>
           </a:p>
         </p:txBody>
       </p:sp>
@@ -24003,27 +23690,27 @@
         </p:nvSpPr>
         <p:spPr>
           <a:xfrm>
-            <a:off x="3401568" y="2761488"/>
-            <a:ext cx="3017520" cy="749808"/>
-          </a:xfrm>
-          <a:prstGeom prst="rect">
-            <a:avLst/>
-          </a:prstGeom>
-          <a:noFill/>
-          <a:ln/>
-        </p:spPr>
-        <p:txBody>
-          <a:bodyPr wrap="square" lIns="0" tIns="0" rIns="0" bIns="0" rtlCol="0" anchor="ctr"/>
-          <a:lstStyle/>
-          <a:p>
-            <a:pPr algn="l" indent="0" marL="0">
+            <a:off x="5504688" y="3017520"/>
+            <a:ext cx="2468880" cy="1005840"/>
+          </a:xfrm>
+          <a:prstGeom prst="rect">
+            <a:avLst/>
+          </a:prstGeom>
+          <a:noFill/>
+          <a:ln/>
+        </p:spPr>
+        <p:txBody>
+          <a:bodyPr wrap="square" lIns="0" tIns="0" rIns="0" bIns="0" rtlCol="0" anchor="ctr"/>
+          <a:lstStyle/>
+          <a:p>
+            <a:pPr algn="ctr" indent="0" marL="0">
               <a:lnSpc>
                 <a:spcPct val="98000"/>
               </a:lnSpc>
               <a:buNone/>
             </a:pPr>
             <a:r>
-              <a:rPr lang="en-US" sz="1300" dirty="0">
+              <a:rPr lang="en-US" sz="1250" dirty="0">
                 <a:solidFill>
                   <a:srgbClr val="13212A"/>
                 </a:solidFill>
@@ -24031,9 +23718,9 @@
                 <a:ea typeface="Calibri" pitchFamily="34" charset="-122"/>
                 <a:cs typeface="Calibri" pitchFamily="34" charset="-120"/>
               </a:rPr>
-              <a:t>T2D + CKD, earlier stage; N=7437</a:t>
-            </a:r>
-            <a:endParaRPr lang="en-US" sz="1300" dirty="0"/>
+              <a:t>5.5% vs 7.1%</a:t>
+            </a:r>
+            <a:endParaRPr lang="en-US" sz="1250" dirty="0"/>
           </a:p>
         </p:txBody>
       </p:sp>
@@ -24045,37 +23732,37 @@
         </p:nvSpPr>
         <p:spPr>
           <a:xfrm>
-            <a:off x="6601968" y="2761488"/>
-            <a:ext cx="2926080" cy="749808"/>
-          </a:xfrm>
-          <a:prstGeom prst="rect">
-            <a:avLst/>
-          </a:prstGeom>
-          <a:noFill/>
-          <a:ln/>
-        </p:spPr>
-        <p:txBody>
-          <a:bodyPr wrap="square" lIns="0" tIns="0" rIns="0" bIns="0" rtlCol="0" anchor="ctr"/>
-          <a:lstStyle/>
-          <a:p>
-            <a:pPr algn="l" indent="0" marL="0">
+            <a:off x="8156448" y="3017520"/>
+            <a:ext cx="2011680" cy="1005840"/>
+          </a:xfrm>
+          <a:prstGeom prst="rect">
+            <a:avLst/>
+          </a:prstGeom>
+          <a:noFill/>
+          <a:ln/>
+        </p:spPr>
+        <p:txBody>
+          <a:bodyPr wrap="square" lIns="0" tIns="0" rIns="0" bIns="0" rtlCol="0" anchor="ctr"/>
+          <a:lstStyle/>
+          <a:p>
+            <a:pPr algn="ctr" indent="0" marL="0">
               <a:lnSpc>
                 <a:spcPct val="98000"/>
               </a:lnSpc>
               <a:buNone/>
             </a:pPr>
             <a:r>
-              <a:rPr lang="en-US" sz="1300" dirty="0">
-                <a:solidFill>
-                  <a:srgbClr val="13212A"/>
-                </a:solidFill>
-                <a:latin typeface="Calibri" pitchFamily="34" charset="0"/>
-                <a:ea typeface="Calibri" pitchFamily="34" charset="-122"/>
-                <a:cs typeface="Calibri" pitchFamily="34" charset="-120"/>
-              </a:rPr>
-              <a:t>CV: CV death, MI, stroke, or HF hospitalization</a:t>
-            </a:r>
-            <a:endParaRPr lang="en-US" sz="1300" dirty="0"/>
+              <a:rPr lang="en-US" sz="1250" b="1" dirty="0">
+                <a:solidFill>
+                  <a:srgbClr val="0E8385"/>
+                </a:solidFill>
+                <a:latin typeface="Calibri" pitchFamily="34" charset="0"/>
+                <a:ea typeface="Calibri" pitchFamily="34" charset="-122"/>
+                <a:cs typeface="Calibri" pitchFamily="34" charset="-120"/>
+              </a:rPr>
+              <a:t>0.77 (0.67–0.88)</a:t>
+            </a:r>
+            <a:endParaRPr lang="en-US" sz="1250" dirty="0"/>
           </a:p>
         </p:txBody>
       </p:sp>
@@ -24087,62 +23774,81 @@
         </p:nvSpPr>
         <p:spPr>
           <a:xfrm>
-            <a:off x="9710928" y="2761488"/>
-            <a:ext cx="1911096" cy="749808"/>
-          </a:xfrm>
-          <a:prstGeom prst="rect">
-            <a:avLst/>
-          </a:prstGeom>
-          <a:noFill/>
-          <a:ln/>
-        </p:spPr>
-        <p:txBody>
-          <a:bodyPr wrap="square" lIns="0" tIns="0" rIns="0" bIns="0" rtlCol="0" anchor="ctr"/>
-          <a:lstStyle/>
-          <a:p>
-            <a:pPr algn="l" indent="0" marL="0">
+            <a:off x="10351008" y="3017520"/>
+            <a:ext cx="1124712" cy="1005840"/>
+          </a:xfrm>
+          <a:prstGeom prst="rect">
+            <a:avLst/>
+          </a:prstGeom>
+          <a:noFill/>
+          <a:ln/>
+        </p:spPr>
+        <p:txBody>
+          <a:bodyPr wrap="square" lIns="0" tIns="0" rIns="0" bIns="0" rtlCol="0" anchor="ctr"/>
+          <a:lstStyle/>
+          <a:p>
+            <a:pPr algn="ctr" indent="0" marL="0">
               <a:lnSpc>
                 <a:spcPct val="98000"/>
               </a:lnSpc>
               <a:buNone/>
             </a:pPr>
             <a:r>
-              <a:rPr lang="en-US" sz="1300" b="1" dirty="0">
-                <a:solidFill>
-                  <a:srgbClr val="0E8385"/>
-                </a:solidFill>
-                <a:latin typeface="Calibri" pitchFamily="34" charset="0"/>
-                <a:ea typeface="Calibri" pitchFamily="34" charset="-122"/>
-                <a:cs typeface="Calibri" pitchFamily="34" charset="-120"/>
-              </a:rPr>
-              <a:t>0.87 (0.76–0.98)</a:t>
-            </a:r>
-            <a:endParaRPr lang="en-US" sz="1300" dirty="0"/>
-          </a:p>
-        </p:txBody>
-      </p:sp>
-      <p:sp>
-        <p:nvSpPr>
-          <p:cNvPr id="22" name="Shape 19"/>
-          <p:cNvSpPr/>
-          <p:nvPr/>
-        </p:nvSpPr>
-        <p:spPr>
-          <a:xfrm>
-            <a:off x="640080" y="4425696"/>
-            <a:ext cx="11055096" cy="0"/>
-          </a:xfrm>
-          <a:prstGeom prst="line">
-            <a:avLst/>
-          </a:prstGeom>
-          <a:noFill/>
-          <a:ln w="9525">
-            <a:solidFill>
-              <a:srgbClr val="CFDDDD"/>
-            </a:solidFill>
-            <a:prstDash val="solid"/>
-          </a:ln>
-        </p:spPr>
+              <a:rPr lang="en-US" sz="1250" dirty="0">
+                <a:solidFill>
+                  <a:srgbClr val="13212A"/>
+                </a:solidFill>
+                <a:latin typeface="Calibri" pitchFamily="34" charset="0"/>
+                <a:ea typeface="Calibri" pitchFamily="34" charset="-122"/>
+                <a:cs typeface="Calibri" pitchFamily="34" charset="-120"/>
+              </a:rPr>
+              <a:t>0.0002</a:t>
+            </a:r>
+            <a:endParaRPr lang="en-US" sz="1250" dirty="0"/>
+          </a:p>
+        </p:txBody>
+      </p:sp>
+      <p:sp>
+        <p:nvSpPr>
+          <p:cNvPr id="22" name="Text 19"/>
+          <p:cNvSpPr/>
+          <p:nvPr/>
+        </p:nvSpPr>
+        <p:spPr>
+          <a:xfrm>
+            <a:off x="640080" y="4297680"/>
+            <a:ext cx="10908792" cy="640080"/>
+          </a:xfrm>
+          <a:prstGeom prst="rect">
+            <a:avLst/>
+          </a:prstGeom>
+          <a:noFill/>
+          <a:ln/>
+        </p:spPr>
+        <p:txBody>
+          <a:bodyPr wrap="square" lIns="0" tIns="0" rIns="0" bIns="0" rtlCol="0" anchor="ctr"/>
+          <a:lstStyle/>
+          <a:p>
+            <a:pPr indent="0" marL="0">
+              <a:lnSpc>
+                <a:spcPct val="115000"/>
+              </a:lnSpc>
+              <a:buNone/>
+            </a:pPr>
+            <a:r>
+              <a:rPr lang="en-US" sz="1500" i="1" dirty="0">
+                <a:solidFill>
+                  <a:srgbClr val="13212A"/>
+                </a:solidFill>
+                <a:latin typeface="Calibri" pitchFamily="34" charset="0"/>
+                <a:ea typeface="Calibri" pitchFamily="34" charset="-122"/>
+                <a:cs typeface="Calibri" pitchFamily="34" charset="-120"/>
+              </a:rPr>
+              <a:t>Consistent kidney and cardiovascular benefit, but every one of these patients had type 2 diabetes. FIND-CKD asks whether it carries over to CKD without diabetes.</a:t>
+            </a:r>
+            <a:endParaRPr lang="en-US" sz="1500" dirty="0"/>
+          </a:p>
+        </p:txBody>
       </p:sp>
       <p:sp>
         <p:nvSpPr>
@@ -24152,228 +23858,40 @@
         </p:nvSpPr>
         <p:spPr>
           <a:xfrm>
-            <a:off x="749808" y="3511296"/>
-            <a:ext cx="2468880" cy="914400"/>
-          </a:xfrm>
-          <a:prstGeom prst="rect">
-            <a:avLst/>
-          </a:prstGeom>
-          <a:noFill/>
-          <a:ln/>
-        </p:spPr>
-        <p:txBody>
-          <a:bodyPr wrap="square" lIns="0" tIns="0" rIns="0" bIns="0" rtlCol="0" anchor="ctr"/>
-          <a:lstStyle/>
-          <a:p>
-            <a:pPr algn="l" indent="0" marL="0">
-              <a:lnSpc>
-                <a:spcPct val="98000"/>
-              </a:lnSpc>
-              <a:buNone/>
-            </a:pPr>
-            <a:r>
-              <a:rPr lang="en-US" sz="1300" b="1" dirty="0">
-                <a:solidFill>
-                  <a:srgbClr val="0F3446"/>
-                </a:solidFill>
-                <a:latin typeface="Calibri" pitchFamily="34" charset="0"/>
-                <a:ea typeface="Calibri" pitchFamily="34" charset="-122"/>
-                <a:cs typeface="Calibri" pitchFamily="34" charset="-120"/>
-              </a:rPr>
-              <a:t>FIDELITY (2022)</a:t>
-            </a:r>
-            <a:endParaRPr lang="en-US" sz="1300" dirty="0"/>
+            <a:off x="640080" y="6291072"/>
+            <a:ext cx="9144000" cy="201168"/>
+          </a:xfrm>
+          <a:prstGeom prst="rect">
+            <a:avLst/>
+          </a:prstGeom>
+          <a:noFill/>
+          <a:ln/>
+        </p:spPr>
+        <p:txBody>
+          <a:bodyPr wrap="square" lIns="0" tIns="0" rIns="0" bIns="0" rtlCol="0" anchor="ctr"/>
+          <a:lstStyle/>
+          <a:p>
+            <a:pPr indent="0" marL="0">
+              <a:buNone/>
+            </a:pPr>
+            <a:r>
+              <a:rPr lang="en-US" sz="850" i="1" dirty="0">
+                <a:solidFill>
+                  <a:srgbClr val="4E5E66"/>
+                </a:solidFill>
+                <a:latin typeface="Calibri" pitchFamily="34" charset="0"/>
+                <a:ea typeface="Calibri" pitchFamily="34" charset="-122"/>
+                <a:cs typeface="Calibri" pitchFamily="34" charset="-120"/>
+              </a:rPr>
+              <a:t>FIDELITY: Agarwal et al., Eur Heart J 2022 (ehab777). Same ≥57% kidney definition as FIND-CKD.</a:t>
+            </a:r>
+            <a:endParaRPr lang="en-US" sz="850" dirty="0"/>
           </a:p>
         </p:txBody>
       </p:sp>
       <p:sp>
         <p:nvSpPr>
           <p:cNvPr id="24" name="Text 21"/>
-          <p:cNvSpPr/>
-          <p:nvPr/>
-        </p:nvSpPr>
-        <p:spPr>
-          <a:xfrm>
-            <a:off x="3401568" y="3511296"/>
-            <a:ext cx="3017520" cy="914400"/>
-          </a:xfrm>
-          <a:prstGeom prst="rect">
-            <a:avLst/>
-          </a:prstGeom>
-          <a:noFill/>
-          <a:ln/>
-        </p:spPr>
-        <p:txBody>
-          <a:bodyPr wrap="square" lIns="0" tIns="0" rIns="0" bIns="0" rtlCol="0" anchor="ctr"/>
-          <a:lstStyle/>
-          <a:p>
-            <a:pPr algn="l" indent="0" marL="0">
-              <a:lnSpc>
-                <a:spcPct val="98000"/>
-              </a:lnSpc>
-              <a:buNone/>
-            </a:pPr>
-            <a:r>
-              <a:rPr lang="en-US" sz="1300" dirty="0">
-                <a:solidFill>
-                  <a:srgbClr val="13212A"/>
-                </a:solidFill>
-                <a:latin typeface="Calibri" pitchFamily="34" charset="0"/>
-                <a:ea typeface="Calibri" pitchFamily="34" charset="-122"/>
-                <a:cs typeface="Calibri" pitchFamily="34" charset="-120"/>
-              </a:rPr>
-              <a:t>Pre-specified pooling; N=13,026</a:t>
-            </a:r>
-            <a:endParaRPr lang="en-US" sz="1300" dirty="0"/>
-          </a:p>
-        </p:txBody>
-      </p:sp>
-      <p:sp>
-        <p:nvSpPr>
-          <p:cNvPr id="25" name="Text 22"/>
-          <p:cNvSpPr/>
-          <p:nvPr/>
-        </p:nvSpPr>
-        <p:spPr>
-          <a:xfrm>
-            <a:off x="6601968" y="3511296"/>
-            <a:ext cx="2926080" cy="914400"/>
-          </a:xfrm>
-          <a:prstGeom prst="rect">
-            <a:avLst/>
-          </a:prstGeom>
-          <a:noFill/>
-          <a:ln/>
-        </p:spPr>
-        <p:txBody>
-          <a:bodyPr wrap="square" lIns="0" tIns="0" rIns="0" bIns="0" rtlCol="0" anchor="ctr"/>
-          <a:lstStyle/>
-          <a:p>
-            <a:pPr algn="l" indent="0" marL="0">
-              <a:lnSpc>
-                <a:spcPct val="98000"/>
-              </a:lnSpc>
-              <a:buNone/>
-            </a:pPr>
-            <a:r>
-              <a:rPr lang="en-US" sz="1300" dirty="0">
-                <a:solidFill>
-                  <a:srgbClr val="13212A"/>
-                </a:solidFill>
-                <a:latin typeface="Calibri" pitchFamily="34" charset="0"/>
-                <a:ea typeface="Calibri" pitchFamily="34" charset="-122"/>
-                <a:cs typeface="Calibri" pitchFamily="34" charset="-120"/>
-              </a:rPr>
-              <a:t>CV composite / kidney composite (≥57% decline)</a:t>
-            </a:r>
-            <a:endParaRPr lang="en-US" sz="1300" dirty="0"/>
-          </a:p>
-        </p:txBody>
-      </p:sp>
-      <p:sp>
-        <p:nvSpPr>
-          <p:cNvPr id="26" name="Text 23"/>
-          <p:cNvSpPr/>
-          <p:nvPr/>
-        </p:nvSpPr>
-        <p:spPr>
-          <a:xfrm>
-            <a:off x="9710928" y="3511296"/>
-            <a:ext cx="1911096" cy="914400"/>
-          </a:xfrm>
-          <a:prstGeom prst="rect">
-            <a:avLst/>
-          </a:prstGeom>
-          <a:noFill/>
-          <a:ln/>
-        </p:spPr>
-        <p:txBody>
-          <a:bodyPr wrap="square" lIns="0" tIns="0" rIns="0" bIns="0" rtlCol="0" anchor="ctr"/>
-          <a:lstStyle/>
-          <a:p>
-            <a:pPr algn="l" indent="0" marL="0">
-              <a:lnSpc>
-                <a:spcPct val="98000"/>
-              </a:lnSpc>
-              <a:buNone/>
-            </a:pPr>
-            <a:r>
-              <a:rPr lang="en-US" sz="1300" b="1" dirty="0">
-                <a:solidFill>
-                  <a:srgbClr val="0E8385"/>
-                </a:solidFill>
-                <a:latin typeface="Calibri" pitchFamily="34" charset="0"/>
-                <a:ea typeface="Calibri" pitchFamily="34" charset="-122"/>
-                <a:cs typeface="Calibri" pitchFamily="34" charset="-120"/>
-              </a:rPr>
-              <a:t>CV 0.86 (0.78–0.95)</a:t>
-            </a:r>
-            <a:endParaRPr lang="en-US" sz="1300" dirty="0"/>
-          </a:p>
-          <a:p>
-            <a:pPr algn="l" indent="0" marL="0">
-              <a:lnSpc>
-                <a:spcPct val="98000"/>
-              </a:lnSpc>
-              <a:buNone/>
-            </a:pPr>
-            <a:r>
-              <a:rPr lang="en-US" sz="1300" b="1" dirty="0">
-                <a:solidFill>
-                  <a:srgbClr val="0E8385"/>
-                </a:solidFill>
-                <a:latin typeface="Calibri" pitchFamily="34" charset="0"/>
-                <a:ea typeface="Calibri" pitchFamily="34" charset="-122"/>
-                <a:cs typeface="Calibri" pitchFamily="34" charset="-120"/>
-              </a:rPr>
-              <a:t>Kidney 0.77 (0.67–0.88)</a:t>
-            </a:r>
-            <a:endParaRPr lang="en-US" sz="1300" dirty="0"/>
-          </a:p>
-        </p:txBody>
-      </p:sp>
-      <p:sp>
-        <p:nvSpPr>
-          <p:cNvPr id="27" name="Text 24"/>
-          <p:cNvSpPr/>
-          <p:nvPr/>
-        </p:nvSpPr>
-        <p:spPr>
-          <a:xfrm>
-            <a:off x="640080" y="4654296"/>
-            <a:ext cx="10908792" cy="457200"/>
-          </a:xfrm>
-          <a:prstGeom prst="rect">
-            <a:avLst/>
-          </a:prstGeom>
-          <a:noFill/>
-          <a:ln/>
-        </p:spPr>
-        <p:txBody>
-          <a:bodyPr wrap="square" lIns="0" tIns="0" rIns="0" bIns="0" rtlCol="0" anchor="ctr"/>
-          <a:lstStyle/>
-          <a:p>
-            <a:pPr indent="0" marL="0">
-              <a:buNone/>
-            </a:pPr>
-            <a:r>
-              <a:rPr lang="en-US" sz="1500" i="1" dirty="0">
-                <a:solidFill>
-                  <a:srgbClr val="13212A"/>
-                </a:solidFill>
-                <a:latin typeface="Calibri" pitchFamily="34" charset="0"/>
-                <a:ea typeface="Calibri" pitchFamily="34" charset="-122"/>
-                <a:cs typeface="Calibri" pitchFamily="34" charset="-120"/>
-              </a:rPr>
-              <a:t>Consistent kidney and cardiovascular benefit, and a clear effect on eGFR slope, but only in diabetic CKD.</a:t>
-            </a:r>
-            <a:endParaRPr lang="en-US" sz="1500" dirty="0"/>
-          </a:p>
-        </p:txBody>
-      </p:sp>
-      <p:sp>
-        <p:nvSpPr>
-          <p:cNvPr id="28" name="Text 25"/>
           <p:cNvSpPr/>
           <p:nvPr/>
         </p:nvSpPr>
@@ -24426,7 +23944,7 @@
       </p:sp>
       <p:sp>
         <p:nvSpPr>
-          <p:cNvPr id="29" name="Text 26"/>
+          <p:cNvPr id="25" name="Text 22"/>
           <p:cNvSpPr/>
           <p:nvPr/>
         </p:nvSpPr>

--- a/FIND-CKD.pptx
+++ b/FIND-CKD.pptx
@@ -137,387 +137,6 @@
 </file>
 
 <file path=ppt/charts/chart1.xml><?xml version="1.0" encoding="utf-8"?>
-<c:chartSpace xmlns:c="http://schemas.openxmlformats.org/drawingml/2006/chart" xmlns:a="http://schemas.openxmlformats.org/drawingml/2006/main" xmlns:r="http://schemas.openxmlformats.org/officeDocument/2006/relationships">
-  <c:date1904 val="0"/>
-  <c:roundedCorners val="1"/>
-  <c:chart>
-    <c:autoTitleDeleted val="1"/>
-    <c:plotArea>
-      <c:layout/>
-      <c:barChart>
-        <c:barDir val="col"/>
-        <c:grouping val="clustered"/>
-        <c:varyColors val="0"/>
-        <c:ser>
-          <c:idx val="0"/>
-          <c:order val="0"/>
-          <c:tx>
-            <c:strRef>
-              <c:f>Sheet1!$B$1</c:f>
-              <c:strCache>
-                <c:ptCount val="1"/>
-                <c:pt idx="0">
-                  <c:v>Finerenone</c:v>
-                </c:pt>
-              </c:strCache>
-            </c:strRef>
-          </c:tx>
-          <c:spPr>
-            <a:solidFill>
-              <a:srgbClr val="12A3A6"/>
-            </a:solidFill>
-            <a:effectLst/>
-          </c:spPr>
-          <c:invertIfNegative val="0"/>
-          <c:dLbls>
-            <c:numFmt formatCode="0.0" sourceLinked="0"/>
-            <c:txPr>
-              <a:bodyPr/>
-              <a:lstStyle/>
-              <a:p>
-                <a:pPr>
-                  <a:defRPr b="1" i="0" strike="noStrike" sz="1200" u="none">
-                    <a:solidFill>
-                      <a:srgbClr val="13212A"/>
-                    </a:solidFill>
-                    <a:latin typeface="Calibri"/>
-                  </a:defRPr>
-                </a:pPr>
-              </a:p>
-            </c:txPr>
-            <c:showLegendKey val="0"/>
-            <c:showVal val="1"/>
-            <c:showCatName val="0"/>
-            <c:showSerName val="0"/>
-            <c:showPercent val="0"/>
-            <c:showBubbleSize val="0"/>
-            <c:showLeaderLines val="0"/>
-          </c:dLbls>
-          <c:cat>
-            <c:multiLvlStrRef>
-              <c:f>Sheet1!$A$2:$A$4</c:f>
-              <c:multiLvlStrCache>
-                <c:ptCount val="3"/>
-                <c:lvl>
-                  <c:pt idx="0">
-                    <c:v>Total slope
-(0–32 mo)</c:v>
-                  </c:pt>
-                  <c:pt idx="1">
-                    <c:v>Acute
-(0–3 mo)</c:v>
-                  </c:pt>
-                  <c:pt idx="2">
-                    <c:v>Chronic
-(3 mo – EOT)</c:v>
-                  </c:pt>
-                </c:lvl>
-              </c:multiLvlStrCache>
-            </c:multiLvlStrRef>
-          </c:cat>
-          <c:val>
-            <c:numRef>
-              <c:f>Sheet1!$B$2:$B$4</c:f>
-              <c:numCache>
-                <c:formatCode>General</c:formatCode>
-                <c:ptCount val="3"/>
-                <c:pt idx="0">
-                  <c:v>-3.3</c:v>
-                </c:pt>
-                <c:pt idx="1">
-                  <c:v>-2</c:v>
-                </c:pt>
-                <c:pt idx="2">
-                  <c:v>-2.9</c:v>
-                </c:pt>
-              </c:numCache>
-            </c:numRef>
-          </c:val>
-        </c:ser>
-        <c:ser>
-          <c:idx val="1"/>
-          <c:order val="1"/>
-          <c:tx>
-            <c:strRef>
-              <c:f>Sheet1!$C$1</c:f>
-              <c:strCache>
-                <c:ptCount val="1"/>
-                <c:pt idx="0">
-                  <c:v>Placebo</c:v>
-                </c:pt>
-              </c:strCache>
-            </c:strRef>
-          </c:tx>
-          <c:spPr>
-            <a:solidFill>
-              <a:srgbClr val="9AA7AD"/>
-            </a:solidFill>
-            <a:effectLst/>
-          </c:spPr>
-          <c:invertIfNegative val="0"/>
-          <c:dLbls>
-            <c:numFmt formatCode="0.0" sourceLinked="0"/>
-            <c:txPr>
-              <a:bodyPr/>
-              <a:lstStyle/>
-              <a:p>
-                <a:pPr>
-                  <a:defRPr b="1" i="0" strike="noStrike" sz="1200" u="none">
-                    <a:solidFill>
-                      <a:srgbClr val="13212A"/>
-                    </a:solidFill>
-                    <a:latin typeface="Calibri"/>
-                  </a:defRPr>
-                </a:pPr>
-              </a:p>
-            </c:txPr>
-            <c:showLegendKey val="0"/>
-            <c:showVal val="1"/>
-            <c:showCatName val="0"/>
-            <c:showSerName val="0"/>
-            <c:showPercent val="0"/>
-            <c:showBubbleSize val="0"/>
-            <c:showLeaderLines val="0"/>
-          </c:dLbls>
-          <c:cat>
-            <c:multiLvlStrRef>
-              <c:f>Sheet1!$A$2:$A$4</c:f>
-              <c:multiLvlStrCache>
-                <c:ptCount val="3"/>
-                <c:lvl>
-                  <c:pt idx="0">
-                    <c:v>Total slope
-(0–32 mo)</c:v>
-                  </c:pt>
-                  <c:pt idx="1">
-                    <c:v>Acute
-(0–3 mo)</c:v>
-                  </c:pt>
-                  <c:pt idx="2">
-                    <c:v>Chronic
-(3 mo – EOT)</c:v>
-                  </c:pt>
-                </c:lvl>
-              </c:multiLvlStrCache>
-            </c:multiLvlStrRef>
-          </c:cat>
-          <c:val>
-            <c:numRef>
-              <c:f>Sheet1!$C$2:$C$4</c:f>
-              <c:numCache>
-                <c:formatCode>General</c:formatCode>
-                <c:ptCount val="3"/>
-                <c:pt idx="0">
-                  <c:v>-4</c:v>
-                </c:pt>
-                <c:pt idx="1">
-                  <c:v>-0.8</c:v>
-                </c:pt>
-                <c:pt idx="2">
-                  <c:v>-4.1</c:v>
-                </c:pt>
-              </c:numCache>
-            </c:numRef>
-          </c:val>
-        </c:ser>
-        <c:dLbls>
-          <c:numFmt formatCode="0.0" sourceLinked="0"/>
-          <c:txPr>
-            <a:bodyPr/>
-            <a:lstStyle/>
-            <a:p>
-              <a:pPr>
-                <a:defRPr b="1" i="0" strike="noStrike" sz="1200" u="none">
-                  <a:solidFill>
-                    <a:srgbClr val="13212A"/>
-                  </a:solidFill>
-                  <a:latin typeface="Calibri"/>
-                </a:defRPr>
-              </a:pPr>
-            </a:p>
-          </c:txPr>
-          <c:showLegendKey val="0"/>
-          <c:showVal val="1"/>
-          <c:showCatName val="0"/>
-          <c:showSerName val="0"/>
-          <c:showPercent val="0"/>
-          <c:showBubbleSize val="0"/>
-          <c:showLeaderLines val="0"/>
-        </c:dLbls>
-        <c:gapWidth val="60"/>
-        <c:overlap val="0"/>
-        <c:axId val="2094734554"/>
-        <c:axId val="2094734552"/>
-        <c:axId val="2094734556"/>
-      </c:barChart>
-      <c:catAx>
-        <c:axId val="2094734554"/>
-        <c:scaling>
-          <c:orientation val="minMax"/>
-        </c:scaling>
-        <c:delete val="0"/>
-        <c:axPos val="b"/>
-        <c:numFmt formatCode="General" sourceLinked="1"/>
-        <c:majorTickMark val="out"/>
-        <c:minorTickMark val="none"/>
-        <c:tickLblPos val="low"/>
-        <c:spPr>
-          <a:ln w="12700" cap="flat">
-            <a:solidFill>
-              <a:srgbClr val="888888"/>
-            </a:solidFill>
-            <a:prstDash val="solid"/>
-            <a:round/>
-          </a:ln>
-        </c:spPr>
-        <c:txPr>
-          <a:bodyPr/>
-          <a:lstStyle/>
-          <a:p>
-            <a:pPr>
-              <a:defRPr sz="1100" b="0" i="0" u="none" strike="noStrike">
-                <a:solidFill>
-                  <a:srgbClr val="13212A"/>
-                </a:solidFill>
-                <a:latin typeface="Calibri"/>
-              </a:defRPr>
-            </a:pPr>
-            <a:endParaRPr lang="en-US"/>
-          </a:p>
-        </c:txPr>
-        <c:crossAx val="2094734552"/>
-        <c:crosses val="autoZero"/>
-        <c:auto val="1"/>
-        <c:lblAlgn val="ctr"/>
-        <c:noMultiLvlLbl val="1"/>
-      </c:catAx>
-      <c:valAx>
-        <c:axId val="2094734552"/>
-        <c:scaling>
-          <c:orientation val="minMax"/>
-          <c:max val="0"/>
-          <c:min val="-5"/>
-        </c:scaling>
-        <c:delete val="0"/>
-        <c:axPos val="l"/>
-        <c:majorGridlines>
-          <c:spPr>
-            <a:ln w="12700" cap="flat">
-              <a:solidFill>
-                <a:srgbClr val="ECF2F2"/>
-              </a:solidFill>
-              <a:prstDash val="solid"/>
-              <a:round/>
-            </a:ln>
-          </c:spPr>
-        </c:majorGridlines>
-        <c:title>
-          <c:tx>
-            <c:rich>
-              <a:bodyPr/>
-              <a:lstStyle/>
-              <a:p>
-                <a:pPr>
-                  <a:defRPr sz="1100" b="0" i="0" u="none" strike="noStrike">
-                    <a:solidFill>
-                      <a:srgbClr val="4E5E66"/>
-                    </a:solidFill>
-                    <a:latin typeface="Arial"/>
-                  </a:defRPr>
-                </a:pPr>
-                <a:r>
-                  <a:rPr sz="1100" b="0" i="0" u="none" strike="noStrike">
-                    <a:solidFill>
-                      <a:srgbClr val="4E5E66"/>
-                    </a:solidFill>
-                    <a:latin typeface="Arial"/>
-                  </a:rPr>
-                  <a:t>eGFR slope (ml/min/1.73 m² per year)</a:t>
-                </a:r>
-              </a:p>
-            </c:rich>
-          </c:tx>
-          <c:layout/>
-          <c:overlay val="0"/>
-        </c:title>
-        <c:numFmt formatCode="General" sourceLinked="0"/>
-        <c:majorTickMark val="out"/>
-        <c:minorTickMark val="none"/>
-        <c:tickLblPos val="nextTo"/>
-        <c:spPr>
-          <a:ln w="12700" cap="flat">
-            <a:solidFill>
-              <a:srgbClr val="888888"/>
-            </a:solidFill>
-            <a:prstDash val="solid"/>
-            <a:round/>
-          </a:ln>
-        </c:spPr>
-        <c:txPr>
-          <a:bodyPr/>
-          <a:lstStyle/>
-          <a:p>
-            <a:pPr>
-              <a:defRPr sz="1000" b="0" i="0" u="none" strike="noStrike">
-                <a:solidFill>
-                  <a:srgbClr val="4E5E66"/>
-                </a:solidFill>
-                <a:latin typeface="Calibri"/>
-              </a:defRPr>
-            </a:pPr>
-            <a:endParaRPr lang="en-US"/>
-          </a:p>
-        </c:txPr>
-        <c:crossAx val="2094734554"/>
-        <c:crosses val="autoZero"/>
-        <c:crossBetween val="between"/>
-        <c:majorUnit val="1"/>
-      </c:valAx>
-      <c:spPr>
-        <a:noFill/>
-        <a:ln>
-          <a:noFill/>
-        </a:ln>
-        <a:effectLst/>
-      </c:spPr>
-    </c:plotArea>
-    <c:legend>
-      <c:legendPos val="t"/>
-      <c:overlay val="0"/>
-      <c:txPr>
-        <a:bodyPr/>
-        <a:lstStyle/>
-        <a:p>
-          <a:pPr>
-            <a:defRPr sz="1200">
-              <a:solidFill>
-                <a:srgbClr val="13212A"/>
-              </a:solidFill>
-              <a:latin typeface="Calibri"/>
-              <a:cs typeface="Calibri"/>
-            </a:defRPr>
-          </a:pPr>
-          <a:endParaRPr lang="en-US"/>
-        </a:p>
-      </c:txPr>
-    </c:legend>
-    <c:plotVisOnly val="1"/>
-    <c:dispBlanksAs val="span"/>
-  </c:chart>
-  <c:spPr>
-    <a:noFill/>
-    <a:ln>
-      <a:noFill/>
-    </a:ln>
-    <a:effectLst/>
-  </c:spPr>
-  <c:externalData r:id="rId1">
-    <c:autoUpdate val="0"/>
-  </c:externalData>
-</c:chartSpace>
-</file>
-
-<file path=ppt/charts/chart2.xml><?xml version="1.0" encoding="utf-8"?>
 <c:chartSpace xmlns:c="http://schemas.openxmlformats.org/drawingml/2006/chart" xmlns:a="http://schemas.openxmlformats.org/drawingml/2006/main" xmlns:r="http://schemas.openxmlformats.org/officeDocument/2006/relationships">
   <c:date1904 val="0"/>
   <c:roundedCorners val="1"/>
@@ -10603,660 +10222,33 @@
           </a:p>
         </p:txBody>
       </p:sp>
-      <p:graphicFrame>
-        <p:nvGraphicFramePr>
-          <p:cNvPr id="7" name="Chart 0" descr=""/>
-          <p:cNvGraphicFramePr/>
-          <p:nvPr/>
-        </p:nvGraphicFramePr>
-        <p:xfrm>
-          <a:off x="640080" y="1554480"/>
-          <a:ext cx="7040880" cy="4389120"/>
-        </p:xfrm>
-        <a:graphic xmlns:a="http://schemas.openxmlformats.org/drawingml/2006/main">
-          <a:graphicData uri="http://schemas.openxmlformats.org/drawingml/2006/chart">
-            <c:chart xmlns:c="http://schemas.openxmlformats.org/drawingml/2006/chart" r:id="rId2"/>
-          </a:graphicData>
-        </a:graphic>
-      </p:graphicFrame>
-      <p:sp>
-        <p:nvSpPr>
-          <p:cNvPr id="8" name="Shape 4"/>
-          <p:cNvSpPr/>
-          <p:nvPr/>
-        </p:nvSpPr>
-        <p:spPr>
-          <a:xfrm>
-            <a:off x="7955280" y="1737360"/>
-            <a:ext cx="3593592" cy="420624"/>
-          </a:xfrm>
-          <a:prstGeom prst="rect">
-            <a:avLst/>
-          </a:prstGeom>
-          <a:solidFill>
-            <a:srgbClr val="0F3446"/>
-          </a:solidFill>
-          <a:ln/>
-        </p:spPr>
-      </p:sp>
-      <p:sp>
-        <p:nvSpPr>
-          <p:cNvPr id="9" name="Text 5"/>
-          <p:cNvSpPr/>
-          <p:nvPr/>
-        </p:nvSpPr>
-        <p:spPr>
-          <a:xfrm>
-            <a:off x="8065008" y="1737360"/>
-            <a:ext cx="1326429" cy="420624"/>
-          </a:xfrm>
-          <a:prstGeom prst="rect">
-            <a:avLst/>
-          </a:prstGeom>
-          <a:noFill/>
-          <a:ln/>
-        </p:spPr>
-        <p:txBody>
-          <a:bodyPr wrap="square" lIns="0" tIns="0" rIns="0" bIns="0" rtlCol="0" anchor="ctr"/>
-          <a:lstStyle/>
-          <a:p>
-            <a:pPr algn="l" indent="0" marL="0">
-              <a:lnSpc>
-                <a:spcPct val="98000"/>
-              </a:lnSpc>
-              <a:buNone/>
-            </a:pPr>
-            <a:r>
-              <a:rPr lang="en-US" sz="1300" b="1" dirty="0">
-                <a:solidFill>
-                  <a:srgbClr val="FFFFFF"/>
-                </a:solidFill>
-                <a:latin typeface="Calibri" pitchFamily="34" charset="0"/>
-                <a:ea typeface="Calibri" pitchFamily="34" charset="-122"/>
-                <a:cs typeface="Calibri" pitchFamily="34" charset="-120"/>
-              </a:rPr>
-              <a:t>Difference</a:t>
-            </a:r>
-            <a:endParaRPr lang="en-US" sz="1300" dirty="0"/>
-          </a:p>
-        </p:txBody>
-      </p:sp>
-      <p:sp>
-        <p:nvSpPr>
-          <p:cNvPr id="10" name="Text 6"/>
-          <p:cNvSpPr/>
-          <p:nvPr/>
-        </p:nvSpPr>
-        <p:spPr>
-          <a:xfrm>
-            <a:off x="9574317" y="1737360"/>
-            <a:ext cx="823326" cy="420624"/>
-          </a:xfrm>
-          <a:prstGeom prst="rect">
-            <a:avLst/>
-          </a:prstGeom>
-          <a:noFill/>
-          <a:ln/>
-        </p:spPr>
-        <p:txBody>
-          <a:bodyPr wrap="square" lIns="0" tIns="0" rIns="0" bIns="0" rtlCol="0" anchor="ctr"/>
-          <a:lstStyle/>
-          <a:p>
-            <a:pPr algn="ctr" indent="0" marL="0">
-              <a:lnSpc>
-                <a:spcPct val="98000"/>
-              </a:lnSpc>
-              <a:buNone/>
-            </a:pPr>
-            <a:r>
-              <a:rPr lang="en-US" sz="1300" b="1" dirty="0">
-                <a:solidFill>
-                  <a:srgbClr val="FFFFFF"/>
-                </a:solidFill>
-                <a:latin typeface="Calibri" pitchFamily="34" charset="0"/>
-                <a:ea typeface="Calibri" pitchFamily="34" charset="-122"/>
-                <a:cs typeface="Calibri" pitchFamily="34" charset="-120"/>
-              </a:rPr>
-              <a:t>Estimate</a:t>
-            </a:r>
-            <a:endParaRPr lang="en-US" sz="1300" dirty="0"/>
-          </a:p>
-        </p:txBody>
-      </p:sp>
-      <p:sp>
-        <p:nvSpPr>
-          <p:cNvPr id="11" name="Text 7"/>
-          <p:cNvSpPr/>
-          <p:nvPr/>
-        </p:nvSpPr>
-        <p:spPr>
-          <a:xfrm>
-            <a:off x="10580522" y="1737360"/>
-            <a:ext cx="895198" cy="420624"/>
-          </a:xfrm>
-          <a:prstGeom prst="rect">
-            <a:avLst/>
-          </a:prstGeom>
-          <a:noFill/>
-          <a:ln/>
-        </p:spPr>
-        <p:txBody>
-          <a:bodyPr wrap="square" lIns="0" tIns="0" rIns="0" bIns="0" rtlCol="0" anchor="ctr"/>
-          <a:lstStyle/>
-          <a:p>
-            <a:pPr algn="ctr" indent="0" marL="0">
-              <a:lnSpc>
-                <a:spcPct val="98000"/>
-              </a:lnSpc>
-              <a:buNone/>
-            </a:pPr>
-            <a:r>
-              <a:rPr lang="en-US" sz="1300" b="1" dirty="0">
-                <a:solidFill>
-                  <a:srgbClr val="FFFFFF"/>
-                </a:solidFill>
-                <a:latin typeface="Calibri" pitchFamily="34" charset="0"/>
-                <a:ea typeface="Calibri" pitchFamily="34" charset="-122"/>
-                <a:cs typeface="Calibri" pitchFamily="34" charset="-120"/>
-              </a:rPr>
-              <a:t>95% CI</a:t>
-            </a:r>
-            <a:endParaRPr lang="en-US" sz="1300" dirty="0"/>
-          </a:p>
-        </p:txBody>
-      </p:sp>
-      <p:sp>
-        <p:nvSpPr>
-          <p:cNvPr id="12" name="Shape 8"/>
-          <p:cNvSpPr/>
-          <p:nvPr/>
-        </p:nvSpPr>
-        <p:spPr>
-          <a:xfrm>
-            <a:off x="7955280" y="2706624"/>
-            <a:ext cx="3593592" cy="0"/>
-          </a:xfrm>
-          <a:prstGeom prst="line">
-            <a:avLst/>
-          </a:prstGeom>
-          <a:noFill/>
-          <a:ln w="9525">
-            <a:solidFill>
-              <a:srgbClr val="CFDDDD"/>
-            </a:solidFill>
-            <a:prstDash val="solid"/>
-          </a:ln>
-        </p:spPr>
-      </p:sp>
-      <p:sp>
-        <p:nvSpPr>
-          <p:cNvPr id="13" name="Text 9"/>
-          <p:cNvSpPr/>
-          <p:nvPr/>
-        </p:nvSpPr>
-        <p:spPr>
-          <a:xfrm>
-            <a:off x="8065008" y="2157984"/>
-            <a:ext cx="1326429" cy="548640"/>
-          </a:xfrm>
-          <a:prstGeom prst="rect">
-            <a:avLst/>
-          </a:prstGeom>
-          <a:noFill/>
-          <a:ln/>
-        </p:spPr>
-        <p:txBody>
-          <a:bodyPr wrap="square" lIns="0" tIns="0" rIns="0" bIns="0" rtlCol="0" anchor="ctr"/>
-          <a:lstStyle/>
-          <a:p>
-            <a:pPr algn="l" indent="0" marL="0">
-              <a:lnSpc>
-                <a:spcPct val="98000"/>
-              </a:lnSpc>
-              <a:buNone/>
-            </a:pPr>
-            <a:r>
-              <a:rPr lang="en-US" sz="1300" b="1" dirty="0">
-                <a:solidFill>
-                  <a:srgbClr val="0F3446"/>
-                </a:solidFill>
-                <a:latin typeface="Calibri" pitchFamily="34" charset="0"/>
-                <a:ea typeface="Calibri" pitchFamily="34" charset="-122"/>
-                <a:cs typeface="Calibri" pitchFamily="34" charset="-120"/>
-              </a:rPr>
-              <a:t>Total</a:t>
-            </a:r>
-            <a:endParaRPr lang="en-US" sz="1300" dirty="0"/>
-          </a:p>
-        </p:txBody>
-      </p:sp>
-      <p:sp>
-        <p:nvSpPr>
-          <p:cNvPr id="14" name="Text 10"/>
-          <p:cNvSpPr/>
-          <p:nvPr/>
-        </p:nvSpPr>
-        <p:spPr>
-          <a:xfrm>
-            <a:off x="9574317" y="2157984"/>
-            <a:ext cx="823326" cy="548640"/>
-          </a:xfrm>
-          <a:prstGeom prst="rect">
-            <a:avLst/>
-          </a:prstGeom>
-          <a:noFill/>
-          <a:ln/>
-        </p:spPr>
-        <p:txBody>
-          <a:bodyPr wrap="square" lIns="0" tIns="0" rIns="0" bIns="0" rtlCol="0" anchor="ctr"/>
-          <a:lstStyle/>
-          <a:p>
-            <a:pPr algn="ctr" indent="0" marL="0">
-              <a:lnSpc>
-                <a:spcPct val="98000"/>
-              </a:lnSpc>
-              <a:buNone/>
-            </a:pPr>
-            <a:r>
-              <a:rPr lang="en-US" sz="1300" b="1" dirty="0">
-                <a:solidFill>
-                  <a:srgbClr val="0E8385"/>
-                </a:solidFill>
-                <a:latin typeface="Calibri" pitchFamily="34" charset="0"/>
-                <a:ea typeface="Calibri" pitchFamily="34" charset="-122"/>
-                <a:cs typeface="Calibri" pitchFamily="34" charset="-120"/>
-              </a:rPr>
-              <a:t>+0.7</a:t>
-            </a:r>
-            <a:endParaRPr lang="en-US" sz="1300" dirty="0"/>
-          </a:p>
-        </p:txBody>
-      </p:sp>
-      <p:sp>
-        <p:nvSpPr>
-          <p:cNvPr id="15" name="Text 11"/>
-          <p:cNvSpPr/>
-          <p:nvPr/>
-        </p:nvSpPr>
-        <p:spPr>
-          <a:xfrm>
-            <a:off x="10580522" y="2157984"/>
-            <a:ext cx="895198" cy="548640"/>
-          </a:xfrm>
-          <a:prstGeom prst="rect">
-            <a:avLst/>
-          </a:prstGeom>
-          <a:noFill/>
-          <a:ln/>
-        </p:spPr>
-        <p:txBody>
-          <a:bodyPr wrap="square" lIns="0" tIns="0" rIns="0" bIns="0" rtlCol="0" anchor="ctr"/>
-          <a:lstStyle/>
-          <a:p>
-            <a:pPr algn="ctr" indent="0" marL="0">
-              <a:lnSpc>
-                <a:spcPct val="98000"/>
-              </a:lnSpc>
-              <a:buNone/>
-            </a:pPr>
-            <a:r>
-              <a:rPr lang="en-US" sz="1300" dirty="0">
-                <a:solidFill>
-                  <a:srgbClr val="13212A"/>
-                </a:solidFill>
-                <a:latin typeface="Calibri" pitchFamily="34" charset="0"/>
-                <a:ea typeface="Calibri" pitchFamily="34" charset="-122"/>
-                <a:cs typeface="Calibri" pitchFamily="34" charset="-120"/>
-              </a:rPr>
-              <a:t>0.3 to 1.1</a:t>
-            </a:r>
-            <a:endParaRPr lang="en-US" sz="1300" dirty="0"/>
-          </a:p>
-        </p:txBody>
-      </p:sp>
-      <p:sp>
-        <p:nvSpPr>
-          <p:cNvPr id="16" name="Shape 12"/>
-          <p:cNvSpPr/>
-          <p:nvPr/>
-        </p:nvSpPr>
-        <p:spPr>
-          <a:xfrm>
-            <a:off x="7955280" y="3255264"/>
-            <a:ext cx="3593592" cy="0"/>
-          </a:xfrm>
-          <a:prstGeom prst="line">
-            <a:avLst/>
-          </a:prstGeom>
-          <a:noFill/>
-          <a:ln w="9525">
-            <a:solidFill>
-              <a:srgbClr val="CFDDDD"/>
-            </a:solidFill>
-            <a:prstDash val="solid"/>
-          </a:ln>
-        </p:spPr>
-      </p:sp>
-      <p:sp>
-        <p:nvSpPr>
-          <p:cNvPr id="17" name="Text 13"/>
-          <p:cNvSpPr/>
-          <p:nvPr/>
-        </p:nvSpPr>
-        <p:spPr>
-          <a:xfrm>
-            <a:off x="8065008" y="2706624"/>
-            <a:ext cx="1326429" cy="548640"/>
-          </a:xfrm>
-          <a:prstGeom prst="rect">
-            <a:avLst/>
-          </a:prstGeom>
-          <a:noFill/>
-          <a:ln/>
-        </p:spPr>
-        <p:txBody>
-          <a:bodyPr wrap="square" lIns="0" tIns="0" rIns="0" bIns="0" rtlCol="0" anchor="ctr"/>
-          <a:lstStyle/>
-          <a:p>
-            <a:pPr algn="l" indent="0" marL="0">
-              <a:lnSpc>
-                <a:spcPct val="98000"/>
-              </a:lnSpc>
-              <a:buNone/>
-            </a:pPr>
-            <a:r>
-              <a:rPr lang="en-US" sz="1300" b="1" dirty="0">
-                <a:solidFill>
-                  <a:srgbClr val="0F3446"/>
-                </a:solidFill>
-                <a:latin typeface="Calibri" pitchFamily="34" charset="0"/>
-                <a:ea typeface="Calibri" pitchFamily="34" charset="-122"/>
-                <a:cs typeface="Calibri" pitchFamily="34" charset="-120"/>
-              </a:rPr>
-              <a:t>Acute (0–3 mo)</a:t>
-            </a:r>
-            <a:endParaRPr lang="en-US" sz="1300" dirty="0"/>
-          </a:p>
-        </p:txBody>
-      </p:sp>
-      <p:sp>
-        <p:nvSpPr>
-          <p:cNvPr id="18" name="Text 14"/>
-          <p:cNvSpPr/>
-          <p:nvPr/>
-        </p:nvSpPr>
-        <p:spPr>
-          <a:xfrm>
-            <a:off x="9574317" y="2706624"/>
-            <a:ext cx="823326" cy="548640"/>
-          </a:xfrm>
-          <a:prstGeom prst="rect">
-            <a:avLst/>
-          </a:prstGeom>
-          <a:noFill/>
-          <a:ln/>
-        </p:spPr>
-        <p:txBody>
-          <a:bodyPr wrap="square" lIns="0" tIns="0" rIns="0" bIns="0" rtlCol="0" anchor="ctr"/>
-          <a:lstStyle/>
-          <a:p>
-            <a:pPr algn="ctr" indent="0" marL="0">
-              <a:lnSpc>
-                <a:spcPct val="98000"/>
-              </a:lnSpc>
-              <a:buNone/>
-            </a:pPr>
-            <a:r>
-              <a:rPr lang="en-US" sz="1300" b="1" dirty="0">
-                <a:solidFill>
-                  <a:srgbClr val="0E8385"/>
-                </a:solidFill>
-                <a:latin typeface="Calibri" pitchFamily="34" charset="0"/>
-                <a:ea typeface="Calibri" pitchFamily="34" charset="-122"/>
-                <a:cs typeface="Calibri" pitchFamily="34" charset="-120"/>
-              </a:rPr>
-              <a:t>−1.2</a:t>
-            </a:r>
-            <a:endParaRPr lang="en-US" sz="1300" dirty="0"/>
-          </a:p>
-        </p:txBody>
-      </p:sp>
-      <p:sp>
-        <p:nvSpPr>
-          <p:cNvPr id="19" name="Text 15"/>
-          <p:cNvSpPr/>
-          <p:nvPr/>
-        </p:nvSpPr>
-        <p:spPr>
-          <a:xfrm>
-            <a:off x="10580522" y="2706624"/>
-            <a:ext cx="895198" cy="548640"/>
-          </a:xfrm>
-          <a:prstGeom prst="rect">
-            <a:avLst/>
-          </a:prstGeom>
-          <a:noFill/>
-          <a:ln/>
-        </p:spPr>
-        <p:txBody>
-          <a:bodyPr wrap="square" lIns="0" tIns="0" rIns="0" bIns="0" rtlCol="0" anchor="ctr"/>
-          <a:lstStyle/>
-          <a:p>
-            <a:pPr algn="ctr" indent="0" marL="0">
-              <a:lnSpc>
-                <a:spcPct val="98000"/>
-              </a:lnSpc>
-              <a:buNone/>
-            </a:pPr>
-            <a:r>
-              <a:rPr lang="en-US" sz="1300" dirty="0">
-                <a:solidFill>
-                  <a:srgbClr val="13212A"/>
-                </a:solidFill>
-                <a:latin typeface="Calibri" pitchFamily="34" charset="0"/>
-                <a:ea typeface="Calibri" pitchFamily="34" charset="-122"/>
-                <a:cs typeface="Calibri" pitchFamily="34" charset="-120"/>
-              </a:rPr>
-              <a:t>−1.7 to −0.6</a:t>
-            </a:r>
-            <a:endParaRPr lang="en-US" sz="1300" dirty="0"/>
-          </a:p>
-        </p:txBody>
-      </p:sp>
-      <p:sp>
-        <p:nvSpPr>
-          <p:cNvPr id="20" name="Shape 16"/>
-          <p:cNvSpPr/>
-          <p:nvPr/>
-        </p:nvSpPr>
-        <p:spPr>
-          <a:xfrm>
-            <a:off x="7955280" y="3803904"/>
-            <a:ext cx="3593592" cy="0"/>
-          </a:xfrm>
-          <a:prstGeom prst="line">
-            <a:avLst/>
-          </a:prstGeom>
-          <a:noFill/>
-          <a:ln w="9525">
-            <a:solidFill>
-              <a:srgbClr val="CFDDDD"/>
-            </a:solidFill>
-            <a:prstDash val="solid"/>
-          </a:ln>
-        </p:spPr>
-      </p:sp>
-      <p:sp>
-        <p:nvSpPr>
-          <p:cNvPr id="21" name="Text 17"/>
-          <p:cNvSpPr/>
-          <p:nvPr/>
-        </p:nvSpPr>
-        <p:spPr>
-          <a:xfrm>
-            <a:off x="8065008" y="3255264"/>
-            <a:ext cx="1326429" cy="548640"/>
-          </a:xfrm>
-          <a:prstGeom prst="rect">
-            <a:avLst/>
-          </a:prstGeom>
-          <a:noFill/>
-          <a:ln/>
-        </p:spPr>
-        <p:txBody>
-          <a:bodyPr wrap="square" lIns="0" tIns="0" rIns="0" bIns="0" rtlCol="0" anchor="ctr"/>
-          <a:lstStyle/>
-          <a:p>
-            <a:pPr algn="l" indent="0" marL="0">
-              <a:lnSpc>
-                <a:spcPct val="98000"/>
-              </a:lnSpc>
-              <a:buNone/>
-            </a:pPr>
-            <a:r>
-              <a:rPr lang="en-US" sz="1300" b="1" dirty="0">
-                <a:solidFill>
-                  <a:srgbClr val="0F3446"/>
-                </a:solidFill>
-                <a:latin typeface="Calibri" pitchFamily="34" charset="0"/>
-                <a:ea typeface="Calibri" pitchFamily="34" charset="-122"/>
-                <a:cs typeface="Calibri" pitchFamily="34" charset="-120"/>
-              </a:rPr>
-              <a:t>Chronic slope</a:t>
-            </a:r>
-            <a:endParaRPr lang="en-US" sz="1300" dirty="0"/>
-          </a:p>
-        </p:txBody>
-      </p:sp>
-      <p:sp>
-        <p:nvSpPr>
-          <p:cNvPr id="22" name="Text 18"/>
-          <p:cNvSpPr/>
-          <p:nvPr/>
-        </p:nvSpPr>
-        <p:spPr>
-          <a:xfrm>
-            <a:off x="9574317" y="3255264"/>
-            <a:ext cx="823326" cy="548640"/>
-          </a:xfrm>
-          <a:prstGeom prst="rect">
-            <a:avLst/>
-          </a:prstGeom>
-          <a:noFill/>
-          <a:ln/>
-        </p:spPr>
-        <p:txBody>
-          <a:bodyPr wrap="square" lIns="0" tIns="0" rIns="0" bIns="0" rtlCol="0" anchor="ctr"/>
-          <a:lstStyle/>
-          <a:p>
-            <a:pPr algn="ctr" indent="0" marL="0">
-              <a:lnSpc>
-                <a:spcPct val="98000"/>
-              </a:lnSpc>
-              <a:buNone/>
-            </a:pPr>
-            <a:r>
-              <a:rPr lang="en-US" sz="1300" b="1" dirty="0">
-                <a:solidFill>
-                  <a:srgbClr val="0E8385"/>
-                </a:solidFill>
-                <a:latin typeface="Calibri" pitchFamily="34" charset="0"/>
-                <a:ea typeface="Calibri" pitchFamily="34" charset="-122"/>
-                <a:cs typeface="Calibri" pitchFamily="34" charset="-120"/>
-              </a:rPr>
-              <a:t>+1.2</a:t>
-            </a:r>
-            <a:endParaRPr lang="en-US" sz="1300" dirty="0"/>
-          </a:p>
-        </p:txBody>
-      </p:sp>
-      <p:sp>
-        <p:nvSpPr>
-          <p:cNvPr id="23" name="Text 19"/>
-          <p:cNvSpPr/>
-          <p:nvPr/>
-        </p:nvSpPr>
-        <p:spPr>
-          <a:xfrm>
-            <a:off x="10580522" y="3255264"/>
-            <a:ext cx="895198" cy="548640"/>
-          </a:xfrm>
-          <a:prstGeom prst="rect">
-            <a:avLst/>
-          </a:prstGeom>
-          <a:noFill/>
-          <a:ln/>
-        </p:spPr>
-        <p:txBody>
-          <a:bodyPr wrap="square" lIns="0" tIns="0" rIns="0" bIns="0" rtlCol="0" anchor="ctr"/>
-          <a:lstStyle/>
-          <a:p>
-            <a:pPr algn="ctr" indent="0" marL="0">
-              <a:lnSpc>
-                <a:spcPct val="98000"/>
-              </a:lnSpc>
-              <a:buNone/>
-            </a:pPr>
-            <a:r>
-              <a:rPr lang="en-US" sz="1300" dirty="0">
-                <a:solidFill>
-                  <a:srgbClr val="13212A"/>
-                </a:solidFill>
-                <a:latin typeface="Calibri" pitchFamily="34" charset="0"/>
-                <a:ea typeface="Calibri" pitchFamily="34" charset="-122"/>
-                <a:cs typeface="Calibri" pitchFamily="34" charset="-120"/>
-              </a:rPr>
-              <a:t>0.9 to 1.6</a:t>
-            </a:r>
-            <a:endParaRPr lang="en-US" sz="1300" dirty="0"/>
-          </a:p>
-        </p:txBody>
-      </p:sp>
-      <p:sp>
-        <p:nvSpPr>
-          <p:cNvPr id="24" name="Text 20"/>
-          <p:cNvSpPr/>
-          <p:nvPr/>
-        </p:nvSpPr>
-        <p:spPr>
-          <a:xfrm>
-            <a:off x="7955280" y="3941064"/>
-            <a:ext cx="3593592" cy="548640"/>
-          </a:xfrm>
-          <a:prstGeom prst="rect">
-            <a:avLst/>
-          </a:prstGeom>
-          <a:noFill/>
-          <a:ln/>
-        </p:spPr>
-        <p:txBody>
-          <a:bodyPr wrap="square" lIns="0" tIns="0" rIns="0" bIns="0" rtlCol="0" anchor="ctr"/>
-          <a:lstStyle/>
-          <a:p>
-            <a:pPr indent="0" marL="0">
-              <a:lnSpc>
-                <a:spcPct val="115000"/>
-              </a:lnSpc>
-              <a:buNone/>
-            </a:pPr>
-            <a:r>
-              <a:rPr lang="en-US" sz="1250" i="1" dirty="0">
-                <a:solidFill>
-                  <a:srgbClr val="4E5E66"/>
-                </a:solidFill>
-                <a:latin typeface="Calibri" pitchFamily="34" charset="0"/>
-                <a:ea typeface="Calibri" pitchFamily="34" charset="-122"/>
-                <a:cs typeface="Calibri" pitchFamily="34" charset="-120"/>
-              </a:rPr>
-              <a:t>P &lt; 0.001 for the total slope. Difference = finerenone minus placebo; positive favors finerenone.</a:t>
-            </a:r>
-            <a:endParaRPr lang="en-US" sz="1250" dirty="0"/>
-          </a:p>
-        </p:txBody>
-      </p:sp>
-      <p:sp>
-        <p:nvSpPr>
-          <p:cNvPr id="25" name="Text 21"/>
+      <p:pic>
+        <p:nvPicPr>
+          <p:cNvPr id="7" name="Image 1" descr="fig1B.png">    </p:cNvPr>
+          <p:cNvPicPr>
+            <a:picLocks noChangeAspect="1"/>
+          </p:cNvPicPr>
+          <p:nvPr/>
+        </p:nvPicPr>
+        <p:blipFill>
+          <a:blip r:embed="rId2"/>
+          <a:stretch>
+            <a:fillRect/>
+          </a:stretch>
+        </p:blipFill>
+        <p:spPr>
+          <a:xfrm>
+            <a:off x="1252728" y="1783080"/>
+            <a:ext cx="9692640" cy="4041648"/>
+          </a:xfrm>
+          <a:prstGeom prst="rect">
+            <a:avLst/>
+          </a:prstGeom>
+        </p:spPr>
+      </p:pic>
+      <p:sp>
+        <p:nvSpPr>
+          <p:cNvPr id="8" name="Text 4"/>
           <p:cNvSpPr/>
           <p:nvPr/>
         </p:nvSpPr>
@@ -11287,7 +10279,7 @@
                 <a:ea typeface="Calibri" pitchFamily="34" charset="-122"/>
                 <a:cs typeface="Calibri" pitchFamily="34" charset="-120"/>
               </a:rPr>
-              <a:t>Adapted from Figure 1B.</a:t>
+              <a:t>Figure 1B.  Heerspink et al., N Engl J Med 2026.</a:t>
             </a:r>
             <a:endParaRPr lang="en-US" sz="850" dirty="0"/>
           </a:p>
@@ -11295,7 +10287,7 @@
       </p:sp>
       <p:sp>
         <p:nvSpPr>
-          <p:cNvPr id="26" name="Text 22"/>
+          <p:cNvPr id="9" name="Text 5"/>
           <p:cNvSpPr/>
           <p:nvPr/>
         </p:nvSpPr>
@@ -11348,7 +10340,7 @@
       </p:sp>
       <p:sp>
         <p:nvSpPr>
-          <p:cNvPr id="27" name="Text 23"/>
+          <p:cNvPr id="10" name="Text 6"/>
           <p:cNvSpPr/>
           <p:nvPr/>
         </p:nvSpPr>
@@ -11530,8 +10522,8 @@
         </p:nvSpPr>
         <p:spPr>
           <a:xfrm>
-            <a:off x="640080" y="1005840"/>
-            <a:ext cx="10908792" cy="310896"/>
+            <a:off x="640080" y="987552"/>
+            <a:ext cx="10908792" cy="420624"/>
           </a:xfrm>
           <a:prstGeom prst="rect">
             <a:avLst/>
@@ -11544,2189 +10536,53 @@
           <a:lstStyle/>
           <a:p>
             <a:pPr indent="0" marL="0">
-              <a:buNone/>
-            </a:pPr>
-            <a:r>
-              <a:rPr lang="en-US" sz="1350" i="1" dirty="0">
-                <a:solidFill>
-                  <a:srgbClr val="4E5E66"/>
-                </a:solidFill>
-                <a:latin typeface="Calibri" pitchFamily="34" charset="0"/>
-                <a:ea typeface="Calibri" pitchFamily="34" charset="-122"/>
-                <a:cs typeface="Calibri" pitchFamily="34" charset="-120"/>
-              </a:rPr>
-              <a:t>Difference in eGFR slope (ml/min/1.73 m² per year). Positive favors finerenone.</a:t>
-            </a:r>
-            <a:endParaRPr lang="en-US" sz="1350" dirty="0"/>
-          </a:p>
-        </p:txBody>
-      </p:sp>
-      <p:sp>
-        <p:nvSpPr>
-          <p:cNvPr id="7" name="Shape 4"/>
-          <p:cNvSpPr/>
-          <p:nvPr/>
-        </p:nvSpPr>
-        <p:spPr>
-          <a:xfrm>
-            <a:off x="3749040" y="1508760"/>
-            <a:ext cx="0" cy="4142232"/>
-          </a:xfrm>
-          <a:prstGeom prst="line">
-            <a:avLst/>
-          </a:prstGeom>
-          <a:noFill/>
-          <a:ln w="12700">
-            <a:solidFill>
-              <a:srgbClr val="EDF2F2"/>
-            </a:solidFill>
-            <a:prstDash val="dash"/>
-          </a:ln>
-        </p:spPr>
-      </p:sp>
-      <p:sp>
-        <p:nvSpPr>
-          <p:cNvPr id="8" name="Text 5"/>
-          <p:cNvSpPr/>
-          <p:nvPr/>
-        </p:nvSpPr>
-        <p:spPr>
-          <a:xfrm>
-            <a:off x="3474720" y="5724144"/>
-            <a:ext cx="548640" cy="219456"/>
-          </a:xfrm>
-          <a:prstGeom prst="rect">
-            <a:avLst/>
-          </a:prstGeom>
-          <a:noFill/>
-          <a:ln/>
-        </p:spPr>
-        <p:txBody>
-          <a:bodyPr wrap="square" lIns="0" tIns="0" rIns="0" bIns="0" rtlCol="0" anchor="ctr"/>
-          <a:lstStyle/>
-          <a:p>
-            <a:pPr algn="ctr" indent="0" marL="0">
-              <a:buNone/>
-            </a:pPr>
-            <a:r>
-              <a:rPr lang="en-US" sz="950" dirty="0">
-                <a:solidFill>
-                  <a:srgbClr val="4E5E66"/>
-                </a:solidFill>
-                <a:latin typeface="Calibri" pitchFamily="34" charset="0"/>
-                <a:ea typeface="Calibri" pitchFamily="34" charset="-122"/>
-                <a:cs typeface="Calibri" pitchFamily="34" charset="-120"/>
-              </a:rPr>
-              <a:t>-1</a:t>
-            </a:r>
-            <a:endParaRPr lang="en-US" sz="950" dirty="0"/>
-          </a:p>
-        </p:txBody>
-      </p:sp>
-      <p:sp>
-        <p:nvSpPr>
-          <p:cNvPr id="9" name="Shape 6"/>
-          <p:cNvSpPr/>
-          <p:nvPr/>
-        </p:nvSpPr>
-        <p:spPr>
-          <a:xfrm>
-            <a:off x="5739384" y="1508760"/>
-            <a:ext cx="0" cy="4142232"/>
-          </a:xfrm>
-          <a:prstGeom prst="line">
-            <a:avLst/>
-          </a:prstGeom>
-          <a:noFill/>
-          <a:ln w="19050">
-            <a:solidFill>
-              <a:srgbClr val="9AA7AD"/>
-            </a:solidFill>
-            <a:prstDash val="solid"/>
-          </a:ln>
-        </p:spPr>
-      </p:sp>
-      <p:sp>
-        <p:nvSpPr>
-          <p:cNvPr id="10" name="Text 7"/>
-          <p:cNvSpPr/>
-          <p:nvPr/>
-        </p:nvSpPr>
-        <p:spPr>
-          <a:xfrm>
-            <a:off x="5465064" y="5724144"/>
-            <a:ext cx="548640" cy="219456"/>
-          </a:xfrm>
-          <a:prstGeom prst="rect">
-            <a:avLst/>
-          </a:prstGeom>
-          <a:noFill/>
-          <a:ln/>
-        </p:spPr>
-        <p:txBody>
-          <a:bodyPr wrap="square" lIns="0" tIns="0" rIns="0" bIns="0" rtlCol="0" anchor="ctr"/>
-          <a:lstStyle/>
-          <a:p>
-            <a:pPr algn="ctr" indent="0" marL="0">
-              <a:buNone/>
-            </a:pPr>
-            <a:r>
-              <a:rPr lang="en-US" sz="950" dirty="0">
-                <a:solidFill>
-                  <a:srgbClr val="4E5E66"/>
-                </a:solidFill>
-                <a:latin typeface="Calibri" pitchFamily="34" charset="0"/>
-                <a:ea typeface="Calibri" pitchFamily="34" charset="-122"/>
-                <a:cs typeface="Calibri" pitchFamily="34" charset="-120"/>
-              </a:rPr>
-              <a:t>0</a:t>
-            </a:r>
-            <a:endParaRPr lang="en-US" sz="950" dirty="0"/>
-          </a:p>
-        </p:txBody>
-      </p:sp>
-      <p:sp>
-        <p:nvSpPr>
-          <p:cNvPr id="11" name="Shape 8"/>
-          <p:cNvSpPr/>
-          <p:nvPr/>
-        </p:nvSpPr>
-        <p:spPr>
-          <a:xfrm>
-            <a:off x="7729728" y="1508760"/>
-            <a:ext cx="0" cy="4142232"/>
-          </a:xfrm>
-          <a:prstGeom prst="line">
-            <a:avLst/>
-          </a:prstGeom>
-          <a:noFill/>
-          <a:ln w="12700">
-            <a:solidFill>
-              <a:srgbClr val="EDF2F2"/>
-            </a:solidFill>
-            <a:prstDash val="dash"/>
-          </a:ln>
-        </p:spPr>
-      </p:sp>
-      <p:sp>
-        <p:nvSpPr>
-          <p:cNvPr id="12" name="Text 9"/>
-          <p:cNvSpPr/>
-          <p:nvPr/>
-        </p:nvSpPr>
-        <p:spPr>
-          <a:xfrm>
-            <a:off x="7455408" y="5724144"/>
-            <a:ext cx="548640" cy="219456"/>
-          </a:xfrm>
-          <a:prstGeom prst="rect">
-            <a:avLst/>
-          </a:prstGeom>
-          <a:noFill/>
-          <a:ln/>
-        </p:spPr>
-        <p:txBody>
-          <a:bodyPr wrap="square" lIns="0" tIns="0" rIns="0" bIns="0" rtlCol="0" anchor="ctr"/>
-          <a:lstStyle/>
-          <a:p>
-            <a:pPr algn="ctr" indent="0" marL="0">
-              <a:buNone/>
-            </a:pPr>
-            <a:r>
-              <a:rPr lang="en-US" sz="950" dirty="0">
-                <a:solidFill>
-                  <a:srgbClr val="4E5E66"/>
-                </a:solidFill>
-                <a:latin typeface="Calibri" pitchFamily="34" charset="0"/>
-                <a:ea typeface="Calibri" pitchFamily="34" charset="-122"/>
-                <a:cs typeface="Calibri" pitchFamily="34" charset="-120"/>
-              </a:rPr>
-              <a:t>1</a:t>
-            </a:r>
-            <a:endParaRPr lang="en-US" sz="950" dirty="0"/>
-          </a:p>
-        </p:txBody>
-      </p:sp>
-      <p:sp>
-        <p:nvSpPr>
-          <p:cNvPr id="13" name="Shape 10"/>
-          <p:cNvSpPr/>
-          <p:nvPr/>
-        </p:nvSpPr>
-        <p:spPr>
-          <a:xfrm>
-            <a:off x="9720072" y="1508760"/>
-            <a:ext cx="0" cy="4142232"/>
-          </a:xfrm>
-          <a:prstGeom prst="line">
-            <a:avLst/>
-          </a:prstGeom>
-          <a:noFill/>
-          <a:ln w="12700">
-            <a:solidFill>
-              <a:srgbClr val="EDF2F2"/>
-            </a:solidFill>
-            <a:prstDash val="dash"/>
-          </a:ln>
-        </p:spPr>
-      </p:sp>
-      <p:sp>
-        <p:nvSpPr>
-          <p:cNvPr id="14" name="Text 11"/>
-          <p:cNvSpPr/>
-          <p:nvPr/>
-        </p:nvSpPr>
-        <p:spPr>
-          <a:xfrm>
-            <a:off x="9445752" y="5724144"/>
-            <a:ext cx="548640" cy="219456"/>
-          </a:xfrm>
-          <a:prstGeom prst="rect">
-            <a:avLst/>
-          </a:prstGeom>
-          <a:noFill/>
-          <a:ln/>
-        </p:spPr>
-        <p:txBody>
-          <a:bodyPr wrap="square" lIns="0" tIns="0" rIns="0" bIns="0" rtlCol="0" anchor="ctr"/>
-          <a:lstStyle/>
-          <a:p>
-            <a:pPr algn="ctr" indent="0" marL="0">
-              <a:buNone/>
-            </a:pPr>
-            <a:r>
-              <a:rPr lang="en-US" sz="950" dirty="0">
-                <a:solidFill>
-                  <a:srgbClr val="4E5E66"/>
-                </a:solidFill>
-                <a:latin typeface="Calibri" pitchFamily="34" charset="0"/>
-                <a:ea typeface="Calibri" pitchFamily="34" charset="-122"/>
-                <a:cs typeface="Calibri" pitchFamily="34" charset="-120"/>
-              </a:rPr>
-              <a:t>2</a:t>
-            </a:r>
-            <a:endParaRPr lang="en-US" sz="950" dirty="0"/>
-          </a:p>
-        </p:txBody>
-      </p:sp>
-      <p:sp>
-        <p:nvSpPr>
-          <p:cNvPr id="15" name="Text 12"/>
-          <p:cNvSpPr/>
-          <p:nvPr/>
-        </p:nvSpPr>
-        <p:spPr>
-          <a:xfrm>
-            <a:off x="3657600" y="5961888"/>
-            <a:ext cx="1828800" cy="219456"/>
-          </a:xfrm>
-          <a:prstGeom prst="rect">
-            <a:avLst/>
-          </a:prstGeom>
-          <a:noFill/>
-          <a:ln/>
-        </p:spPr>
-        <p:txBody>
-          <a:bodyPr wrap="square" lIns="0" tIns="0" rIns="0" bIns="0" rtlCol="0" anchor="ctr"/>
-          <a:lstStyle/>
-          <a:p>
-            <a:pPr indent="0" marL="0">
-              <a:buNone/>
-            </a:pPr>
-            <a:r>
-              <a:rPr lang="en-US" sz="950" i="1" dirty="0">
-                <a:solidFill>
-                  <a:srgbClr val="4E5E66"/>
-                </a:solidFill>
-                <a:latin typeface="Calibri" pitchFamily="34" charset="0"/>
-                <a:ea typeface="Calibri" pitchFamily="34" charset="-122"/>
-                <a:cs typeface="Calibri" pitchFamily="34" charset="-120"/>
-              </a:rPr>
-              <a:t>Favors placebo</a:t>
-            </a:r>
-            <a:endParaRPr lang="en-US" sz="950" dirty="0"/>
-          </a:p>
-        </p:txBody>
-      </p:sp>
-      <p:sp>
-        <p:nvSpPr>
-          <p:cNvPr id="16" name="Text 13"/>
-          <p:cNvSpPr/>
-          <p:nvPr/>
-        </p:nvSpPr>
-        <p:spPr>
-          <a:xfrm>
-            <a:off x="7982712" y="5961888"/>
-            <a:ext cx="1828800" cy="219456"/>
-          </a:xfrm>
-          <a:prstGeom prst="rect">
-            <a:avLst/>
-          </a:prstGeom>
-          <a:noFill/>
-          <a:ln/>
-        </p:spPr>
-        <p:txBody>
-          <a:bodyPr wrap="square" lIns="0" tIns="0" rIns="0" bIns="0" rtlCol="0" anchor="ctr"/>
-          <a:lstStyle/>
-          <a:p>
-            <a:pPr algn="r" indent="0" marL="0">
-              <a:buNone/>
-            </a:pPr>
-            <a:r>
-              <a:rPr lang="en-US" sz="950" i="1" dirty="0">
-                <a:solidFill>
-                  <a:srgbClr val="4E5E66"/>
-                </a:solidFill>
-                <a:latin typeface="Calibri" pitchFamily="34" charset="0"/>
-                <a:ea typeface="Calibri" pitchFamily="34" charset="-122"/>
-                <a:cs typeface="Calibri" pitchFamily="34" charset="-120"/>
-              </a:rPr>
-              <a:t>Favors finerenone</a:t>
-            </a:r>
-            <a:endParaRPr lang="en-US" sz="950" dirty="0"/>
-          </a:p>
-        </p:txBody>
-      </p:sp>
-      <p:sp>
-        <p:nvSpPr>
-          <p:cNvPr id="17" name="Text 14"/>
-          <p:cNvSpPr/>
-          <p:nvPr/>
-        </p:nvSpPr>
-        <p:spPr>
-          <a:xfrm>
-            <a:off x="640080" y="1597291"/>
-            <a:ext cx="3017520" cy="292608"/>
-          </a:xfrm>
-          <a:prstGeom prst="rect">
-            <a:avLst/>
-          </a:prstGeom>
-          <a:noFill/>
-          <a:ln/>
-        </p:spPr>
-        <p:txBody>
-          <a:bodyPr wrap="square" lIns="0" tIns="0" rIns="0" bIns="0" rtlCol="0" anchor="ctr"/>
-          <a:lstStyle/>
-          <a:p>
-            <a:pPr indent="0" marL="0">
-              <a:buNone/>
-            </a:pPr>
-            <a:r>
-              <a:rPr lang="en-US" sz="1250" b="1" dirty="0">
-                <a:solidFill>
-                  <a:srgbClr val="0F3446"/>
-                </a:solidFill>
-                <a:latin typeface="Calibri" pitchFamily="34" charset="0"/>
-                <a:ea typeface="Calibri" pitchFamily="34" charset="-122"/>
-                <a:cs typeface="Calibri" pitchFamily="34" charset="-120"/>
-              </a:rPr>
-              <a:t>Overall</a:t>
-            </a:r>
-            <a:endParaRPr lang="en-US" sz="1250" dirty="0"/>
-          </a:p>
-        </p:txBody>
-      </p:sp>
-      <p:sp>
-        <p:nvSpPr>
-          <p:cNvPr id="18" name="Shape 15"/>
-          <p:cNvSpPr/>
-          <p:nvPr/>
-        </p:nvSpPr>
-        <p:spPr>
-          <a:xfrm>
-            <a:off x="6376294" y="1743595"/>
-            <a:ext cx="1452951" cy="0"/>
-          </a:xfrm>
-          <a:prstGeom prst="line">
-            <a:avLst/>
-          </a:prstGeom>
-          <a:noFill/>
-          <a:ln w="38100">
-            <a:solidFill>
-              <a:srgbClr val="12A3A6"/>
-            </a:solidFill>
-            <a:prstDash val="solid"/>
-          </a:ln>
-        </p:spPr>
-      </p:sp>
-      <p:sp>
-        <p:nvSpPr>
-          <p:cNvPr id="19" name="Shape 16"/>
-          <p:cNvSpPr/>
-          <p:nvPr/>
-        </p:nvSpPr>
-        <p:spPr>
-          <a:xfrm>
-            <a:off x="6376294" y="1688731"/>
-            <a:ext cx="0" cy="109728"/>
-          </a:xfrm>
-          <a:prstGeom prst="line">
-            <a:avLst/>
-          </a:prstGeom>
-          <a:noFill/>
-          <a:ln w="25400">
-            <a:solidFill>
-              <a:srgbClr val="12A3A6"/>
-            </a:solidFill>
-            <a:prstDash val="solid"/>
-          </a:ln>
-        </p:spPr>
-      </p:sp>
-      <p:sp>
-        <p:nvSpPr>
-          <p:cNvPr id="20" name="Shape 17"/>
-          <p:cNvSpPr/>
-          <p:nvPr/>
-        </p:nvSpPr>
-        <p:spPr>
-          <a:xfrm>
-            <a:off x="7829245" y="1688731"/>
-            <a:ext cx="0" cy="109728"/>
-          </a:xfrm>
-          <a:prstGeom prst="line">
-            <a:avLst/>
-          </a:prstGeom>
-          <a:noFill/>
-          <a:ln w="25400">
-            <a:solidFill>
-              <a:srgbClr val="12A3A6"/>
-            </a:solidFill>
-            <a:prstDash val="solid"/>
-          </a:ln>
-        </p:spPr>
-      </p:sp>
-      <p:sp>
-        <p:nvSpPr>
-          <p:cNvPr id="21" name="Shape 18"/>
-          <p:cNvSpPr/>
-          <p:nvPr/>
-        </p:nvSpPr>
-        <p:spPr>
-          <a:xfrm>
-            <a:off x="7033382" y="1684159"/>
-            <a:ext cx="118872" cy="118872"/>
-          </a:xfrm>
-          <a:prstGeom prst="diamond">
-            <a:avLst/>
-          </a:prstGeom>
-          <a:solidFill>
-            <a:srgbClr val="0F3446"/>
-          </a:solidFill>
-          <a:ln/>
-        </p:spPr>
-      </p:sp>
-      <p:sp>
-        <p:nvSpPr>
-          <p:cNvPr id="22" name="Text 19"/>
-          <p:cNvSpPr/>
-          <p:nvPr/>
-        </p:nvSpPr>
-        <p:spPr>
-          <a:xfrm>
-            <a:off x="9765792" y="1597291"/>
-            <a:ext cx="1783080" cy="292608"/>
-          </a:xfrm>
-          <a:prstGeom prst="rect">
-            <a:avLst/>
-          </a:prstGeom>
-          <a:noFill/>
-          <a:ln/>
-        </p:spPr>
-        <p:txBody>
-          <a:bodyPr wrap="square" lIns="0" tIns="0" rIns="0" bIns="0" rtlCol="0" anchor="ctr"/>
-          <a:lstStyle/>
-          <a:p>
-            <a:pPr indent="0" marL="0">
-              <a:buNone/>
-            </a:pPr>
-            <a:r>
-              <a:rPr lang="en-US" sz="950" b="1" dirty="0">
-                <a:solidFill>
-                  <a:srgbClr val="0F3446"/>
-                </a:solidFill>
-                <a:latin typeface="Calibri" pitchFamily="34" charset="0"/>
-                <a:ea typeface="Calibri" pitchFamily="34" charset="-122"/>
-                <a:cs typeface="Calibri" pitchFamily="34" charset="-120"/>
-              </a:rPr>
-              <a:t>0.68 (0.32 to 1.05)</a:t>
-            </a:r>
-            <a:endParaRPr lang="en-US" sz="950" dirty="0"/>
-          </a:p>
-        </p:txBody>
-      </p:sp>
-      <p:sp>
-        <p:nvSpPr>
-          <p:cNvPr id="23" name="Text 20"/>
-          <p:cNvSpPr/>
-          <p:nvPr/>
-        </p:nvSpPr>
-        <p:spPr>
-          <a:xfrm>
-            <a:off x="640080" y="1975520"/>
-            <a:ext cx="3017520" cy="292608"/>
-          </a:xfrm>
-          <a:prstGeom prst="rect">
-            <a:avLst/>
-          </a:prstGeom>
-          <a:noFill/>
-          <a:ln/>
-        </p:spPr>
-        <p:txBody>
-          <a:bodyPr wrap="square" lIns="0" tIns="0" rIns="0" bIns="0" rtlCol="0" anchor="ctr"/>
-          <a:lstStyle/>
-          <a:p>
-            <a:pPr indent="0" marL="0">
-              <a:buNone/>
-            </a:pPr>
-            <a:r>
-              <a:rPr lang="en-US" sz="1250" dirty="0">
-                <a:solidFill>
-                  <a:srgbClr val="13212A"/>
-                </a:solidFill>
-                <a:latin typeface="Calibri" pitchFamily="34" charset="0"/>
-                <a:ea typeface="Calibri" pitchFamily="34" charset="-122"/>
-                <a:cs typeface="Calibri" pitchFamily="34" charset="-120"/>
-              </a:rPr>
-              <a:t>Cause: HTN / ischemic</a:t>
-            </a:r>
-            <a:endParaRPr lang="en-US" sz="1250" dirty="0"/>
-          </a:p>
-        </p:txBody>
-      </p:sp>
-      <p:sp>
-        <p:nvSpPr>
-          <p:cNvPr id="24" name="Shape 21"/>
-          <p:cNvSpPr/>
-          <p:nvPr/>
-        </p:nvSpPr>
-        <p:spPr>
-          <a:xfrm>
-            <a:off x="5739384" y="2121824"/>
-            <a:ext cx="2726771" cy="0"/>
-          </a:xfrm>
-          <a:prstGeom prst="line">
-            <a:avLst/>
-          </a:prstGeom>
-          <a:noFill/>
-          <a:ln w="25400">
-            <a:solidFill>
-              <a:srgbClr val="6FBEC0"/>
-            </a:solidFill>
-            <a:prstDash val="solid"/>
-          </a:ln>
-        </p:spPr>
-      </p:sp>
-      <p:sp>
-        <p:nvSpPr>
-          <p:cNvPr id="25" name="Shape 22"/>
-          <p:cNvSpPr/>
-          <p:nvPr/>
-        </p:nvSpPr>
-        <p:spPr>
-          <a:xfrm>
-            <a:off x="5739384" y="2066960"/>
-            <a:ext cx="0" cy="109728"/>
-          </a:xfrm>
-          <a:prstGeom prst="line">
-            <a:avLst/>
-          </a:prstGeom>
-          <a:noFill/>
-          <a:ln w="25400">
-            <a:solidFill>
-              <a:srgbClr val="6FBEC0"/>
-            </a:solidFill>
-            <a:prstDash val="solid"/>
-          </a:ln>
-        </p:spPr>
-      </p:sp>
-      <p:sp>
-        <p:nvSpPr>
-          <p:cNvPr id="26" name="Shape 23"/>
-          <p:cNvSpPr/>
-          <p:nvPr/>
-        </p:nvSpPr>
-        <p:spPr>
-          <a:xfrm>
-            <a:off x="8466155" y="2066960"/>
-            <a:ext cx="0" cy="109728"/>
-          </a:xfrm>
-          <a:prstGeom prst="line">
-            <a:avLst/>
-          </a:prstGeom>
-          <a:noFill/>
-          <a:ln w="25400">
-            <a:solidFill>
-              <a:srgbClr val="6FBEC0"/>
-            </a:solidFill>
-            <a:prstDash val="solid"/>
-          </a:ln>
-        </p:spPr>
-      </p:sp>
-      <p:sp>
-        <p:nvSpPr>
-          <p:cNvPr id="27" name="Shape 24"/>
-          <p:cNvSpPr/>
-          <p:nvPr/>
-        </p:nvSpPr>
-        <p:spPr>
-          <a:xfrm>
-            <a:off x="7047098" y="2076104"/>
-            <a:ext cx="91440" cy="91440"/>
-          </a:xfrm>
-          <a:prstGeom prst="diamond">
-            <a:avLst/>
-          </a:prstGeom>
-          <a:solidFill>
-            <a:srgbClr val="12A3A6"/>
-          </a:solidFill>
-          <a:ln/>
-        </p:spPr>
-      </p:sp>
-      <p:sp>
-        <p:nvSpPr>
-          <p:cNvPr id="28" name="Text 25"/>
-          <p:cNvSpPr/>
-          <p:nvPr/>
-        </p:nvSpPr>
-        <p:spPr>
-          <a:xfrm>
-            <a:off x="9765792" y="1975520"/>
-            <a:ext cx="1783080" cy="292608"/>
-          </a:xfrm>
-          <a:prstGeom prst="rect">
-            <a:avLst/>
-          </a:prstGeom>
-          <a:noFill/>
-          <a:ln/>
-        </p:spPr>
-        <p:txBody>
-          <a:bodyPr wrap="square" lIns="0" tIns="0" rIns="0" bIns="0" rtlCol="0" anchor="ctr"/>
-          <a:lstStyle/>
-          <a:p>
-            <a:pPr indent="0" marL="0">
-              <a:buNone/>
-            </a:pPr>
-            <a:r>
-              <a:rPr lang="en-US" sz="950" dirty="0">
-                <a:solidFill>
-                  <a:srgbClr val="4E5E66"/>
-                </a:solidFill>
-                <a:latin typeface="Calibri" pitchFamily="34" charset="0"/>
-                <a:ea typeface="Calibri" pitchFamily="34" charset="-122"/>
-                <a:cs typeface="Calibri" pitchFamily="34" charset="-120"/>
-              </a:rPr>
-              <a:t>0.68 (0.00 to 1.37)</a:t>
-            </a:r>
-            <a:endParaRPr lang="en-US" sz="950" dirty="0"/>
-          </a:p>
-        </p:txBody>
-      </p:sp>
-      <p:sp>
-        <p:nvSpPr>
-          <p:cNvPr id="29" name="Text 26"/>
-          <p:cNvSpPr/>
-          <p:nvPr/>
-        </p:nvSpPr>
-        <p:spPr>
-          <a:xfrm>
-            <a:off x="640080" y="2353749"/>
-            <a:ext cx="3017520" cy="292608"/>
-          </a:xfrm>
-          <a:prstGeom prst="rect">
-            <a:avLst/>
-          </a:prstGeom>
-          <a:noFill/>
-          <a:ln/>
-        </p:spPr>
-        <p:txBody>
-          <a:bodyPr wrap="square" lIns="0" tIns="0" rIns="0" bIns="0" rtlCol="0" anchor="ctr"/>
-          <a:lstStyle/>
-          <a:p>
-            <a:pPr indent="0" marL="0">
-              <a:buNone/>
-            </a:pPr>
-            <a:r>
-              <a:rPr lang="en-US" sz="1250" dirty="0">
-                <a:solidFill>
-                  <a:srgbClr val="13212A"/>
-                </a:solidFill>
-                <a:latin typeface="Calibri" pitchFamily="34" charset="0"/>
-                <a:ea typeface="Calibri" pitchFamily="34" charset="-122"/>
-                <a:cs typeface="Calibri" pitchFamily="34" charset="-120"/>
-              </a:rPr>
-              <a:t>Cause: chronic GN</a:t>
-            </a:r>
-            <a:endParaRPr lang="en-US" sz="1250" dirty="0"/>
-          </a:p>
-        </p:txBody>
-      </p:sp>
-      <p:sp>
-        <p:nvSpPr>
-          <p:cNvPr id="30" name="Shape 27"/>
-          <p:cNvSpPr/>
-          <p:nvPr/>
-        </p:nvSpPr>
-        <p:spPr>
-          <a:xfrm>
-            <a:off x="6236970" y="2500053"/>
-            <a:ext cx="1930634" cy="0"/>
-          </a:xfrm>
-          <a:prstGeom prst="line">
-            <a:avLst/>
-          </a:prstGeom>
-          <a:noFill/>
-          <a:ln w="25400">
-            <a:solidFill>
-              <a:srgbClr val="6FBEC0"/>
-            </a:solidFill>
-            <a:prstDash val="solid"/>
-          </a:ln>
-        </p:spPr>
-      </p:sp>
-      <p:sp>
-        <p:nvSpPr>
-          <p:cNvPr id="31" name="Shape 28"/>
-          <p:cNvSpPr/>
-          <p:nvPr/>
-        </p:nvSpPr>
-        <p:spPr>
-          <a:xfrm>
-            <a:off x="6236970" y="2445189"/>
-            <a:ext cx="0" cy="109728"/>
-          </a:xfrm>
-          <a:prstGeom prst="line">
-            <a:avLst/>
-          </a:prstGeom>
-          <a:noFill/>
-          <a:ln w="25400">
-            <a:solidFill>
-              <a:srgbClr val="6FBEC0"/>
-            </a:solidFill>
-            <a:prstDash val="solid"/>
-          </a:ln>
-        </p:spPr>
-      </p:sp>
-      <p:sp>
-        <p:nvSpPr>
-          <p:cNvPr id="32" name="Shape 29"/>
-          <p:cNvSpPr/>
-          <p:nvPr/>
-        </p:nvSpPr>
-        <p:spPr>
-          <a:xfrm>
-            <a:off x="8167604" y="2445189"/>
-            <a:ext cx="0" cy="109728"/>
-          </a:xfrm>
-          <a:prstGeom prst="line">
-            <a:avLst/>
-          </a:prstGeom>
-          <a:noFill/>
-          <a:ln w="25400">
-            <a:solidFill>
-              <a:srgbClr val="6FBEC0"/>
-            </a:solidFill>
-            <a:prstDash val="solid"/>
-          </a:ln>
-        </p:spPr>
-      </p:sp>
-      <p:sp>
-        <p:nvSpPr>
-          <p:cNvPr id="33" name="Shape 30"/>
-          <p:cNvSpPr/>
-          <p:nvPr/>
-        </p:nvSpPr>
-        <p:spPr>
-          <a:xfrm>
-            <a:off x="7146615" y="2454333"/>
-            <a:ext cx="91440" cy="91440"/>
-          </a:xfrm>
-          <a:prstGeom prst="diamond">
-            <a:avLst/>
-          </a:prstGeom>
-          <a:solidFill>
-            <a:srgbClr val="12A3A6"/>
-          </a:solidFill>
-          <a:ln/>
-        </p:spPr>
-      </p:sp>
-      <p:sp>
-        <p:nvSpPr>
-          <p:cNvPr id="34" name="Text 31"/>
-          <p:cNvSpPr/>
-          <p:nvPr/>
-        </p:nvSpPr>
-        <p:spPr>
-          <a:xfrm>
-            <a:off x="9765792" y="2353749"/>
-            <a:ext cx="1783080" cy="292608"/>
-          </a:xfrm>
-          <a:prstGeom prst="rect">
-            <a:avLst/>
-          </a:prstGeom>
-          <a:noFill/>
-          <a:ln/>
-        </p:spPr>
-        <p:txBody>
-          <a:bodyPr wrap="square" lIns="0" tIns="0" rIns="0" bIns="0" rtlCol="0" anchor="ctr"/>
-          <a:lstStyle/>
-          <a:p>
-            <a:pPr indent="0" marL="0">
-              <a:buNone/>
-            </a:pPr>
-            <a:r>
-              <a:rPr lang="en-US" sz="950" dirty="0">
-                <a:solidFill>
-                  <a:srgbClr val="4E5E66"/>
-                </a:solidFill>
-                <a:latin typeface="Calibri" pitchFamily="34" charset="0"/>
-                <a:ea typeface="Calibri" pitchFamily="34" charset="-122"/>
-                <a:cs typeface="Calibri" pitchFamily="34" charset="-120"/>
-              </a:rPr>
-              <a:t>0.73 (0.25 to 1.22)</a:t>
-            </a:r>
-            <a:endParaRPr lang="en-US" sz="950" dirty="0"/>
-          </a:p>
-        </p:txBody>
-      </p:sp>
-      <p:sp>
-        <p:nvSpPr>
-          <p:cNvPr id="35" name="Text 32"/>
-          <p:cNvSpPr/>
-          <p:nvPr/>
-        </p:nvSpPr>
-        <p:spPr>
-          <a:xfrm>
-            <a:off x="640080" y="2731978"/>
-            <a:ext cx="3017520" cy="292608"/>
-          </a:xfrm>
-          <a:prstGeom prst="rect">
-            <a:avLst/>
-          </a:prstGeom>
-          <a:noFill/>
-          <a:ln/>
-        </p:spPr>
-        <p:txBody>
-          <a:bodyPr wrap="square" lIns="0" tIns="0" rIns="0" bIns="0" rtlCol="0" anchor="ctr"/>
-          <a:lstStyle/>
-          <a:p>
-            <a:pPr indent="0" marL="0">
-              <a:buNone/>
-            </a:pPr>
-            <a:r>
-              <a:rPr lang="en-US" sz="1250" dirty="0">
-                <a:solidFill>
-                  <a:srgbClr val="13212A"/>
-                </a:solidFill>
-                <a:latin typeface="Calibri" pitchFamily="34" charset="0"/>
-                <a:ea typeface="Calibri" pitchFamily="34" charset="-122"/>
-                <a:cs typeface="Calibri" pitchFamily="34" charset="-120"/>
-              </a:rPr>
-              <a:t>Cause: other / unknown</a:t>
-            </a:r>
-            <a:endParaRPr lang="en-US" sz="1250" dirty="0"/>
-          </a:p>
-        </p:txBody>
-      </p:sp>
-      <p:sp>
-        <p:nvSpPr>
-          <p:cNvPr id="36" name="Shape 33"/>
-          <p:cNvSpPr/>
-          <p:nvPr/>
-        </p:nvSpPr>
-        <p:spPr>
-          <a:xfrm>
-            <a:off x="4684502" y="2878282"/>
-            <a:ext cx="3920978" cy="0"/>
-          </a:xfrm>
-          <a:prstGeom prst="line">
-            <a:avLst/>
-          </a:prstGeom>
-          <a:noFill/>
-          <a:ln w="25400">
-            <a:solidFill>
-              <a:srgbClr val="6FBEC0"/>
-            </a:solidFill>
-            <a:prstDash val="solid"/>
-          </a:ln>
-        </p:spPr>
-      </p:sp>
-      <p:sp>
-        <p:nvSpPr>
-          <p:cNvPr id="37" name="Shape 34"/>
-          <p:cNvSpPr/>
-          <p:nvPr/>
-        </p:nvSpPr>
-        <p:spPr>
-          <a:xfrm>
-            <a:off x="4684502" y="2823418"/>
-            <a:ext cx="0" cy="109728"/>
-          </a:xfrm>
-          <a:prstGeom prst="line">
-            <a:avLst/>
-          </a:prstGeom>
-          <a:noFill/>
-          <a:ln w="25400">
-            <a:solidFill>
-              <a:srgbClr val="6FBEC0"/>
-            </a:solidFill>
-            <a:prstDash val="solid"/>
-          </a:ln>
-        </p:spPr>
-      </p:sp>
-      <p:sp>
-        <p:nvSpPr>
-          <p:cNvPr id="38" name="Shape 35"/>
-          <p:cNvSpPr/>
-          <p:nvPr/>
-        </p:nvSpPr>
-        <p:spPr>
-          <a:xfrm>
-            <a:off x="8605479" y="2823418"/>
-            <a:ext cx="0" cy="109728"/>
-          </a:xfrm>
-          <a:prstGeom prst="line">
-            <a:avLst/>
-          </a:prstGeom>
-          <a:noFill/>
-          <a:ln w="25400">
-            <a:solidFill>
-              <a:srgbClr val="6FBEC0"/>
-            </a:solidFill>
-            <a:prstDash val="solid"/>
-          </a:ln>
-        </p:spPr>
-      </p:sp>
-      <p:sp>
-        <p:nvSpPr>
-          <p:cNvPr id="39" name="Shape 36"/>
-          <p:cNvSpPr/>
-          <p:nvPr/>
-        </p:nvSpPr>
-        <p:spPr>
-          <a:xfrm>
-            <a:off x="6589319" y="2832562"/>
-            <a:ext cx="91440" cy="91440"/>
-          </a:xfrm>
-          <a:prstGeom prst="diamond">
-            <a:avLst/>
-          </a:prstGeom>
-          <a:solidFill>
-            <a:srgbClr val="12A3A6"/>
-          </a:solidFill>
-          <a:ln/>
-        </p:spPr>
-      </p:sp>
-      <p:sp>
-        <p:nvSpPr>
-          <p:cNvPr id="40" name="Text 37"/>
-          <p:cNvSpPr/>
-          <p:nvPr/>
-        </p:nvSpPr>
-        <p:spPr>
-          <a:xfrm>
-            <a:off x="9765792" y="2731978"/>
-            <a:ext cx="1783080" cy="292608"/>
-          </a:xfrm>
-          <a:prstGeom prst="rect">
-            <a:avLst/>
-          </a:prstGeom>
-          <a:noFill/>
-          <a:ln/>
-        </p:spPr>
-        <p:txBody>
-          <a:bodyPr wrap="square" lIns="0" tIns="0" rIns="0" bIns="0" rtlCol="0" anchor="ctr"/>
-          <a:lstStyle/>
-          <a:p>
-            <a:pPr indent="0" marL="0">
-              <a:buNone/>
-            </a:pPr>
-            <a:r>
-              <a:rPr lang="en-US" sz="950" dirty="0">
-                <a:solidFill>
-                  <a:srgbClr val="4E5E66"/>
-                </a:solidFill>
-                <a:latin typeface="Calibri" pitchFamily="34" charset="0"/>
-                <a:ea typeface="Calibri" pitchFamily="34" charset="-122"/>
-                <a:cs typeface="Calibri" pitchFamily="34" charset="-120"/>
-              </a:rPr>
-              <a:t>0.45 (-0.53 to 1.44)</a:t>
-            </a:r>
-            <a:endParaRPr lang="en-US" sz="950" dirty="0"/>
-          </a:p>
-        </p:txBody>
-      </p:sp>
-      <p:sp>
-        <p:nvSpPr>
-          <p:cNvPr id="41" name="Text 38"/>
-          <p:cNvSpPr/>
-          <p:nvPr/>
-        </p:nvSpPr>
-        <p:spPr>
-          <a:xfrm>
-            <a:off x="640080" y="3110207"/>
-            <a:ext cx="3017520" cy="292608"/>
-          </a:xfrm>
-          <a:prstGeom prst="rect">
-            <a:avLst/>
-          </a:prstGeom>
-          <a:noFill/>
-          <a:ln/>
-        </p:spPr>
-        <p:txBody>
-          <a:bodyPr wrap="square" lIns="0" tIns="0" rIns="0" bIns="0" rtlCol="0" anchor="ctr"/>
-          <a:lstStyle/>
-          <a:p>
-            <a:pPr indent="0" marL="0">
-              <a:buNone/>
-            </a:pPr>
-            <a:r>
-              <a:rPr lang="en-US" sz="1250" dirty="0">
-                <a:solidFill>
-                  <a:srgbClr val="13212A"/>
-                </a:solidFill>
-                <a:latin typeface="Calibri" pitchFamily="34" charset="0"/>
-                <a:ea typeface="Calibri" pitchFamily="34" charset="-122"/>
-                <a:cs typeface="Calibri" pitchFamily="34" charset="-120"/>
-              </a:rPr>
-              <a:t>eGFR &lt; 45</a:t>
-            </a:r>
-            <a:endParaRPr lang="en-US" sz="1250" dirty="0"/>
-          </a:p>
-        </p:txBody>
-      </p:sp>
-      <p:sp>
-        <p:nvSpPr>
-          <p:cNvPr id="42" name="Shape 39"/>
-          <p:cNvSpPr/>
-          <p:nvPr/>
-        </p:nvSpPr>
-        <p:spPr>
-          <a:xfrm>
-            <a:off x="5958322" y="3256511"/>
-            <a:ext cx="2010247" cy="0"/>
-          </a:xfrm>
-          <a:prstGeom prst="line">
-            <a:avLst/>
-          </a:prstGeom>
-          <a:noFill/>
-          <a:ln w="25400">
-            <a:solidFill>
-              <a:srgbClr val="6FBEC0"/>
-            </a:solidFill>
-            <a:prstDash val="solid"/>
-          </a:ln>
-        </p:spPr>
-      </p:sp>
-      <p:sp>
-        <p:nvSpPr>
-          <p:cNvPr id="43" name="Shape 40"/>
-          <p:cNvSpPr/>
-          <p:nvPr/>
-        </p:nvSpPr>
-        <p:spPr>
-          <a:xfrm>
-            <a:off x="5958322" y="3201647"/>
-            <a:ext cx="0" cy="109728"/>
-          </a:xfrm>
-          <a:prstGeom prst="line">
-            <a:avLst/>
-          </a:prstGeom>
-          <a:noFill/>
-          <a:ln w="25400">
-            <a:solidFill>
-              <a:srgbClr val="6FBEC0"/>
-            </a:solidFill>
-            <a:prstDash val="solid"/>
-          </a:ln>
-        </p:spPr>
-      </p:sp>
-      <p:sp>
-        <p:nvSpPr>
-          <p:cNvPr id="44" name="Shape 41"/>
-          <p:cNvSpPr/>
-          <p:nvPr/>
-        </p:nvSpPr>
-        <p:spPr>
-          <a:xfrm>
-            <a:off x="7968569" y="3201647"/>
-            <a:ext cx="0" cy="109728"/>
-          </a:xfrm>
-          <a:prstGeom prst="line">
-            <a:avLst/>
-          </a:prstGeom>
-          <a:noFill/>
-          <a:ln w="25400">
-            <a:solidFill>
-              <a:srgbClr val="6FBEC0"/>
-            </a:solidFill>
-            <a:prstDash val="solid"/>
-          </a:ln>
-        </p:spPr>
-      </p:sp>
-      <p:sp>
-        <p:nvSpPr>
-          <p:cNvPr id="45" name="Shape 42"/>
-          <p:cNvSpPr/>
-          <p:nvPr/>
-        </p:nvSpPr>
-        <p:spPr>
-          <a:xfrm>
-            <a:off x="6907774" y="3210791"/>
-            <a:ext cx="91440" cy="91440"/>
-          </a:xfrm>
-          <a:prstGeom prst="diamond">
-            <a:avLst/>
-          </a:prstGeom>
-          <a:solidFill>
-            <a:srgbClr val="12A3A6"/>
-          </a:solidFill>
-          <a:ln/>
-        </p:spPr>
-      </p:sp>
-      <p:sp>
-        <p:nvSpPr>
-          <p:cNvPr id="46" name="Text 43"/>
-          <p:cNvSpPr/>
-          <p:nvPr/>
-        </p:nvSpPr>
-        <p:spPr>
-          <a:xfrm>
-            <a:off x="9765792" y="3110207"/>
-            <a:ext cx="1783080" cy="292608"/>
-          </a:xfrm>
-          <a:prstGeom prst="rect">
-            <a:avLst/>
-          </a:prstGeom>
-          <a:noFill/>
-          <a:ln/>
-        </p:spPr>
-        <p:txBody>
-          <a:bodyPr wrap="square" lIns="0" tIns="0" rIns="0" bIns="0" rtlCol="0" anchor="ctr"/>
-          <a:lstStyle/>
-          <a:p>
-            <a:pPr indent="0" marL="0">
-              <a:buNone/>
-            </a:pPr>
-            <a:r>
-              <a:rPr lang="en-US" sz="950" dirty="0">
-                <a:solidFill>
-                  <a:srgbClr val="4E5E66"/>
-                </a:solidFill>
-                <a:latin typeface="Calibri" pitchFamily="34" charset="0"/>
-                <a:ea typeface="Calibri" pitchFamily="34" charset="-122"/>
-                <a:cs typeface="Calibri" pitchFamily="34" charset="-120"/>
-              </a:rPr>
-              <a:t>0.61 (0.11 to 1.12)</a:t>
-            </a:r>
-            <a:endParaRPr lang="en-US" sz="950" dirty="0"/>
-          </a:p>
-        </p:txBody>
-      </p:sp>
-      <p:sp>
-        <p:nvSpPr>
-          <p:cNvPr id="47" name="Text 44"/>
-          <p:cNvSpPr/>
-          <p:nvPr/>
-        </p:nvSpPr>
-        <p:spPr>
-          <a:xfrm>
-            <a:off x="640080" y="3488436"/>
-            <a:ext cx="3017520" cy="292608"/>
-          </a:xfrm>
-          <a:prstGeom prst="rect">
-            <a:avLst/>
-          </a:prstGeom>
-          <a:noFill/>
-          <a:ln/>
-        </p:spPr>
-        <p:txBody>
-          <a:bodyPr wrap="square" lIns="0" tIns="0" rIns="0" bIns="0" rtlCol="0" anchor="ctr"/>
-          <a:lstStyle/>
-          <a:p>
-            <a:pPr indent="0" marL="0">
-              <a:buNone/>
-            </a:pPr>
-            <a:r>
-              <a:rPr lang="en-US" sz="1250" dirty="0">
-                <a:solidFill>
-                  <a:srgbClr val="13212A"/>
-                </a:solidFill>
-                <a:latin typeface="Calibri" pitchFamily="34" charset="0"/>
-                <a:ea typeface="Calibri" pitchFamily="34" charset="-122"/>
-                <a:cs typeface="Calibri" pitchFamily="34" charset="-120"/>
-              </a:rPr>
-              <a:t>eGFR 45 to &lt;60</a:t>
-            </a:r>
-            <a:endParaRPr lang="en-US" sz="1250" dirty="0"/>
-          </a:p>
-        </p:txBody>
-      </p:sp>
-      <p:sp>
-        <p:nvSpPr>
-          <p:cNvPr id="48" name="Shape 45"/>
-          <p:cNvSpPr/>
-          <p:nvPr/>
-        </p:nvSpPr>
-        <p:spPr>
-          <a:xfrm>
-            <a:off x="6416101" y="3634740"/>
-            <a:ext cx="2806385" cy="0"/>
-          </a:xfrm>
-          <a:prstGeom prst="line">
-            <a:avLst/>
-          </a:prstGeom>
-          <a:noFill/>
-          <a:ln w="25400">
-            <a:solidFill>
-              <a:srgbClr val="6FBEC0"/>
-            </a:solidFill>
-            <a:prstDash val="solid"/>
-          </a:ln>
-        </p:spPr>
-      </p:sp>
-      <p:sp>
-        <p:nvSpPr>
-          <p:cNvPr id="49" name="Shape 46"/>
-          <p:cNvSpPr/>
-          <p:nvPr/>
-        </p:nvSpPr>
-        <p:spPr>
-          <a:xfrm>
-            <a:off x="6416101" y="3579876"/>
-            <a:ext cx="0" cy="109728"/>
-          </a:xfrm>
-          <a:prstGeom prst="line">
-            <a:avLst/>
-          </a:prstGeom>
-          <a:noFill/>
-          <a:ln w="25400">
-            <a:solidFill>
-              <a:srgbClr val="6FBEC0"/>
-            </a:solidFill>
-            <a:prstDash val="solid"/>
-          </a:ln>
-        </p:spPr>
-      </p:sp>
-      <p:sp>
-        <p:nvSpPr>
-          <p:cNvPr id="50" name="Shape 47"/>
-          <p:cNvSpPr/>
-          <p:nvPr/>
-        </p:nvSpPr>
-        <p:spPr>
-          <a:xfrm>
-            <a:off x="9222486" y="3579876"/>
-            <a:ext cx="0" cy="109728"/>
-          </a:xfrm>
-          <a:prstGeom prst="line">
-            <a:avLst/>
-          </a:prstGeom>
-          <a:noFill/>
-          <a:ln w="25400">
-            <a:solidFill>
-              <a:srgbClr val="6FBEC0"/>
-            </a:solidFill>
-            <a:prstDash val="solid"/>
-          </a:ln>
-        </p:spPr>
-      </p:sp>
-      <p:sp>
-        <p:nvSpPr>
-          <p:cNvPr id="51" name="Shape 48"/>
-          <p:cNvSpPr/>
-          <p:nvPr/>
-        </p:nvSpPr>
-        <p:spPr>
-          <a:xfrm>
-            <a:off x="7783525" y="3589020"/>
-            <a:ext cx="91440" cy="91440"/>
-          </a:xfrm>
-          <a:prstGeom prst="diamond">
-            <a:avLst/>
-          </a:prstGeom>
-          <a:solidFill>
-            <a:srgbClr val="12A3A6"/>
-          </a:solidFill>
-          <a:ln/>
-        </p:spPr>
-      </p:sp>
-      <p:sp>
-        <p:nvSpPr>
-          <p:cNvPr id="52" name="Text 49"/>
-          <p:cNvSpPr/>
-          <p:nvPr/>
-        </p:nvSpPr>
-        <p:spPr>
-          <a:xfrm>
-            <a:off x="9765792" y="3488436"/>
-            <a:ext cx="1783080" cy="292608"/>
-          </a:xfrm>
-          <a:prstGeom prst="rect">
-            <a:avLst/>
-          </a:prstGeom>
-          <a:noFill/>
-          <a:ln/>
-        </p:spPr>
-        <p:txBody>
-          <a:bodyPr wrap="square" lIns="0" tIns="0" rIns="0" bIns="0" rtlCol="0" anchor="ctr"/>
-          <a:lstStyle/>
-          <a:p>
-            <a:pPr indent="0" marL="0">
-              <a:buNone/>
-            </a:pPr>
-            <a:r>
-              <a:rPr lang="en-US" sz="950" dirty="0">
-                <a:solidFill>
-                  <a:srgbClr val="4E5E66"/>
-                </a:solidFill>
-                <a:latin typeface="Calibri" pitchFamily="34" charset="0"/>
-                <a:ea typeface="Calibri" pitchFamily="34" charset="-122"/>
-                <a:cs typeface="Calibri" pitchFamily="34" charset="-120"/>
-              </a:rPr>
-              <a:t>1.05 (0.34 to 1.75)</a:t>
-            </a:r>
-            <a:endParaRPr lang="en-US" sz="950" dirty="0"/>
-          </a:p>
-        </p:txBody>
-      </p:sp>
-      <p:sp>
-        <p:nvSpPr>
-          <p:cNvPr id="53" name="Text 50"/>
-          <p:cNvSpPr/>
-          <p:nvPr/>
-        </p:nvSpPr>
-        <p:spPr>
-          <a:xfrm>
-            <a:off x="640080" y="3866665"/>
-            <a:ext cx="3017520" cy="292608"/>
-          </a:xfrm>
-          <a:prstGeom prst="rect">
-            <a:avLst/>
-          </a:prstGeom>
-          <a:noFill/>
-          <a:ln/>
-        </p:spPr>
-        <p:txBody>
-          <a:bodyPr wrap="square" lIns="0" tIns="0" rIns="0" bIns="0" rtlCol="0" anchor="ctr"/>
-          <a:lstStyle/>
-          <a:p>
-            <a:pPr indent="0" marL="0">
-              <a:buNone/>
-            </a:pPr>
-            <a:r>
-              <a:rPr lang="en-US" sz="1250" dirty="0">
-                <a:solidFill>
-                  <a:srgbClr val="13212A"/>
-                </a:solidFill>
-                <a:latin typeface="Calibri" pitchFamily="34" charset="0"/>
-                <a:ea typeface="Calibri" pitchFamily="34" charset="-122"/>
-                <a:cs typeface="Calibri" pitchFamily="34" charset="-120"/>
-              </a:rPr>
-              <a:t>eGFR ≥ 60</a:t>
-            </a:r>
-            <a:endParaRPr lang="en-US" sz="1250" dirty="0"/>
-          </a:p>
-        </p:txBody>
-      </p:sp>
-      <p:sp>
-        <p:nvSpPr>
-          <p:cNvPr id="54" name="Shape 51"/>
-          <p:cNvSpPr/>
-          <p:nvPr/>
-        </p:nvSpPr>
-        <p:spPr>
-          <a:xfrm>
-            <a:off x="4943246" y="4012969"/>
-            <a:ext cx="3244261" cy="0"/>
-          </a:xfrm>
-          <a:prstGeom prst="line">
-            <a:avLst/>
-          </a:prstGeom>
-          <a:noFill/>
-          <a:ln w="25400">
-            <a:solidFill>
-              <a:srgbClr val="6FBEC0"/>
-            </a:solidFill>
-            <a:prstDash val="solid"/>
-          </a:ln>
-        </p:spPr>
-      </p:sp>
-      <p:sp>
-        <p:nvSpPr>
-          <p:cNvPr id="55" name="Shape 52"/>
-          <p:cNvSpPr/>
-          <p:nvPr/>
-        </p:nvSpPr>
-        <p:spPr>
-          <a:xfrm>
-            <a:off x="4943246" y="3958105"/>
-            <a:ext cx="0" cy="109728"/>
-          </a:xfrm>
-          <a:prstGeom prst="line">
-            <a:avLst/>
-          </a:prstGeom>
-          <a:noFill/>
-          <a:ln w="25400">
-            <a:solidFill>
-              <a:srgbClr val="6FBEC0"/>
-            </a:solidFill>
-            <a:prstDash val="solid"/>
-          </a:ln>
-        </p:spPr>
-      </p:sp>
-      <p:sp>
-        <p:nvSpPr>
-          <p:cNvPr id="56" name="Shape 53"/>
-          <p:cNvSpPr/>
-          <p:nvPr/>
-        </p:nvSpPr>
-        <p:spPr>
-          <a:xfrm>
-            <a:off x="8187507" y="3958105"/>
-            <a:ext cx="0" cy="109728"/>
-          </a:xfrm>
-          <a:prstGeom prst="line">
-            <a:avLst/>
-          </a:prstGeom>
-          <a:noFill/>
-          <a:ln w="25400">
-            <a:solidFill>
-              <a:srgbClr val="6FBEC0"/>
-            </a:solidFill>
-            <a:prstDash val="solid"/>
-          </a:ln>
-        </p:spPr>
-      </p:sp>
-      <p:sp>
-        <p:nvSpPr>
-          <p:cNvPr id="57" name="Shape 54"/>
-          <p:cNvSpPr/>
-          <p:nvPr/>
-        </p:nvSpPr>
-        <p:spPr>
-          <a:xfrm>
-            <a:off x="6509705" y="3967249"/>
-            <a:ext cx="91440" cy="91440"/>
-          </a:xfrm>
-          <a:prstGeom prst="diamond">
-            <a:avLst/>
-          </a:prstGeom>
-          <a:solidFill>
-            <a:srgbClr val="12A3A6"/>
-          </a:solidFill>
-          <a:ln/>
-        </p:spPr>
-      </p:sp>
-      <p:sp>
-        <p:nvSpPr>
-          <p:cNvPr id="58" name="Text 55"/>
-          <p:cNvSpPr/>
-          <p:nvPr/>
-        </p:nvSpPr>
-        <p:spPr>
-          <a:xfrm>
-            <a:off x="9765792" y="3866665"/>
-            <a:ext cx="1783080" cy="292608"/>
-          </a:xfrm>
-          <a:prstGeom prst="rect">
-            <a:avLst/>
-          </a:prstGeom>
-          <a:noFill/>
-          <a:ln/>
-        </p:spPr>
-        <p:txBody>
-          <a:bodyPr wrap="square" lIns="0" tIns="0" rIns="0" bIns="0" rtlCol="0" anchor="ctr"/>
-          <a:lstStyle/>
-          <a:p>
-            <a:pPr indent="0" marL="0">
-              <a:buNone/>
-            </a:pPr>
-            <a:r>
-              <a:rPr lang="en-US" sz="950" dirty="0">
-                <a:solidFill>
-                  <a:srgbClr val="4E5E66"/>
-                </a:solidFill>
-                <a:latin typeface="Calibri" pitchFamily="34" charset="0"/>
-                <a:ea typeface="Calibri" pitchFamily="34" charset="-122"/>
-                <a:cs typeface="Calibri" pitchFamily="34" charset="-120"/>
-              </a:rPr>
-              <a:t>0.41 (-0.40 to 1.23)</a:t>
-            </a:r>
-            <a:endParaRPr lang="en-US" sz="950" dirty="0"/>
-          </a:p>
-        </p:txBody>
-      </p:sp>
-      <p:sp>
-        <p:nvSpPr>
-          <p:cNvPr id="59" name="Text 56"/>
-          <p:cNvSpPr/>
-          <p:nvPr/>
-        </p:nvSpPr>
-        <p:spPr>
-          <a:xfrm>
-            <a:off x="640080" y="4244894"/>
-            <a:ext cx="3017520" cy="292608"/>
-          </a:xfrm>
-          <a:prstGeom prst="rect">
-            <a:avLst/>
-          </a:prstGeom>
-          <a:noFill/>
-          <a:ln/>
-        </p:spPr>
-        <p:txBody>
-          <a:bodyPr wrap="square" lIns="0" tIns="0" rIns="0" bIns="0" rtlCol="0" anchor="ctr"/>
-          <a:lstStyle/>
-          <a:p>
-            <a:pPr indent="0" marL="0">
-              <a:buNone/>
-            </a:pPr>
-            <a:r>
-              <a:rPr lang="en-US" sz="1250" dirty="0">
-                <a:solidFill>
-                  <a:srgbClr val="13212A"/>
-                </a:solidFill>
-                <a:latin typeface="Calibri" pitchFamily="34" charset="0"/>
-                <a:ea typeface="Calibri" pitchFamily="34" charset="-122"/>
-                <a:cs typeface="Calibri" pitchFamily="34" charset="-120"/>
-              </a:rPr>
-              <a:t>UACR ≤ 1000</a:t>
-            </a:r>
-            <a:endParaRPr lang="en-US" sz="1250" dirty="0"/>
-          </a:p>
-        </p:txBody>
-      </p:sp>
-      <p:sp>
-        <p:nvSpPr>
-          <p:cNvPr id="60" name="Shape 57"/>
-          <p:cNvSpPr/>
-          <p:nvPr/>
-        </p:nvSpPr>
-        <p:spPr>
-          <a:xfrm>
-            <a:off x="5619963" y="4391198"/>
-            <a:ext cx="1851020" cy="0"/>
-          </a:xfrm>
-          <a:prstGeom prst="line">
-            <a:avLst/>
-          </a:prstGeom>
-          <a:noFill/>
-          <a:ln w="25400">
-            <a:solidFill>
-              <a:srgbClr val="6FBEC0"/>
-            </a:solidFill>
-            <a:prstDash val="solid"/>
-          </a:ln>
-        </p:spPr>
-      </p:sp>
-      <p:sp>
-        <p:nvSpPr>
-          <p:cNvPr id="61" name="Shape 58"/>
-          <p:cNvSpPr/>
-          <p:nvPr/>
-        </p:nvSpPr>
-        <p:spPr>
-          <a:xfrm>
-            <a:off x="5619963" y="4336334"/>
-            <a:ext cx="0" cy="109728"/>
-          </a:xfrm>
-          <a:prstGeom prst="line">
-            <a:avLst/>
-          </a:prstGeom>
-          <a:noFill/>
-          <a:ln w="25400">
-            <a:solidFill>
-              <a:srgbClr val="6FBEC0"/>
-            </a:solidFill>
-            <a:prstDash val="solid"/>
-          </a:ln>
-        </p:spPr>
-      </p:sp>
-      <p:sp>
-        <p:nvSpPr>
-          <p:cNvPr id="62" name="Shape 59"/>
-          <p:cNvSpPr/>
-          <p:nvPr/>
-        </p:nvSpPr>
-        <p:spPr>
-          <a:xfrm>
-            <a:off x="7470983" y="4336334"/>
-            <a:ext cx="0" cy="109728"/>
-          </a:xfrm>
-          <a:prstGeom prst="line">
-            <a:avLst/>
-          </a:prstGeom>
-          <a:noFill/>
-          <a:ln w="25400">
-            <a:solidFill>
-              <a:srgbClr val="6FBEC0"/>
-            </a:solidFill>
-            <a:prstDash val="solid"/>
-          </a:ln>
-        </p:spPr>
-      </p:sp>
-      <p:sp>
-        <p:nvSpPr>
-          <p:cNvPr id="63" name="Shape 60"/>
-          <p:cNvSpPr/>
-          <p:nvPr/>
-        </p:nvSpPr>
-        <p:spPr>
-          <a:xfrm>
-            <a:off x="6489802" y="4345478"/>
-            <a:ext cx="91440" cy="91440"/>
-          </a:xfrm>
-          <a:prstGeom prst="diamond">
-            <a:avLst/>
-          </a:prstGeom>
-          <a:solidFill>
-            <a:srgbClr val="12A3A6"/>
-          </a:solidFill>
-          <a:ln/>
-        </p:spPr>
-      </p:sp>
-      <p:sp>
-        <p:nvSpPr>
-          <p:cNvPr id="64" name="Text 61"/>
-          <p:cNvSpPr/>
-          <p:nvPr/>
-        </p:nvSpPr>
-        <p:spPr>
-          <a:xfrm>
-            <a:off x="9765792" y="4244894"/>
-            <a:ext cx="1783080" cy="292608"/>
-          </a:xfrm>
-          <a:prstGeom prst="rect">
-            <a:avLst/>
-          </a:prstGeom>
-          <a:noFill/>
-          <a:ln/>
-        </p:spPr>
-        <p:txBody>
-          <a:bodyPr wrap="square" lIns="0" tIns="0" rIns="0" bIns="0" rtlCol="0" anchor="ctr"/>
-          <a:lstStyle/>
-          <a:p>
-            <a:pPr indent="0" marL="0">
-              <a:buNone/>
-            </a:pPr>
-            <a:r>
-              <a:rPr lang="en-US" sz="950" dirty="0">
-                <a:solidFill>
-                  <a:srgbClr val="4E5E66"/>
-                </a:solidFill>
-                <a:latin typeface="Calibri" pitchFamily="34" charset="0"/>
-                <a:ea typeface="Calibri" pitchFamily="34" charset="-122"/>
-                <a:cs typeface="Calibri" pitchFamily="34" charset="-120"/>
-              </a:rPr>
-              <a:t>0.40 (-0.06 to 0.87)</a:t>
-            </a:r>
-            <a:endParaRPr lang="en-US" sz="950" dirty="0"/>
-          </a:p>
-        </p:txBody>
-      </p:sp>
-      <p:sp>
-        <p:nvSpPr>
-          <p:cNvPr id="65" name="Text 62"/>
-          <p:cNvSpPr/>
-          <p:nvPr/>
-        </p:nvSpPr>
-        <p:spPr>
-          <a:xfrm>
-            <a:off x="640080" y="4623123"/>
-            <a:ext cx="3017520" cy="292608"/>
-          </a:xfrm>
-          <a:prstGeom prst="rect">
-            <a:avLst/>
-          </a:prstGeom>
-          <a:noFill/>
-          <a:ln/>
-        </p:spPr>
-        <p:txBody>
-          <a:bodyPr wrap="square" lIns="0" tIns="0" rIns="0" bIns="0" rtlCol="0" anchor="ctr"/>
-          <a:lstStyle/>
-          <a:p>
-            <a:pPr indent="0" marL="0">
-              <a:buNone/>
-            </a:pPr>
-            <a:r>
-              <a:rPr lang="en-US" sz="1250" dirty="0">
-                <a:solidFill>
-                  <a:srgbClr val="13212A"/>
-                </a:solidFill>
-                <a:latin typeface="Calibri" pitchFamily="34" charset="0"/>
-                <a:ea typeface="Calibri" pitchFamily="34" charset="-122"/>
-                <a:cs typeface="Calibri" pitchFamily="34" charset="-120"/>
-              </a:rPr>
-              <a:t>UACR &gt; 1000</a:t>
-            </a:r>
-            <a:endParaRPr lang="en-US" sz="1250" dirty="0"/>
-          </a:p>
-        </p:txBody>
-      </p:sp>
-      <p:sp>
-        <p:nvSpPr>
-          <p:cNvPr id="66" name="Shape 63"/>
-          <p:cNvSpPr/>
-          <p:nvPr/>
-        </p:nvSpPr>
-        <p:spPr>
-          <a:xfrm>
-            <a:off x="6834073" y="4769427"/>
-            <a:ext cx="2388413" cy="0"/>
-          </a:xfrm>
-          <a:prstGeom prst="line">
-            <a:avLst/>
-          </a:prstGeom>
-          <a:noFill/>
-          <a:ln w="25400">
-            <a:solidFill>
-              <a:srgbClr val="6FBEC0"/>
-            </a:solidFill>
-            <a:prstDash val="solid"/>
-          </a:ln>
-        </p:spPr>
-      </p:sp>
-      <p:sp>
-        <p:nvSpPr>
-          <p:cNvPr id="67" name="Shape 64"/>
-          <p:cNvSpPr/>
-          <p:nvPr/>
-        </p:nvSpPr>
-        <p:spPr>
-          <a:xfrm>
-            <a:off x="6834073" y="4714563"/>
-            <a:ext cx="0" cy="109728"/>
-          </a:xfrm>
-          <a:prstGeom prst="line">
-            <a:avLst/>
-          </a:prstGeom>
-          <a:noFill/>
-          <a:ln w="25400">
-            <a:solidFill>
-              <a:srgbClr val="6FBEC0"/>
-            </a:solidFill>
-            <a:prstDash val="solid"/>
-          </a:ln>
-        </p:spPr>
-      </p:sp>
-      <p:sp>
-        <p:nvSpPr>
-          <p:cNvPr id="68" name="Shape 65"/>
-          <p:cNvSpPr/>
-          <p:nvPr/>
-        </p:nvSpPr>
-        <p:spPr>
-          <a:xfrm>
-            <a:off x="9222486" y="4714563"/>
-            <a:ext cx="0" cy="109728"/>
-          </a:xfrm>
-          <a:prstGeom prst="line">
-            <a:avLst/>
-          </a:prstGeom>
-          <a:noFill/>
-          <a:ln w="25400">
-            <a:solidFill>
-              <a:srgbClr val="6FBEC0"/>
-            </a:solidFill>
-            <a:prstDash val="solid"/>
-          </a:ln>
-        </p:spPr>
-      </p:sp>
-      <p:sp>
-        <p:nvSpPr>
-          <p:cNvPr id="69" name="Shape 66"/>
-          <p:cNvSpPr/>
-          <p:nvPr/>
-        </p:nvSpPr>
-        <p:spPr>
-          <a:xfrm>
-            <a:off x="7982560" y="4723707"/>
-            <a:ext cx="91440" cy="91440"/>
-          </a:xfrm>
-          <a:prstGeom prst="diamond">
-            <a:avLst/>
-          </a:prstGeom>
-          <a:solidFill>
-            <a:srgbClr val="12A3A6"/>
-          </a:solidFill>
-          <a:ln/>
-        </p:spPr>
-      </p:sp>
-      <p:sp>
-        <p:nvSpPr>
-          <p:cNvPr id="70" name="Text 67"/>
-          <p:cNvSpPr/>
-          <p:nvPr/>
-        </p:nvSpPr>
-        <p:spPr>
-          <a:xfrm>
-            <a:off x="9765792" y="4623123"/>
-            <a:ext cx="1783080" cy="292608"/>
-          </a:xfrm>
-          <a:prstGeom prst="rect">
-            <a:avLst/>
-          </a:prstGeom>
-          <a:noFill/>
-          <a:ln/>
-        </p:spPr>
-        <p:txBody>
-          <a:bodyPr wrap="square" lIns="0" tIns="0" rIns="0" bIns="0" rtlCol="0" anchor="ctr"/>
-          <a:lstStyle/>
-          <a:p>
-            <a:pPr indent="0" marL="0">
-              <a:buNone/>
-            </a:pPr>
-            <a:r>
-              <a:rPr lang="en-US" sz="950" dirty="0">
-                <a:solidFill>
-                  <a:srgbClr val="4E5E66"/>
-                </a:solidFill>
-                <a:latin typeface="Calibri" pitchFamily="34" charset="0"/>
-                <a:ea typeface="Calibri" pitchFamily="34" charset="-122"/>
-                <a:cs typeface="Calibri" pitchFamily="34" charset="-120"/>
-              </a:rPr>
-              <a:t>1.15 (0.55 to 1.75)</a:t>
-            </a:r>
-            <a:endParaRPr lang="en-US" sz="950" dirty="0"/>
-          </a:p>
-        </p:txBody>
-      </p:sp>
-      <p:sp>
-        <p:nvSpPr>
-          <p:cNvPr id="71" name="Text 68"/>
-          <p:cNvSpPr/>
-          <p:nvPr/>
-        </p:nvSpPr>
-        <p:spPr>
-          <a:xfrm>
-            <a:off x="640080" y="5001352"/>
-            <a:ext cx="3017520" cy="292608"/>
-          </a:xfrm>
-          <a:prstGeom prst="rect">
-            <a:avLst/>
-          </a:prstGeom>
-          <a:noFill/>
-          <a:ln/>
-        </p:spPr>
-        <p:txBody>
-          <a:bodyPr wrap="square" lIns="0" tIns="0" rIns="0" bIns="0" rtlCol="0" anchor="ctr"/>
-          <a:lstStyle/>
-          <a:p>
-            <a:pPr indent="0" marL="0">
-              <a:buNone/>
-            </a:pPr>
-            <a:r>
-              <a:rPr lang="en-US" sz="1250" dirty="0">
-                <a:solidFill>
-                  <a:srgbClr val="13212A"/>
-                </a:solidFill>
-                <a:latin typeface="Calibri" pitchFamily="34" charset="0"/>
-                <a:ea typeface="Calibri" pitchFamily="34" charset="-122"/>
-                <a:cs typeface="Calibri" pitchFamily="34" charset="-120"/>
-              </a:rPr>
-              <a:t>SGLT2i: yes</a:t>
-            </a:r>
-            <a:endParaRPr lang="en-US" sz="1250" dirty="0"/>
-          </a:p>
-        </p:txBody>
-      </p:sp>
-      <p:sp>
-        <p:nvSpPr>
-          <p:cNvPr id="72" name="Shape 69"/>
-          <p:cNvSpPr/>
-          <p:nvPr/>
-        </p:nvSpPr>
-        <p:spPr>
-          <a:xfrm>
-            <a:off x="5619963" y="5147656"/>
-            <a:ext cx="3562716" cy="0"/>
-          </a:xfrm>
-          <a:prstGeom prst="line">
-            <a:avLst/>
-          </a:prstGeom>
-          <a:noFill/>
-          <a:ln w="25400">
-            <a:solidFill>
-              <a:srgbClr val="6FBEC0"/>
-            </a:solidFill>
-            <a:prstDash val="solid"/>
-          </a:ln>
-        </p:spPr>
-      </p:sp>
-      <p:sp>
-        <p:nvSpPr>
-          <p:cNvPr id="73" name="Shape 70"/>
-          <p:cNvSpPr/>
-          <p:nvPr/>
-        </p:nvSpPr>
-        <p:spPr>
-          <a:xfrm>
-            <a:off x="5619963" y="5092792"/>
-            <a:ext cx="0" cy="109728"/>
-          </a:xfrm>
-          <a:prstGeom prst="line">
-            <a:avLst/>
-          </a:prstGeom>
-          <a:noFill/>
-          <a:ln w="25400">
-            <a:solidFill>
-              <a:srgbClr val="6FBEC0"/>
-            </a:solidFill>
-            <a:prstDash val="solid"/>
-          </a:ln>
-        </p:spPr>
-      </p:sp>
-      <p:sp>
-        <p:nvSpPr>
-          <p:cNvPr id="74" name="Shape 71"/>
-          <p:cNvSpPr/>
-          <p:nvPr/>
-        </p:nvSpPr>
-        <p:spPr>
-          <a:xfrm>
-            <a:off x="9182679" y="5092792"/>
-            <a:ext cx="0" cy="109728"/>
-          </a:xfrm>
-          <a:prstGeom prst="line">
-            <a:avLst/>
-          </a:prstGeom>
-          <a:noFill/>
-          <a:ln w="25400">
-            <a:solidFill>
-              <a:srgbClr val="6FBEC0"/>
-            </a:solidFill>
-            <a:prstDash val="solid"/>
-          </a:ln>
-        </p:spPr>
-      </p:sp>
-      <p:sp>
-        <p:nvSpPr>
-          <p:cNvPr id="75" name="Shape 72"/>
-          <p:cNvSpPr/>
-          <p:nvPr/>
-        </p:nvSpPr>
-        <p:spPr>
-          <a:xfrm>
-            <a:off x="7365553" y="5101936"/>
-            <a:ext cx="91440" cy="91440"/>
-          </a:xfrm>
-          <a:prstGeom prst="diamond">
-            <a:avLst/>
-          </a:prstGeom>
-          <a:solidFill>
-            <a:srgbClr val="12A3A6"/>
-          </a:solidFill>
-          <a:ln/>
-        </p:spPr>
-      </p:sp>
-      <p:sp>
-        <p:nvSpPr>
-          <p:cNvPr id="76" name="Text 73"/>
-          <p:cNvSpPr/>
-          <p:nvPr/>
-        </p:nvSpPr>
-        <p:spPr>
-          <a:xfrm>
-            <a:off x="9765792" y="5001352"/>
-            <a:ext cx="1783080" cy="292608"/>
-          </a:xfrm>
-          <a:prstGeom prst="rect">
-            <a:avLst/>
-          </a:prstGeom>
-          <a:noFill/>
-          <a:ln/>
-        </p:spPr>
-        <p:txBody>
-          <a:bodyPr wrap="square" lIns="0" tIns="0" rIns="0" bIns="0" rtlCol="0" anchor="ctr"/>
-          <a:lstStyle/>
-          <a:p>
-            <a:pPr indent="0" marL="0">
-              <a:buNone/>
-            </a:pPr>
-            <a:r>
-              <a:rPr lang="en-US" sz="950" dirty="0">
-                <a:solidFill>
-                  <a:srgbClr val="4E5E66"/>
-                </a:solidFill>
-                <a:latin typeface="Calibri" pitchFamily="34" charset="0"/>
-                <a:ea typeface="Calibri" pitchFamily="34" charset="-122"/>
-                <a:cs typeface="Calibri" pitchFamily="34" charset="-120"/>
-              </a:rPr>
-              <a:t>0.84 (-0.06 to 1.73)</a:t>
-            </a:r>
-            <a:endParaRPr lang="en-US" sz="950" dirty="0"/>
-          </a:p>
-        </p:txBody>
-      </p:sp>
-      <p:sp>
-        <p:nvSpPr>
-          <p:cNvPr id="77" name="Text 74"/>
-          <p:cNvSpPr/>
-          <p:nvPr/>
-        </p:nvSpPr>
-        <p:spPr>
-          <a:xfrm>
-            <a:off x="640080" y="5379581"/>
-            <a:ext cx="3017520" cy="292608"/>
-          </a:xfrm>
-          <a:prstGeom prst="rect">
-            <a:avLst/>
-          </a:prstGeom>
-          <a:noFill/>
-          <a:ln/>
-        </p:spPr>
-        <p:txBody>
-          <a:bodyPr wrap="square" lIns="0" tIns="0" rIns="0" bIns="0" rtlCol="0" anchor="ctr"/>
-          <a:lstStyle/>
-          <a:p>
-            <a:pPr indent="0" marL="0">
-              <a:buNone/>
-            </a:pPr>
-            <a:r>
-              <a:rPr lang="en-US" sz="1250" dirty="0">
-                <a:solidFill>
-                  <a:srgbClr val="13212A"/>
-                </a:solidFill>
-                <a:latin typeface="Calibri" pitchFamily="34" charset="0"/>
-                <a:ea typeface="Calibri" pitchFamily="34" charset="-122"/>
-                <a:cs typeface="Calibri" pitchFamily="34" charset="-120"/>
-              </a:rPr>
-              <a:t>SGLT2i: no</a:t>
-            </a:r>
-            <a:endParaRPr lang="en-US" sz="1250" dirty="0"/>
-          </a:p>
-        </p:txBody>
-      </p:sp>
-      <p:sp>
-        <p:nvSpPr>
-          <p:cNvPr id="78" name="Shape 75"/>
-          <p:cNvSpPr/>
-          <p:nvPr/>
-        </p:nvSpPr>
-        <p:spPr>
-          <a:xfrm>
-            <a:off x="6236970" y="5525885"/>
-            <a:ext cx="1612179" cy="0"/>
-          </a:xfrm>
-          <a:prstGeom prst="line">
-            <a:avLst/>
-          </a:prstGeom>
-          <a:noFill/>
-          <a:ln w="25400">
-            <a:solidFill>
-              <a:srgbClr val="6FBEC0"/>
-            </a:solidFill>
-            <a:prstDash val="solid"/>
-          </a:ln>
-        </p:spPr>
-      </p:sp>
-      <p:sp>
-        <p:nvSpPr>
-          <p:cNvPr id="79" name="Shape 76"/>
-          <p:cNvSpPr/>
-          <p:nvPr/>
-        </p:nvSpPr>
-        <p:spPr>
-          <a:xfrm>
-            <a:off x="6236970" y="5471021"/>
-            <a:ext cx="0" cy="109728"/>
-          </a:xfrm>
-          <a:prstGeom prst="line">
-            <a:avLst/>
-          </a:prstGeom>
-          <a:noFill/>
-          <a:ln w="25400">
-            <a:solidFill>
-              <a:srgbClr val="6FBEC0"/>
-            </a:solidFill>
-            <a:prstDash val="solid"/>
-          </a:ln>
-        </p:spPr>
-      </p:sp>
-      <p:sp>
-        <p:nvSpPr>
-          <p:cNvPr id="80" name="Shape 77"/>
-          <p:cNvSpPr/>
-          <p:nvPr/>
-        </p:nvSpPr>
-        <p:spPr>
-          <a:xfrm>
-            <a:off x="7849149" y="5471021"/>
-            <a:ext cx="0" cy="109728"/>
-          </a:xfrm>
-          <a:prstGeom prst="line">
-            <a:avLst/>
-          </a:prstGeom>
-          <a:noFill/>
-          <a:ln w="25400">
-            <a:solidFill>
-              <a:srgbClr val="6FBEC0"/>
-            </a:solidFill>
-            <a:prstDash val="solid"/>
-          </a:ln>
-        </p:spPr>
-      </p:sp>
-      <p:sp>
-        <p:nvSpPr>
-          <p:cNvPr id="81" name="Shape 78"/>
-          <p:cNvSpPr/>
-          <p:nvPr/>
-        </p:nvSpPr>
-        <p:spPr>
-          <a:xfrm>
-            <a:off x="6987388" y="5480165"/>
-            <a:ext cx="91440" cy="91440"/>
-          </a:xfrm>
-          <a:prstGeom prst="diamond">
-            <a:avLst/>
-          </a:prstGeom>
-          <a:solidFill>
-            <a:srgbClr val="12A3A6"/>
-          </a:solidFill>
-          <a:ln/>
-        </p:spPr>
-      </p:sp>
-      <p:sp>
-        <p:nvSpPr>
-          <p:cNvPr id="82" name="Text 79"/>
-          <p:cNvSpPr/>
-          <p:nvPr/>
-        </p:nvSpPr>
-        <p:spPr>
-          <a:xfrm>
-            <a:off x="9765792" y="5379581"/>
-            <a:ext cx="1783080" cy="292608"/>
-          </a:xfrm>
-          <a:prstGeom prst="rect">
-            <a:avLst/>
-          </a:prstGeom>
-          <a:noFill/>
-          <a:ln/>
-        </p:spPr>
-        <p:txBody>
-          <a:bodyPr wrap="square" lIns="0" tIns="0" rIns="0" bIns="0" rtlCol="0" anchor="ctr"/>
-          <a:lstStyle/>
-          <a:p>
-            <a:pPr indent="0" marL="0">
-              <a:buNone/>
-            </a:pPr>
-            <a:r>
-              <a:rPr lang="en-US" sz="950" dirty="0">
-                <a:solidFill>
-                  <a:srgbClr val="4E5E66"/>
-                </a:solidFill>
-                <a:latin typeface="Calibri" pitchFamily="34" charset="0"/>
-                <a:ea typeface="Calibri" pitchFamily="34" charset="-122"/>
-                <a:cs typeface="Calibri" pitchFamily="34" charset="-120"/>
-              </a:rPr>
-              <a:t>0.65 (0.25 to 1.06)</a:t>
-            </a:r>
-            <a:endParaRPr lang="en-US" sz="950" dirty="0"/>
-          </a:p>
-        </p:txBody>
-      </p:sp>
-      <p:sp>
-        <p:nvSpPr>
-          <p:cNvPr id="83" name="Text 80"/>
+              <a:lnSpc>
+                <a:spcPct val="105000"/>
+              </a:lnSpc>
+              <a:buNone/>
+            </a:pPr>
+            <a:r>
+              <a:rPr lang="en-US" sz="1600" b="1" dirty="0">
+                <a:solidFill>
+                  <a:srgbClr val="0E8385"/>
+                </a:solidFill>
+                <a:latin typeface="Calibri" pitchFamily="34" charset="0"/>
+                <a:ea typeface="Calibri" pitchFamily="34" charset="-122"/>
+                <a:cs typeface="Calibri" pitchFamily="34" charset="-120"/>
+              </a:rPr>
+              <a:t>Every subgroup favors finerenone; the effect is largest with heavy albuminuria (UACR &gt;1000).</a:t>
+            </a:r>
+            <a:endParaRPr lang="en-US" sz="1600" dirty="0"/>
+          </a:p>
+        </p:txBody>
+      </p:sp>
+      <p:pic>
+        <p:nvPicPr>
+          <p:cNvPr id="7" name="Image 1" descr="fig2.png">    </p:cNvPr>
+          <p:cNvPicPr>
+            <a:picLocks noChangeAspect="1"/>
+          </p:cNvPicPr>
+          <p:nvPr/>
+        </p:nvPicPr>
+        <p:blipFill>
+          <a:blip r:embed="rId2"/>
+          <a:stretch>
+            <a:fillRect/>
+          </a:stretch>
+        </p:blipFill>
+        <p:spPr>
+          <a:xfrm>
+            <a:off x="886968" y="1536192"/>
+            <a:ext cx="10424160" cy="4645152"/>
+          </a:xfrm>
+          <a:prstGeom prst="rect">
+            <a:avLst/>
+          </a:prstGeom>
+        </p:spPr>
+      </p:pic>
+      <p:sp>
+        <p:nvSpPr>
+          <p:cNvPr id="8" name="Text 4"/>
           <p:cNvSpPr/>
           <p:nvPr/>
         </p:nvSpPr>
@@ -13757,7 +10613,7 @@
                 <a:ea typeface="Calibri" pitchFamily="34" charset="-122"/>
                 <a:cs typeface="Calibri" pitchFamily="34" charset="-120"/>
               </a:rPr>
-              <a:t>Adapted from Figure 2. CIs not adjusted for multiplicity.</a:t>
+              <a:t>Figure 2.  Heerspink et al., N Engl J Med 2026.  CIs not adjusted for multiplicity.</a:t>
             </a:r>
             <a:endParaRPr lang="en-US" sz="850" dirty="0"/>
           </a:p>
@@ -13765,7 +10621,7 @@
       </p:sp>
       <p:sp>
         <p:nvSpPr>
-          <p:cNvPr id="84" name="Text 81"/>
+          <p:cNvPr id="9" name="Text 5"/>
           <p:cNvSpPr/>
           <p:nvPr/>
         </p:nvSpPr>
@@ -13818,7 +10674,7 @@
       </p:sp>
       <p:sp>
         <p:nvSpPr>
-          <p:cNvPr id="85" name="Text 82"/>
+          <p:cNvPr id="10" name="Text 6"/>
           <p:cNvSpPr/>
           <p:nvPr/>
         </p:nvSpPr>

--- a/FIND-CKD.pptx
+++ b/FIND-CKD.pptx
@@ -1740,7 +1740,7 @@
           <a:p>
             <a:r>
               <a:rPr lang="en-US" dirty="0"/>
-              <a:t>Headline total slope 0.7/yr, P&lt;0.001, almost identical to FIDELIO. The acute period favors placebo by 1.2 (the dip), dragging the total down. The chronic slope is 1.2/yr, nearly double. Judge finerenone by the chronic slope.</a:t>
+              <a:t>Headline total slope 0.7/yr, P&lt;0.001, almost identical to what finerenone showed in diabetic CKD. The acute period favors placebo by 1.2 (the dip), dragging the total down. The chronic slope is 1.2/yr, nearly double. Judge finerenone by the chronic slope.</a:t>
             </a:r>
             <a:endParaRPr lang="en-US" dirty="0"/>
           </a:p>
@@ -3324,7 +3324,7 @@
           <a:p>
             <a:r>
               <a:rPr lang="en-US" dirty="0"/>
-              <a:t>FIDELITY pooled FIDELIO and FIGARO, ~13,000 patients, for a CV composite of 0.86 and a kidney composite of 0.77, using the same ≥57% eGFR-decline definition FIND-CKD adopts. All diabetic. That is the gap FIND-CKD fills.</a:t>
+              <a:t>FIDELITY pooled two phase 3 finerenone trials, ~13,000 patients, for a CV composite of 0.86 and a kidney composite of 0.77, using the same ≥57% eGFR-decline definition FIND-CKD adopts. All diabetic. That is the gap FIND-CKD fills.</a:t>
             </a:r>
             <a:endParaRPr lang="en-US" dirty="0"/>
           </a:p>
@@ -8823,7 +8823,7 @@
                 <a:ea typeface="Calibri" pitchFamily="34" charset="-122"/>
                 <a:cs typeface="Calibri" pitchFamily="34" charset="-120"/>
               </a:rPr>
-              <a:t>A meta-analysis of 66 randomized trials found that slowing eGFR decline by about 0.75 per year predicts a 23% lower risk of hard kidney outcomes. An accepted surrogate, but a surrogate all the same.</a:t>
+              <a:t>eGFR slope is increasingly used as a surrogate for kidney-failure risk in CKD trials, and is accepted for that purpose. Still, it is a surrogate, not a hard outcome.</a:t>
             </a:r>
             <a:endParaRPr lang="en-US" sz="1450" dirty="0"/>
           </a:p>
@@ -15434,7 +15434,7 @@
                 <a:ea typeface="Calibri" pitchFamily="34" charset="-122"/>
                 <a:cs typeface="Calibri" pitchFamily="34" charset="-120"/>
               </a:rPr>
-              <a:t>FIDELIO + FIGARO; 13,026</a:t>
+              <a:t>Pooled analysis; 13,026</a:t>
             </a:r>
             <a:endParaRPr lang="en-US" sz="1300" dirty="0"/>
           </a:p>
@@ -19139,7 +19139,7 @@
                 <a:ea typeface="Calibri" pitchFamily="34" charset="-122"/>
                 <a:cs typeface="Calibri" pitchFamily="34" charset="-120"/>
               </a:rPr>
-              <a:t>Finerenone reduced kidney and cardiovascular events in diabetic CKD (FIDELIO-DKD, FIGARO-DKD, FIDELITY pooled).</a:t>
+              <a:t>Finerenone reduced kidney and cardiovascular events in diabetic CKD (the FIDELITY pooled analysis).</a:t>
             </a:r>
             <a:endParaRPr lang="en-US" sz="1550" dirty="0"/>
           </a:p>
@@ -20088,7 +20088,7 @@
                 <a:ea typeface="Calibri" pitchFamily="34" charset="-122"/>
                 <a:cs typeface="Calibri" pitchFamily="34" charset="-120"/>
               </a:rPr>
-              <a:t>FIDELITY pooled the FIDELIO-DKD and FIGARO-DKD trials: 13,026 patients with type 2 diabetes and CKD.</a:t>
+              <a:t>FIDELITY was a pre-specified pooled analysis of two phase 3 finerenone trials: 13,026 patients with type 2 diabetes and CKD.</a:t>
             </a:r>
             <a:endParaRPr lang="en-US" sz="1350" dirty="0"/>
           </a:p>
